--- a/slides/Lecture_Chapter12.pptx
+++ b/slides/Lecture_Chapter12.pptx
@@ -304,7 +304,7 @@
           <a:p>
             <a:fld id="{3E22BF2E-04DA-469E-97C5-BB68A0368813}" type="datetimeFigureOut">
               <a:rPr lang="en-US" smtClean="0"/>
-              <a:t>11/12/2025</a:t>
+              <a:t>11/29/2025</a:t>
             </a:fld>
             <a:endParaRPr lang="en-US"/>
           </a:p>
@@ -502,7 +502,7 @@
           <a:p>
             <a:fld id="{3E22BF2E-04DA-469E-97C5-BB68A0368813}" type="datetimeFigureOut">
               <a:rPr lang="en-US" smtClean="0"/>
-              <a:t>11/12/2025</a:t>
+              <a:t>11/29/2025</a:t>
             </a:fld>
             <a:endParaRPr lang="en-US"/>
           </a:p>
@@ -710,7 +710,7 @@
           <a:p>
             <a:fld id="{3E22BF2E-04DA-469E-97C5-BB68A0368813}" type="datetimeFigureOut">
               <a:rPr lang="en-US" smtClean="0"/>
-              <a:t>11/12/2025</a:t>
+              <a:t>11/29/2025</a:t>
             </a:fld>
             <a:endParaRPr lang="en-US"/>
           </a:p>
@@ -918,7 +918,7 @@
           <a:p>
             <a:fld id="{3E22BF2E-04DA-469E-97C5-BB68A0368813}" type="datetimeFigureOut">
               <a:rPr lang="en-US" smtClean="0"/>
-              <a:t>11/12/2025</a:t>
+              <a:t>11/29/2025</a:t>
             </a:fld>
             <a:endParaRPr lang="en-US"/>
           </a:p>
@@ -1193,7 +1193,7 @@
           <a:p>
             <a:fld id="{3E22BF2E-04DA-469E-97C5-BB68A0368813}" type="datetimeFigureOut">
               <a:rPr lang="en-US" smtClean="0"/>
-              <a:t>11/12/2025</a:t>
+              <a:t>11/29/2025</a:t>
             </a:fld>
             <a:endParaRPr lang="en-US"/>
           </a:p>
@@ -1458,7 +1458,7 @@
           <a:p>
             <a:fld id="{3E22BF2E-04DA-469E-97C5-BB68A0368813}" type="datetimeFigureOut">
               <a:rPr lang="en-US" smtClean="0"/>
-              <a:t>11/12/2025</a:t>
+              <a:t>11/29/2025</a:t>
             </a:fld>
             <a:endParaRPr lang="en-US"/>
           </a:p>
@@ -1870,7 +1870,7 @@
           <a:p>
             <a:fld id="{3E22BF2E-04DA-469E-97C5-BB68A0368813}" type="datetimeFigureOut">
               <a:rPr lang="en-US" smtClean="0"/>
-              <a:t>11/12/2025</a:t>
+              <a:t>11/29/2025</a:t>
             </a:fld>
             <a:endParaRPr lang="en-US"/>
           </a:p>
@@ -2011,7 +2011,7 @@
           <a:p>
             <a:fld id="{3E22BF2E-04DA-469E-97C5-BB68A0368813}" type="datetimeFigureOut">
               <a:rPr lang="en-US" smtClean="0"/>
-              <a:t>11/12/2025</a:t>
+              <a:t>11/29/2025</a:t>
             </a:fld>
             <a:endParaRPr lang="en-US"/>
           </a:p>
@@ -2124,7 +2124,7 @@
           <a:p>
             <a:fld id="{3E22BF2E-04DA-469E-97C5-BB68A0368813}" type="datetimeFigureOut">
               <a:rPr lang="en-US" smtClean="0"/>
-              <a:t>11/12/2025</a:t>
+              <a:t>11/29/2025</a:t>
             </a:fld>
             <a:endParaRPr lang="en-US"/>
           </a:p>
@@ -2435,7 +2435,7 @@
           <a:p>
             <a:fld id="{3E22BF2E-04DA-469E-97C5-BB68A0368813}" type="datetimeFigureOut">
               <a:rPr lang="en-US" smtClean="0"/>
-              <a:t>11/12/2025</a:t>
+              <a:t>11/29/2025</a:t>
             </a:fld>
             <a:endParaRPr lang="en-US"/>
           </a:p>
@@ -2723,7 +2723,7 @@
           <a:p>
             <a:fld id="{3E22BF2E-04DA-469E-97C5-BB68A0368813}" type="datetimeFigureOut">
               <a:rPr lang="en-US" smtClean="0"/>
-              <a:t>11/12/2025</a:t>
+              <a:t>11/29/2025</a:t>
             </a:fld>
             <a:endParaRPr lang="en-US"/>
           </a:p>
@@ -2964,7 +2964,7 @@
           <a:p>
             <a:fld id="{3E22BF2E-04DA-469E-97C5-BB68A0368813}" type="datetimeFigureOut">
               <a:rPr lang="en-US" smtClean="0"/>
-              <a:t>11/12/2025</a:t>
+              <a:t>11/29/2025</a:t>
             </a:fld>
             <a:endParaRPr lang="en-US"/>
           </a:p>
@@ -3481,7 +3481,7 @@
         </p:blipFill>
         <p:spPr bwMode="auto">
           <a:xfrm>
-            <a:off x="3653200" y="-18278"/>
+            <a:off x="3523485" y="0"/>
             <a:ext cx="8668512" cy="6857990"/>
           </a:xfrm>
           <a:prstGeom prst="rect">
@@ -3941,6 +3941,53 @@
           </a:prstGeom>
         </p:spPr>
       </p:pic>
+      <p:pic>
+        <p:nvPicPr>
+          <p:cNvPr id="6" name="Picture 5">
+            <a:extLst>
+              <a:ext uri="{FF2B5EF4-FFF2-40B4-BE49-F238E27FC236}">
+                <a16:creationId xmlns:a16="http://schemas.microsoft.com/office/drawing/2014/main" id="{8AD28C7D-14A3-CFEB-3DEC-2E01272844F2}"/>
+              </a:ext>
+            </a:extLst>
+          </p:cNvPr>
+          <p:cNvPicPr>
+            <a:picLocks noChangeAspect="1" noChangeArrowheads="1"/>
+          </p:cNvPicPr>
+          <p:nvPr/>
+        </p:nvPicPr>
+        <p:blipFill>
+          <a:blip r:embed="rId5">
+            <a:extLst>
+              <a:ext uri="{28A0092B-C50C-407E-A947-70E740481C1C}">
+                <a14:useLocalDpi xmlns:a14="http://schemas.microsoft.com/office/drawing/2010/main" val="0"/>
+              </a:ext>
+            </a:extLst>
+          </a:blip>
+          <a:srcRect/>
+          <a:stretch>
+            <a:fillRect/>
+          </a:stretch>
+        </p:blipFill>
+        <p:spPr bwMode="auto">
+          <a:xfrm>
+            <a:off x="7921481" y="271515"/>
+            <a:ext cx="4182403" cy="1000945"/>
+          </a:xfrm>
+          <a:prstGeom prst="rect">
+            <a:avLst/>
+          </a:prstGeom>
+          <a:noFill/>
+          <a:extLst>
+            <a:ext uri="{909E8E84-426E-40DD-AFC4-6F175D3DCCD1}">
+              <a14:hiddenFill xmlns:a14="http://schemas.microsoft.com/office/drawing/2010/main">
+                <a:solidFill>
+                  <a:srgbClr val="FFFFFF"/>
+                </a:solidFill>
+              </a14:hiddenFill>
+            </a:ext>
+          </a:extLst>
+        </p:spPr>
+      </p:pic>
     </p:spTree>
     <p:extLst>
       <p:ext uri="{BB962C8B-B14F-4D97-AF65-F5344CB8AC3E}">
@@ -4085,8 +4132,8 @@
           </a:p>
         </p:txBody>
       </p:sp>
-      <mc:AlternateContent xmlns:mc="http://schemas.openxmlformats.org/markup-compatibility/2006">
-        <mc:Choice xmlns:a14="http://schemas.microsoft.com/office/drawing/2010/main" Requires="a14">
+      <mc:AlternateContent xmlns:mc="http://schemas.openxmlformats.org/markup-compatibility/2006" xmlns:a14="http://schemas.microsoft.com/office/drawing/2010/main">
+        <mc:Choice Requires="a14">
           <p:sp>
             <p:nvSpPr>
               <p:cNvPr id="5" name="Content Placeholder 4">
@@ -4172,7 +4219,7 @@
             </p:txBody>
           </p:sp>
         </mc:Choice>
-        <mc:Fallback>
+        <mc:Fallback xmlns="">
           <p:sp>
             <p:nvSpPr>
               <p:cNvPr id="5" name="Content Placeholder 4">
@@ -4246,8 +4293,8 @@
           </a:prstGeom>
         </p:spPr>
       </p:pic>
-      <mc:AlternateContent xmlns:mc="http://schemas.openxmlformats.org/markup-compatibility/2006">
-        <mc:Choice xmlns:a14="http://schemas.microsoft.com/office/drawing/2010/main" Requires="a14">
+      <mc:AlternateContent xmlns:mc="http://schemas.openxmlformats.org/markup-compatibility/2006" xmlns:a14="http://schemas.microsoft.com/office/drawing/2010/main">
+        <mc:Choice Requires="a14">
           <p:sp>
             <p:nvSpPr>
               <p:cNvPr id="11" name="TextBox 10">
@@ -4316,7 +4363,7 @@
             </p:txBody>
           </p:sp>
         </mc:Choice>
-        <mc:Fallback>
+        <mc:Fallback xmlns="">
           <p:sp>
             <p:nvSpPr>
               <p:cNvPr id="11" name="TextBox 10">
@@ -4361,8 +4408,8 @@
           </p:sp>
         </mc:Fallback>
       </mc:AlternateContent>
-      <mc:AlternateContent xmlns:mc="http://schemas.openxmlformats.org/markup-compatibility/2006">
-        <mc:Choice xmlns:a14="http://schemas.microsoft.com/office/drawing/2010/main" Requires="a14">
+      <mc:AlternateContent xmlns:mc="http://schemas.openxmlformats.org/markup-compatibility/2006" xmlns:a14="http://schemas.microsoft.com/office/drawing/2010/main">
+        <mc:Choice Requires="a14">
           <p:sp>
             <p:nvSpPr>
               <p:cNvPr id="12" name="TextBox 11">
@@ -4437,7 +4484,7 @@
             </p:txBody>
           </p:sp>
         </mc:Choice>
-        <mc:Fallback>
+        <mc:Fallback xmlns="">
           <p:sp>
             <p:nvSpPr>
               <p:cNvPr id="12" name="TextBox 11">
@@ -4642,8 +4689,8 @@
           </a:p>
         </p:txBody>
       </p:sp>
-      <mc:AlternateContent xmlns:mc="http://schemas.openxmlformats.org/markup-compatibility/2006">
-        <mc:Choice xmlns:a14="http://schemas.microsoft.com/office/drawing/2010/main" Requires="a14">
+      <mc:AlternateContent xmlns:mc="http://schemas.openxmlformats.org/markup-compatibility/2006" xmlns:a14="http://schemas.microsoft.com/office/drawing/2010/main">
+        <mc:Choice Requires="a14">
           <p:sp>
             <p:nvSpPr>
               <p:cNvPr id="3" name="Content Placeholder 2">
@@ -5188,7 +5235,7 @@
             </p:txBody>
           </p:sp>
         </mc:Choice>
-        <mc:Fallback>
+        <mc:Fallback xmlns="">
           <p:sp>
             <p:nvSpPr>
               <p:cNvPr id="3" name="Content Placeholder 2">
@@ -5262,8 +5309,8 @@
           </a:prstGeom>
         </p:spPr>
       </p:pic>
-      <mc:AlternateContent xmlns:mc="http://schemas.openxmlformats.org/markup-compatibility/2006">
-        <mc:Choice xmlns:a14="http://schemas.microsoft.com/office/drawing/2010/main" Requires="a14">
+      <mc:AlternateContent xmlns:mc="http://schemas.openxmlformats.org/markup-compatibility/2006" xmlns:a14="http://schemas.microsoft.com/office/drawing/2010/main">
+        <mc:Choice Requires="a14">
           <p:sp>
             <p:nvSpPr>
               <p:cNvPr id="5" name="Arrow: Right 4">
@@ -5363,7 +5410,7 @@
             </p:txBody>
           </p:sp>
         </mc:Choice>
-        <mc:Fallback>
+        <mc:Fallback xmlns="">
           <p:sp>
             <p:nvSpPr>
               <p:cNvPr id="5" name="Arrow: Right 4">
@@ -5438,8 +5485,8 @@
           <a:chExt cx="0" cy="0"/>
         </a:xfrm>
       </p:grpSpPr>
-      <mc:AlternateContent xmlns:mc="http://schemas.openxmlformats.org/markup-compatibility/2006">
-        <mc:Choice xmlns:a14="http://schemas.microsoft.com/office/drawing/2010/main" Requires="a14">
+      <mc:AlternateContent xmlns:mc="http://schemas.openxmlformats.org/markup-compatibility/2006" xmlns:a14="http://schemas.microsoft.com/office/drawing/2010/main">
+        <mc:Choice Requires="a14">
           <p:sp>
             <p:nvSpPr>
               <p:cNvPr id="2" name="Title 1">
@@ -5495,7 +5542,7 @@
             </p:txBody>
           </p:sp>
         </mc:Choice>
-        <mc:Fallback>
+        <mc:Fallback xmlns="">
           <p:sp>
             <p:nvSpPr>
               <p:cNvPr id="2" name="Title 1">
@@ -5595,8 +5642,8 @@
           <a:chExt cx="0" cy="0"/>
         </a:xfrm>
       </p:grpSpPr>
-      <mc:AlternateContent xmlns:mc="http://schemas.openxmlformats.org/markup-compatibility/2006">
-        <mc:Choice xmlns:a14="http://schemas.microsoft.com/office/drawing/2010/main" Requires="a14">
+      <mc:AlternateContent xmlns:mc="http://schemas.openxmlformats.org/markup-compatibility/2006" xmlns:a14="http://schemas.microsoft.com/office/drawing/2010/main">
+        <mc:Choice Requires="a14">
           <p:sp>
             <p:nvSpPr>
               <p:cNvPr id="2" name="Title 1">
@@ -5652,7 +5699,7 @@
             </p:txBody>
           </p:sp>
         </mc:Choice>
-        <mc:Fallback>
+        <mc:Fallback xmlns="">
           <p:sp>
             <p:nvSpPr>
               <p:cNvPr id="2" name="Title 1">
@@ -5752,8 +5799,8 @@
           </a:prstGeom>
         </p:spPr>
       </p:pic>
-      <mc:AlternateContent xmlns:mc="http://schemas.openxmlformats.org/markup-compatibility/2006">
-        <mc:Choice xmlns:a14="http://schemas.microsoft.com/office/drawing/2010/main" Requires="a14">
+      <mc:AlternateContent xmlns:mc="http://schemas.openxmlformats.org/markup-compatibility/2006" xmlns:a14="http://schemas.microsoft.com/office/drawing/2010/main">
+        <mc:Choice Requires="a14">
           <p:sp>
             <p:nvSpPr>
               <p:cNvPr id="9" name="Speech Bubble: Rectangle with Corners Rounded 8">
@@ -5918,7 +5965,7 @@
             </p:txBody>
           </p:sp>
         </mc:Choice>
-        <mc:Fallback>
+        <mc:Fallback xmlns="">
           <p:sp>
             <p:nvSpPr>
               <p:cNvPr id="9" name="Speech Bubble: Rectangle with Corners Rounded 8">
@@ -6179,8 +6226,8 @@
           </a:p>
         </p:txBody>
       </p:sp>
-      <mc:AlternateContent xmlns:mc="http://schemas.openxmlformats.org/markup-compatibility/2006">
-        <mc:Choice xmlns:a14="http://schemas.microsoft.com/office/drawing/2010/main" Requires="a14">
+      <mc:AlternateContent xmlns:mc="http://schemas.openxmlformats.org/markup-compatibility/2006" xmlns:a14="http://schemas.microsoft.com/office/drawing/2010/main">
+        <mc:Choice Requires="a14">
           <p:sp>
             <p:nvSpPr>
               <p:cNvPr id="5" name="Text Placeholder 4">
@@ -6233,7 +6280,7 @@
             </p:txBody>
           </p:sp>
         </mc:Choice>
-        <mc:Fallback>
+        <mc:Fallback xmlns="">
           <p:sp>
             <p:nvSpPr>
               <p:cNvPr id="5" name="Text Placeholder 4">
@@ -6303,8 +6350,8 @@
           <a:chExt cx="0" cy="0"/>
         </a:xfrm>
       </p:grpSpPr>
-      <mc:AlternateContent xmlns:mc="http://schemas.openxmlformats.org/markup-compatibility/2006">
-        <mc:Choice xmlns:a14="http://schemas.microsoft.com/office/drawing/2010/main" Requires="a14">
+      <mc:AlternateContent xmlns:mc="http://schemas.openxmlformats.org/markup-compatibility/2006" xmlns:a14="http://schemas.microsoft.com/office/drawing/2010/main">
+        <mc:Choice Requires="a14">
           <p:sp>
             <p:nvSpPr>
               <p:cNvPr id="2" name="Title 1">
@@ -6367,7 +6414,7 @@
             </p:txBody>
           </p:sp>
         </mc:Choice>
-        <mc:Fallback>
+        <mc:Fallback xmlns="">
           <p:sp>
             <p:nvSpPr>
               <p:cNvPr id="2" name="Title 1">
@@ -6496,8 +6543,8 @@
           </a:prstGeom>
         </p:spPr>
       </p:pic>
-      <mc:AlternateContent xmlns:mc="http://schemas.openxmlformats.org/markup-compatibility/2006">
-        <mc:Choice xmlns:a14="http://schemas.microsoft.com/office/drawing/2010/main" Requires="a14">
+      <mc:AlternateContent xmlns:mc="http://schemas.openxmlformats.org/markup-compatibility/2006" xmlns:a14="http://schemas.microsoft.com/office/drawing/2010/main">
+        <mc:Choice Requires="a14">
           <p:sp>
             <p:nvSpPr>
               <p:cNvPr id="7" name="Speech Bubble: Rectangle with Corners Rounded 6">
@@ -6688,7 +6735,7 @@
             </p:txBody>
           </p:sp>
         </mc:Choice>
-        <mc:Fallback>
+        <mc:Fallback xmlns="">
           <p:sp>
             <p:nvSpPr>
               <p:cNvPr id="7" name="Speech Bubble: Rectangle with Corners Rounded 6">
@@ -7061,8 +7108,8 @@
           </a:p>
         </p:txBody>
       </p:sp>
-      <mc:AlternateContent xmlns:mc="http://schemas.openxmlformats.org/markup-compatibility/2006">
-        <mc:Choice xmlns:a14="http://schemas.microsoft.com/office/drawing/2010/main" Requires="a14">
+      <mc:AlternateContent xmlns:mc="http://schemas.openxmlformats.org/markup-compatibility/2006" xmlns:a14="http://schemas.microsoft.com/office/drawing/2010/main">
+        <mc:Choice Requires="a14">
           <p:sp>
             <p:nvSpPr>
               <p:cNvPr id="3" name="Content Placeholder 2">
@@ -7147,7 +7194,7 @@
             </p:txBody>
           </p:sp>
         </mc:Choice>
-        <mc:Fallback>
+        <mc:Fallback xmlns="">
           <p:sp>
             <p:nvSpPr>
               <p:cNvPr id="3" name="Content Placeholder 2">
@@ -7281,8 +7328,8 @@
           </a:p>
         </p:txBody>
       </p:sp>
-      <mc:AlternateContent xmlns:mc="http://schemas.openxmlformats.org/markup-compatibility/2006">
-        <mc:Choice xmlns:a14="http://schemas.microsoft.com/office/drawing/2010/main" Requires="a14">
+      <mc:AlternateContent xmlns:mc="http://schemas.openxmlformats.org/markup-compatibility/2006" xmlns:a14="http://schemas.microsoft.com/office/drawing/2010/main">
+        <mc:Choice Requires="a14">
           <p:sp>
             <p:nvSpPr>
               <p:cNvPr id="3" name="Content Placeholder 2">
@@ -7458,7 +7505,7 @@
             </p:txBody>
           </p:sp>
         </mc:Choice>
-        <mc:Fallback>
+        <mc:Fallback xmlns="">
           <p:sp>
             <p:nvSpPr>
               <p:cNvPr id="3" name="Content Placeholder 2">
@@ -7556,8 +7603,8 @@
           </a:p>
         </p:txBody>
       </p:sp>
-      <mc:AlternateContent xmlns:mc="http://schemas.openxmlformats.org/markup-compatibility/2006">
-        <mc:Choice xmlns:a14="http://schemas.microsoft.com/office/drawing/2010/main" Requires="a14">
+      <mc:AlternateContent xmlns:mc="http://schemas.openxmlformats.org/markup-compatibility/2006" xmlns:a14="http://schemas.microsoft.com/office/drawing/2010/main">
+        <mc:Choice Requires="a14">
           <p:sp>
             <p:nvSpPr>
               <p:cNvPr id="3" name="Content Placeholder 2">
@@ -7694,7 +7741,7 @@
             </p:txBody>
           </p:sp>
         </mc:Choice>
-        <mc:Fallback>
+        <mc:Fallback xmlns="">
           <p:sp>
             <p:nvSpPr>
               <p:cNvPr id="3" name="Content Placeholder 2">
@@ -10738,8 +10785,8 @@
           <a:chExt cx="0" cy="0"/>
         </a:xfrm>
       </p:grpSpPr>
-      <mc:AlternateContent xmlns:mc="http://schemas.openxmlformats.org/markup-compatibility/2006">
-        <mc:Choice xmlns:a14="http://schemas.microsoft.com/office/drawing/2010/main" Requires="a14">
+      <mc:AlternateContent xmlns:mc="http://schemas.openxmlformats.org/markup-compatibility/2006" xmlns:a14="http://schemas.microsoft.com/office/drawing/2010/main">
+        <mc:Choice Requires="a14">
           <p:sp>
             <p:nvSpPr>
               <p:cNvPr id="4" name="Title 3">
@@ -10783,7 +10830,7 @@
             </p:txBody>
           </p:sp>
         </mc:Choice>
-        <mc:Fallback>
+        <mc:Fallback xmlns="">
           <p:sp>
             <p:nvSpPr>
               <p:cNvPr id="4" name="Title 3">
@@ -11325,8 +11372,8 @@
           </mc:Fallback>
         </mc:AlternateContent>
       </p:grpSp>
-      <mc:AlternateContent xmlns:mc="http://schemas.openxmlformats.org/markup-compatibility/2006">
-        <mc:Choice xmlns:a14="http://schemas.microsoft.com/office/drawing/2010/main" Requires="a14">
+      <mc:AlternateContent xmlns:mc="http://schemas.openxmlformats.org/markup-compatibility/2006" xmlns:a14="http://schemas.microsoft.com/office/drawing/2010/main">
+        <mc:Choice Requires="a14">
           <p:sp>
             <p:nvSpPr>
               <p:cNvPr id="2" name="Title 1">
@@ -11370,7 +11417,7 @@
             </p:txBody>
           </p:sp>
         </mc:Choice>
-        <mc:Fallback>
+        <mc:Fallback xmlns="">
           <p:sp>
             <p:nvSpPr>
               <p:cNvPr id="2" name="Title 1">
@@ -13494,8 +13541,8 @@
           <a:chExt cx="0" cy="0"/>
         </a:xfrm>
       </p:grpSpPr>
-      <mc:AlternateContent xmlns:mc="http://schemas.openxmlformats.org/markup-compatibility/2006">
-        <mc:Choice xmlns:a14="http://schemas.microsoft.com/office/drawing/2010/main" Requires="a14">
+      <mc:AlternateContent xmlns:mc="http://schemas.openxmlformats.org/markup-compatibility/2006" xmlns:a14="http://schemas.microsoft.com/office/drawing/2010/main">
+        <mc:Choice Requires="a14">
           <p:sp>
             <p:nvSpPr>
               <p:cNvPr id="2" name="Title 1">
@@ -13539,7 +13586,7 @@
             </p:txBody>
           </p:sp>
         </mc:Choice>
-        <mc:Fallback>
+        <mc:Fallback xmlns="">
           <p:sp>
             <p:nvSpPr>
               <p:cNvPr id="2" name="Title 1">
@@ -13579,8 +13626,8 @@
           </p:sp>
         </mc:Fallback>
       </mc:AlternateContent>
-      <mc:AlternateContent xmlns:mc="http://schemas.openxmlformats.org/markup-compatibility/2006">
-        <mc:Choice xmlns:a14="http://schemas.microsoft.com/office/drawing/2010/main" Requires="a14">
+      <mc:AlternateContent xmlns:mc="http://schemas.openxmlformats.org/markup-compatibility/2006" xmlns:a14="http://schemas.microsoft.com/office/drawing/2010/main">
+        <mc:Choice Requires="a14">
           <p:sp>
             <p:nvSpPr>
               <p:cNvPr id="3" name="Content Placeholder 2">
@@ -14322,7 +14369,7 @@
             </p:txBody>
           </p:sp>
         </mc:Choice>
-        <mc:Fallback>
+        <mc:Fallback xmlns="">
           <p:sp>
             <p:nvSpPr>
               <p:cNvPr id="3" name="Content Placeholder 2">
@@ -14470,8 +14517,8 @@
             </a:p>
           </p:txBody>
         </p:sp>
-        <mc:AlternateContent xmlns:mc="http://schemas.openxmlformats.org/markup-compatibility/2006">
-          <mc:Choice xmlns:a14="http://schemas.microsoft.com/office/drawing/2010/main" Requires="a14">
+        <mc:AlternateContent xmlns:mc="http://schemas.openxmlformats.org/markup-compatibility/2006" xmlns:a14="http://schemas.microsoft.com/office/drawing/2010/main">
+          <mc:Choice Requires="a14">
             <p:sp>
               <p:nvSpPr>
                 <p:cNvPr id="6" name="TextBox 5">
@@ -14519,7 +14566,7 @@
               </p:txBody>
             </p:sp>
           </mc:Choice>
-          <mc:Fallback>
+          <mc:Fallback xmlns="">
             <p:sp>
               <p:nvSpPr>
                 <p:cNvPr id="6" name="TextBox 5">
@@ -14690,8 +14737,8 @@
           <a:chExt cx="0" cy="0"/>
         </a:xfrm>
       </p:grpSpPr>
-      <mc:AlternateContent xmlns:mc="http://schemas.openxmlformats.org/markup-compatibility/2006">
-        <mc:Choice xmlns:a14="http://schemas.microsoft.com/office/drawing/2010/main" Requires="a14">
+      <mc:AlternateContent xmlns:mc="http://schemas.openxmlformats.org/markup-compatibility/2006" xmlns:a14="http://schemas.microsoft.com/office/drawing/2010/main">
+        <mc:Choice Requires="a14">
           <p:sp>
             <p:nvSpPr>
               <p:cNvPr id="2" name="Title 1">
@@ -14761,7 +14808,7 @@
             </p:txBody>
           </p:sp>
         </mc:Choice>
-        <mc:Fallback>
+        <mc:Fallback xmlns="">
           <p:sp>
             <p:nvSpPr>
               <p:cNvPr id="2" name="Title 1">
@@ -14801,8 +14848,8 @@
           </p:sp>
         </mc:Fallback>
       </mc:AlternateContent>
-      <mc:AlternateContent xmlns:mc="http://schemas.openxmlformats.org/markup-compatibility/2006">
-        <mc:Choice xmlns:a14="http://schemas.microsoft.com/office/drawing/2010/main" Requires="a14">
+      <mc:AlternateContent xmlns:mc="http://schemas.openxmlformats.org/markup-compatibility/2006" xmlns:a14="http://schemas.microsoft.com/office/drawing/2010/main">
+        <mc:Choice Requires="a14">
           <p:sp>
             <p:nvSpPr>
               <p:cNvPr id="3" name="Content Placeholder 2">
@@ -15148,7 +15195,7 @@
             </p:txBody>
           </p:sp>
         </mc:Choice>
-        <mc:Fallback>
+        <mc:Fallback xmlns="">
           <p:sp>
             <p:nvSpPr>
               <p:cNvPr id="3" name="Content Placeholder 2">
@@ -15242,8 +15289,8 @@
             </a:prstGeom>
           </p:spPr>
         </p:pic>
-        <mc:AlternateContent xmlns:mc="http://schemas.openxmlformats.org/markup-compatibility/2006">
-          <mc:Choice xmlns:a14="http://schemas.microsoft.com/office/drawing/2010/main" Requires="a14">
+        <mc:AlternateContent xmlns:mc="http://schemas.openxmlformats.org/markup-compatibility/2006" xmlns:a14="http://schemas.microsoft.com/office/drawing/2010/main">
+          <mc:Choice Requires="a14">
             <p:sp>
               <p:nvSpPr>
                 <p:cNvPr id="11" name="TextBox 10">
@@ -15309,7 +15356,7 @@
               </p:txBody>
             </p:sp>
           </mc:Choice>
-          <mc:Fallback>
+          <mc:Fallback xmlns="">
             <p:sp>
               <p:nvSpPr>
                 <p:cNvPr id="11" name="TextBox 10">
@@ -15354,8 +15401,8 @@
             </p:sp>
           </mc:Fallback>
         </mc:AlternateContent>
-        <mc:AlternateContent xmlns:mc="http://schemas.openxmlformats.org/markup-compatibility/2006">
-          <mc:Choice xmlns:a14="http://schemas.microsoft.com/office/drawing/2010/main" Requires="a14">
+        <mc:AlternateContent xmlns:mc="http://schemas.openxmlformats.org/markup-compatibility/2006" xmlns:a14="http://schemas.microsoft.com/office/drawing/2010/main">
+          <mc:Choice Requires="a14">
             <p:sp>
               <p:nvSpPr>
                 <p:cNvPr id="13" name="Arrow: Right 12">
@@ -15420,7 +15467,7 @@
               </p:txBody>
             </p:sp>
           </mc:Choice>
-          <mc:Fallback>
+          <mc:Fallback xmlns="">
             <p:sp>
               <p:nvSpPr>
                 <p:cNvPr id="13" name="Arrow: Right 12">
@@ -15890,8 +15937,8 @@
           </a:p>
         </p:txBody>
       </p:sp>
-      <mc:AlternateContent xmlns:mc="http://schemas.openxmlformats.org/markup-compatibility/2006">
-        <mc:Choice xmlns:a14="http://schemas.microsoft.com/office/drawing/2010/main" Requires="a14">
+      <mc:AlternateContent xmlns:mc="http://schemas.openxmlformats.org/markup-compatibility/2006" xmlns:a14="http://schemas.microsoft.com/office/drawing/2010/main">
+        <mc:Choice Requires="a14">
           <p:sp>
             <p:nvSpPr>
               <p:cNvPr id="3" name="Content Placeholder 2">
@@ -16205,7 +16252,7 @@
             </p:txBody>
           </p:sp>
         </mc:Choice>
-        <mc:Fallback>
+        <mc:Fallback xmlns="">
           <p:sp>
             <p:nvSpPr>
               <p:cNvPr id="3" name="Content Placeholder 2">
@@ -16329,8 +16376,8 @@
             </a:prstGeom>
           </p:spPr>
         </p:pic>
-        <mc:AlternateContent xmlns:mc="http://schemas.openxmlformats.org/markup-compatibility/2006">
-          <mc:Choice xmlns:a14="http://schemas.microsoft.com/office/drawing/2010/main" Requires="a14">
+        <mc:AlternateContent xmlns:mc="http://schemas.openxmlformats.org/markup-compatibility/2006" xmlns:a14="http://schemas.microsoft.com/office/drawing/2010/main">
+          <mc:Choice Requires="a14">
             <p:sp>
               <p:nvSpPr>
                 <p:cNvPr id="6" name="TextBox 5">
@@ -16396,7 +16443,7 @@
               </p:txBody>
             </p:sp>
           </mc:Choice>
-          <mc:Fallback>
+          <mc:Fallback xmlns="">
             <p:sp>
               <p:nvSpPr>
                 <p:cNvPr id="6" name="TextBox 5">
@@ -16604,8 +16651,8 @@
             </a:p>
           </p:txBody>
         </p:sp>
-        <mc:AlternateContent xmlns:mc="http://schemas.openxmlformats.org/markup-compatibility/2006">
-          <mc:Choice xmlns:a14="http://schemas.microsoft.com/office/drawing/2010/main" Requires="a14">
+        <mc:AlternateContent xmlns:mc="http://schemas.openxmlformats.org/markup-compatibility/2006" xmlns:a14="http://schemas.microsoft.com/office/drawing/2010/main">
+          <mc:Choice Requires="a14">
             <p:sp>
               <p:nvSpPr>
                 <p:cNvPr id="12" name="TextBox 11">
@@ -16668,7 +16715,7 @@
               </p:txBody>
             </p:sp>
           </mc:Choice>
-          <mc:Fallback>
+          <mc:Fallback xmlns="">
             <p:sp>
               <p:nvSpPr>
                 <p:cNvPr id="12" name="TextBox 11">
@@ -17011,8 +17058,8 @@
           <a:chExt cx="0" cy="0"/>
         </a:xfrm>
       </p:grpSpPr>
-      <mc:AlternateContent xmlns:mc="http://schemas.openxmlformats.org/markup-compatibility/2006">
-        <mc:Choice xmlns:a14="http://schemas.microsoft.com/office/drawing/2010/main" Requires="a14">
+      <mc:AlternateContent xmlns:mc="http://schemas.openxmlformats.org/markup-compatibility/2006" xmlns:a14="http://schemas.microsoft.com/office/drawing/2010/main">
+        <mc:Choice Requires="a14">
           <p:sp>
             <p:nvSpPr>
               <p:cNvPr id="2" name="Title 1">
@@ -17056,7 +17103,7 @@
             </p:txBody>
           </p:sp>
         </mc:Choice>
-        <mc:Fallback>
+        <mc:Fallback xmlns="">
           <p:sp>
             <p:nvSpPr>
               <p:cNvPr id="2" name="Title 1">
@@ -17096,8 +17143,8 @@
           </p:sp>
         </mc:Fallback>
       </mc:AlternateContent>
-      <mc:AlternateContent xmlns:mc="http://schemas.openxmlformats.org/markup-compatibility/2006">
-        <mc:Choice xmlns:a14="http://schemas.microsoft.com/office/drawing/2010/main" Requires="a14">
+      <mc:AlternateContent xmlns:mc="http://schemas.openxmlformats.org/markup-compatibility/2006" xmlns:a14="http://schemas.microsoft.com/office/drawing/2010/main">
+        <mc:Choice Requires="a14">
           <p:sp>
             <p:nvSpPr>
               <p:cNvPr id="3" name="Content Placeholder 2">
@@ -17608,7 +17655,7 @@
             </p:txBody>
           </p:sp>
         </mc:Choice>
-        <mc:Fallback>
+        <mc:Fallback xmlns="">
           <p:sp>
             <p:nvSpPr>
               <p:cNvPr id="3" name="Content Placeholder 2">
@@ -17702,8 +17749,8 @@
             </a:prstGeom>
           </p:spPr>
         </p:pic>
-        <mc:AlternateContent xmlns:mc="http://schemas.openxmlformats.org/markup-compatibility/2006">
-          <mc:Choice xmlns:a14="http://schemas.microsoft.com/office/drawing/2010/main" Requires="a14">
+        <mc:AlternateContent xmlns:mc="http://schemas.openxmlformats.org/markup-compatibility/2006" xmlns:a14="http://schemas.microsoft.com/office/drawing/2010/main">
+          <mc:Choice Requires="a14">
             <p:sp>
               <p:nvSpPr>
                 <p:cNvPr id="6" name="TextBox 5">
@@ -17778,7 +17825,7 @@
               </p:txBody>
             </p:sp>
           </mc:Choice>
-          <mc:Fallback>
+          <mc:Fallback xmlns="">
             <p:sp>
               <p:nvSpPr>
                 <p:cNvPr id="6" name="TextBox 5">
@@ -17854,8 +17901,8 @@
           <a:chExt cx="0" cy="0"/>
         </a:xfrm>
       </p:grpSpPr>
-      <mc:AlternateContent xmlns:mc="http://schemas.openxmlformats.org/markup-compatibility/2006">
-        <mc:Choice xmlns:a14="http://schemas.microsoft.com/office/drawing/2010/main" Requires="a14">
+      <mc:AlternateContent xmlns:mc="http://schemas.openxmlformats.org/markup-compatibility/2006" xmlns:a14="http://schemas.microsoft.com/office/drawing/2010/main">
+        <mc:Choice Requires="a14">
           <p:sp>
             <p:nvSpPr>
               <p:cNvPr id="2" name="Title 1">
@@ -17913,7 +17960,7 @@
             </p:txBody>
           </p:sp>
         </mc:Choice>
-        <mc:Fallback>
+        <mc:Fallback xmlns="">
           <p:sp>
             <p:nvSpPr>
               <p:cNvPr id="2" name="Title 1">
@@ -17957,8 +18004,8 @@
           </p:sp>
         </mc:Fallback>
       </mc:AlternateContent>
-      <mc:AlternateContent xmlns:mc="http://schemas.openxmlformats.org/markup-compatibility/2006">
-        <mc:Choice xmlns:a14="http://schemas.microsoft.com/office/drawing/2010/main" Requires="a14">
+      <mc:AlternateContent xmlns:mc="http://schemas.openxmlformats.org/markup-compatibility/2006" xmlns:a14="http://schemas.microsoft.com/office/drawing/2010/main">
+        <mc:Choice Requires="a14">
           <p:sp>
             <p:nvSpPr>
               <p:cNvPr id="3" name="Content Placeholder 2">
@@ -18096,7 +18143,7 @@
             </p:txBody>
           </p:sp>
         </mc:Choice>
-        <mc:Fallback>
+        <mc:Fallback xmlns="">
           <p:sp>
             <p:nvSpPr>
               <p:cNvPr id="3" name="Content Placeholder 2">
@@ -18190,8 +18237,8 @@
             </a:prstGeom>
           </p:spPr>
         </p:pic>
-        <mc:AlternateContent xmlns:mc="http://schemas.openxmlformats.org/markup-compatibility/2006">
-          <mc:Choice xmlns:a14="http://schemas.microsoft.com/office/drawing/2010/main" Requires="a14">
+        <mc:AlternateContent xmlns:mc="http://schemas.openxmlformats.org/markup-compatibility/2006" xmlns:a14="http://schemas.microsoft.com/office/drawing/2010/main">
+          <mc:Choice Requires="a14">
             <p:sp>
               <p:nvSpPr>
                 <p:cNvPr id="6" name="TextBox 5">
@@ -18257,7 +18304,7 @@
               </p:txBody>
             </p:sp>
           </mc:Choice>
-          <mc:Fallback>
+          <mc:Fallback xmlns="">
             <p:sp>
               <p:nvSpPr>
                 <p:cNvPr id="6" name="TextBox 5">
@@ -18387,8 +18434,8 @@
           </a:prstGeom>
         </p:spPr>
       </p:pic>
-      <mc:AlternateContent xmlns:mc="http://schemas.openxmlformats.org/markup-compatibility/2006">
-        <mc:Choice xmlns:a14="http://schemas.microsoft.com/office/drawing/2010/main" Requires="a14">
+      <mc:AlternateContent xmlns:mc="http://schemas.openxmlformats.org/markup-compatibility/2006" xmlns:a14="http://schemas.microsoft.com/office/drawing/2010/main">
+        <mc:Choice Requires="a14">
           <p:sp>
             <p:nvSpPr>
               <p:cNvPr id="10" name="Speech Bubble: Rectangle with Corners Rounded 9">
@@ -18476,7 +18523,7 @@
             </p:txBody>
           </p:sp>
         </mc:Choice>
-        <mc:Fallback>
+        <mc:Fallback xmlns="">
           <p:sp>
             <p:nvSpPr>
               <p:cNvPr id="10" name="Speech Bubble: Rectangle with Corners Rounded 9">

--- a/slides/Lecture_Chapter12.pptx
+++ b/slides/Lecture_Chapter12.pptx
@@ -6,24 +6,25 @@
   </p:sldMasterIdLst>
   <p:sldIdLst>
     <p:sldId id="256" r:id="rId2"/>
-    <p:sldId id="384" r:id="rId3"/>
-    <p:sldId id="393" r:id="rId4"/>
-    <p:sldId id="386" r:id="rId5"/>
-    <p:sldId id="396" r:id="rId6"/>
-    <p:sldId id="397" r:id="rId7"/>
-    <p:sldId id="398" r:id="rId8"/>
-    <p:sldId id="399" r:id="rId9"/>
-    <p:sldId id="402" r:id="rId10"/>
-    <p:sldId id="401" r:id="rId11"/>
-    <p:sldId id="403" r:id="rId12"/>
-    <p:sldId id="395" r:id="rId13"/>
-    <p:sldId id="400" r:id="rId14"/>
-    <p:sldId id="406" r:id="rId15"/>
-    <p:sldId id="404" r:id="rId16"/>
-    <p:sldId id="407" r:id="rId17"/>
-    <p:sldId id="410" r:id="rId18"/>
-    <p:sldId id="408" r:id="rId19"/>
-    <p:sldId id="409" r:id="rId20"/>
+    <p:sldId id="313" r:id="rId3"/>
+    <p:sldId id="478" r:id="rId4"/>
+    <p:sldId id="393" r:id="rId5"/>
+    <p:sldId id="386" r:id="rId6"/>
+    <p:sldId id="396" r:id="rId7"/>
+    <p:sldId id="397" r:id="rId8"/>
+    <p:sldId id="398" r:id="rId9"/>
+    <p:sldId id="399" r:id="rId10"/>
+    <p:sldId id="402" r:id="rId11"/>
+    <p:sldId id="401" r:id="rId12"/>
+    <p:sldId id="403" r:id="rId13"/>
+    <p:sldId id="395" r:id="rId14"/>
+    <p:sldId id="400" r:id="rId15"/>
+    <p:sldId id="406" r:id="rId16"/>
+    <p:sldId id="404" r:id="rId17"/>
+    <p:sldId id="407" r:id="rId18"/>
+    <p:sldId id="410" r:id="rId19"/>
+    <p:sldId id="408" r:id="rId20"/>
+    <p:sldId id="409" r:id="rId21"/>
   </p:sldIdLst>
   <p:sldSz cx="12192000" cy="6858000"/>
   <p:notesSz cx="6858000" cy="9144000"/>
@@ -128,7 +129,8 @@
         <p14:section name="Default Section" id="{83286E67-F0F0-421C-8F74-7B93ABA17FBF}">
           <p14:sldIdLst>
             <p14:sldId id="256"/>
-            <p14:sldId id="384"/>
+            <p14:sldId id="313"/>
+            <p14:sldId id="478"/>
             <p14:sldId id="393"/>
             <p14:sldId id="386"/>
             <p14:sldId id="396"/>
@@ -304,7 +306,7 @@
           <a:p>
             <a:fld id="{3E22BF2E-04DA-469E-97C5-BB68A0368813}" type="datetimeFigureOut">
               <a:rPr lang="en-US" smtClean="0"/>
-              <a:t>11/29/2025</a:t>
+              <a:t>2/6/2026</a:t>
             </a:fld>
             <a:endParaRPr lang="en-US"/>
           </a:p>
@@ -502,7 +504,7 @@
           <a:p>
             <a:fld id="{3E22BF2E-04DA-469E-97C5-BB68A0368813}" type="datetimeFigureOut">
               <a:rPr lang="en-US" smtClean="0"/>
-              <a:t>11/29/2025</a:t>
+              <a:t>2/6/2026</a:t>
             </a:fld>
             <a:endParaRPr lang="en-US"/>
           </a:p>
@@ -710,7 +712,7 @@
           <a:p>
             <a:fld id="{3E22BF2E-04DA-469E-97C5-BB68A0368813}" type="datetimeFigureOut">
               <a:rPr lang="en-US" smtClean="0"/>
-              <a:t>11/29/2025</a:t>
+              <a:t>2/6/2026</a:t>
             </a:fld>
             <a:endParaRPr lang="en-US"/>
           </a:p>
@@ -918,7 +920,7 @@
           <a:p>
             <a:fld id="{3E22BF2E-04DA-469E-97C5-BB68A0368813}" type="datetimeFigureOut">
               <a:rPr lang="en-US" smtClean="0"/>
-              <a:t>11/29/2025</a:t>
+              <a:t>2/6/2026</a:t>
             </a:fld>
             <a:endParaRPr lang="en-US"/>
           </a:p>
@@ -1193,7 +1195,7 @@
           <a:p>
             <a:fld id="{3E22BF2E-04DA-469E-97C5-BB68A0368813}" type="datetimeFigureOut">
               <a:rPr lang="en-US" smtClean="0"/>
-              <a:t>11/29/2025</a:t>
+              <a:t>2/6/2026</a:t>
             </a:fld>
             <a:endParaRPr lang="en-US"/>
           </a:p>
@@ -1458,7 +1460,7 @@
           <a:p>
             <a:fld id="{3E22BF2E-04DA-469E-97C5-BB68A0368813}" type="datetimeFigureOut">
               <a:rPr lang="en-US" smtClean="0"/>
-              <a:t>11/29/2025</a:t>
+              <a:t>2/6/2026</a:t>
             </a:fld>
             <a:endParaRPr lang="en-US"/>
           </a:p>
@@ -1870,7 +1872,7 @@
           <a:p>
             <a:fld id="{3E22BF2E-04DA-469E-97C5-BB68A0368813}" type="datetimeFigureOut">
               <a:rPr lang="en-US" smtClean="0"/>
-              <a:t>11/29/2025</a:t>
+              <a:t>2/6/2026</a:t>
             </a:fld>
             <a:endParaRPr lang="en-US"/>
           </a:p>
@@ -2011,7 +2013,7 @@
           <a:p>
             <a:fld id="{3E22BF2E-04DA-469E-97C5-BB68A0368813}" type="datetimeFigureOut">
               <a:rPr lang="en-US" smtClean="0"/>
-              <a:t>11/29/2025</a:t>
+              <a:t>2/6/2026</a:t>
             </a:fld>
             <a:endParaRPr lang="en-US"/>
           </a:p>
@@ -2124,7 +2126,7 @@
           <a:p>
             <a:fld id="{3E22BF2E-04DA-469E-97C5-BB68A0368813}" type="datetimeFigureOut">
               <a:rPr lang="en-US" smtClean="0"/>
-              <a:t>11/29/2025</a:t>
+              <a:t>2/6/2026</a:t>
             </a:fld>
             <a:endParaRPr lang="en-US"/>
           </a:p>
@@ -2435,7 +2437,7 @@
           <a:p>
             <a:fld id="{3E22BF2E-04DA-469E-97C5-BB68A0368813}" type="datetimeFigureOut">
               <a:rPr lang="en-US" smtClean="0"/>
-              <a:t>11/29/2025</a:t>
+              <a:t>2/6/2026</a:t>
             </a:fld>
             <a:endParaRPr lang="en-US"/>
           </a:p>
@@ -2723,7 +2725,7 @@
           <a:p>
             <a:fld id="{3E22BF2E-04DA-469E-97C5-BB68A0368813}" type="datetimeFigureOut">
               <a:rPr lang="en-US" smtClean="0"/>
-              <a:t>11/29/2025</a:t>
+              <a:t>2/6/2026</a:t>
             </a:fld>
             <a:endParaRPr lang="en-US"/>
           </a:p>
@@ -2964,7 +2966,7 @@
           <a:p>
             <a:fld id="{3E22BF2E-04DA-469E-97C5-BB68A0368813}" type="datetimeFigureOut">
               <a:rPr lang="en-US" smtClean="0"/>
-              <a:t>11/29/2025</a:t>
+              <a:t>2/6/2026</a:t>
             </a:fld>
             <a:endParaRPr lang="en-US"/>
           </a:p>
@@ -4018,6 +4020,707 @@
           <a:chExt cx="0" cy="0"/>
         </a:xfrm>
       </p:grpSpPr>
+      <mc:AlternateContent xmlns:mc="http://schemas.openxmlformats.org/markup-compatibility/2006" xmlns:a14="http://schemas.microsoft.com/office/drawing/2010/main">
+        <mc:Choice Requires="a14">
+          <p:sp>
+            <p:nvSpPr>
+              <p:cNvPr id="2" name="Title 1">
+                <a:extLst>
+                  <a:ext uri="{FF2B5EF4-FFF2-40B4-BE49-F238E27FC236}">
+                    <a16:creationId xmlns:a16="http://schemas.microsoft.com/office/drawing/2014/main" id="{38385F1E-6465-1645-CA42-6BA88334F8C2}"/>
+                  </a:ext>
+                </a:extLst>
+              </p:cNvPr>
+              <p:cNvSpPr>
+                <a:spLocks noGrp="1"/>
+              </p:cNvSpPr>
+              <p:nvPr>
+                <p:ph type="title"/>
+              </p:nvPr>
+            </p:nvSpPr>
+            <p:spPr>
+              <a:xfrm>
+                <a:off x="838200" y="365126"/>
+                <a:ext cx="7099092" cy="759072"/>
+              </a:xfrm>
+            </p:spPr>
+            <p:txBody>
+              <a:bodyPr>
+                <a:normAutofit fontScale="90000"/>
+              </a:bodyPr>
+              <a:lstStyle/>
+              <a:p>
+                <a:r>
+                  <a:rPr lang="en-US" dirty="0"/>
+                  <a:t>The Forward View Issue with </a:t>
+                </a:r>
+                <a:br>
+                  <a:rPr lang="en-US" dirty="0"/>
+                </a:br>
+                <a:r>
+                  <a:rPr lang="en-US" dirty="0"/>
+                  <a:t>the Off-Line </a:t>
+                </a:r>
+                <a14:m>
+                  <m:oMath xmlns:m="http://schemas.openxmlformats.org/officeDocument/2006/math">
+                    <m:r>
+                      <a:rPr lang="en-US" i="1">
+                        <a:latin typeface="Cambria Math" panose="02040503050406030204" pitchFamily="18" charset="0"/>
+                      </a:rPr>
+                      <m:t>𝜆</m:t>
+                    </m:r>
+                  </m:oMath>
+                </a14:m>
+                <a:r>
+                  <a:rPr lang="en-US" dirty="0"/>
+                  <a:t>-Return Algorithm </a:t>
+                </a:r>
+              </a:p>
+            </p:txBody>
+          </p:sp>
+        </mc:Choice>
+        <mc:Fallback xmlns="">
+          <p:sp>
+            <p:nvSpPr>
+              <p:cNvPr id="2" name="Title 1">
+                <a:extLst>
+                  <a:ext uri="{FF2B5EF4-FFF2-40B4-BE49-F238E27FC236}">
+                    <a16:creationId xmlns:a16="http://schemas.microsoft.com/office/drawing/2014/main" id="{38385F1E-6465-1645-CA42-6BA88334F8C2}"/>
+                  </a:ext>
+                </a:extLst>
+              </p:cNvPr>
+              <p:cNvSpPr>
+                <a:spLocks noGrp="1" noRot="1" noChangeAspect="1" noMove="1" noResize="1" noEditPoints="1" noAdjustHandles="1" noChangeArrowheads="1" noChangeShapeType="1" noTextEdit="1"/>
+              </p:cNvSpPr>
+              <p:nvPr>
+                <p:ph type="title"/>
+              </p:nvPr>
+            </p:nvSpPr>
+            <p:spPr>
+              <a:xfrm>
+                <a:off x="838200" y="365126"/>
+                <a:ext cx="7099092" cy="759072"/>
+              </a:xfrm>
+              <a:blipFill>
+                <a:blip r:embed="rId2"/>
+                <a:stretch>
+                  <a:fillRect l="-3093" t="-50000" b="-64516"/>
+                </a:stretch>
+              </a:blipFill>
+            </p:spPr>
+            <p:txBody>
+              <a:bodyPr/>
+              <a:lstStyle/>
+              <a:p>
+                <a:r>
+                  <a:rPr lang="en-US">
+                    <a:noFill/>
+                  </a:rPr>
+                  <a:t> </a:t>
+                </a:r>
+              </a:p>
+            </p:txBody>
+          </p:sp>
+        </mc:Fallback>
+      </mc:AlternateContent>
+      <mc:AlternateContent xmlns:mc="http://schemas.openxmlformats.org/markup-compatibility/2006" xmlns:a14="http://schemas.microsoft.com/office/drawing/2010/main">
+        <mc:Choice Requires="a14">
+          <p:sp>
+            <p:nvSpPr>
+              <p:cNvPr id="3" name="Content Placeholder 2">
+                <a:extLst>
+                  <a:ext uri="{FF2B5EF4-FFF2-40B4-BE49-F238E27FC236}">
+                    <a16:creationId xmlns:a16="http://schemas.microsoft.com/office/drawing/2014/main" id="{060FE59A-5A07-2A07-3158-4CE63E7481B5}"/>
+                  </a:ext>
+                </a:extLst>
+              </p:cNvPr>
+              <p:cNvSpPr>
+                <a:spLocks noGrp="1"/>
+              </p:cNvSpPr>
+              <p:nvPr>
+                <p:ph idx="1"/>
+              </p:nvPr>
+            </p:nvSpPr>
+            <p:spPr>
+              <a:xfrm>
+                <a:off x="838200" y="1464786"/>
+                <a:ext cx="7201798" cy="1428316"/>
+              </a:xfrm>
+            </p:spPr>
+            <p:txBody>
+              <a:bodyPr>
+                <a:normAutofit fontScale="70000" lnSpcReduction="20000"/>
+              </a:bodyPr>
+              <a:lstStyle/>
+              <a:p>
+                <a:r>
+                  <a:rPr lang="en-US" dirty="0"/>
+                  <a:t>Uses the </a:t>
+                </a:r>
+                <a:r>
+                  <a:rPr lang="en-US" b="1" dirty="0"/>
+                  <a:t>“forward view.” </a:t>
+                </a:r>
+              </a:p>
+              <a:p>
+                <a:r>
+                  <a:rPr lang="en-US" dirty="0"/>
+                  <a:t>Updating </a:t>
+                </a:r>
+                <a14:m>
+                  <m:oMath xmlns:m="http://schemas.openxmlformats.org/officeDocument/2006/math">
+                    <m:sSub>
+                      <m:sSubPr>
+                        <m:ctrlPr>
+                          <a:rPr lang="en-US" b="0" i="1" smtClean="0">
+                            <a:latin typeface="Cambria Math" panose="02040503050406030204" pitchFamily="18" charset="0"/>
+                          </a:rPr>
+                        </m:ctrlPr>
+                      </m:sSubPr>
+                      <m:e>
+                        <m:r>
+                          <a:rPr lang="en-US" b="0" i="1" smtClean="0">
+                            <a:latin typeface="Cambria Math" panose="02040503050406030204" pitchFamily="18" charset="0"/>
+                          </a:rPr>
+                          <m:t>𝑆</m:t>
+                        </m:r>
+                      </m:e>
+                      <m:sub>
+                        <m:r>
+                          <a:rPr lang="en-US" b="0" i="1" smtClean="0">
+                            <a:latin typeface="Cambria Math" panose="02040503050406030204" pitchFamily="18" charset="0"/>
+                          </a:rPr>
+                          <m:t>𝑡</m:t>
+                        </m:r>
+                      </m:sub>
+                    </m:sSub>
+                  </m:oMath>
+                </a14:m>
+                <a:r>
+                  <a:rPr lang="en-US" dirty="0"/>
+                  <a:t> requires the calculation of </a:t>
+                </a:r>
+                <a14:m>
+                  <m:oMath xmlns:m="http://schemas.openxmlformats.org/officeDocument/2006/math">
+                    <m:sSubSup>
+                      <m:sSubSupPr>
+                        <m:ctrlPr>
+                          <a:rPr lang="en-US" i="1" smtClean="0">
+                            <a:latin typeface="Cambria Math" panose="02040503050406030204" pitchFamily="18" charset="0"/>
+                          </a:rPr>
+                        </m:ctrlPr>
+                      </m:sSubSupPr>
+                      <m:e>
+                        <m:r>
+                          <a:rPr lang="en-US" i="1">
+                            <a:latin typeface="Cambria Math" panose="02040503050406030204" pitchFamily="18" charset="0"/>
+                          </a:rPr>
+                          <m:t>𝐺</m:t>
+                        </m:r>
+                      </m:e>
+                      <m:sub>
+                        <m:r>
+                          <a:rPr lang="en-US" i="1">
+                            <a:latin typeface="Cambria Math" panose="02040503050406030204" pitchFamily="18" charset="0"/>
+                          </a:rPr>
+                          <m:t>𝑡</m:t>
+                        </m:r>
+                      </m:sub>
+                      <m:sup>
+                        <m:r>
+                          <a:rPr lang="en-US" i="1">
+                            <a:latin typeface="Cambria Math" panose="02040503050406030204" pitchFamily="18" charset="0"/>
+                          </a:rPr>
+                          <m:t>𝜆</m:t>
+                        </m:r>
+                      </m:sup>
+                    </m:sSubSup>
+                  </m:oMath>
+                </a14:m>
+                <a:r>
+                  <a:rPr lang="en-US" dirty="0"/>
+                  <a:t>, which requires all future rewards</a:t>
+                </a:r>
+              </a:p>
+              <a:p>
+                <a:r>
+                  <a:rPr lang="en-US" dirty="0"/>
+                  <a:t>The </a:t>
+                </a:r>
+                <a:r>
+                  <a:rPr lang="en-US" b="1" dirty="0"/>
+                  <a:t>update is delayed </a:t>
+                </a:r>
+                <a:r>
+                  <a:rPr lang="en-US" dirty="0"/>
+                  <a:t>till the whole episode is observed (like for MC).</a:t>
+                </a:r>
+              </a:p>
+              <a:p>
+                <a:endParaRPr lang="en-US" dirty="0"/>
+              </a:p>
+            </p:txBody>
+          </p:sp>
+        </mc:Choice>
+        <mc:Fallback xmlns="">
+          <p:sp>
+            <p:nvSpPr>
+              <p:cNvPr id="3" name="Content Placeholder 2">
+                <a:extLst>
+                  <a:ext uri="{FF2B5EF4-FFF2-40B4-BE49-F238E27FC236}">
+                    <a16:creationId xmlns:a16="http://schemas.microsoft.com/office/drawing/2014/main" id="{060FE59A-5A07-2A07-3158-4CE63E7481B5}"/>
+                  </a:ext>
+                </a:extLst>
+              </p:cNvPr>
+              <p:cNvSpPr>
+                <a:spLocks noGrp="1" noRot="1" noChangeAspect="1" noMove="1" noResize="1" noEditPoints="1" noAdjustHandles="1" noChangeArrowheads="1" noChangeShapeType="1" noTextEdit="1"/>
+              </p:cNvSpPr>
+              <p:nvPr>
+                <p:ph idx="1"/>
+              </p:nvPr>
+            </p:nvSpPr>
+            <p:spPr>
+              <a:xfrm>
+                <a:off x="838200" y="1464786"/>
+                <a:ext cx="7201798" cy="1428316"/>
+              </a:xfrm>
+              <a:blipFill>
+                <a:blip r:embed="rId3"/>
+                <a:stretch>
+                  <a:fillRect l="-762" t="-7234" r="-85" b="-8511"/>
+                </a:stretch>
+              </a:blipFill>
+            </p:spPr>
+            <p:txBody>
+              <a:bodyPr/>
+              <a:lstStyle/>
+              <a:p>
+                <a:r>
+                  <a:rPr lang="en-US">
+                    <a:noFill/>
+                  </a:rPr>
+                  <a:t> </a:t>
+                </a:r>
+              </a:p>
+            </p:txBody>
+          </p:sp>
+        </mc:Fallback>
+      </mc:AlternateContent>
+      <p:grpSp>
+        <p:nvGrpSpPr>
+          <p:cNvPr id="4" name="Group 3">
+            <a:extLst>
+              <a:ext uri="{FF2B5EF4-FFF2-40B4-BE49-F238E27FC236}">
+                <a16:creationId xmlns:a16="http://schemas.microsoft.com/office/drawing/2014/main" id="{14F066E0-14B9-ED12-6A95-7A9B8E5FEA05}"/>
+              </a:ext>
+            </a:extLst>
+          </p:cNvPr>
+          <p:cNvGrpSpPr/>
+          <p:nvPr/>
+        </p:nvGrpSpPr>
+        <p:grpSpPr>
+          <a:xfrm>
+            <a:off x="8098145" y="374690"/>
+            <a:ext cx="3892174" cy="4077325"/>
+            <a:chOff x="7318283" y="732971"/>
+            <a:chExt cx="4870635" cy="5144409"/>
+          </a:xfrm>
+        </p:grpSpPr>
+        <p:pic>
+          <p:nvPicPr>
+            <p:cNvPr id="5" name="Picture 4">
+              <a:extLst>
+                <a:ext uri="{FF2B5EF4-FFF2-40B4-BE49-F238E27FC236}">
+                  <a16:creationId xmlns:a16="http://schemas.microsoft.com/office/drawing/2014/main" id="{4FBF0173-A454-9854-1EB8-24853BE78A3E}"/>
+                </a:ext>
+              </a:extLst>
+            </p:cNvPr>
+            <p:cNvPicPr>
+              <a:picLocks noChangeAspect="1"/>
+            </p:cNvPicPr>
+            <p:nvPr/>
+          </p:nvPicPr>
+          <p:blipFill>
+            <a:blip r:embed="rId4"/>
+            <a:stretch>
+              <a:fillRect/>
+            </a:stretch>
+          </p:blipFill>
+          <p:spPr>
+            <a:xfrm>
+              <a:off x="7318283" y="1739618"/>
+              <a:ext cx="4870635" cy="4054445"/>
+            </a:xfrm>
+            <a:prstGeom prst="rect">
+              <a:avLst/>
+            </a:prstGeom>
+          </p:spPr>
+        </p:pic>
+        <mc:AlternateContent xmlns:mc="http://schemas.openxmlformats.org/markup-compatibility/2006" xmlns:a14="http://schemas.microsoft.com/office/drawing/2010/main">
+          <mc:Choice Requires="a14">
+            <p:sp>
+              <p:nvSpPr>
+                <p:cNvPr id="6" name="TextBox 5">
+                  <a:extLst>
+                    <a:ext uri="{FF2B5EF4-FFF2-40B4-BE49-F238E27FC236}">
+                      <a16:creationId xmlns:a16="http://schemas.microsoft.com/office/drawing/2014/main" id="{083FA437-6AA3-E563-8318-88ED17E056FB}"/>
+                    </a:ext>
+                  </a:extLst>
+                </p:cNvPr>
+                <p:cNvSpPr txBox="1"/>
+                <p:nvPr/>
+              </p:nvSpPr>
+              <p:spPr>
+                <a:xfrm>
+                  <a:off x="7721599" y="732971"/>
+                  <a:ext cx="4209143" cy="923330"/>
+                </a:xfrm>
+                <a:prstGeom prst="rect">
+                  <a:avLst/>
+                </a:prstGeom>
+                <a:noFill/>
+              </p:spPr>
+              <p:txBody>
+                <a:bodyPr wrap="square" rtlCol="0">
+                  <a:spAutoFit/>
+                </a:bodyPr>
+                <a:lstStyle/>
+                <a:p>
+                  <a:pPr algn="ctr"/>
+                  <a:r>
+                    <a:rPr lang="en-US" b="1" dirty="0"/>
+                    <a:t>Backup diagram </a:t>
+                  </a:r>
+                  <a:br>
+                    <a:rPr lang="en-US" b="1" dirty="0"/>
+                  </a:br>
+                  <a:r>
+                    <a:rPr lang="en-US" dirty="0"/>
+                    <a:t>Weighting of the components </a:t>
+                  </a:r>
+                  <a:br>
+                    <a:rPr lang="en-US" dirty="0"/>
+                  </a:br>
+                  <a:r>
+                    <a:rPr lang="en-US" dirty="0"/>
+                    <a:t>of the </a:t>
+                  </a:r>
+                  <a14:m>
+                    <m:oMath xmlns:m="http://schemas.openxmlformats.org/officeDocument/2006/math">
+                      <m:r>
+                        <a:rPr lang="en-US" b="0" i="1">
+                          <a:latin typeface="Cambria Math" panose="02040503050406030204" pitchFamily="18" charset="0"/>
+                        </a:rPr>
+                        <m:t>𝜆</m:t>
+                      </m:r>
+                    </m:oMath>
+                  </a14:m>
+                  <a:r>
+                    <a:rPr lang="en-US" dirty="0"/>
+                    <a:t>-return </a:t>
+                  </a:r>
+                </a:p>
+              </p:txBody>
+            </p:sp>
+          </mc:Choice>
+          <mc:Fallback xmlns="">
+            <p:sp>
+              <p:nvSpPr>
+                <p:cNvPr id="6" name="TextBox 5">
+                  <a:extLst>
+                    <a:ext uri="{FF2B5EF4-FFF2-40B4-BE49-F238E27FC236}">
+                      <a16:creationId xmlns:a16="http://schemas.microsoft.com/office/drawing/2014/main" id="{083FA437-6AA3-E563-8318-88ED17E056FB}"/>
+                    </a:ext>
+                  </a:extLst>
+                </p:cNvPr>
+                <p:cNvSpPr txBox="1">
+                  <a:spLocks noRot="1" noChangeAspect="1" noMove="1" noResize="1" noEditPoints="1" noAdjustHandles="1" noChangeArrowheads="1" noChangeShapeType="1" noTextEdit="1"/>
+                </p:cNvSpPr>
+                <p:nvPr/>
+              </p:nvSpPr>
+              <p:spPr>
+                <a:xfrm>
+                  <a:off x="7721599" y="732971"/>
+                  <a:ext cx="4209143" cy="923330"/>
+                </a:xfrm>
+                <a:prstGeom prst="rect">
+                  <a:avLst/>
+                </a:prstGeom>
+                <a:blipFill>
+                  <a:blip r:embed="rId5"/>
+                  <a:stretch>
+                    <a:fillRect t="-3306" b="-38017"/>
+                  </a:stretch>
+                </a:blipFill>
+              </p:spPr>
+              <p:txBody>
+                <a:bodyPr/>
+                <a:lstStyle/>
+                <a:p>
+                  <a:r>
+                    <a:rPr lang="en-US">
+                      <a:noFill/>
+                    </a:rPr>
+                    <a:t> </a:t>
+                  </a:r>
+                </a:p>
+              </p:txBody>
+            </p:sp>
+          </mc:Fallback>
+        </mc:AlternateContent>
+        <p:sp>
+          <p:nvSpPr>
+            <p:cNvPr id="7" name="Rectangle 6">
+              <a:extLst>
+                <a:ext uri="{FF2B5EF4-FFF2-40B4-BE49-F238E27FC236}">
+                  <a16:creationId xmlns:a16="http://schemas.microsoft.com/office/drawing/2014/main" id="{08FE606E-7390-123A-8006-FFCF34E5BBA2}"/>
+                </a:ext>
+              </a:extLst>
+            </p:cNvPr>
+            <p:cNvSpPr/>
+            <p:nvPr/>
+          </p:nvSpPr>
+          <p:spPr>
+            <a:xfrm>
+              <a:off x="7467600" y="732971"/>
+              <a:ext cx="4572000" cy="5144409"/>
+            </a:xfrm>
+            <a:prstGeom prst="rect">
+              <a:avLst/>
+            </a:prstGeom>
+            <a:noFill/>
+            <a:ln w="9525" cap="flat" cmpd="sng" algn="ctr">
+              <a:solidFill>
+                <a:schemeClr val="dk1"/>
+              </a:solidFill>
+              <a:prstDash val="solid"/>
+              <a:round/>
+              <a:headEnd type="none" w="med" len="med"/>
+              <a:tailEnd type="none" w="med" len="med"/>
+            </a:ln>
+          </p:spPr>
+          <p:style>
+            <a:lnRef idx="0">
+              <a:scrgbClr r="0" g="0" b="0"/>
+            </a:lnRef>
+            <a:fillRef idx="0">
+              <a:scrgbClr r="0" g="0" b="0"/>
+            </a:fillRef>
+            <a:effectRef idx="0">
+              <a:scrgbClr r="0" g="0" b="0"/>
+            </a:effectRef>
+            <a:fontRef idx="minor">
+              <a:schemeClr val="dk1"/>
+            </a:fontRef>
+          </p:style>
+          <p:txBody>
+            <a:bodyPr rtlCol="0" anchor="ctr"/>
+            <a:lstStyle/>
+            <a:p>
+              <a:pPr algn="ctr"/>
+              <a:endParaRPr lang="en-US"/>
+            </a:p>
+          </p:txBody>
+        </p:sp>
+      </p:grpSp>
+      <p:pic>
+        <p:nvPicPr>
+          <p:cNvPr id="9" name="Picture 8">
+            <a:extLst>
+              <a:ext uri="{FF2B5EF4-FFF2-40B4-BE49-F238E27FC236}">
+                <a16:creationId xmlns:a16="http://schemas.microsoft.com/office/drawing/2014/main" id="{AB6695FD-E75E-33FA-BCC4-B93D4EA61FD4}"/>
+              </a:ext>
+            </a:extLst>
+          </p:cNvPr>
+          <p:cNvPicPr>
+            <a:picLocks noChangeAspect="1"/>
+          </p:cNvPicPr>
+          <p:nvPr/>
+        </p:nvPicPr>
+        <p:blipFill>
+          <a:blip r:embed="rId6"/>
+          <a:stretch>
+            <a:fillRect/>
+          </a:stretch>
+        </p:blipFill>
+        <p:spPr>
+          <a:xfrm>
+            <a:off x="482272" y="3098780"/>
+            <a:ext cx="7339461" cy="2094693"/>
+          </a:xfrm>
+          <a:prstGeom prst="rect">
+            <a:avLst/>
+          </a:prstGeom>
+        </p:spPr>
+      </p:pic>
+      <mc:AlternateContent xmlns:mc="http://schemas.openxmlformats.org/markup-compatibility/2006" xmlns:a14="http://schemas.microsoft.com/office/drawing/2010/main">
+        <mc:Choice Requires="a14">
+          <p:sp>
+            <p:nvSpPr>
+              <p:cNvPr id="10" name="Speech Bubble: Rectangle with Corners Rounded 9">
+                <a:extLst>
+                  <a:ext uri="{FF2B5EF4-FFF2-40B4-BE49-F238E27FC236}">
+                    <a16:creationId xmlns:a16="http://schemas.microsoft.com/office/drawing/2014/main" id="{211F70B4-8AFD-C643-01D4-C8A539A11926}"/>
+                  </a:ext>
+                </a:extLst>
+              </p:cNvPr>
+              <p:cNvSpPr/>
+              <p:nvPr/>
+            </p:nvSpPr>
+            <p:spPr>
+              <a:xfrm>
+                <a:off x="5254052" y="5495935"/>
+                <a:ext cx="3065488" cy="626278"/>
+              </a:xfrm>
+              <a:prstGeom prst="wedgeRoundRectCallout">
+                <a:avLst>
+                  <a:gd name="adj1" fmla="val 15220"/>
+                  <a:gd name="adj2" fmla="val -353391"/>
+                  <a:gd name="adj3" fmla="val 16667"/>
+                </a:avLst>
+              </a:prstGeom>
+            </p:spPr>
+            <p:style>
+              <a:lnRef idx="2">
+                <a:schemeClr val="accent1">
+                  <a:shade val="15000"/>
+                </a:schemeClr>
+              </a:lnRef>
+              <a:fillRef idx="1">
+                <a:schemeClr val="accent1"/>
+              </a:fillRef>
+              <a:effectRef idx="0">
+                <a:schemeClr val="accent1"/>
+              </a:effectRef>
+              <a:fontRef idx="minor">
+                <a:schemeClr val="lt1"/>
+              </a:fontRef>
+            </p:style>
+            <p:txBody>
+              <a:bodyPr rtlCol="0" anchor="ctr"/>
+              <a:lstStyle/>
+              <a:p>
+                <a:pPr algn="ctr"/>
+                <a:r>
+                  <a:rPr lang="en-US" dirty="0"/>
+                  <a:t>Agent can only update the value for </a:t>
+                </a:r>
+                <a14:m>
+                  <m:oMath xmlns:m="http://schemas.openxmlformats.org/officeDocument/2006/math">
+                    <m:sSub>
+                      <m:sSubPr>
+                        <m:ctrlPr>
+                          <a:rPr lang="en-US" b="0" i="1" smtClean="0">
+                            <a:latin typeface="Cambria Math" panose="02040503050406030204" pitchFamily="18" charset="0"/>
+                          </a:rPr>
+                        </m:ctrlPr>
+                      </m:sSubPr>
+                      <m:e>
+                        <m:r>
+                          <a:rPr lang="en-US" b="0" i="1" smtClean="0">
+                            <a:latin typeface="Cambria Math" panose="02040503050406030204" pitchFamily="18" charset="0"/>
+                          </a:rPr>
+                          <m:t>𝑆</m:t>
+                        </m:r>
+                      </m:e>
+                      <m:sub>
+                        <m:r>
+                          <a:rPr lang="en-US" b="0" i="1" smtClean="0">
+                            <a:latin typeface="Cambria Math" panose="02040503050406030204" pitchFamily="18" charset="0"/>
+                          </a:rPr>
+                          <m:t>𝑡</m:t>
+                        </m:r>
+                      </m:sub>
+                    </m:sSub>
+                  </m:oMath>
+                </a14:m>
+                <a:r>
+                  <a:rPr lang="en-US" dirty="0"/>
+                  <a:t> when it is here!</a:t>
+                </a:r>
+              </a:p>
+            </p:txBody>
+          </p:sp>
+        </mc:Choice>
+        <mc:Fallback xmlns="">
+          <p:sp>
+            <p:nvSpPr>
+              <p:cNvPr id="10" name="Speech Bubble: Rectangle with Corners Rounded 9">
+                <a:extLst>
+                  <a:ext uri="{FF2B5EF4-FFF2-40B4-BE49-F238E27FC236}">
+                    <a16:creationId xmlns:a16="http://schemas.microsoft.com/office/drawing/2014/main" id="{211F70B4-8AFD-C643-01D4-C8A539A11926}"/>
+                  </a:ext>
+                </a:extLst>
+              </p:cNvPr>
+              <p:cNvSpPr>
+                <a:spLocks noRot="1" noChangeAspect="1" noMove="1" noResize="1" noEditPoints="1" noAdjustHandles="1" noChangeArrowheads="1" noChangeShapeType="1" noTextEdit="1"/>
+              </p:cNvSpPr>
+              <p:nvPr/>
+            </p:nvSpPr>
+            <p:spPr>
+              <a:xfrm>
+                <a:off x="5254052" y="5495935"/>
+                <a:ext cx="3065488" cy="626278"/>
+              </a:xfrm>
+              <a:prstGeom prst="wedgeRoundRectCallout">
+                <a:avLst>
+                  <a:gd name="adj1" fmla="val 15220"/>
+                  <a:gd name="adj2" fmla="val -353391"/>
+                  <a:gd name="adj3" fmla="val 16667"/>
+                </a:avLst>
+              </a:prstGeom>
+              <a:blipFill>
+                <a:blip r:embed="rId7"/>
+                <a:stretch>
+                  <a:fillRect b="-3800"/>
+                </a:stretch>
+              </a:blipFill>
+            </p:spPr>
+            <p:txBody>
+              <a:bodyPr/>
+              <a:lstStyle/>
+              <a:p>
+                <a:r>
+                  <a:rPr lang="en-US">
+                    <a:noFill/>
+                  </a:rPr>
+                  <a:t> </a:t>
+                </a:r>
+              </a:p>
+            </p:txBody>
+          </p:sp>
+        </mc:Fallback>
+      </mc:AlternateContent>
+    </p:spTree>
+    <p:extLst>
+      <p:ext uri="{BB962C8B-B14F-4D97-AF65-F5344CB8AC3E}">
+        <p14:creationId xmlns:p14="http://schemas.microsoft.com/office/powerpoint/2010/main" val="3998512222"/>
+      </p:ext>
+    </p:extLst>
+  </p:cSld>
+  <p:clrMapOvr>
+    <a:masterClrMapping/>
+  </p:clrMapOvr>
+</p:sld>
+</file>
+
+<file path=ppt/slides/slide11.xml><?xml version="1.0" encoding="utf-8"?>
+<p:sld xmlns:a="http://schemas.openxmlformats.org/drawingml/2006/main" xmlns:r="http://schemas.openxmlformats.org/officeDocument/2006/relationships" xmlns:p="http://schemas.openxmlformats.org/presentationml/2006/main">
+  <p:cSld>
+    <p:spTree>
+      <p:nvGrpSpPr>
+        <p:cNvPr id="1" name=""/>
+        <p:cNvGrpSpPr/>
+        <p:nvPr/>
+      </p:nvGrpSpPr>
+      <p:grpSpPr>
+        <a:xfrm>
+          <a:off x="0" y="0"/>
+          <a:ext cx="0" cy="0"/>
+          <a:chOff x="0" y="0"/>
+          <a:chExt cx="0" cy="0"/>
+        </a:xfrm>
+      </p:grpSpPr>
       <p:sp>
         <p:nvSpPr>
           <p:cNvPr id="4" name="Title 3">
@@ -4087,7 +4790,7 @@
 </p:sld>
 </file>
 
-<file path=ppt/slides/slide11.xml><?xml version="1.0" encoding="utf-8"?>
+<file path=ppt/slides/slide12.xml><?xml version="1.0" encoding="utf-8"?>
 <p:sld xmlns:a="http://schemas.openxmlformats.org/drawingml/2006/main" xmlns:r="http://schemas.openxmlformats.org/officeDocument/2006/relationships" xmlns:p="http://schemas.openxmlformats.org/presentationml/2006/main">
   <p:cSld>
     <p:spTree>
@@ -4644,7 +5347,7 @@
 </p:sld>
 </file>
 
-<file path=ppt/slides/slide12.xml><?xml version="1.0" encoding="utf-8"?>
+<file path=ppt/slides/slide13.xml><?xml version="1.0" encoding="utf-8"?>
 <p:sld xmlns:a="http://schemas.openxmlformats.org/drawingml/2006/main" xmlns:r="http://schemas.openxmlformats.org/officeDocument/2006/relationships" xmlns:p="http://schemas.openxmlformats.org/presentationml/2006/main">
   <p:cSld>
     <p:spTree>
@@ -5468,7 +6171,7 @@
 </p:sld>
 </file>
 
-<file path=ppt/slides/slide13.xml><?xml version="1.0" encoding="utf-8"?>
+<file path=ppt/slides/slide14.xml><?xml version="1.0" encoding="utf-8"?>
 <p:sld xmlns:a="http://schemas.openxmlformats.org/drawingml/2006/main" xmlns:r="http://schemas.openxmlformats.org/officeDocument/2006/relationships" xmlns:p="http://schemas.openxmlformats.org/presentationml/2006/main">
   <p:cSld>
     <p:spTree>
@@ -5625,7 +6328,7 @@
 </p:sld>
 </file>
 
-<file path=ppt/slides/slide14.xml><?xml version="1.0" encoding="utf-8"?>
+<file path=ppt/slides/slide15.xml><?xml version="1.0" encoding="utf-8"?>
 <p:sld xmlns:a="http://schemas.openxmlformats.org/drawingml/2006/main" xmlns:r="http://schemas.openxmlformats.org/officeDocument/2006/relationships" xmlns:p="http://schemas.openxmlformats.org/presentationml/2006/main">
   <p:cSld>
     <p:spTree>
@@ -6181,7 +6884,7 @@
 </p:sld>
 </file>
 
-<file path=ppt/slides/slide15.xml><?xml version="1.0" encoding="utf-8"?>
+<file path=ppt/slides/slide16.xml><?xml version="1.0" encoding="utf-8"?>
 <p:sld xmlns:a="http://schemas.openxmlformats.org/drawingml/2006/main" xmlns:r="http://schemas.openxmlformats.org/officeDocument/2006/relationships" xmlns:p="http://schemas.openxmlformats.org/presentationml/2006/main">
   <p:cSld>
     <p:spTree>
@@ -6333,7 +7036,7 @@
 </p:sld>
 </file>
 
-<file path=ppt/slides/slide16.xml><?xml version="1.0" encoding="utf-8"?>
+<file path=ppt/slides/slide17.xml><?xml version="1.0" encoding="utf-8"?>
 <p:sld xmlns:a="http://schemas.openxmlformats.org/drawingml/2006/main" xmlns:r="http://schemas.openxmlformats.org/officeDocument/2006/relationships" xmlns:p="http://schemas.openxmlformats.org/presentationml/2006/main">
   <p:cSld>
     <p:spTree>
@@ -7058,7 +7761,7 @@
 </p:sld>
 </file>
 
-<file path=ppt/slides/slide17.xml><?xml version="1.0" encoding="utf-8"?>
+<file path=ppt/slides/slide18.xml><?xml version="1.0" encoding="utf-8"?>
 <p:sld xmlns:a="http://schemas.openxmlformats.org/drawingml/2006/main" xmlns:r="http://schemas.openxmlformats.org/officeDocument/2006/relationships" xmlns:p="http://schemas.openxmlformats.org/presentationml/2006/main">
   <p:cSld>
     <p:spTree>
@@ -7281,7 +7984,7 @@
 </p:sld>
 </file>
 
-<file path=ppt/slides/slide18.xml><?xml version="1.0" encoding="utf-8"?>
+<file path=ppt/slides/slide19.xml><?xml version="1.0" encoding="utf-8"?>
 <p:sld xmlns:a="http://schemas.openxmlformats.org/drawingml/2006/main" xmlns:r="http://schemas.openxmlformats.org/officeDocument/2006/relationships" xmlns:p="http://schemas.openxmlformats.org/presentationml/2006/main">
   <p:cSld>
     <p:spTree>
@@ -7558,7 +8261,189 @@
 </p:sld>
 </file>
 
-<file path=ppt/slides/slide19.xml><?xml version="1.0" encoding="utf-8"?>
+<file path=ppt/slides/slide2.xml><?xml version="1.0" encoding="utf-8"?>
+<p:sld xmlns:a="http://schemas.openxmlformats.org/drawingml/2006/main" xmlns:r="http://schemas.openxmlformats.org/officeDocument/2006/relationships" xmlns:p="http://schemas.openxmlformats.org/presentationml/2006/main">
+  <p:cSld>
+    <p:spTree>
+      <p:nvGrpSpPr>
+        <p:cNvPr id="1" name=""/>
+        <p:cNvGrpSpPr/>
+        <p:nvPr/>
+      </p:nvGrpSpPr>
+      <p:grpSpPr>
+        <a:xfrm>
+          <a:off x="0" y="0"/>
+          <a:ext cx="0" cy="0"/>
+          <a:chOff x="0" y="0"/>
+          <a:chExt cx="0" cy="0"/>
+        </a:xfrm>
+      </p:grpSpPr>
+      <p:sp>
+        <p:nvSpPr>
+          <p:cNvPr id="2" name="Title 1">
+            <a:extLst>
+              <a:ext uri="{FF2B5EF4-FFF2-40B4-BE49-F238E27FC236}">
+                <a16:creationId xmlns:a16="http://schemas.microsoft.com/office/drawing/2014/main" id="{9E7A3493-2ED6-DF09-F569-7F3DCA81AB18}"/>
+              </a:ext>
+            </a:extLst>
+          </p:cNvPr>
+          <p:cNvSpPr>
+            <a:spLocks noGrp="1"/>
+          </p:cNvSpPr>
+          <p:nvPr>
+            <p:ph type="title"/>
+          </p:nvPr>
+        </p:nvSpPr>
+        <p:spPr/>
+        <p:txBody>
+          <a:bodyPr/>
+          <a:lstStyle/>
+          <a:p>
+            <a:r>
+              <a:rPr lang="en-US" dirty="0"/>
+              <a:t>Topics of this Course</a:t>
+            </a:r>
+          </a:p>
+        </p:txBody>
+      </p:sp>
+      <p:sp>
+        <p:nvSpPr>
+          <p:cNvPr id="3" name="Content Placeholder 2">
+            <a:extLst>
+              <a:ext uri="{FF2B5EF4-FFF2-40B4-BE49-F238E27FC236}">
+                <a16:creationId xmlns:a16="http://schemas.microsoft.com/office/drawing/2014/main" id="{8F95E019-92A5-79AC-D777-59B4926F61AA}"/>
+              </a:ext>
+            </a:extLst>
+          </p:cNvPr>
+          <p:cNvSpPr>
+            <a:spLocks noGrp="1"/>
+          </p:cNvSpPr>
+          <p:nvPr>
+            <p:ph idx="1"/>
+          </p:nvPr>
+        </p:nvSpPr>
+        <p:spPr/>
+        <p:txBody>
+          <a:bodyPr>
+            <a:normAutofit fontScale="85000" lnSpcReduction="20000"/>
+          </a:bodyPr>
+          <a:lstStyle/>
+          <a:p>
+            <a:r>
+              <a:rPr lang="en-US" dirty="0"/>
+              <a:t>Introduction to reinforcement learning</a:t>
+            </a:r>
+          </a:p>
+          <a:p>
+            <a:r>
+              <a:rPr lang="en-US" dirty="0"/>
+              <a:t>Markov decision processes</a:t>
+            </a:r>
+          </a:p>
+          <a:p>
+            <a:r>
+              <a:rPr lang="en-US" dirty="0"/>
+              <a:t>Part I: Tabular Methods</a:t>
+            </a:r>
+          </a:p>
+          <a:p>
+            <a:pPr lvl="1"/>
+            <a:r>
+              <a:rPr lang="en-US" dirty="0"/>
+              <a:t>Dynamic programming</a:t>
+            </a:r>
+          </a:p>
+          <a:p>
+            <a:pPr lvl="1"/>
+            <a:r>
+              <a:rPr lang="en-US" dirty="0"/>
+              <a:t>Monte Carlo methods</a:t>
+            </a:r>
+          </a:p>
+          <a:p>
+            <a:pPr lvl="1"/>
+            <a:r>
+              <a:rPr lang="en-US" dirty="0"/>
+              <a:t>Temporal-difference learning</a:t>
+            </a:r>
+          </a:p>
+          <a:p>
+            <a:pPr lvl="1"/>
+            <a:r>
+              <a:rPr lang="en-US" dirty="0"/>
+              <a:t>Multi-step bootstrapping</a:t>
+            </a:r>
+          </a:p>
+          <a:p>
+            <a:pPr lvl="1"/>
+            <a:r>
+              <a:rPr lang="en-US" dirty="0"/>
+              <a:t>Planning and learning with tabular methods</a:t>
+            </a:r>
+          </a:p>
+          <a:p>
+            <a:r>
+              <a:rPr lang="en-US" b="1" dirty="0"/>
+              <a:t>Part II: Approximate Solution Methods</a:t>
+            </a:r>
+          </a:p>
+          <a:p>
+            <a:pPr lvl="1"/>
+            <a:r>
+              <a:rPr lang="en-US" dirty="0"/>
+              <a:t>Prediction and Control using Approximation</a:t>
+            </a:r>
+          </a:p>
+          <a:p>
+            <a:pPr lvl="1"/>
+            <a:r>
+              <a:rPr lang="en-US" b="1" dirty="0"/>
+              <a:t>Eligibility Traces</a:t>
+            </a:r>
+          </a:p>
+          <a:p>
+            <a:pPr lvl="1"/>
+            <a:r>
+              <a:rPr lang="en-US" dirty="0"/>
+              <a:t>Policy Gradient Methods</a:t>
+            </a:r>
+          </a:p>
+          <a:p>
+            <a:r>
+              <a:rPr lang="en-US" dirty="0"/>
+              <a:t>Part III: Modern RL Methods</a:t>
+            </a:r>
+          </a:p>
+          <a:p>
+            <a:pPr lvl="1"/>
+            <a:r>
+              <a:rPr lang="en-US" dirty="0"/>
+              <a:t>Deep Reinforcement Learning</a:t>
+            </a:r>
+          </a:p>
+          <a:p>
+            <a:pPr lvl="1"/>
+            <a:r>
+              <a:rPr lang="en-US" dirty="0"/>
+              <a:t>Current Applications</a:t>
+            </a:r>
+          </a:p>
+        </p:txBody>
+      </p:sp>
+    </p:spTree>
+    <p:extLst>
+      <p:ext uri="{BB962C8B-B14F-4D97-AF65-F5344CB8AC3E}">
+        <p14:creationId xmlns:p14="http://schemas.microsoft.com/office/powerpoint/2010/main" val="3653367536"/>
+      </p:ext>
+    </p:extLst>
+  </p:cSld>
+  <p:clrMapOvr>
+    <a:masterClrMapping/>
+  </p:clrMapOvr>
+</p:sld>
+</file>
+
+<file path=ppt/slides/slide20.xml><?xml version="1.0" encoding="utf-8"?>
 <p:sld xmlns:a="http://schemas.openxmlformats.org/drawingml/2006/main" xmlns:r="http://schemas.openxmlformats.org/officeDocument/2006/relationships" xmlns:p="http://schemas.openxmlformats.org/presentationml/2006/main">
   <p:cSld>
     <p:spTree>
@@ -7794,7 +8679,7 @@
 </p:sld>
 </file>
 
-<file path=ppt/slides/slide2.xml><?xml version="1.0" encoding="utf-8"?>
+<file path=ppt/slides/slide3.xml><?xml version="1.0" encoding="utf-8"?>
 <p:sld xmlns:a="http://schemas.openxmlformats.org/drawingml/2006/main" xmlns:r="http://schemas.openxmlformats.org/officeDocument/2006/relationships" xmlns:p="http://schemas.openxmlformats.org/presentationml/2006/main">
   <p:cSld>
     <p:spTree>
@@ -7859,8 +8744,8 @@
             </p:nvSpPr>
             <p:spPr>
               <a:xfrm>
-                <a:off x="6211474" y="1140632"/>
-                <a:ext cx="5273179" cy="2049857"/>
+                <a:off x="822819" y="3658891"/>
+                <a:ext cx="5273179" cy="1902124"/>
               </a:xfrm>
             </p:spPr>
             <p:style>
@@ -8083,6 +8968,20 @@
                   </a:spcBef>
                   <a:buNone/>
                 </a:pPr>
+                <a:endParaRPr lang="en-US" sz="1200" i="1" dirty="0">
+                  <a:latin typeface="Cambria Math" panose="02040503050406030204" pitchFamily="18" charset="0"/>
+                </a:endParaRPr>
+              </a:p>
+              <a:p>
+                <a:pPr marL="0" indent="0">
+                  <a:lnSpc>
+                    <a:spcPct val="100000"/>
+                  </a:lnSpc>
+                  <a:spcBef>
+                    <a:spcPts val="0"/>
+                  </a:spcBef>
+                  <a:buNone/>
+                </a:pPr>
                 <a14:m>
                   <m:oMath xmlns:m="http://schemas.openxmlformats.org/officeDocument/2006/math">
                     <m:sSub>
@@ -8799,183 +9698,6 @@
                         </m:r>
                       </m:sub>
                     </m:sSub>
-                  </m:oMath>
-                </a14:m>
-                <a:endParaRPr lang="en-US" sz="1200" dirty="0">
-                  <a:solidFill>
-                    <a:schemeClr val="tx1"/>
-                  </a:solidFill>
-                </a:endParaRPr>
-              </a:p>
-              <a:p>
-                <a:pPr marL="0" indent="0">
-                  <a:spcBef>
-                    <a:spcPts val="0"/>
-                  </a:spcBef>
-                  <a:buNone/>
-                </a:pPr>
-                <a14:m>
-                  <m:oMath xmlns:m="http://schemas.openxmlformats.org/officeDocument/2006/math">
-                    <m:sSub>
-                      <m:sSubPr>
-                        <m:ctrlPr>
-                          <a:rPr lang="en-US" sz="1200" i="1" dirty="0">
-                            <a:solidFill>
-                              <a:schemeClr val="tx1"/>
-                            </a:solidFill>
-                            <a:latin typeface="Cambria Math" panose="02040503050406030204" pitchFamily="18" charset="0"/>
-                          </a:rPr>
-                        </m:ctrlPr>
-                      </m:sSubPr>
-                      <m:e>
-                        <m:acc>
-                          <m:accPr>
-                            <m:chr m:val="̅"/>
-                            <m:ctrlPr>
-                              <a:rPr lang="en-US" sz="1200" i="1" dirty="0">
-                                <a:solidFill>
-                                  <a:schemeClr val="tx1"/>
-                                </a:solidFill>
-                                <a:latin typeface="Cambria Math" panose="02040503050406030204" pitchFamily="18" charset="0"/>
-                              </a:rPr>
-                            </m:ctrlPr>
-                          </m:accPr>
-                          <m:e>
-                            <m:r>
-                              <a:rPr lang="en-US" sz="1200" i="1" dirty="0">
-                                <a:solidFill>
-                                  <a:schemeClr val="tx1"/>
-                                </a:solidFill>
-                                <a:latin typeface="Cambria Math" panose="02040503050406030204" pitchFamily="18" charset="0"/>
-                              </a:rPr>
-                              <m:t>𝑉</m:t>
-                            </m:r>
-                          </m:e>
-                        </m:acc>
-                      </m:e>
-                      <m:sub>
-                        <m:r>
-                          <a:rPr lang="en-US" sz="1200" i="1" dirty="0">
-                            <a:solidFill>
-                              <a:schemeClr val="tx1"/>
-                            </a:solidFill>
-                            <a:latin typeface="Cambria Math" panose="02040503050406030204" pitchFamily="18" charset="0"/>
-                          </a:rPr>
-                          <m:t>𝑡</m:t>
-                        </m:r>
-                      </m:sub>
-                    </m:sSub>
-                    <m:r>
-                      <a:rPr lang="en-US" sz="1200" i="1" dirty="0">
-                        <a:solidFill>
-                          <a:schemeClr val="tx1"/>
-                        </a:solidFill>
-                        <a:latin typeface="Cambria Math" panose="02040503050406030204" pitchFamily="18" charset="0"/>
-                      </a:rPr>
-                      <m:t>(</m:t>
-                    </m:r>
-                    <m:r>
-                      <a:rPr lang="en-US" sz="1200" i="1" dirty="0">
-                        <a:solidFill>
-                          <a:schemeClr val="tx1"/>
-                        </a:solidFill>
-                        <a:latin typeface="Cambria Math" panose="02040503050406030204" pitchFamily="18" charset="0"/>
-                      </a:rPr>
-                      <m:t>𝑠</m:t>
-                    </m:r>
-                    <m:r>
-                      <a:rPr lang="en-US" sz="1200" i="1" dirty="0">
-                        <a:solidFill>
-                          <a:schemeClr val="tx1"/>
-                        </a:solidFill>
-                        <a:latin typeface="Cambria Math" panose="02040503050406030204" pitchFamily="18" charset="0"/>
-                      </a:rPr>
-                      <m:t>) </m:t>
-                    </m:r>
-                  </m:oMath>
-                </a14:m>
-                <a:r>
-                  <a:rPr lang="en-US" sz="1200" dirty="0">
-                    <a:solidFill>
-                      <a:schemeClr val="tx1"/>
-                    </a:solidFill>
-                  </a:rPr>
-                  <a:t>	expected approximate action value</a:t>
-                </a:r>
-              </a:p>
-              <a:p>
-                <a:pPr marL="0" indent="0">
-                  <a:spcBef>
-                    <a:spcPts val="0"/>
-                  </a:spcBef>
-                  <a:buNone/>
-                </a:pPr>
-                <a14:m>
-                  <m:oMath xmlns:m="http://schemas.openxmlformats.org/officeDocument/2006/math">
-                    <m:sSub>
-                      <m:sSubPr>
-                        <m:ctrlPr>
-                          <a:rPr lang="en-US" sz="1200" i="1" dirty="0">
-                            <a:solidFill>
-                              <a:schemeClr val="tx1"/>
-                            </a:solidFill>
-                            <a:latin typeface="Cambria Math" panose="02040503050406030204" pitchFamily="18" charset="0"/>
-                          </a:rPr>
-                        </m:ctrlPr>
-                      </m:sSubPr>
-                      <m:e>
-                        <m:r>
-                          <a:rPr lang="en-US" sz="1200" i="1" dirty="0">
-                            <a:solidFill>
-                              <a:schemeClr val="tx1"/>
-                            </a:solidFill>
-                            <a:latin typeface="Cambria Math" panose="02040503050406030204" pitchFamily="18" charset="0"/>
-                          </a:rPr>
-                          <m:t>𝑈</m:t>
-                        </m:r>
-                      </m:e>
-                      <m:sub>
-                        <m:r>
-                          <a:rPr lang="en-US" sz="1200" i="1" dirty="0">
-                            <a:solidFill>
-                              <a:schemeClr val="tx1"/>
-                            </a:solidFill>
-                            <a:latin typeface="Cambria Math" panose="02040503050406030204" pitchFamily="18" charset="0"/>
-                          </a:rPr>
-                          <m:t>𝑡</m:t>
-                        </m:r>
-                      </m:sub>
-                    </m:sSub>
-                  </m:oMath>
-                </a14:m>
-                <a:r>
-                  <a:rPr lang="en-US" sz="1200" dirty="0">
-                    <a:solidFill>
-                      <a:schemeClr val="tx1"/>
-                    </a:solidFill>
-                  </a:rPr>
-                  <a:t>	target for estimate at time</a:t>
-                </a:r>
-                <a14:m>
-                  <m:oMath xmlns:m="http://schemas.openxmlformats.org/officeDocument/2006/math">
-                    <m:r>
-                      <a:rPr lang="en-US" sz="1200" i="1" dirty="0">
-                        <a:solidFill>
-                          <a:schemeClr val="tx1"/>
-                        </a:solidFill>
-                        <a:latin typeface="Cambria Math" panose="02040503050406030204" pitchFamily="18" charset="0"/>
-                      </a:rPr>
-                      <m:t> </m:t>
-                    </m:r>
-                    <m:r>
-                      <a:rPr lang="en-US" sz="1200" i="1" dirty="0">
-                        <a:solidFill>
-                          <a:schemeClr val="tx1"/>
-                        </a:solidFill>
-                        <a:latin typeface="Cambria Math" panose="02040503050406030204" pitchFamily="18" charset="0"/>
-                      </a:rPr>
-                      <m:t>𝑡</m:t>
-                    </m:r>
                   </m:oMath>
                 </a14:m>
                 <a:endParaRPr lang="en-US" sz="1200" dirty="0">
@@ -9006,13 +9728,13 @@
             </p:nvSpPr>
             <p:spPr>
               <a:xfrm>
-                <a:off x="6211474" y="1140632"/>
-                <a:ext cx="5273179" cy="2049857"/>
+                <a:off x="822819" y="3658891"/>
+                <a:ext cx="5273179" cy="1902124"/>
               </a:xfrm>
               <a:blipFill>
                 <a:blip r:embed="rId2"/>
                 <a:stretch>
-                  <a:fillRect b="-885"/>
+                  <a:fillRect b="-952"/>
                 </a:stretch>
               </a:blipFill>
             </p:spPr>
@@ -9300,7 +10022,7 @@
                 </a14:m>
                 <a:r>
                   <a:rPr lang="en-US" sz="1200" dirty="0"/>
-                  <a:t> selected from distribution</a:t>
+                  <a:t> selected from distribution </a:t>
                 </a:r>
                 <a14:m>
                   <m:oMath xmlns:m="http://schemas.openxmlformats.org/officeDocument/2006/math">
@@ -9425,7 +10147,7 @@
                 </a14:m>
                 <a:r>
                   <a:rPr lang="en-US" sz="1200" dirty="0"/>
-                  <a:t>, i.e.,</a:t>
+                  <a:t>, i.e., </a:t>
                 </a:r>
                 <a14:m>
                   <m:oMath xmlns:m="http://schemas.openxmlformats.org/officeDocument/2006/math">
@@ -9710,8 +10432,8 @@
             </p:nvSpPr>
             <p:spPr>
               <a:xfrm>
-                <a:off x="822819" y="3570646"/>
-                <a:ext cx="5273179" cy="2985823"/>
+                <a:off x="6267338" y="1124198"/>
+                <a:ext cx="5273179" cy="3693383"/>
               </a:xfrm>
               <a:prstGeom prst="rect">
                 <a:avLst/>
@@ -9732,7 +10454,7 @@
               </a:fontRef>
             </p:style>
             <p:txBody>
-              <a:bodyPr vert="horz" lIns="91440" tIns="45720" rIns="91440" bIns="45720" rtlCol="0">
+              <a:bodyPr vert="horz" wrap="square" lIns="91440" tIns="45720" rIns="91440" bIns="45720" rtlCol="0">
                 <a:spAutoFit/>
               </a:bodyPr>
               <a:lstStyle>
@@ -10341,6 +11063,20 @@
                   </a:spcBef>
                   <a:buNone/>
                 </a:pPr>
+                <a:endParaRPr lang="en-US" sz="1200" i="1" dirty="0">
+                  <a:latin typeface="Cambria Math" panose="02040503050406030204" pitchFamily="18" charset="0"/>
+                </a:endParaRPr>
+              </a:p>
+              <a:p>
+                <a:pPr marL="0" indent="0">
+                  <a:lnSpc>
+                    <a:spcPct val="100000"/>
+                  </a:lnSpc>
+                  <a:spcBef>
+                    <a:spcPts val="0"/>
+                  </a:spcBef>
+                  <a:buNone/>
+                </a:pPr>
                 <a14:m>
                   <m:oMath xmlns:m="http://schemas.openxmlformats.org/officeDocument/2006/math">
                     <m:r>
@@ -10499,7 +11235,10 @@
                     </m:r>
                   </m:oMath>
                 </a14:m>
-                <a:endParaRPr lang="en-US" sz="1200" dirty="0"/>
+                <a:r>
+                  <a:rPr lang="en-US" sz="1200" dirty="0"/>
+                  <a:t>.</a:t>
+                </a:r>
               </a:p>
               <a:p>
                 <a:pPr marL="0" indent="0">
@@ -10511,6 +11250,180 @@
                   </a:spcBef>
                   <a:buNone/>
                 </a:pPr>
+                <a14:m>
+                  <m:oMath xmlns:m="http://schemas.openxmlformats.org/officeDocument/2006/math">
+                    <m:r>
+                      <a:rPr lang="en-US" sz="1200" i="1" dirty="0">
+                        <a:latin typeface="Cambria Math" panose="02040503050406030204" pitchFamily="18" charset="0"/>
+                      </a:rPr>
+                      <m:t>𝑝</m:t>
+                    </m:r>
+                    <m:d>
+                      <m:dPr>
+                        <m:endChr m:val="|"/>
+                        <m:ctrlPr>
+                          <a:rPr lang="en-US" sz="1200" i="1" dirty="0">
+                            <a:latin typeface="Cambria Math" panose="02040503050406030204" pitchFamily="18" charset="0"/>
+                          </a:rPr>
+                        </m:ctrlPr>
+                      </m:dPr>
+                      <m:e>
+                        <m:sSup>
+                          <m:sSupPr>
+                            <m:ctrlPr>
+                              <a:rPr lang="en-US" sz="1200" i="1" dirty="0">
+                                <a:latin typeface="Cambria Math" panose="02040503050406030204" pitchFamily="18" charset="0"/>
+                              </a:rPr>
+                            </m:ctrlPr>
+                          </m:sSupPr>
+                          <m:e>
+                            <m:r>
+                              <a:rPr lang="en-US" sz="1200" i="1" dirty="0">
+                                <a:latin typeface="Cambria Math" panose="02040503050406030204" pitchFamily="18" charset="0"/>
+                              </a:rPr>
+                              <m:t>𝑠</m:t>
+                            </m:r>
+                          </m:e>
+                          <m:sup>
+                            <m:r>
+                              <a:rPr lang="en-US" sz="1200" i="1" dirty="0">
+                                <a:latin typeface="Cambria Math" panose="02040503050406030204" pitchFamily="18" charset="0"/>
+                              </a:rPr>
+                              <m:t>′</m:t>
+                            </m:r>
+                          </m:sup>
+                        </m:sSup>
+                      </m:e>
+                    </m:d>
+                    <m:r>
+                      <a:rPr lang="en-US" sz="1200" i="1" dirty="0">
+                        <a:latin typeface="Cambria Math" panose="02040503050406030204" pitchFamily="18" charset="0"/>
+                      </a:rPr>
+                      <m:t>𝑠</m:t>
+                    </m:r>
+                    <m:r>
+                      <a:rPr lang="en-US" sz="1200" i="1" dirty="0">
+                        <a:latin typeface="Cambria Math" panose="02040503050406030204" pitchFamily="18" charset="0"/>
+                      </a:rPr>
+                      <m:t>, </m:t>
+                    </m:r>
+                    <m:r>
+                      <a:rPr lang="en-US" sz="1200" i="1" dirty="0">
+                        <a:latin typeface="Cambria Math" panose="02040503050406030204" pitchFamily="18" charset="0"/>
+                      </a:rPr>
+                      <m:t>𝑎</m:t>
+                    </m:r>
+                    <m:r>
+                      <a:rPr lang="en-US" sz="1200" i="1" dirty="0">
+                        <a:latin typeface="Cambria Math" panose="02040503050406030204" pitchFamily="18" charset="0"/>
+                      </a:rPr>
+                      <m:t>)</m:t>
+                    </m:r>
+                  </m:oMath>
+                </a14:m>
+                <a:r>
+                  <a:rPr lang="en-US" sz="1200" dirty="0"/>
+                  <a:t> 	probability of transition to state </a:t>
+                </a:r>
+                <a14:m>
+                  <m:oMath xmlns:m="http://schemas.openxmlformats.org/officeDocument/2006/math">
+                    <m:r>
+                      <a:rPr lang="en-US" sz="1200" i="1" dirty="0">
+                        <a:latin typeface="Cambria Math" panose="02040503050406030204" pitchFamily="18" charset="0"/>
+                      </a:rPr>
+                      <m:t>𝑠</m:t>
+                    </m:r>
+                    <m:r>
+                      <a:rPr lang="en-US" sz="1200" i="1" dirty="0">
+                        <a:latin typeface="Cambria Math" panose="02040503050406030204" pitchFamily="18" charset="0"/>
+                      </a:rPr>
+                      <m:t>′</m:t>
+                    </m:r>
+                  </m:oMath>
+                </a14:m>
+                <a:r>
+                  <a:rPr lang="en-US" sz="1200" dirty="0"/>
+                  <a:t> fom state </a:t>
+                </a:r>
+                <a14:m>
+                  <m:oMath xmlns:m="http://schemas.openxmlformats.org/officeDocument/2006/math">
+                    <m:r>
+                      <a:rPr lang="en-US" sz="1200" i="1" dirty="0">
+                        <a:latin typeface="Cambria Math" panose="02040503050406030204" pitchFamily="18" charset="0"/>
+                      </a:rPr>
+                      <m:t>𝑠</m:t>
+                    </m:r>
+                  </m:oMath>
+                </a14:m>
+                <a:r>
+                  <a:rPr lang="en-US" sz="1200" dirty="0"/>
+                  <a:t> taking action </a:t>
+                </a:r>
+                <a14:m>
+                  <m:oMath xmlns:m="http://schemas.openxmlformats.org/officeDocument/2006/math">
+                    <m:r>
+                      <a:rPr lang="en-US" sz="1200" i="1" dirty="0">
+                        <a:latin typeface="Cambria Math" panose="02040503050406030204" pitchFamily="18" charset="0"/>
+                      </a:rPr>
+                      <m:t>𝑎</m:t>
+                    </m:r>
+                  </m:oMath>
+                </a14:m>
+                <a:r>
+                  <a:rPr lang="en-US" sz="1200" dirty="0"/>
+                  <a:t>.</a:t>
+                </a:r>
+              </a:p>
+              <a:p>
+                <a:pPr marL="0" indent="0">
+                  <a:lnSpc>
+                    <a:spcPct val="100000"/>
+                  </a:lnSpc>
+                  <a:spcBef>
+                    <a:spcPts val="0"/>
+                  </a:spcBef>
+                  <a:buNone/>
+                </a:pPr>
+                <a14:m>
+                  <m:oMath xmlns:m="http://schemas.openxmlformats.org/officeDocument/2006/math">
+                    <m:r>
+                      <a:rPr lang="en-US" sz="1200" b="0" i="1" smtClean="0">
+                        <a:latin typeface="Cambria Math" panose="02040503050406030204" pitchFamily="18" charset="0"/>
+                      </a:rPr>
+                      <m:t>𝑟</m:t>
+                    </m:r>
+                    <m:r>
+                      <a:rPr lang="en-US" sz="1200" b="0" i="1" smtClean="0">
+                        <a:latin typeface="Cambria Math" panose="02040503050406030204" pitchFamily="18" charset="0"/>
+                      </a:rPr>
+                      <m:t>(</m:t>
+                    </m:r>
+                    <m:r>
+                      <a:rPr lang="en-US" sz="1200" b="0" i="1" smtClean="0">
+                        <a:latin typeface="Cambria Math" panose="02040503050406030204" pitchFamily="18" charset="0"/>
+                      </a:rPr>
+                      <m:t>𝑠</m:t>
+                    </m:r>
+                    <m:r>
+                      <a:rPr lang="en-US" sz="1200" b="0" i="1" smtClean="0">
+                        <a:latin typeface="Cambria Math" panose="02040503050406030204" pitchFamily="18" charset="0"/>
+                      </a:rPr>
+                      <m:t>,</m:t>
+                    </m:r>
+                    <m:r>
+                      <a:rPr lang="en-US" sz="1200" b="0" i="1" smtClean="0">
+                        <a:latin typeface="Cambria Math" panose="02040503050406030204" pitchFamily="18" charset="0"/>
+                      </a:rPr>
+                      <m:t>𝑎</m:t>
+                    </m:r>
+                    <m:r>
+                      <a:rPr lang="en-US" sz="1200" b="0" i="1" smtClean="0">
+                        <a:latin typeface="Cambria Math" panose="02040503050406030204" pitchFamily="18" charset="0"/>
+                      </a:rPr>
+                      <m:t>)</m:t>
+                    </m:r>
+                  </m:oMath>
+                </a14:m>
                 <a:r>
                   <a:rPr lang="en-US" sz="1200" dirty="0"/>
                   <a:t>	expected immediate reward from state </a:t>
@@ -10537,8 +11450,156 @@
                       </a:rPr>
                       <m:t>𝑎</m:t>
                     </m:r>
+                    <m:r>
+                      <a:rPr lang="en-US" sz="1200" b="0" i="1" dirty="0" smtClean="0">
+                        <a:latin typeface="Cambria Math" panose="02040503050406030204" pitchFamily="18" charset="0"/>
+                      </a:rPr>
+                      <m:t>.</m:t>
+                    </m:r>
                   </m:oMath>
                 </a14:m>
+                <a:endParaRPr lang="en-US" sz="1200" b="0" dirty="0"/>
+              </a:p>
+              <a:p>
+                <a:pPr marL="0" indent="0">
+                  <a:lnSpc>
+                    <a:spcPct val="100000"/>
+                  </a:lnSpc>
+                  <a:spcBef>
+                    <a:spcPts val="0"/>
+                  </a:spcBef>
+                  <a:buNone/>
+                </a:pPr>
+                <a14:m>
+                  <m:oMath xmlns:m="http://schemas.openxmlformats.org/officeDocument/2006/math">
+                    <m:r>
+                      <a:rPr lang="en-US" sz="1200" i="1">
+                        <a:latin typeface="Cambria Math" panose="02040503050406030204" pitchFamily="18" charset="0"/>
+                      </a:rPr>
+                      <m:t>𝑟</m:t>
+                    </m:r>
+                    <m:r>
+                      <a:rPr lang="en-US" sz="1200" i="1">
+                        <a:latin typeface="Cambria Math" panose="02040503050406030204" pitchFamily="18" charset="0"/>
+                      </a:rPr>
+                      <m:t>(</m:t>
+                    </m:r>
+                    <m:r>
+                      <a:rPr lang="en-US" sz="1200" i="1">
+                        <a:latin typeface="Cambria Math" panose="02040503050406030204" pitchFamily="18" charset="0"/>
+                      </a:rPr>
+                      <m:t>𝑠</m:t>
+                    </m:r>
+                    <m:r>
+                      <a:rPr lang="en-US" sz="1200" i="1">
+                        <a:latin typeface="Cambria Math" panose="02040503050406030204" pitchFamily="18" charset="0"/>
+                      </a:rPr>
+                      <m:t>,</m:t>
+                    </m:r>
+                    <m:r>
+                      <a:rPr lang="en-US" sz="1200" i="1">
+                        <a:latin typeface="Cambria Math" panose="02040503050406030204" pitchFamily="18" charset="0"/>
+                      </a:rPr>
+                      <m:t>𝑎</m:t>
+                    </m:r>
+                    <m:r>
+                      <a:rPr lang="en-US" sz="1200" b="0" i="1" smtClean="0">
+                        <a:latin typeface="Cambria Math" panose="02040503050406030204" pitchFamily="18" charset="0"/>
+                      </a:rPr>
+                      <m:t>,</m:t>
+                    </m:r>
+                    <m:r>
+                      <a:rPr lang="en-US" sz="1200" b="0" i="1" smtClean="0">
+                        <a:latin typeface="Cambria Math" panose="02040503050406030204" pitchFamily="18" charset="0"/>
+                      </a:rPr>
+                      <m:t>𝑠</m:t>
+                    </m:r>
+                    <m:r>
+                      <a:rPr lang="en-US" sz="1200" b="0" i="1" smtClean="0">
+                        <a:latin typeface="Cambria Math" panose="02040503050406030204" pitchFamily="18" charset="0"/>
+                      </a:rPr>
+                      <m:t>′)</m:t>
+                    </m:r>
+                  </m:oMath>
+                </a14:m>
+                <a:r>
+                  <a:rPr lang="en-US" sz="1200" dirty="0"/>
+                  <a:t>	expected immediate reward from state </a:t>
+                </a:r>
+                <a14:m>
+                  <m:oMath xmlns:m="http://schemas.openxmlformats.org/officeDocument/2006/math">
+                    <m:r>
+                      <a:rPr lang="en-US" sz="1200" i="1" dirty="0">
+                        <a:latin typeface="Cambria Math" panose="02040503050406030204" pitchFamily="18" charset="0"/>
+                      </a:rPr>
+                      <m:t>𝑠</m:t>
+                    </m:r>
+                  </m:oMath>
+                </a14:m>
+                <a:r>
+                  <a:rPr lang="en-US" sz="1200" dirty="0"/>
+                  <a:t> to </a:t>
+                </a:r>
+                <a14:m>
+                  <m:oMath xmlns:m="http://schemas.openxmlformats.org/officeDocument/2006/math">
+                    <m:sSup>
+                      <m:sSupPr>
+                        <m:ctrlPr>
+                          <a:rPr lang="en-US" sz="1200" b="0" i="1" smtClean="0">
+                            <a:latin typeface="Cambria Math" panose="02040503050406030204" pitchFamily="18" charset="0"/>
+                          </a:rPr>
+                        </m:ctrlPr>
+                      </m:sSupPr>
+                      <m:e>
+                        <m:r>
+                          <a:rPr lang="en-US" sz="1200" b="0" i="1" smtClean="0">
+                            <a:latin typeface="Cambria Math" panose="02040503050406030204" pitchFamily="18" charset="0"/>
+                          </a:rPr>
+                          <m:t>𝑠</m:t>
+                        </m:r>
+                      </m:e>
+                      <m:sup>
+                        <m:r>
+                          <a:rPr lang="en-US" sz="1200" b="0" i="1" smtClean="0">
+                            <a:latin typeface="Cambria Math" panose="02040503050406030204" pitchFamily="18" charset="0"/>
+                          </a:rPr>
+                          <m:t>′</m:t>
+                        </m:r>
+                      </m:sup>
+                    </m:sSup>
+                  </m:oMath>
+                </a14:m>
+                <a:r>
+                  <a:rPr lang="en-US" sz="1200" dirty="0"/>
+                  <a:t> with action </a:t>
+                </a:r>
+                <a14:m>
+                  <m:oMath xmlns:m="http://schemas.openxmlformats.org/officeDocument/2006/math">
+                    <m:r>
+                      <a:rPr lang="en-US" sz="1200" i="1" dirty="0">
+                        <a:latin typeface="Cambria Math" panose="02040503050406030204" pitchFamily="18" charset="0"/>
+                      </a:rPr>
+                      <m:t>𝑎</m:t>
+                    </m:r>
+                    <m:r>
+                      <a:rPr lang="en-US" sz="1200" b="0" i="1" dirty="0" smtClean="0">
+                        <a:latin typeface="Cambria Math" panose="02040503050406030204" pitchFamily="18" charset="0"/>
+                      </a:rPr>
+                      <m:t>.</m:t>
+                    </m:r>
+                  </m:oMath>
+                </a14:m>
+                <a:endParaRPr lang="en-US" sz="1200" i="1" dirty="0">
+                  <a:latin typeface="Cambria Math" panose="02040503050406030204" pitchFamily="18" charset="0"/>
+                </a:endParaRPr>
+              </a:p>
+              <a:p>
+                <a:pPr marL="0" indent="0">
+                  <a:spcBef>
+                    <a:spcPts val="0"/>
+                  </a:spcBef>
+                  <a:buNone/>
+                </a:pPr>
                 <a:endParaRPr lang="en-US" sz="1200" i="1" dirty="0">
                   <a:latin typeface="Cambria Math" panose="02040503050406030204" pitchFamily="18" charset="0"/>
                 </a:endParaRPr>
@@ -10721,8 +11782,8 @@
             </p:nvSpPr>
             <p:spPr>
               <a:xfrm>
-                <a:off x="822819" y="3570646"/>
-                <a:ext cx="5273179" cy="2985823"/>
+                <a:off x="6267338" y="1124198"/>
+                <a:ext cx="5273179" cy="3693383"/>
               </a:xfrm>
               <a:prstGeom prst="rect">
                 <a:avLst/>
@@ -10730,7 +11791,7 @@
               <a:blipFill>
                 <a:blip r:embed="rId4"/>
                 <a:stretch>
-                  <a:fillRect t="-609"/>
+                  <a:fillRect t="-328"/>
                 </a:stretch>
               </a:blipFill>
             </p:spPr>
@@ -10752,7 +11813,7 @@
     </p:spTree>
     <p:extLst>
       <p:ext uri="{BB962C8B-B14F-4D97-AF65-F5344CB8AC3E}">
-        <p14:creationId xmlns:p14="http://schemas.microsoft.com/office/powerpoint/2010/main" val="920694018"/>
+        <p14:creationId xmlns:p14="http://schemas.microsoft.com/office/powerpoint/2010/main" val="3945362088"/>
       </p:ext>
     </p:extLst>
   </p:cSld>
@@ -10762,7 +11823,7 @@
 </p:sld>
 </file>
 
-<file path=ppt/slides/slide3.xml><?xml version="1.0" encoding="utf-8"?>
+<file path=ppt/slides/slide4.xml><?xml version="1.0" encoding="utf-8"?>
 <p:sld xmlns:a="http://schemas.openxmlformats.org/drawingml/2006/main" xmlns:r="http://schemas.openxmlformats.org/officeDocument/2006/relationships" xmlns:p="http://schemas.openxmlformats.org/presentationml/2006/main">
   <p:cSld>
     <p:spTree>
@@ -10911,7 +11972,7 @@
 </p:sld>
 </file>
 
-<file path=ppt/slides/slide4.xml><?xml version="1.0" encoding="utf-8"?>
+<file path=ppt/slides/slide5.xml><?xml version="1.0" encoding="utf-8"?>
 <p:sld xmlns:a="http://schemas.openxmlformats.org/drawingml/2006/main" xmlns:r="http://schemas.openxmlformats.org/officeDocument/2006/relationships" xmlns:p="http://schemas.openxmlformats.org/presentationml/2006/main">
   <p:cSld>
     <p:spTree>
@@ -13524,7 +14585,7 @@
 </p:sld>
 </file>
 
-<file path=ppt/slides/slide5.xml><?xml version="1.0" encoding="utf-8"?>
+<file path=ppt/slides/slide6.xml><?xml version="1.0" encoding="utf-8"?>
 <p:sld xmlns:a="http://schemas.openxmlformats.org/drawingml/2006/main" xmlns:r="http://schemas.openxmlformats.org/officeDocument/2006/relationships" xmlns:p="http://schemas.openxmlformats.org/presentationml/2006/main">
   <p:cSld>
     <p:spTree>
@@ -14714,7 +15775,7 @@
 </p:sld>
 </file>
 
-<file path=ppt/slides/slide6.xml><?xml version="1.0" encoding="utf-8"?>
+<file path=ppt/slides/slide7.xml><?xml version="1.0" encoding="utf-8"?>
 <p:sld xmlns:a="http://schemas.openxmlformats.org/drawingml/2006/main" xmlns:r="http://schemas.openxmlformats.org/officeDocument/2006/relationships" xmlns:p="http://schemas.openxmlformats.org/presentationml/2006/main">
   <p:cSld>
     <p:spTree>
@@ -15885,7 +16946,7 @@
 </p:sld>
 </file>
 
-<file path=ppt/slides/slide7.xml><?xml version="1.0" encoding="utf-8"?>
+<file path=ppt/slides/slide8.xml><?xml version="1.0" encoding="utf-8"?>
 <p:sld xmlns:a="http://schemas.openxmlformats.org/drawingml/2006/main" xmlns:r="http://schemas.openxmlformats.org/officeDocument/2006/relationships" xmlns:p="http://schemas.openxmlformats.org/presentationml/2006/main">
   <p:cSld>
     <p:spTree>
@@ -17041,7 +18102,7 @@
 </p:sld>
 </file>
 
-<file path=ppt/slides/slide8.xml><?xml version="1.0" encoding="utf-8"?>
+<file path=ppt/slides/slide9.xml><?xml version="1.0" encoding="utf-8"?>
 <p:sld xmlns:a="http://schemas.openxmlformats.org/drawingml/2006/main" xmlns:r="http://schemas.openxmlformats.org/officeDocument/2006/relationships" xmlns:p="http://schemas.openxmlformats.org/presentationml/2006/main">
   <p:cSld>
     <p:spTree>
@@ -17875,707 +18936,6 @@
     <p:extLst>
       <p:ext uri="{BB962C8B-B14F-4D97-AF65-F5344CB8AC3E}">
         <p14:creationId xmlns:p14="http://schemas.microsoft.com/office/powerpoint/2010/main" val="1401826799"/>
-      </p:ext>
-    </p:extLst>
-  </p:cSld>
-  <p:clrMapOvr>
-    <a:masterClrMapping/>
-  </p:clrMapOvr>
-</p:sld>
-</file>
-
-<file path=ppt/slides/slide9.xml><?xml version="1.0" encoding="utf-8"?>
-<p:sld xmlns:a="http://schemas.openxmlformats.org/drawingml/2006/main" xmlns:r="http://schemas.openxmlformats.org/officeDocument/2006/relationships" xmlns:p="http://schemas.openxmlformats.org/presentationml/2006/main">
-  <p:cSld>
-    <p:spTree>
-      <p:nvGrpSpPr>
-        <p:cNvPr id="1" name=""/>
-        <p:cNvGrpSpPr/>
-        <p:nvPr/>
-      </p:nvGrpSpPr>
-      <p:grpSpPr>
-        <a:xfrm>
-          <a:off x="0" y="0"/>
-          <a:ext cx="0" cy="0"/>
-          <a:chOff x="0" y="0"/>
-          <a:chExt cx="0" cy="0"/>
-        </a:xfrm>
-      </p:grpSpPr>
-      <mc:AlternateContent xmlns:mc="http://schemas.openxmlformats.org/markup-compatibility/2006" xmlns:a14="http://schemas.microsoft.com/office/drawing/2010/main">
-        <mc:Choice Requires="a14">
-          <p:sp>
-            <p:nvSpPr>
-              <p:cNvPr id="2" name="Title 1">
-                <a:extLst>
-                  <a:ext uri="{FF2B5EF4-FFF2-40B4-BE49-F238E27FC236}">
-                    <a16:creationId xmlns:a16="http://schemas.microsoft.com/office/drawing/2014/main" id="{38385F1E-6465-1645-CA42-6BA88334F8C2}"/>
-                  </a:ext>
-                </a:extLst>
-              </p:cNvPr>
-              <p:cNvSpPr>
-                <a:spLocks noGrp="1"/>
-              </p:cNvSpPr>
-              <p:nvPr>
-                <p:ph type="title"/>
-              </p:nvPr>
-            </p:nvSpPr>
-            <p:spPr>
-              <a:xfrm>
-                <a:off x="838200" y="365126"/>
-                <a:ext cx="7099092" cy="759072"/>
-              </a:xfrm>
-            </p:spPr>
-            <p:txBody>
-              <a:bodyPr>
-                <a:normAutofit fontScale="90000"/>
-              </a:bodyPr>
-              <a:lstStyle/>
-              <a:p>
-                <a:r>
-                  <a:rPr lang="en-US" dirty="0"/>
-                  <a:t>The Forward View Issue with </a:t>
-                </a:r>
-                <a:br>
-                  <a:rPr lang="en-US" dirty="0"/>
-                </a:br>
-                <a:r>
-                  <a:rPr lang="en-US" dirty="0"/>
-                  <a:t>the Off-Line </a:t>
-                </a:r>
-                <a14:m>
-                  <m:oMath xmlns:m="http://schemas.openxmlformats.org/officeDocument/2006/math">
-                    <m:r>
-                      <a:rPr lang="en-US" i="1">
-                        <a:latin typeface="Cambria Math" panose="02040503050406030204" pitchFamily="18" charset="0"/>
-                      </a:rPr>
-                      <m:t>𝜆</m:t>
-                    </m:r>
-                  </m:oMath>
-                </a14:m>
-                <a:r>
-                  <a:rPr lang="en-US" dirty="0"/>
-                  <a:t>-Return Algorithm </a:t>
-                </a:r>
-              </a:p>
-            </p:txBody>
-          </p:sp>
-        </mc:Choice>
-        <mc:Fallback xmlns="">
-          <p:sp>
-            <p:nvSpPr>
-              <p:cNvPr id="2" name="Title 1">
-                <a:extLst>
-                  <a:ext uri="{FF2B5EF4-FFF2-40B4-BE49-F238E27FC236}">
-                    <a16:creationId xmlns:a16="http://schemas.microsoft.com/office/drawing/2014/main" id="{38385F1E-6465-1645-CA42-6BA88334F8C2}"/>
-                  </a:ext>
-                </a:extLst>
-              </p:cNvPr>
-              <p:cNvSpPr>
-                <a:spLocks noGrp="1" noRot="1" noChangeAspect="1" noMove="1" noResize="1" noEditPoints="1" noAdjustHandles="1" noChangeArrowheads="1" noChangeShapeType="1" noTextEdit="1"/>
-              </p:cNvSpPr>
-              <p:nvPr>
-                <p:ph type="title"/>
-              </p:nvPr>
-            </p:nvSpPr>
-            <p:spPr>
-              <a:xfrm>
-                <a:off x="838200" y="365126"/>
-                <a:ext cx="7099092" cy="759072"/>
-              </a:xfrm>
-              <a:blipFill>
-                <a:blip r:embed="rId2"/>
-                <a:stretch>
-                  <a:fillRect l="-3093" t="-50000" b="-64516"/>
-                </a:stretch>
-              </a:blipFill>
-            </p:spPr>
-            <p:txBody>
-              <a:bodyPr/>
-              <a:lstStyle/>
-              <a:p>
-                <a:r>
-                  <a:rPr lang="en-US">
-                    <a:noFill/>
-                  </a:rPr>
-                  <a:t> </a:t>
-                </a:r>
-              </a:p>
-            </p:txBody>
-          </p:sp>
-        </mc:Fallback>
-      </mc:AlternateContent>
-      <mc:AlternateContent xmlns:mc="http://schemas.openxmlformats.org/markup-compatibility/2006" xmlns:a14="http://schemas.microsoft.com/office/drawing/2010/main">
-        <mc:Choice Requires="a14">
-          <p:sp>
-            <p:nvSpPr>
-              <p:cNvPr id="3" name="Content Placeholder 2">
-                <a:extLst>
-                  <a:ext uri="{FF2B5EF4-FFF2-40B4-BE49-F238E27FC236}">
-                    <a16:creationId xmlns:a16="http://schemas.microsoft.com/office/drawing/2014/main" id="{060FE59A-5A07-2A07-3158-4CE63E7481B5}"/>
-                  </a:ext>
-                </a:extLst>
-              </p:cNvPr>
-              <p:cNvSpPr>
-                <a:spLocks noGrp="1"/>
-              </p:cNvSpPr>
-              <p:nvPr>
-                <p:ph idx="1"/>
-              </p:nvPr>
-            </p:nvSpPr>
-            <p:spPr>
-              <a:xfrm>
-                <a:off x="838200" y="1464786"/>
-                <a:ext cx="7201798" cy="1428316"/>
-              </a:xfrm>
-            </p:spPr>
-            <p:txBody>
-              <a:bodyPr>
-                <a:normAutofit fontScale="70000" lnSpcReduction="20000"/>
-              </a:bodyPr>
-              <a:lstStyle/>
-              <a:p>
-                <a:r>
-                  <a:rPr lang="en-US" dirty="0"/>
-                  <a:t>Uses the </a:t>
-                </a:r>
-                <a:r>
-                  <a:rPr lang="en-US" b="1" dirty="0"/>
-                  <a:t>“forward view.” </a:t>
-                </a:r>
-              </a:p>
-              <a:p>
-                <a:r>
-                  <a:rPr lang="en-US" dirty="0"/>
-                  <a:t>Updating </a:t>
-                </a:r>
-                <a14:m>
-                  <m:oMath xmlns:m="http://schemas.openxmlformats.org/officeDocument/2006/math">
-                    <m:sSub>
-                      <m:sSubPr>
-                        <m:ctrlPr>
-                          <a:rPr lang="en-US" b="0" i="1" smtClean="0">
-                            <a:latin typeface="Cambria Math" panose="02040503050406030204" pitchFamily="18" charset="0"/>
-                          </a:rPr>
-                        </m:ctrlPr>
-                      </m:sSubPr>
-                      <m:e>
-                        <m:r>
-                          <a:rPr lang="en-US" b="0" i="1" smtClean="0">
-                            <a:latin typeface="Cambria Math" panose="02040503050406030204" pitchFamily="18" charset="0"/>
-                          </a:rPr>
-                          <m:t>𝑆</m:t>
-                        </m:r>
-                      </m:e>
-                      <m:sub>
-                        <m:r>
-                          <a:rPr lang="en-US" b="0" i="1" smtClean="0">
-                            <a:latin typeface="Cambria Math" panose="02040503050406030204" pitchFamily="18" charset="0"/>
-                          </a:rPr>
-                          <m:t>𝑡</m:t>
-                        </m:r>
-                      </m:sub>
-                    </m:sSub>
-                  </m:oMath>
-                </a14:m>
-                <a:r>
-                  <a:rPr lang="en-US" dirty="0"/>
-                  <a:t> requires the calculation of </a:t>
-                </a:r>
-                <a14:m>
-                  <m:oMath xmlns:m="http://schemas.openxmlformats.org/officeDocument/2006/math">
-                    <m:sSubSup>
-                      <m:sSubSupPr>
-                        <m:ctrlPr>
-                          <a:rPr lang="en-US" i="1" smtClean="0">
-                            <a:latin typeface="Cambria Math" panose="02040503050406030204" pitchFamily="18" charset="0"/>
-                          </a:rPr>
-                        </m:ctrlPr>
-                      </m:sSubSupPr>
-                      <m:e>
-                        <m:r>
-                          <a:rPr lang="en-US" i="1">
-                            <a:latin typeface="Cambria Math" panose="02040503050406030204" pitchFamily="18" charset="0"/>
-                          </a:rPr>
-                          <m:t>𝐺</m:t>
-                        </m:r>
-                      </m:e>
-                      <m:sub>
-                        <m:r>
-                          <a:rPr lang="en-US" i="1">
-                            <a:latin typeface="Cambria Math" panose="02040503050406030204" pitchFamily="18" charset="0"/>
-                          </a:rPr>
-                          <m:t>𝑡</m:t>
-                        </m:r>
-                      </m:sub>
-                      <m:sup>
-                        <m:r>
-                          <a:rPr lang="en-US" i="1">
-                            <a:latin typeface="Cambria Math" panose="02040503050406030204" pitchFamily="18" charset="0"/>
-                          </a:rPr>
-                          <m:t>𝜆</m:t>
-                        </m:r>
-                      </m:sup>
-                    </m:sSubSup>
-                  </m:oMath>
-                </a14:m>
-                <a:r>
-                  <a:rPr lang="en-US" dirty="0"/>
-                  <a:t>, which requires all future rewards</a:t>
-                </a:r>
-              </a:p>
-              <a:p>
-                <a:r>
-                  <a:rPr lang="en-US" dirty="0"/>
-                  <a:t>The </a:t>
-                </a:r>
-                <a:r>
-                  <a:rPr lang="en-US" b="1" dirty="0"/>
-                  <a:t>update is delayed </a:t>
-                </a:r>
-                <a:r>
-                  <a:rPr lang="en-US" dirty="0"/>
-                  <a:t>till the whole episode is observed (like for MC).</a:t>
-                </a:r>
-              </a:p>
-              <a:p>
-                <a:endParaRPr lang="en-US" dirty="0"/>
-              </a:p>
-            </p:txBody>
-          </p:sp>
-        </mc:Choice>
-        <mc:Fallback xmlns="">
-          <p:sp>
-            <p:nvSpPr>
-              <p:cNvPr id="3" name="Content Placeholder 2">
-                <a:extLst>
-                  <a:ext uri="{FF2B5EF4-FFF2-40B4-BE49-F238E27FC236}">
-                    <a16:creationId xmlns:a16="http://schemas.microsoft.com/office/drawing/2014/main" id="{060FE59A-5A07-2A07-3158-4CE63E7481B5}"/>
-                  </a:ext>
-                </a:extLst>
-              </p:cNvPr>
-              <p:cNvSpPr>
-                <a:spLocks noGrp="1" noRot="1" noChangeAspect="1" noMove="1" noResize="1" noEditPoints="1" noAdjustHandles="1" noChangeArrowheads="1" noChangeShapeType="1" noTextEdit="1"/>
-              </p:cNvSpPr>
-              <p:nvPr>
-                <p:ph idx="1"/>
-              </p:nvPr>
-            </p:nvSpPr>
-            <p:spPr>
-              <a:xfrm>
-                <a:off x="838200" y="1464786"/>
-                <a:ext cx="7201798" cy="1428316"/>
-              </a:xfrm>
-              <a:blipFill>
-                <a:blip r:embed="rId3"/>
-                <a:stretch>
-                  <a:fillRect l="-762" t="-7234" r="-85" b="-8511"/>
-                </a:stretch>
-              </a:blipFill>
-            </p:spPr>
-            <p:txBody>
-              <a:bodyPr/>
-              <a:lstStyle/>
-              <a:p>
-                <a:r>
-                  <a:rPr lang="en-US">
-                    <a:noFill/>
-                  </a:rPr>
-                  <a:t> </a:t>
-                </a:r>
-              </a:p>
-            </p:txBody>
-          </p:sp>
-        </mc:Fallback>
-      </mc:AlternateContent>
-      <p:grpSp>
-        <p:nvGrpSpPr>
-          <p:cNvPr id="4" name="Group 3">
-            <a:extLst>
-              <a:ext uri="{FF2B5EF4-FFF2-40B4-BE49-F238E27FC236}">
-                <a16:creationId xmlns:a16="http://schemas.microsoft.com/office/drawing/2014/main" id="{14F066E0-14B9-ED12-6A95-7A9B8E5FEA05}"/>
-              </a:ext>
-            </a:extLst>
-          </p:cNvPr>
-          <p:cNvGrpSpPr/>
-          <p:nvPr/>
-        </p:nvGrpSpPr>
-        <p:grpSpPr>
-          <a:xfrm>
-            <a:off x="8098145" y="374690"/>
-            <a:ext cx="3892174" cy="4077325"/>
-            <a:chOff x="7318283" y="732971"/>
-            <a:chExt cx="4870635" cy="5144409"/>
-          </a:xfrm>
-        </p:grpSpPr>
-        <p:pic>
-          <p:nvPicPr>
-            <p:cNvPr id="5" name="Picture 4">
-              <a:extLst>
-                <a:ext uri="{FF2B5EF4-FFF2-40B4-BE49-F238E27FC236}">
-                  <a16:creationId xmlns:a16="http://schemas.microsoft.com/office/drawing/2014/main" id="{4FBF0173-A454-9854-1EB8-24853BE78A3E}"/>
-                </a:ext>
-              </a:extLst>
-            </p:cNvPr>
-            <p:cNvPicPr>
-              <a:picLocks noChangeAspect="1"/>
-            </p:cNvPicPr>
-            <p:nvPr/>
-          </p:nvPicPr>
-          <p:blipFill>
-            <a:blip r:embed="rId4"/>
-            <a:stretch>
-              <a:fillRect/>
-            </a:stretch>
-          </p:blipFill>
-          <p:spPr>
-            <a:xfrm>
-              <a:off x="7318283" y="1739618"/>
-              <a:ext cx="4870635" cy="4054445"/>
-            </a:xfrm>
-            <a:prstGeom prst="rect">
-              <a:avLst/>
-            </a:prstGeom>
-          </p:spPr>
-        </p:pic>
-        <mc:AlternateContent xmlns:mc="http://schemas.openxmlformats.org/markup-compatibility/2006" xmlns:a14="http://schemas.microsoft.com/office/drawing/2010/main">
-          <mc:Choice Requires="a14">
-            <p:sp>
-              <p:nvSpPr>
-                <p:cNvPr id="6" name="TextBox 5">
-                  <a:extLst>
-                    <a:ext uri="{FF2B5EF4-FFF2-40B4-BE49-F238E27FC236}">
-                      <a16:creationId xmlns:a16="http://schemas.microsoft.com/office/drawing/2014/main" id="{083FA437-6AA3-E563-8318-88ED17E056FB}"/>
-                    </a:ext>
-                  </a:extLst>
-                </p:cNvPr>
-                <p:cNvSpPr txBox="1"/>
-                <p:nvPr/>
-              </p:nvSpPr>
-              <p:spPr>
-                <a:xfrm>
-                  <a:off x="7721599" y="732971"/>
-                  <a:ext cx="4209143" cy="923330"/>
-                </a:xfrm>
-                <a:prstGeom prst="rect">
-                  <a:avLst/>
-                </a:prstGeom>
-                <a:noFill/>
-              </p:spPr>
-              <p:txBody>
-                <a:bodyPr wrap="square" rtlCol="0">
-                  <a:spAutoFit/>
-                </a:bodyPr>
-                <a:lstStyle/>
-                <a:p>
-                  <a:pPr algn="ctr"/>
-                  <a:r>
-                    <a:rPr lang="en-US" b="1" dirty="0"/>
-                    <a:t>Backup diagram </a:t>
-                  </a:r>
-                  <a:br>
-                    <a:rPr lang="en-US" b="1" dirty="0"/>
-                  </a:br>
-                  <a:r>
-                    <a:rPr lang="en-US" dirty="0"/>
-                    <a:t>Weighting of the components </a:t>
-                  </a:r>
-                  <a:br>
-                    <a:rPr lang="en-US" dirty="0"/>
-                  </a:br>
-                  <a:r>
-                    <a:rPr lang="en-US" dirty="0"/>
-                    <a:t>of the </a:t>
-                  </a:r>
-                  <a14:m>
-                    <m:oMath xmlns:m="http://schemas.openxmlformats.org/officeDocument/2006/math">
-                      <m:r>
-                        <a:rPr lang="en-US" b="0" i="1">
-                          <a:latin typeface="Cambria Math" panose="02040503050406030204" pitchFamily="18" charset="0"/>
-                        </a:rPr>
-                        <m:t>𝜆</m:t>
-                      </m:r>
-                    </m:oMath>
-                  </a14:m>
-                  <a:r>
-                    <a:rPr lang="en-US" dirty="0"/>
-                    <a:t>-return </a:t>
-                  </a:r>
-                </a:p>
-              </p:txBody>
-            </p:sp>
-          </mc:Choice>
-          <mc:Fallback xmlns="">
-            <p:sp>
-              <p:nvSpPr>
-                <p:cNvPr id="6" name="TextBox 5">
-                  <a:extLst>
-                    <a:ext uri="{FF2B5EF4-FFF2-40B4-BE49-F238E27FC236}">
-                      <a16:creationId xmlns:a16="http://schemas.microsoft.com/office/drawing/2014/main" id="{083FA437-6AA3-E563-8318-88ED17E056FB}"/>
-                    </a:ext>
-                  </a:extLst>
-                </p:cNvPr>
-                <p:cNvSpPr txBox="1">
-                  <a:spLocks noRot="1" noChangeAspect="1" noMove="1" noResize="1" noEditPoints="1" noAdjustHandles="1" noChangeArrowheads="1" noChangeShapeType="1" noTextEdit="1"/>
-                </p:cNvSpPr>
-                <p:nvPr/>
-              </p:nvSpPr>
-              <p:spPr>
-                <a:xfrm>
-                  <a:off x="7721599" y="732971"/>
-                  <a:ext cx="4209143" cy="923330"/>
-                </a:xfrm>
-                <a:prstGeom prst="rect">
-                  <a:avLst/>
-                </a:prstGeom>
-                <a:blipFill>
-                  <a:blip r:embed="rId5"/>
-                  <a:stretch>
-                    <a:fillRect t="-3306" b="-38017"/>
-                  </a:stretch>
-                </a:blipFill>
-              </p:spPr>
-              <p:txBody>
-                <a:bodyPr/>
-                <a:lstStyle/>
-                <a:p>
-                  <a:r>
-                    <a:rPr lang="en-US">
-                      <a:noFill/>
-                    </a:rPr>
-                    <a:t> </a:t>
-                  </a:r>
-                </a:p>
-              </p:txBody>
-            </p:sp>
-          </mc:Fallback>
-        </mc:AlternateContent>
-        <p:sp>
-          <p:nvSpPr>
-            <p:cNvPr id="7" name="Rectangle 6">
-              <a:extLst>
-                <a:ext uri="{FF2B5EF4-FFF2-40B4-BE49-F238E27FC236}">
-                  <a16:creationId xmlns:a16="http://schemas.microsoft.com/office/drawing/2014/main" id="{08FE606E-7390-123A-8006-FFCF34E5BBA2}"/>
-                </a:ext>
-              </a:extLst>
-            </p:cNvPr>
-            <p:cNvSpPr/>
-            <p:nvPr/>
-          </p:nvSpPr>
-          <p:spPr>
-            <a:xfrm>
-              <a:off x="7467600" y="732971"/>
-              <a:ext cx="4572000" cy="5144409"/>
-            </a:xfrm>
-            <a:prstGeom prst="rect">
-              <a:avLst/>
-            </a:prstGeom>
-            <a:noFill/>
-            <a:ln w="9525" cap="flat" cmpd="sng" algn="ctr">
-              <a:solidFill>
-                <a:schemeClr val="dk1"/>
-              </a:solidFill>
-              <a:prstDash val="solid"/>
-              <a:round/>
-              <a:headEnd type="none" w="med" len="med"/>
-              <a:tailEnd type="none" w="med" len="med"/>
-            </a:ln>
-          </p:spPr>
-          <p:style>
-            <a:lnRef idx="0">
-              <a:scrgbClr r="0" g="0" b="0"/>
-            </a:lnRef>
-            <a:fillRef idx="0">
-              <a:scrgbClr r="0" g="0" b="0"/>
-            </a:fillRef>
-            <a:effectRef idx="0">
-              <a:scrgbClr r="0" g="0" b="0"/>
-            </a:effectRef>
-            <a:fontRef idx="minor">
-              <a:schemeClr val="dk1"/>
-            </a:fontRef>
-          </p:style>
-          <p:txBody>
-            <a:bodyPr rtlCol="0" anchor="ctr"/>
-            <a:lstStyle/>
-            <a:p>
-              <a:pPr algn="ctr"/>
-              <a:endParaRPr lang="en-US"/>
-            </a:p>
-          </p:txBody>
-        </p:sp>
-      </p:grpSp>
-      <p:pic>
-        <p:nvPicPr>
-          <p:cNvPr id="9" name="Picture 8">
-            <a:extLst>
-              <a:ext uri="{FF2B5EF4-FFF2-40B4-BE49-F238E27FC236}">
-                <a16:creationId xmlns:a16="http://schemas.microsoft.com/office/drawing/2014/main" id="{AB6695FD-E75E-33FA-BCC4-B93D4EA61FD4}"/>
-              </a:ext>
-            </a:extLst>
-          </p:cNvPr>
-          <p:cNvPicPr>
-            <a:picLocks noChangeAspect="1"/>
-          </p:cNvPicPr>
-          <p:nvPr/>
-        </p:nvPicPr>
-        <p:blipFill>
-          <a:blip r:embed="rId6"/>
-          <a:stretch>
-            <a:fillRect/>
-          </a:stretch>
-        </p:blipFill>
-        <p:spPr>
-          <a:xfrm>
-            <a:off x="482272" y="3098780"/>
-            <a:ext cx="7339461" cy="2094693"/>
-          </a:xfrm>
-          <a:prstGeom prst="rect">
-            <a:avLst/>
-          </a:prstGeom>
-        </p:spPr>
-      </p:pic>
-      <mc:AlternateContent xmlns:mc="http://schemas.openxmlformats.org/markup-compatibility/2006" xmlns:a14="http://schemas.microsoft.com/office/drawing/2010/main">
-        <mc:Choice Requires="a14">
-          <p:sp>
-            <p:nvSpPr>
-              <p:cNvPr id="10" name="Speech Bubble: Rectangle with Corners Rounded 9">
-                <a:extLst>
-                  <a:ext uri="{FF2B5EF4-FFF2-40B4-BE49-F238E27FC236}">
-                    <a16:creationId xmlns:a16="http://schemas.microsoft.com/office/drawing/2014/main" id="{211F70B4-8AFD-C643-01D4-C8A539A11926}"/>
-                  </a:ext>
-                </a:extLst>
-              </p:cNvPr>
-              <p:cNvSpPr/>
-              <p:nvPr/>
-            </p:nvSpPr>
-            <p:spPr>
-              <a:xfrm>
-                <a:off x="5254052" y="5495935"/>
-                <a:ext cx="3065488" cy="626278"/>
-              </a:xfrm>
-              <a:prstGeom prst="wedgeRoundRectCallout">
-                <a:avLst>
-                  <a:gd name="adj1" fmla="val 15220"/>
-                  <a:gd name="adj2" fmla="val -353391"/>
-                  <a:gd name="adj3" fmla="val 16667"/>
-                </a:avLst>
-              </a:prstGeom>
-            </p:spPr>
-            <p:style>
-              <a:lnRef idx="2">
-                <a:schemeClr val="accent1">
-                  <a:shade val="15000"/>
-                </a:schemeClr>
-              </a:lnRef>
-              <a:fillRef idx="1">
-                <a:schemeClr val="accent1"/>
-              </a:fillRef>
-              <a:effectRef idx="0">
-                <a:schemeClr val="accent1"/>
-              </a:effectRef>
-              <a:fontRef idx="minor">
-                <a:schemeClr val="lt1"/>
-              </a:fontRef>
-            </p:style>
-            <p:txBody>
-              <a:bodyPr rtlCol="0" anchor="ctr"/>
-              <a:lstStyle/>
-              <a:p>
-                <a:pPr algn="ctr"/>
-                <a:r>
-                  <a:rPr lang="en-US" dirty="0"/>
-                  <a:t>Agent can only update the value for </a:t>
-                </a:r>
-                <a14:m>
-                  <m:oMath xmlns:m="http://schemas.openxmlformats.org/officeDocument/2006/math">
-                    <m:sSub>
-                      <m:sSubPr>
-                        <m:ctrlPr>
-                          <a:rPr lang="en-US" b="0" i="1" smtClean="0">
-                            <a:latin typeface="Cambria Math" panose="02040503050406030204" pitchFamily="18" charset="0"/>
-                          </a:rPr>
-                        </m:ctrlPr>
-                      </m:sSubPr>
-                      <m:e>
-                        <m:r>
-                          <a:rPr lang="en-US" b="0" i="1" smtClean="0">
-                            <a:latin typeface="Cambria Math" panose="02040503050406030204" pitchFamily="18" charset="0"/>
-                          </a:rPr>
-                          <m:t>𝑆</m:t>
-                        </m:r>
-                      </m:e>
-                      <m:sub>
-                        <m:r>
-                          <a:rPr lang="en-US" b="0" i="1" smtClean="0">
-                            <a:latin typeface="Cambria Math" panose="02040503050406030204" pitchFamily="18" charset="0"/>
-                          </a:rPr>
-                          <m:t>𝑡</m:t>
-                        </m:r>
-                      </m:sub>
-                    </m:sSub>
-                  </m:oMath>
-                </a14:m>
-                <a:r>
-                  <a:rPr lang="en-US" dirty="0"/>
-                  <a:t> when it is here!</a:t>
-                </a:r>
-              </a:p>
-            </p:txBody>
-          </p:sp>
-        </mc:Choice>
-        <mc:Fallback xmlns="">
-          <p:sp>
-            <p:nvSpPr>
-              <p:cNvPr id="10" name="Speech Bubble: Rectangle with Corners Rounded 9">
-                <a:extLst>
-                  <a:ext uri="{FF2B5EF4-FFF2-40B4-BE49-F238E27FC236}">
-                    <a16:creationId xmlns:a16="http://schemas.microsoft.com/office/drawing/2014/main" id="{211F70B4-8AFD-C643-01D4-C8A539A11926}"/>
-                  </a:ext>
-                </a:extLst>
-              </p:cNvPr>
-              <p:cNvSpPr>
-                <a:spLocks noRot="1" noChangeAspect="1" noMove="1" noResize="1" noEditPoints="1" noAdjustHandles="1" noChangeArrowheads="1" noChangeShapeType="1" noTextEdit="1"/>
-              </p:cNvSpPr>
-              <p:nvPr/>
-            </p:nvSpPr>
-            <p:spPr>
-              <a:xfrm>
-                <a:off x="5254052" y="5495935"/>
-                <a:ext cx="3065488" cy="626278"/>
-              </a:xfrm>
-              <a:prstGeom prst="wedgeRoundRectCallout">
-                <a:avLst>
-                  <a:gd name="adj1" fmla="val 15220"/>
-                  <a:gd name="adj2" fmla="val -353391"/>
-                  <a:gd name="adj3" fmla="val 16667"/>
-                </a:avLst>
-              </a:prstGeom>
-              <a:blipFill>
-                <a:blip r:embed="rId7"/>
-                <a:stretch>
-                  <a:fillRect b="-3800"/>
-                </a:stretch>
-              </a:blipFill>
-            </p:spPr>
-            <p:txBody>
-              <a:bodyPr/>
-              <a:lstStyle/>
-              <a:p>
-                <a:r>
-                  <a:rPr lang="en-US">
-                    <a:noFill/>
-                  </a:rPr>
-                  <a:t> </a:t>
-                </a:r>
-              </a:p>
-            </p:txBody>
-          </p:sp>
-        </mc:Fallback>
-      </mc:AlternateContent>
-    </p:spTree>
-    <p:extLst>
-      <p:ext uri="{BB962C8B-B14F-4D97-AF65-F5344CB8AC3E}">
-        <p14:creationId xmlns:p14="http://schemas.microsoft.com/office/powerpoint/2010/main" val="3998512222"/>
       </p:ext>
     </p:extLst>
   </p:cSld>

--- a/slides/Lecture_Chapter12.pptx
+++ b/slides/Lecture_Chapter12.pptx
@@ -131,6 +131,10 @@
             <p14:sldId id="256"/>
             <p14:sldId id="313"/>
             <p14:sldId id="478"/>
+          </p14:sldIdLst>
+        </p14:section>
+        <p14:section name="Introduction" id="{3FBBE9B2-8635-424D-824A-711EB3C57D43}">
+          <p14:sldIdLst>
             <p14:sldId id="393"/>
             <p14:sldId id="386"/>
             <p14:sldId id="396"/>
@@ -143,10 +147,18 @@
             <p14:sldId id="395"/>
             <p14:sldId id="400"/>
             <p14:sldId id="406"/>
+          </p14:sldIdLst>
+        </p14:section>
+        <p14:section name="Control" id="{D19960EB-A1C6-4D66-80F2-3E021135FEAC}">
+          <p14:sldIdLst>
             <p14:sldId id="404"/>
             <p14:sldId id="407"/>
             <p14:sldId id="410"/>
             <p14:sldId id="408"/>
+          </p14:sldIdLst>
+        </p14:section>
+        <p14:section name="Summary" id="{B4D006AA-B9D2-4811-B2E5-789BBF68F9DC}">
+          <p14:sldIdLst>
             <p14:sldId id="409"/>
           </p14:sldIdLst>
         </p14:section>
@@ -306,7 +318,7 @@
           <a:p>
             <a:fld id="{3E22BF2E-04DA-469E-97C5-BB68A0368813}" type="datetimeFigureOut">
               <a:rPr lang="en-US" smtClean="0"/>
-              <a:t>2/6/2026</a:t>
+              <a:t>3/27/2026</a:t>
             </a:fld>
             <a:endParaRPr lang="en-US"/>
           </a:p>
@@ -504,7 +516,7 @@
           <a:p>
             <a:fld id="{3E22BF2E-04DA-469E-97C5-BB68A0368813}" type="datetimeFigureOut">
               <a:rPr lang="en-US" smtClean="0"/>
-              <a:t>2/6/2026</a:t>
+              <a:t>3/27/2026</a:t>
             </a:fld>
             <a:endParaRPr lang="en-US"/>
           </a:p>
@@ -712,7 +724,7 @@
           <a:p>
             <a:fld id="{3E22BF2E-04DA-469E-97C5-BB68A0368813}" type="datetimeFigureOut">
               <a:rPr lang="en-US" smtClean="0"/>
-              <a:t>2/6/2026</a:t>
+              <a:t>3/27/2026</a:t>
             </a:fld>
             <a:endParaRPr lang="en-US"/>
           </a:p>
@@ -920,7 +932,7 @@
           <a:p>
             <a:fld id="{3E22BF2E-04DA-469E-97C5-BB68A0368813}" type="datetimeFigureOut">
               <a:rPr lang="en-US" smtClean="0"/>
-              <a:t>2/6/2026</a:t>
+              <a:t>3/27/2026</a:t>
             </a:fld>
             <a:endParaRPr lang="en-US"/>
           </a:p>
@@ -1195,7 +1207,7 @@
           <a:p>
             <a:fld id="{3E22BF2E-04DA-469E-97C5-BB68A0368813}" type="datetimeFigureOut">
               <a:rPr lang="en-US" smtClean="0"/>
-              <a:t>2/6/2026</a:t>
+              <a:t>3/27/2026</a:t>
             </a:fld>
             <a:endParaRPr lang="en-US"/>
           </a:p>
@@ -1460,7 +1472,7 @@
           <a:p>
             <a:fld id="{3E22BF2E-04DA-469E-97C5-BB68A0368813}" type="datetimeFigureOut">
               <a:rPr lang="en-US" smtClean="0"/>
-              <a:t>2/6/2026</a:t>
+              <a:t>3/27/2026</a:t>
             </a:fld>
             <a:endParaRPr lang="en-US"/>
           </a:p>
@@ -1872,7 +1884,7 @@
           <a:p>
             <a:fld id="{3E22BF2E-04DA-469E-97C5-BB68A0368813}" type="datetimeFigureOut">
               <a:rPr lang="en-US" smtClean="0"/>
-              <a:t>2/6/2026</a:t>
+              <a:t>3/27/2026</a:t>
             </a:fld>
             <a:endParaRPr lang="en-US"/>
           </a:p>
@@ -2013,7 +2025,7 @@
           <a:p>
             <a:fld id="{3E22BF2E-04DA-469E-97C5-BB68A0368813}" type="datetimeFigureOut">
               <a:rPr lang="en-US" smtClean="0"/>
-              <a:t>2/6/2026</a:t>
+              <a:t>3/27/2026</a:t>
             </a:fld>
             <a:endParaRPr lang="en-US"/>
           </a:p>
@@ -2126,7 +2138,7 @@
           <a:p>
             <a:fld id="{3E22BF2E-04DA-469E-97C5-BB68A0368813}" type="datetimeFigureOut">
               <a:rPr lang="en-US" smtClean="0"/>
-              <a:t>2/6/2026</a:t>
+              <a:t>3/27/2026</a:t>
             </a:fld>
             <a:endParaRPr lang="en-US"/>
           </a:p>
@@ -2437,7 +2449,7 @@
           <a:p>
             <a:fld id="{3E22BF2E-04DA-469E-97C5-BB68A0368813}" type="datetimeFigureOut">
               <a:rPr lang="en-US" smtClean="0"/>
-              <a:t>2/6/2026</a:t>
+              <a:t>3/27/2026</a:t>
             </a:fld>
             <a:endParaRPr lang="en-US"/>
           </a:p>
@@ -2725,7 +2737,7 @@
           <a:p>
             <a:fld id="{3E22BF2E-04DA-469E-97C5-BB68A0368813}" type="datetimeFigureOut">
               <a:rPr lang="en-US" smtClean="0"/>
-              <a:t>2/6/2026</a:t>
+              <a:t>3/27/2026</a:t>
             </a:fld>
             <a:endParaRPr lang="en-US"/>
           </a:p>
@@ -2966,7 +2978,7 @@
           <a:p>
             <a:fld id="{3E22BF2E-04DA-469E-97C5-BB68A0368813}" type="datetimeFigureOut">
               <a:rPr lang="en-US" smtClean="0"/>
-              <a:t>2/6/2026</a:t>
+              <a:t>3/27/2026</a:t>
             </a:fld>
             <a:endParaRPr lang="en-US"/>
           </a:p>
@@ -5392,8 +5404,8 @@
           </a:p>
         </p:txBody>
       </p:sp>
-      <mc:AlternateContent xmlns:mc="http://schemas.openxmlformats.org/markup-compatibility/2006" xmlns:a14="http://schemas.microsoft.com/office/drawing/2010/main">
-        <mc:Choice Requires="a14">
+      <mc:AlternateContent xmlns:mc="http://schemas.openxmlformats.org/markup-compatibility/2006">
+        <mc:Choice xmlns:a14="http://schemas.microsoft.com/office/drawing/2010/main" Requires="a14">
           <p:sp>
             <p:nvSpPr>
               <p:cNvPr id="3" name="Content Placeholder 2">
@@ -5418,7 +5430,7 @@
             </p:spPr>
             <p:txBody>
               <a:bodyPr>
-                <a:normAutofit fontScale="77500" lnSpcReduction="20000"/>
+                <a:normAutofit fontScale="62500" lnSpcReduction="20000"/>
               </a:bodyPr>
               <a:lstStyle/>
               <a:p>
@@ -5426,6 +5438,9 @@
                   <a:rPr lang="en-US" dirty="0"/>
                   <a:t>The approximation weights </a:t>
                 </a:r>
+                <a:br>
+                  <a:rPr lang="en-US" dirty="0"/>
+                </a:br>
                 <a:br>
                   <a:rPr lang="en-US" dirty="0"/>
                 </a:br>
@@ -5497,9 +5512,14 @@
                     <a:ea typeface="Cambria Math" panose="02040503050406030204" pitchFamily="18" charset="0"/>
                   </a:rPr>
                 </a:br>
+                <a:br>
+                  <a:rPr lang="en-US" dirty="0">
+                    <a:ea typeface="Cambria Math" panose="02040503050406030204" pitchFamily="18" charset="0"/>
+                  </a:rPr>
+                </a:br>
                 <a:r>
                   <a:rPr lang="en-US" dirty="0"/>
-                  <a:t>represent what we have learned about the value function so far = long-term memory</a:t>
+                  <a:t>represent what we have learned about the value function so far = long-term memory.</a:t>
                 </a:r>
               </a:p>
               <a:p>
@@ -5507,17 +5527,16 @@
               </a:p>
               <a:p>
                 <a:r>
+                  <a:rPr lang="en-US" b="1" dirty="0"/>
+                  <a:t>Eligibility trace:</a:t>
+                </a:r>
+                <a:r>
                   <a:rPr lang="en-US" dirty="0"/>
-                  <a:t>An </a:t>
-                </a:r>
-                <a:r>
-                  <a:rPr lang="en-US" b="1" dirty="0"/>
-                  <a:t>eligibility trace </a:t>
-                </a:r>
-                <a:r>
+                  <a:t> a vector </a:t>
+                </a:r>
+                <a:br>
                   <a:rPr lang="en-US" dirty="0"/>
-                  <a:t>is a vector </a:t>
-                </a:r>
+                </a:br>
                 <a:br>
                   <a:rPr lang="en-US" dirty="0"/>
                 </a:br>
@@ -5587,12 +5606,19 @@
                 <a:br>
                   <a:rPr lang="en-US" b="1" dirty="0"/>
                 </a:br>
+                <a:br>
+                  <a:rPr lang="en-US" b="1" dirty="0"/>
+                </a:br>
                 <a:endParaRPr lang="en-US" b="1" dirty="0"/>
               </a:p>
               <a:p>
                 <a:r>
+                  <a:rPr lang="en-US" b="1" dirty="0"/>
+                  <a:t>Update</a:t>
+                </a:r>
+                <a:r>
                   <a:rPr lang="en-US" dirty="0"/>
-                  <a:t>Update: </a:t>
+                  <a:t>: </a:t>
                 </a:r>
                 <a14:m>
                   <m:oMath xmlns:m="http://schemas.openxmlformats.org/officeDocument/2006/math">
@@ -5938,7 +5964,7 @@
             </p:txBody>
           </p:sp>
         </mc:Choice>
-        <mc:Fallback xmlns="">
+        <mc:Fallback>
           <p:sp>
             <p:nvSpPr>
               <p:cNvPr id="3" name="Content Placeholder 2">
@@ -5963,7 +5989,7 @@
               <a:blipFill>
                 <a:blip r:embed="rId2"/>
                 <a:stretch>
-                  <a:fillRect l="-1205" t="-2478" r="-1643"/>
+                  <a:fillRect l="-657" t="-1859" r="-876"/>
                 </a:stretch>
               </a:blipFill>
             </p:spPr>
@@ -7232,14 +7258,15 @@
         </p:nvPicPr>
         <p:blipFill>
           <a:blip r:embed="rId4"/>
+          <a:srcRect l="1778" t="1084"/>
           <a:stretch>
             <a:fillRect/>
           </a:stretch>
         </p:blipFill>
         <p:spPr>
           <a:xfrm>
-            <a:off x="4538882" y="652980"/>
-            <a:ext cx="7289595" cy="5931888"/>
+            <a:off x="4668473" y="717259"/>
+            <a:ext cx="7160004" cy="5867608"/>
           </a:xfrm>
           <a:prstGeom prst="rect">
             <a:avLst/>
@@ -7501,7 +7528,7 @@
         </p:nvSpPr>
         <p:spPr>
           <a:xfrm>
-            <a:off x="4377128" y="3080479"/>
+            <a:off x="4318405" y="3084226"/>
             <a:ext cx="584616" cy="846944"/>
           </a:xfrm>
           <a:prstGeom prst="rightArrow">
@@ -8446,6 +8473,14 @@
 <file path=ppt/slides/slide20.xml><?xml version="1.0" encoding="utf-8"?>
 <p:sld xmlns:a="http://schemas.openxmlformats.org/drawingml/2006/main" xmlns:r="http://schemas.openxmlformats.org/officeDocument/2006/relationships" xmlns:p="http://schemas.openxmlformats.org/presentationml/2006/main">
   <p:cSld>
+    <p:bg>
+      <p:bgPr>
+        <a:solidFill>
+          <a:schemeClr val="bg1"/>
+        </a:solidFill>
+        <a:effectLst/>
+      </p:bgPr>
+    </p:bg>
     <p:spTree>
       <p:nvGrpSpPr>
         <p:cNvPr id="1" name=""/>
@@ -8476,18 +8511,104 @@
             <p:ph type="title"/>
           </p:nvPr>
         </p:nvSpPr>
-        <p:spPr/>
+        <p:spPr>
+          <a:xfrm>
+            <a:off x="6417733" y="490537"/>
+            <a:ext cx="5291663" cy="1628775"/>
+          </a:xfrm>
+        </p:spPr>
         <p:txBody>
-          <a:bodyPr/>
+          <a:bodyPr anchor="b">
+            <a:normAutofit/>
+          </a:bodyPr>
           <a:lstStyle/>
           <a:p>
             <a:r>
-              <a:rPr lang="en-US" dirty="0"/>
-              <a:t>Conclusion</a:t>
+              <a:rPr lang="en-US" sz="4000"/>
+              <a:t>What You Should Know</a:t>
             </a:r>
           </a:p>
         </p:txBody>
       </p:sp>
+      <p:pic>
+        <p:nvPicPr>
+          <p:cNvPr id="6" name="Picture 5">
+            <a:extLst>
+              <a:ext uri="{FF2B5EF4-FFF2-40B4-BE49-F238E27FC236}">
+                <a16:creationId xmlns:a16="http://schemas.microsoft.com/office/drawing/2014/main" id="{0C226E4D-B2A2-5FFB-DA0C-C2A326D53CCC}"/>
+              </a:ext>
+              <a:ext uri="{C183D7F6-B498-43B3-948B-1728B52AA6E4}">
+                <adec:decorative xmlns:adec="http://schemas.microsoft.com/office/drawing/2017/decorative" val="1"/>
+              </a:ext>
+            </a:extLst>
+          </p:cNvPr>
+          <p:cNvPicPr>
+            <a:picLocks noChangeAspect="1" noChangeArrowheads="1"/>
+          </p:cNvPicPr>
+          <p:nvPr/>
+        </p:nvPicPr>
+        <p:blipFill rotWithShape="1">
+          <a:blip r:embed="rId2">
+            <a:extLst>
+              <a:ext uri="{28A0092B-C50C-407E-A947-70E740481C1C}">
+                <a14:useLocalDpi xmlns:a14="http://schemas.microsoft.com/office/drawing/2010/main" val="0"/>
+              </a:ext>
+            </a:extLst>
+          </a:blip>
+          <a:srcRect l="17252" r="23400" b="-2"/>
+          <a:stretch>
+            <a:fillRect/>
+          </a:stretch>
+        </p:blipFill>
+        <p:spPr bwMode="auto">
+          <a:xfrm>
+            <a:off x="2" y="1587"/>
+            <a:ext cx="6095999" cy="6856413"/>
+          </a:xfrm>
+          <a:custGeom>
+            <a:avLst/>
+            <a:gdLst/>
+            <a:ahLst/>
+            <a:cxnLst/>
+            <a:rect l="l" t="t" r="r" b="b"/>
+            <a:pathLst>
+              <a:path w="6649908" h="6856413">
+                <a:moveTo>
+                  <a:pt x="0" y="0"/>
+                </a:moveTo>
+                <a:lnTo>
+                  <a:pt x="6559859" y="0"/>
+                </a:lnTo>
+                <a:lnTo>
+                  <a:pt x="6572145" y="79394"/>
+                </a:lnTo>
+                <a:cubicBezTo>
+                  <a:pt x="6857782" y="2230562"/>
+                  <a:pt x="6243159" y="4473353"/>
+                  <a:pt x="6528796" y="6624522"/>
+                </a:cubicBezTo>
+                <a:lnTo>
+                  <a:pt x="6564680" y="6856413"/>
+                </a:lnTo>
+                <a:lnTo>
+                  <a:pt x="0" y="6856413"/>
+                </a:lnTo>
+                <a:close/>
+              </a:path>
+            </a:pathLst>
+          </a:custGeom>
+          <a:noFill/>
+          <a:extLst>
+            <a:ext uri="{909E8E84-426E-40DD-AFC4-6F175D3DCCD1}">
+              <a14:hiddenFill xmlns:a14="http://schemas.microsoft.com/office/drawing/2010/main">
+                <a:solidFill>
+                  <a:srgbClr val="FFFFFF"/>
+                </a:solidFill>
+              </a14:hiddenFill>
+            </a:ext>
+          </a:extLst>
+        </p:spPr>
+      </p:pic>
       <mc:AlternateContent xmlns:mc="http://schemas.openxmlformats.org/markup-compatibility/2006" xmlns:a14="http://schemas.microsoft.com/office/drawing/2010/main">
         <mc:Choice Requires="a14">
           <p:sp>
@@ -8506,7 +8627,12 @@
                 <p:ph idx="1"/>
               </p:nvPr>
             </p:nvSpPr>
-            <p:spPr/>
+            <p:spPr>
+              <a:xfrm>
+                <a:off x="6417734" y="2614612"/>
+                <a:ext cx="5291663" cy="3752849"/>
+              </a:xfrm>
+            </p:spPr>
             <p:txBody>
               <a:bodyPr>
                 <a:normAutofit/>
@@ -8514,81 +8640,139 @@
               <a:lstStyle/>
               <a:p>
                 <a:r>
-                  <a:rPr lang="en-US" dirty="0"/>
-                  <a:t>Let’s us incrementally move between MC and one-step TD.</a:t>
+                  <a:rPr lang="en-US" sz="1700" dirty="0"/>
+                  <a:t>Eligibility traces </a:t>
+                </a:r>
+                <a:r>
+                  <a:rPr lang="en-US" sz="1700" b="1" dirty="0"/>
+                  <a:t>generalize </a:t>
+                </a:r>
+                <a14:m>
+                  <m:oMath xmlns:m="http://schemas.openxmlformats.org/officeDocument/2006/math">
+                    <m:r>
+                      <a:rPr lang="en-US" sz="1700" b="1" i="1" dirty="0" smtClean="0">
+                        <a:latin typeface="Cambria Math" panose="02040503050406030204" pitchFamily="18" charset="0"/>
+                      </a:rPr>
+                      <m:t>𝒏</m:t>
+                    </m:r>
+                  </m:oMath>
+                </a14:m>
+                <a:r>
+                  <a:rPr lang="en-US" sz="1700" b="1" dirty="0"/>
+                  <a:t>-step methods</a:t>
+                </a:r>
+                <a:r>
+                  <a:rPr lang="en-US" sz="1700" dirty="0"/>
+                  <a:t>: Move between MC and one-step TD.</a:t>
                 </a:r>
               </a:p>
               <a:p>
                 <a:r>
-                  <a:rPr lang="en-US" dirty="0"/>
-                  <a:t>Eligibility traces are very general, often learn faster, and are computationally efficient. </a:t>
+                  <a:rPr lang="en-US" sz="1700" dirty="0"/>
+                  <a:t>Eligibility traces are very general, often learn faster, and are </a:t>
+                </a:r>
+                <a:r>
+                  <a:rPr lang="en-US" sz="1700" b="1" dirty="0"/>
+                  <a:t>computationally efficient. </a:t>
                 </a:r>
               </a:p>
               <a:p>
                 <a:r>
-                  <a:rPr lang="en-US" dirty="0"/>
+                  <a:rPr lang="en-US" sz="1700" dirty="0"/>
                   <a:t>Since eligibility traces can move close to MC behavior, they should be used if </a:t>
                 </a:r>
               </a:p>
               <a:p>
                 <a:pPr lvl="1"/>
                 <a:r>
-                  <a:rPr lang="en-US" dirty="0"/>
-                  <a:t>the problem is suspected to be partially non-Markov or </a:t>
+                  <a:rPr lang="en-US" sz="1700" dirty="0"/>
+                  <a:t>the problem is suspected to be </a:t>
+                </a:r>
+                <a:r>
+                  <a:rPr lang="en-US" sz="1700" b="1" dirty="0"/>
+                  <a:t>partially non-Markov </a:t>
+                </a:r>
+                <a:r>
+                  <a:rPr lang="en-US" sz="1700" dirty="0"/>
+                  <a:t>or </a:t>
                 </a:r>
               </a:p>
               <a:p>
                 <a:pPr lvl="1"/>
                 <a:r>
-                  <a:rPr lang="en-US" dirty="0"/>
-                  <a:t>the rewards are very delayed.</a:t>
+                  <a:rPr lang="en-US" sz="1700" dirty="0"/>
+                  <a:t>the </a:t>
+                </a:r>
+                <a:r>
+                  <a:rPr lang="en-US" sz="1700" b="1" dirty="0"/>
+                  <a:t>rewards</a:t>
+                </a:r>
+                <a:r>
+                  <a:rPr lang="en-US" sz="1700" dirty="0"/>
+                  <a:t> are very </a:t>
+                </a:r>
+                <a:r>
+                  <a:rPr lang="en-US" sz="1700" b="1" dirty="0"/>
+                  <a:t>delayed</a:t>
+                </a:r>
+                <a:r>
+                  <a:rPr lang="en-US" sz="1700" dirty="0"/>
+                  <a:t>.</a:t>
                 </a:r>
               </a:p>
               <a:p>
                 <a:pPr lvl="1"/>
-                <a:endParaRPr lang="en-US" dirty="0"/>
+                <a:endParaRPr lang="en-US" sz="1700" dirty="0"/>
               </a:p>
               <a:p>
                 <a:r>
-                  <a:rPr lang="en-US" dirty="0"/>
-                  <a:t>Eligibility traces can also be used to extend </a:t>
+                  <a:rPr lang="en-US" sz="1700" dirty="0"/>
+                  <a:t>Eligibility traces </a:t>
+                </a:r>
+                <a:r>
+                  <a:rPr lang="en-US" sz="1700" b="1" dirty="0"/>
+                  <a:t>can also be used to extend </a:t>
                 </a:r>
                 <a14:m>
                   <m:oMath xmlns:m="http://schemas.openxmlformats.org/officeDocument/2006/math">
                     <m:r>
-                      <a:rPr lang="en-US" i="1" dirty="0" smtClean="0">
-                        <a:latin typeface="Cambria Math" panose="02040503050406030204" pitchFamily="18" charset="0"/>
-                      </a:rPr>
-                      <m:t>𝑄</m:t>
+                      <a:rPr lang="en-US" sz="1700" b="1" i="1">
+                        <a:latin typeface="Cambria Math" panose="02040503050406030204" pitchFamily="18" charset="0"/>
+                      </a:rPr>
+                      <m:t>𝑸</m:t>
                     </m:r>
                   </m:oMath>
                 </a14:m>
                 <a:r>
-                  <a:rPr lang="en-US" dirty="0"/>
-                  <a:t>-learning. This leads to algorithms like Watkins’s </a:t>
+                  <a:rPr lang="en-US" sz="1700" b="1" dirty="0"/>
+                  <a:t>-learning</a:t>
+                </a:r>
+                <a:r>
+                  <a:rPr lang="en-US" sz="1700" dirty="0"/>
+                  <a:t>. This leads to algorithms like Watkins’s </a:t>
                 </a:r>
                 <a14:m>
                   <m:oMath xmlns:m="http://schemas.openxmlformats.org/officeDocument/2006/math">
                     <m:r>
-                      <a:rPr lang="en-US" i="1" dirty="0" smtClean="0">
+                      <a:rPr lang="en-US" sz="1700" i="1">
                         <a:latin typeface="Cambria Math" panose="02040503050406030204" pitchFamily="18" charset="0"/>
                       </a:rPr>
                       <m:t>𝑄</m:t>
                     </m:r>
                     <m:r>
-                      <a:rPr lang="en-US" i="1" dirty="0" smtClean="0">
+                      <a:rPr lang="en-US" sz="1700" i="1">
                         <a:latin typeface="Cambria Math" panose="02040503050406030204" pitchFamily="18" charset="0"/>
                       </a:rPr>
                       <m:t>(</m:t>
                     </m:r>
                     <m:r>
-                      <a:rPr lang="en-US" b="0" i="1" dirty="0" smtClean="0">
+                      <a:rPr lang="en-US" sz="1700" b="0" i="1">
                         <a:latin typeface="Cambria Math" panose="02040503050406030204" pitchFamily="18" charset="0"/>
                       </a:rPr>
                       <m:t>𝜆</m:t>
                     </m:r>
                     <m:r>
-                      <a:rPr lang="en-US" i="1" dirty="0" smtClean="0">
+                      <a:rPr lang="en-US" sz="1700" i="1">
                         <a:latin typeface="Cambria Math" panose="02040503050406030204" pitchFamily="18" charset="0"/>
                       </a:rPr>
                       <m:t>)</m:t>
@@ -8596,32 +8780,35 @@
                   </m:oMath>
                 </a14:m>
                 <a:r>
-                  <a:rPr lang="en-US" dirty="0"/>
+                  <a:rPr lang="en-US" sz="1700" dirty="0"/>
                   <a:t> and Tree-Backup</a:t>
                 </a:r>
                 <a14:m>
                   <m:oMath xmlns:m="http://schemas.openxmlformats.org/officeDocument/2006/math">
                     <m:r>
-                      <a:rPr lang="en-US" i="1" dirty="0" smtClean="0">
+                      <a:rPr lang="en-US" sz="1700" i="1">
                         <a:latin typeface="Cambria Math" panose="02040503050406030204" pitchFamily="18" charset="0"/>
                       </a:rPr>
                       <m:t>(</m:t>
                     </m:r>
                     <m:r>
-                      <a:rPr lang="en-US" b="0" i="1" smtClean="0">
+                      <a:rPr lang="en-US" sz="1700" b="0" i="1">
                         <a:latin typeface="Cambria Math" panose="02040503050406030204" pitchFamily="18" charset="0"/>
                       </a:rPr>
                       <m:t>𝜆</m:t>
                     </m:r>
                     <m:r>
-                      <a:rPr lang="en-US" i="1" dirty="0" smtClean="0">
+                      <a:rPr lang="en-US" sz="1700" i="1">
                         <a:latin typeface="Cambria Math" panose="02040503050406030204" pitchFamily="18" charset="0"/>
                       </a:rPr>
                       <m:t>)</m:t>
                     </m:r>
                   </m:oMath>
                 </a14:m>
-                <a:endParaRPr lang="en-US" dirty="0"/>
+                <a:r>
+                  <a:rPr lang="en-US" sz="1700" dirty="0"/>
+                  <a:t>.</a:t>
+                </a:r>
               </a:p>
             </p:txBody>
           </p:sp>
@@ -8644,10 +8831,14 @@
               </p:nvPr>
             </p:nvSpPr>
             <p:spPr>
+              <a:xfrm>
+                <a:off x="6417734" y="2614612"/>
+                <a:ext cx="5291663" cy="3752849"/>
+              </a:xfrm>
               <a:blipFill>
-                <a:blip r:embed="rId2"/>
+                <a:blip r:embed="rId3"/>
                 <a:stretch>
-                  <a:fillRect l="-1043" t="-2168" r="-1855"/>
+                  <a:fillRect l="-576" t="-1136" b="-649"/>
                 </a:stretch>
               </a:blipFill>
             </p:spPr>

--- a/slides/Lecture_Chapter12.pptx
+++ b/slides/Lecture_Chapter12.pptx
@@ -318,7 +318,7 @@
           <a:p>
             <a:fld id="{3E22BF2E-04DA-469E-97C5-BB68A0368813}" type="datetimeFigureOut">
               <a:rPr lang="en-US" smtClean="0"/>
-              <a:t>3/27/2026</a:t>
+              <a:t>3/30/2026</a:t>
             </a:fld>
             <a:endParaRPr lang="en-US"/>
           </a:p>
@@ -516,7 +516,7 @@
           <a:p>
             <a:fld id="{3E22BF2E-04DA-469E-97C5-BB68A0368813}" type="datetimeFigureOut">
               <a:rPr lang="en-US" smtClean="0"/>
-              <a:t>3/27/2026</a:t>
+              <a:t>3/30/2026</a:t>
             </a:fld>
             <a:endParaRPr lang="en-US"/>
           </a:p>
@@ -724,7 +724,7 @@
           <a:p>
             <a:fld id="{3E22BF2E-04DA-469E-97C5-BB68A0368813}" type="datetimeFigureOut">
               <a:rPr lang="en-US" smtClean="0"/>
-              <a:t>3/27/2026</a:t>
+              <a:t>3/30/2026</a:t>
             </a:fld>
             <a:endParaRPr lang="en-US"/>
           </a:p>
@@ -932,7 +932,7 @@
           <a:p>
             <a:fld id="{3E22BF2E-04DA-469E-97C5-BB68A0368813}" type="datetimeFigureOut">
               <a:rPr lang="en-US" smtClean="0"/>
-              <a:t>3/27/2026</a:t>
+              <a:t>3/30/2026</a:t>
             </a:fld>
             <a:endParaRPr lang="en-US"/>
           </a:p>
@@ -1207,7 +1207,7 @@
           <a:p>
             <a:fld id="{3E22BF2E-04DA-469E-97C5-BB68A0368813}" type="datetimeFigureOut">
               <a:rPr lang="en-US" smtClean="0"/>
-              <a:t>3/27/2026</a:t>
+              <a:t>3/30/2026</a:t>
             </a:fld>
             <a:endParaRPr lang="en-US"/>
           </a:p>
@@ -1472,7 +1472,7 @@
           <a:p>
             <a:fld id="{3E22BF2E-04DA-469E-97C5-BB68A0368813}" type="datetimeFigureOut">
               <a:rPr lang="en-US" smtClean="0"/>
-              <a:t>3/27/2026</a:t>
+              <a:t>3/30/2026</a:t>
             </a:fld>
             <a:endParaRPr lang="en-US"/>
           </a:p>
@@ -1884,7 +1884,7 @@
           <a:p>
             <a:fld id="{3E22BF2E-04DA-469E-97C5-BB68A0368813}" type="datetimeFigureOut">
               <a:rPr lang="en-US" smtClean="0"/>
-              <a:t>3/27/2026</a:t>
+              <a:t>3/30/2026</a:t>
             </a:fld>
             <a:endParaRPr lang="en-US"/>
           </a:p>
@@ -2025,7 +2025,7 @@
           <a:p>
             <a:fld id="{3E22BF2E-04DA-469E-97C5-BB68A0368813}" type="datetimeFigureOut">
               <a:rPr lang="en-US" smtClean="0"/>
-              <a:t>3/27/2026</a:t>
+              <a:t>3/30/2026</a:t>
             </a:fld>
             <a:endParaRPr lang="en-US"/>
           </a:p>
@@ -2138,7 +2138,7 @@
           <a:p>
             <a:fld id="{3E22BF2E-04DA-469E-97C5-BB68A0368813}" type="datetimeFigureOut">
               <a:rPr lang="en-US" smtClean="0"/>
-              <a:t>3/27/2026</a:t>
+              <a:t>3/30/2026</a:t>
             </a:fld>
             <a:endParaRPr lang="en-US"/>
           </a:p>
@@ -2449,7 +2449,7 @@
           <a:p>
             <a:fld id="{3E22BF2E-04DA-469E-97C5-BB68A0368813}" type="datetimeFigureOut">
               <a:rPr lang="en-US" smtClean="0"/>
-              <a:t>3/27/2026</a:t>
+              <a:t>3/30/2026</a:t>
             </a:fld>
             <a:endParaRPr lang="en-US"/>
           </a:p>
@@ -2737,7 +2737,7 @@
           <a:p>
             <a:fld id="{3E22BF2E-04DA-469E-97C5-BB68A0368813}" type="datetimeFigureOut">
               <a:rPr lang="en-US" smtClean="0"/>
-              <a:t>3/27/2026</a:t>
+              <a:t>3/30/2026</a:t>
             </a:fld>
             <a:endParaRPr lang="en-US"/>
           </a:p>
@@ -2978,7 +2978,7 @@
           <a:p>
             <a:fld id="{3E22BF2E-04DA-469E-97C5-BB68A0368813}" type="datetimeFigureOut">
               <a:rPr lang="en-US" smtClean="0"/>
-              <a:t>3/27/2026</a:t>
+              <a:t>3/30/2026</a:t>
             </a:fld>
             <a:endParaRPr lang="en-US"/>
           </a:p>
@@ -4002,6 +4002,87 @@
           </a:extLst>
         </p:spPr>
       </p:pic>
+      <p:grpSp>
+        <p:nvGrpSpPr>
+          <p:cNvPr id="7" name="Group 6">
+            <a:extLst>
+              <a:ext uri="{FF2B5EF4-FFF2-40B4-BE49-F238E27FC236}">
+                <a16:creationId xmlns:a16="http://schemas.microsoft.com/office/drawing/2014/main" id="{5D896AA8-AD22-FC37-BA81-9F43B070213A}"/>
+              </a:ext>
+            </a:extLst>
+          </p:cNvPr>
+          <p:cNvGrpSpPr/>
+          <p:nvPr/>
+        </p:nvGrpSpPr>
+        <p:grpSpPr>
+          <a:xfrm>
+            <a:off x="10961015" y="4868822"/>
+            <a:ext cx="1037459" cy="1303078"/>
+            <a:chOff x="5248582" y="2401735"/>
+            <a:chExt cx="1694835" cy="2054530"/>
+          </a:xfrm>
+        </p:grpSpPr>
+        <p:pic>
+          <p:nvPicPr>
+            <p:cNvPr id="8" name="Picture 7">
+              <a:extLst>
+                <a:ext uri="{FF2B5EF4-FFF2-40B4-BE49-F238E27FC236}">
+                  <a16:creationId xmlns:a16="http://schemas.microsoft.com/office/drawing/2014/main" id="{D01FE3A0-E973-B40B-8CFF-88FB30F76924}"/>
+                </a:ext>
+              </a:extLst>
+            </p:cNvPr>
+            <p:cNvPicPr>
+              <a:picLocks noChangeAspect="1"/>
+            </p:cNvPicPr>
+            <p:nvPr/>
+          </p:nvPicPr>
+          <p:blipFill>
+            <a:blip r:embed="rId6"/>
+            <a:stretch>
+              <a:fillRect/>
+            </a:stretch>
+          </p:blipFill>
+          <p:spPr>
+            <a:xfrm>
+              <a:off x="5248582" y="2401735"/>
+              <a:ext cx="1694835" cy="2054530"/>
+            </a:xfrm>
+            <a:prstGeom prst="rect">
+              <a:avLst/>
+            </a:prstGeom>
+          </p:spPr>
+        </p:pic>
+        <p:pic>
+          <p:nvPicPr>
+            <p:cNvPr id="9" name="Picture 8">
+              <a:extLst>
+                <a:ext uri="{FF2B5EF4-FFF2-40B4-BE49-F238E27FC236}">
+                  <a16:creationId xmlns:a16="http://schemas.microsoft.com/office/drawing/2014/main" id="{D0BDFAA0-1BD7-3834-6A9A-98646B135505}"/>
+                </a:ext>
+              </a:extLst>
+            </p:cNvPr>
+            <p:cNvPicPr>
+              <a:picLocks noChangeAspect="1"/>
+            </p:cNvPicPr>
+            <p:nvPr/>
+          </p:nvPicPr>
+          <p:blipFill>
+            <a:blip r:embed="rId7"/>
+            <a:stretch>
+              <a:fillRect/>
+            </a:stretch>
+          </p:blipFill>
+          <p:spPr>
+            <a:xfrm>
+              <a:off x="5315643" y="2435129"/>
+              <a:ext cx="1560711" cy="1560711"/>
+            </a:xfrm>
+            <a:prstGeom prst="rect">
+              <a:avLst/>
+            </a:prstGeom>
+          </p:spPr>
+        </p:pic>
+      </p:grpSp>
     </p:spTree>
     <p:extLst>
       <p:ext uri="{BB962C8B-B14F-4D97-AF65-F5344CB8AC3E}">
@@ -5404,8 +5485,8 @@
           </a:p>
         </p:txBody>
       </p:sp>
-      <mc:AlternateContent xmlns:mc="http://schemas.openxmlformats.org/markup-compatibility/2006">
-        <mc:Choice xmlns:a14="http://schemas.microsoft.com/office/drawing/2010/main" Requires="a14">
+      <mc:AlternateContent xmlns:mc="http://schemas.openxmlformats.org/markup-compatibility/2006" xmlns:a14="http://schemas.microsoft.com/office/drawing/2010/main">
+        <mc:Choice Requires="a14">
           <p:sp>
             <p:nvSpPr>
               <p:cNvPr id="3" name="Content Placeholder 2">
@@ -5964,7 +6045,7 @@
             </p:txBody>
           </p:sp>
         </mc:Choice>
-        <mc:Fallback>
+        <mc:Fallback xmlns="">
           <p:sp>
             <p:nvSpPr>
               <p:cNvPr id="3" name="Content Placeholder 2">
@@ -6023,7 +6104,7 @@
           <p:nvPr/>
         </p:nvPicPr>
         <p:blipFill>
-          <a:blip r:embed="rId3"/>
+          <a:blip r:embed="rId2"/>
           <a:stretch>
             <a:fillRect/>
           </a:stretch>

--- a/slides/Lecture_Chapter12.pptx
+++ b/slides/Lecture_Chapter12.pptx
@@ -142,6 +142,10 @@
             <p14:sldId id="398"/>
             <p14:sldId id="399"/>
             <p14:sldId id="402"/>
+          </p14:sldIdLst>
+        </p14:section>
+        <p14:section name="Backward View and Prediction" id="{109EF36A-AEEE-47E8-BFE0-2CBDE1E96074}">
+          <p14:sldIdLst>
             <p14:sldId id="401"/>
             <p14:sldId id="403"/>
             <p14:sldId id="395"/>
@@ -318,7 +322,7 @@
           <a:p>
             <a:fld id="{3E22BF2E-04DA-469E-97C5-BB68A0368813}" type="datetimeFigureOut">
               <a:rPr lang="en-US" smtClean="0"/>
-              <a:t>3/30/2026</a:t>
+              <a:t>4/1/2026</a:t>
             </a:fld>
             <a:endParaRPr lang="en-US"/>
           </a:p>
@@ -516,7 +520,7 @@
           <a:p>
             <a:fld id="{3E22BF2E-04DA-469E-97C5-BB68A0368813}" type="datetimeFigureOut">
               <a:rPr lang="en-US" smtClean="0"/>
-              <a:t>3/30/2026</a:t>
+              <a:t>4/1/2026</a:t>
             </a:fld>
             <a:endParaRPr lang="en-US"/>
           </a:p>
@@ -724,7 +728,7 @@
           <a:p>
             <a:fld id="{3E22BF2E-04DA-469E-97C5-BB68A0368813}" type="datetimeFigureOut">
               <a:rPr lang="en-US" smtClean="0"/>
-              <a:t>3/30/2026</a:t>
+              <a:t>4/1/2026</a:t>
             </a:fld>
             <a:endParaRPr lang="en-US"/>
           </a:p>
@@ -932,7 +936,7 @@
           <a:p>
             <a:fld id="{3E22BF2E-04DA-469E-97C5-BB68A0368813}" type="datetimeFigureOut">
               <a:rPr lang="en-US" smtClean="0"/>
-              <a:t>3/30/2026</a:t>
+              <a:t>4/1/2026</a:t>
             </a:fld>
             <a:endParaRPr lang="en-US"/>
           </a:p>
@@ -1207,7 +1211,7 @@
           <a:p>
             <a:fld id="{3E22BF2E-04DA-469E-97C5-BB68A0368813}" type="datetimeFigureOut">
               <a:rPr lang="en-US" smtClean="0"/>
-              <a:t>3/30/2026</a:t>
+              <a:t>4/1/2026</a:t>
             </a:fld>
             <a:endParaRPr lang="en-US"/>
           </a:p>
@@ -1472,7 +1476,7 @@
           <a:p>
             <a:fld id="{3E22BF2E-04DA-469E-97C5-BB68A0368813}" type="datetimeFigureOut">
               <a:rPr lang="en-US" smtClean="0"/>
-              <a:t>3/30/2026</a:t>
+              <a:t>4/1/2026</a:t>
             </a:fld>
             <a:endParaRPr lang="en-US"/>
           </a:p>
@@ -1884,7 +1888,7 @@
           <a:p>
             <a:fld id="{3E22BF2E-04DA-469E-97C5-BB68A0368813}" type="datetimeFigureOut">
               <a:rPr lang="en-US" smtClean="0"/>
-              <a:t>3/30/2026</a:t>
+              <a:t>4/1/2026</a:t>
             </a:fld>
             <a:endParaRPr lang="en-US"/>
           </a:p>
@@ -2025,7 +2029,7 @@
           <a:p>
             <a:fld id="{3E22BF2E-04DA-469E-97C5-BB68A0368813}" type="datetimeFigureOut">
               <a:rPr lang="en-US" smtClean="0"/>
-              <a:t>3/30/2026</a:t>
+              <a:t>4/1/2026</a:t>
             </a:fld>
             <a:endParaRPr lang="en-US"/>
           </a:p>
@@ -2138,7 +2142,7 @@
           <a:p>
             <a:fld id="{3E22BF2E-04DA-469E-97C5-BB68A0368813}" type="datetimeFigureOut">
               <a:rPr lang="en-US" smtClean="0"/>
-              <a:t>3/30/2026</a:t>
+              <a:t>4/1/2026</a:t>
             </a:fld>
             <a:endParaRPr lang="en-US"/>
           </a:p>
@@ -2449,7 +2453,7 @@
           <a:p>
             <a:fld id="{3E22BF2E-04DA-469E-97C5-BB68A0368813}" type="datetimeFigureOut">
               <a:rPr lang="en-US" smtClean="0"/>
-              <a:t>3/30/2026</a:t>
+              <a:t>4/1/2026</a:t>
             </a:fld>
             <a:endParaRPr lang="en-US"/>
           </a:p>
@@ -2737,7 +2741,7 @@
           <a:p>
             <a:fld id="{3E22BF2E-04DA-469E-97C5-BB68A0368813}" type="datetimeFigureOut">
               <a:rPr lang="en-US" smtClean="0"/>
-              <a:t>3/30/2026</a:t>
+              <a:t>4/1/2026</a:t>
             </a:fld>
             <a:endParaRPr lang="en-US"/>
           </a:p>
@@ -2978,7 +2982,7 @@
           <a:p>
             <a:fld id="{3E22BF2E-04DA-469E-97C5-BB68A0368813}" type="datetimeFigureOut">
               <a:rPr lang="en-US" smtClean="0"/>
-              <a:t>3/30/2026</a:t>
+              <a:t>4/1/2026</a:t>
             </a:fld>
             <a:endParaRPr lang="en-US"/>
           </a:p>
@@ -4216,8 +4220,8 @@
           </p:sp>
         </mc:Fallback>
       </mc:AlternateContent>
-      <mc:AlternateContent xmlns:mc="http://schemas.openxmlformats.org/markup-compatibility/2006" xmlns:a14="http://schemas.microsoft.com/office/drawing/2010/main">
-        <mc:Choice Requires="a14">
+      <mc:AlternateContent xmlns:mc="http://schemas.openxmlformats.org/markup-compatibility/2006">
+        <mc:Choice xmlns:a14="http://schemas.microsoft.com/office/drawing/2010/main" Requires="a14">
           <p:sp>
             <p:nvSpPr>
               <p:cNvPr id="3" name="Content Placeholder 2">
@@ -4242,7 +4246,7 @@
             </p:spPr>
             <p:txBody>
               <a:bodyPr>
-                <a:normAutofit fontScale="70000" lnSpcReduction="20000"/>
+                <a:normAutofit fontScale="85000" lnSpcReduction="10000"/>
               </a:bodyPr>
               <a:lstStyle/>
               <a:p>
@@ -4332,13 +4336,7 @@
                 </a14:m>
                 <a:r>
                   <a:rPr lang="en-US" dirty="0"/>
-                  <a:t>, which requires all future rewards</a:t>
-                </a:r>
-              </a:p>
-              <a:p>
-                <a:r>
-                  <a:rPr lang="en-US" dirty="0"/>
-                  <a:t>The </a:t>
+                  <a:t>, which requires all future rewards: The </a:t>
                 </a:r>
                 <a:r>
                   <a:rPr lang="en-US" b="1" dirty="0"/>
@@ -4355,7 +4353,7 @@
             </p:txBody>
           </p:sp>
         </mc:Choice>
-        <mc:Fallback xmlns="">
+        <mc:Fallback>
           <p:sp>
             <p:nvSpPr>
               <p:cNvPr id="3" name="Content Placeholder 2">
@@ -4380,7 +4378,7 @@
               <a:blipFill>
                 <a:blip r:embed="rId3"/>
                 <a:stretch>
-                  <a:fillRect l="-762" t="-7234" r="-85" b="-8511"/>
+                  <a:fillRect l="-1185" t="-7660" b="-8936"/>
                 </a:stretch>
               </a:blipFill>
             </p:spPr>
@@ -4616,36 +4614,373 @@
           </p:txBody>
         </p:sp>
       </p:grpSp>
-      <p:pic>
-        <p:nvPicPr>
-          <p:cNvPr id="9" name="Picture 8">
+      <p:grpSp>
+        <p:nvGrpSpPr>
+          <p:cNvPr id="17" name="Group 16">
             <a:extLst>
               <a:ext uri="{FF2B5EF4-FFF2-40B4-BE49-F238E27FC236}">
-                <a16:creationId xmlns:a16="http://schemas.microsoft.com/office/drawing/2014/main" id="{AB6695FD-E75E-33FA-BCC4-B93D4EA61FD4}"/>
+                <a16:creationId xmlns:a16="http://schemas.microsoft.com/office/drawing/2014/main" id="{206F3215-3084-94A5-D9BC-4EF0F1E6626F}"/>
               </a:ext>
             </a:extLst>
           </p:cNvPr>
-          <p:cNvPicPr>
-            <a:picLocks noChangeAspect="1"/>
-          </p:cNvPicPr>
+          <p:cNvGrpSpPr/>
           <p:nvPr/>
-        </p:nvPicPr>
-        <p:blipFill>
-          <a:blip r:embed="rId6"/>
-          <a:stretch>
-            <a:fillRect/>
-          </a:stretch>
-        </p:blipFill>
-        <p:spPr>
+        </p:nvGrpSpPr>
+        <p:grpSpPr>
           <a:xfrm>
             <a:off x="482272" y="3098780"/>
-            <a:ext cx="7339461" cy="2094693"/>
+            <a:ext cx="7339461" cy="2279359"/>
+            <a:chOff x="482272" y="3098780"/>
+            <a:chExt cx="7339461" cy="2279359"/>
           </a:xfrm>
-          <a:prstGeom prst="rect">
-            <a:avLst/>
-          </a:prstGeom>
-        </p:spPr>
-      </p:pic>
+        </p:grpSpPr>
+        <p:pic>
+          <p:nvPicPr>
+            <p:cNvPr id="9" name="Picture 8">
+              <a:extLst>
+                <a:ext uri="{FF2B5EF4-FFF2-40B4-BE49-F238E27FC236}">
+                  <a16:creationId xmlns:a16="http://schemas.microsoft.com/office/drawing/2014/main" id="{AB6695FD-E75E-33FA-BCC4-B93D4EA61FD4}"/>
+                </a:ext>
+              </a:extLst>
+            </p:cNvPr>
+            <p:cNvPicPr>
+              <a:picLocks noChangeAspect="1"/>
+            </p:cNvPicPr>
+            <p:nvPr/>
+          </p:nvPicPr>
+          <p:blipFill>
+            <a:blip r:embed="rId6"/>
+            <a:stretch>
+              <a:fillRect/>
+            </a:stretch>
+          </p:blipFill>
+          <p:spPr>
+            <a:xfrm>
+              <a:off x="482272" y="3098780"/>
+              <a:ext cx="7339461" cy="2094693"/>
+            </a:xfrm>
+            <a:prstGeom prst="rect">
+              <a:avLst/>
+            </a:prstGeom>
+          </p:spPr>
+        </p:pic>
+        <mc:AlternateContent xmlns:mc="http://schemas.openxmlformats.org/markup-compatibility/2006">
+          <mc:Choice xmlns:a14="http://schemas.microsoft.com/office/drawing/2010/main" Requires="a14">
+            <p:sp>
+              <p:nvSpPr>
+                <p:cNvPr id="8" name="TextBox 7">
+                  <a:extLst>
+                    <a:ext uri="{FF2B5EF4-FFF2-40B4-BE49-F238E27FC236}">
+                      <a16:creationId xmlns:a16="http://schemas.microsoft.com/office/drawing/2014/main" id="{06462DD3-AC57-AC6E-DB58-8C4AA8C5F1B3}"/>
+                    </a:ext>
+                  </a:extLst>
+                </p:cNvPr>
+                <p:cNvSpPr txBox="1"/>
+                <p:nvPr/>
+              </p:nvSpPr>
+              <p:spPr>
+                <a:xfrm>
+                  <a:off x="1187644" y="5008807"/>
+                  <a:ext cx="538393" cy="369332"/>
+                </a:xfrm>
+                <a:prstGeom prst="rect">
+                  <a:avLst/>
+                </a:prstGeom>
+                <a:noFill/>
+              </p:spPr>
+              <p:txBody>
+                <a:bodyPr wrap="square">
+                  <a:spAutoFit/>
+                </a:bodyPr>
+                <a:lstStyle/>
+                <a:p>
+                  <a:pPr/>
+                  <a14:m>
+                    <m:oMathPara xmlns:m="http://schemas.openxmlformats.org/officeDocument/2006/math">
+                      <m:oMathParaPr>
+                        <m:jc m:val="centerGroup"/>
+                      </m:oMathParaPr>
+                      <m:oMath xmlns:m="http://schemas.openxmlformats.org/officeDocument/2006/math">
+                        <m:sSub>
+                          <m:sSubPr>
+                            <m:ctrlPr>
+                              <a:rPr lang="en-US" i="1" smtClean="0">
+                                <a:latin typeface="Cambria Math" panose="02040503050406030204" pitchFamily="18" charset="0"/>
+                              </a:rPr>
+                            </m:ctrlPr>
+                          </m:sSubPr>
+                          <m:e>
+                            <m:r>
+                              <a:rPr lang="en-US" b="1" i="1" smtClean="0">
+                                <a:latin typeface="Cambria Math" panose="02040503050406030204" pitchFamily="18" charset="0"/>
+                              </a:rPr>
+                              <m:t>𝒘</m:t>
+                            </m:r>
+                          </m:e>
+                          <m:sub>
+                            <m:r>
+                              <a:rPr lang="en-US" b="0" i="1" smtClean="0">
+                                <a:latin typeface="Cambria Math" panose="02040503050406030204" pitchFamily="18" charset="0"/>
+                              </a:rPr>
+                              <m:t>𝑡</m:t>
+                            </m:r>
+                          </m:sub>
+                        </m:sSub>
+                      </m:oMath>
+                    </m:oMathPara>
+                  </a14:m>
+                  <a:endParaRPr lang="en-US" dirty="0"/>
+                </a:p>
+              </p:txBody>
+            </p:sp>
+          </mc:Choice>
+          <mc:Fallback>
+            <p:sp>
+              <p:nvSpPr>
+                <p:cNvPr id="8" name="TextBox 7">
+                  <a:extLst>
+                    <a:ext uri="{FF2B5EF4-FFF2-40B4-BE49-F238E27FC236}">
+                      <a16:creationId xmlns:a16="http://schemas.microsoft.com/office/drawing/2014/main" id="{06462DD3-AC57-AC6E-DB58-8C4AA8C5F1B3}"/>
+                    </a:ext>
+                  </a:extLst>
+                </p:cNvPr>
+                <p:cNvSpPr txBox="1">
+                  <a:spLocks noRot="1" noChangeAspect="1" noMove="1" noResize="1" noEditPoints="1" noAdjustHandles="1" noChangeArrowheads="1" noChangeShapeType="1" noTextEdit="1"/>
+                </p:cNvSpPr>
+                <p:nvPr/>
+              </p:nvSpPr>
+              <p:spPr>
+                <a:xfrm>
+                  <a:off x="1187644" y="5008807"/>
+                  <a:ext cx="538393" cy="369332"/>
+                </a:xfrm>
+                <a:prstGeom prst="rect">
+                  <a:avLst/>
+                </a:prstGeom>
+                <a:blipFill>
+                  <a:blip r:embed="rId7"/>
+                  <a:stretch>
+                    <a:fillRect/>
+                  </a:stretch>
+                </a:blipFill>
+              </p:spPr>
+              <p:txBody>
+                <a:bodyPr/>
+                <a:lstStyle/>
+                <a:p>
+                  <a:r>
+                    <a:rPr lang="en-US">
+                      <a:noFill/>
+                    </a:rPr>
+                    <a:t> </a:t>
+                  </a:r>
+                </a:p>
+              </p:txBody>
+            </p:sp>
+          </mc:Fallback>
+        </mc:AlternateContent>
+        <mc:AlternateContent xmlns:mc="http://schemas.openxmlformats.org/markup-compatibility/2006">
+          <mc:Choice xmlns:a14="http://schemas.microsoft.com/office/drawing/2010/main" Requires="a14">
+            <p:sp>
+              <p:nvSpPr>
+                <p:cNvPr id="11" name="TextBox 10">
+                  <a:extLst>
+                    <a:ext uri="{FF2B5EF4-FFF2-40B4-BE49-F238E27FC236}">
+                      <a16:creationId xmlns:a16="http://schemas.microsoft.com/office/drawing/2014/main" id="{D4C21A98-A3F2-1D38-E686-25CC785EEF09}"/>
+                    </a:ext>
+                  </a:extLst>
+                </p:cNvPr>
+                <p:cNvSpPr txBox="1"/>
+                <p:nvPr/>
+              </p:nvSpPr>
+              <p:spPr>
+                <a:xfrm>
+                  <a:off x="2515386" y="4762408"/>
+                  <a:ext cx="616470" cy="369332"/>
+                </a:xfrm>
+                <a:prstGeom prst="rect">
+                  <a:avLst/>
+                </a:prstGeom>
+                <a:noFill/>
+              </p:spPr>
+              <p:txBody>
+                <a:bodyPr wrap="square">
+                  <a:spAutoFit/>
+                </a:bodyPr>
+                <a:lstStyle/>
+                <a:p>
+                  <a:pPr/>
+                  <a14:m>
+                    <m:oMathPara xmlns:m="http://schemas.openxmlformats.org/officeDocument/2006/math">
+                      <m:oMathParaPr>
+                        <m:jc m:val="centerGroup"/>
+                      </m:oMathParaPr>
+                      <m:oMath xmlns:m="http://schemas.openxmlformats.org/officeDocument/2006/math">
+                        <m:sSub>
+                          <m:sSubPr>
+                            <m:ctrlPr>
+                              <a:rPr lang="en-US" i="1" smtClean="0">
+                                <a:latin typeface="Cambria Math" panose="02040503050406030204" pitchFamily="18" charset="0"/>
+                              </a:rPr>
+                            </m:ctrlPr>
+                          </m:sSubPr>
+                          <m:e>
+                            <m:r>
+                              <a:rPr lang="en-US" b="1" i="1" smtClean="0">
+                                <a:latin typeface="Cambria Math" panose="02040503050406030204" pitchFamily="18" charset="0"/>
+                              </a:rPr>
+                              <m:t>𝒘</m:t>
+                            </m:r>
+                          </m:e>
+                          <m:sub>
+                            <m:r>
+                              <a:rPr lang="en-US" b="0" i="1" smtClean="0">
+                                <a:latin typeface="Cambria Math" panose="02040503050406030204" pitchFamily="18" charset="0"/>
+                              </a:rPr>
+                              <m:t>𝑡</m:t>
+                            </m:r>
+                            <m:r>
+                              <a:rPr lang="en-US" b="0" i="1" smtClean="0">
+                                <a:latin typeface="Cambria Math" panose="02040503050406030204" pitchFamily="18" charset="0"/>
+                              </a:rPr>
+                              <m:t>+1</m:t>
+                            </m:r>
+                          </m:sub>
+                        </m:sSub>
+                      </m:oMath>
+                    </m:oMathPara>
+                  </a14:m>
+                  <a:endParaRPr lang="en-US" dirty="0"/>
+                </a:p>
+              </p:txBody>
+            </p:sp>
+          </mc:Choice>
+          <mc:Fallback>
+            <p:sp>
+              <p:nvSpPr>
+                <p:cNvPr id="11" name="TextBox 10">
+                  <a:extLst>
+                    <a:ext uri="{FF2B5EF4-FFF2-40B4-BE49-F238E27FC236}">
+                      <a16:creationId xmlns:a16="http://schemas.microsoft.com/office/drawing/2014/main" id="{D4C21A98-A3F2-1D38-E686-25CC785EEF09}"/>
+                    </a:ext>
+                  </a:extLst>
+                </p:cNvPr>
+                <p:cNvSpPr txBox="1">
+                  <a:spLocks noRot="1" noChangeAspect="1" noMove="1" noResize="1" noEditPoints="1" noAdjustHandles="1" noChangeArrowheads="1" noChangeShapeType="1" noTextEdit="1"/>
+                </p:cNvSpPr>
+                <p:nvPr/>
+              </p:nvSpPr>
+              <p:spPr>
+                <a:xfrm>
+                  <a:off x="2515386" y="4762408"/>
+                  <a:ext cx="616470" cy="369332"/>
+                </a:xfrm>
+                <a:prstGeom prst="rect">
+                  <a:avLst/>
+                </a:prstGeom>
+                <a:blipFill>
+                  <a:blip r:embed="rId8"/>
+                  <a:stretch>
+                    <a:fillRect r="-990"/>
+                  </a:stretch>
+                </a:blipFill>
+              </p:spPr>
+              <p:txBody>
+                <a:bodyPr/>
+                <a:lstStyle/>
+                <a:p>
+                  <a:r>
+                    <a:rPr lang="en-US">
+                      <a:noFill/>
+                    </a:rPr>
+                    <a:t> </a:t>
+                  </a:r>
+                </a:p>
+              </p:txBody>
+            </p:sp>
+          </mc:Fallback>
+        </mc:AlternateContent>
+        <p:sp>
+          <p:nvSpPr>
+            <p:cNvPr id="12" name="TextBox 11">
+              <a:extLst>
+                <a:ext uri="{FF2B5EF4-FFF2-40B4-BE49-F238E27FC236}">
+                  <a16:creationId xmlns:a16="http://schemas.microsoft.com/office/drawing/2014/main" id="{3841847C-870A-6AAB-5DFF-B9B9859364C8}"/>
+                </a:ext>
+              </a:extLst>
+            </p:cNvPr>
+            <p:cNvSpPr txBox="1"/>
+            <p:nvPr/>
+          </p:nvSpPr>
+          <p:spPr>
+            <a:xfrm rot="20955581">
+              <a:off x="1541594" y="4605447"/>
+              <a:ext cx="889987" cy="369332"/>
+            </a:xfrm>
+            <a:prstGeom prst="rect">
+              <a:avLst/>
+            </a:prstGeom>
+            <a:noFill/>
+          </p:spPr>
+          <p:txBody>
+            <a:bodyPr wrap="none" rtlCol="0">
+              <a:spAutoFit/>
+            </a:bodyPr>
+            <a:lstStyle/>
+            <a:p>
+              <a:r>
+                <a:rPr lang="en-US" dirty="0">
+                  <a:solidFill>
+                    <a:schemeClr val="accent2"/>
+                  </a:solidFill>
+                </a:rPr>
+                <a:t>update</a:t>
+              </a:r>
+            </a:p>
+          </p:txBody>
+        </p:sp>
+        <p:cxnSp>
+          <p:nvCxnSpPr>
+            <p:cNvPr id="13" name="Straight Arrow Connector 12">
+              <a:extLst>
+                <a:ext uri="{FF2B5EF4-FFF2-40B4-BE49-F238E27FC236}">
+                  <a16:creationId xmlns:a16="http://schemas.microsoft.com/office/drawing/2014/main" id="{9AFA192E-5DA0-E399-780F-3564BE21E543}"/>
+                </a:ext>
+              </a:extLst>
+            </p:cNvPr>
+            <p:cNvCxnSpPr>
+              <a:cxnSpLocks/>
+            </p:cNvCxnSpPr>
+            <p:nvPr/>
+          </p:nvCxnSpPr>
+          <p:spPr>
+            <a:xfrm flipV="1">
+              <a:off x="1510018" y="4790114"/>
+              <a:ext cx="1115736" cy="260058"/>
+            </a:xfrm>
+            <a:prstGeom prst="straightConnector1">
+              <a:avLst/>
+            </a:prstGeom>
+            <a:ln>
+              <a:tailEnd type="triangle"/>
+            </a:ln>
+          </p:spPr>
+          <p:style>
+            <a:lnRef idx="3">
+              <a:schemeClr val="accent2"/>
+            </a:lnRef>
+            <a:fillRef idx="0">
+              <a:schemeClr val="accent2"/>
+            </a:fillRef>
+            <a:effectRef idx="2">
+              <a:schemeClr val="accent2"/>
+            </a:effectRef>
+            <a:fontRef idx="minor">
+              <a:schemeClr val="tx1"/>
+            </a:fontRef>
+          </p:style>
+        </p:cxnSp>
+      </p:grpSp>
       <mc:AlternateContent xmlns:mc="http://schemas.openxmlformats.org/markup-compatibility/2006" xmlns:a14="http://schemas.microsoft.com/office/drawing/2010/main">
         <mc:Choice Requires="a14">
           <p:sp>
@@ -4763,7 +5098,7 @@
                 </a:avLst>
               </a:prstGeom>
               <a:blipFill>
-                <a:blip r:embed="rId7"/>
+                <a:blip r:embed="rId9"/>
                 <a:stretch>
                   <a:fillRect b="-3800"/>
                 </a:stretch>
@@ -4928,8 +5263,8 @@
           </a:p>
         </p:txBody>
       </p:sp>
-      <mc:AlternateContent xmlns:mc="http://schemas.openxmlformats.org/markup-compatibility/2006" xmlns:a14="http://schemas.microsoft.com/office/drawing/2010/main">
-        <mc:Choice Requires="a14">
+      <mc:AlternateContent xmlns:mc="http://schemas.openxmlformats.org/markup-compatibility/2006">
+        <mc:Choice xmlns:a14="http://schemas.microsoft.com/office/drawing/2010/main" Requires="a14">
           <p:sp>
             <p:nvSpPr>
               <p:cNvPr id="5" name="Content Placeholder 4">
@@ -4948,13 +5283,13 @@
             </p:nvSpPr>
             <p:spPr>
               <a:xfrm>
-                <a:off x="838200" y="4579570"/>
-                <a:ext cx="10515600" cy="1870525"/>
+                <a:off x="838200" y="4579571"/>
+                <a:ext cx="10515600" cy="1720562"/>
               </a:xfrm>
             </p:spPr>
             <p:txBody>
               <a:bodyPr>
-                <a:normAutofit fontScale="92500" lnSpcReduction="20000"/>
+                <a:normAutofit fontScale="77500" lnSpcReduction="20000"/>
               </a:bodyPr>
               <a:lstStyle/>
               <a:p>
@@ -4963,7 +5298,15 @@
                 </a:pPr>
                 <a:r>
                   <a:rPr lang="en-US" dirty="0"/>
-                  <a:t>If we can update our current state value by looking back at the updates of previous states, then we can:</a:t>
+                  <a:t>If we can </a:t>
+                </a:r>
+                <a:r>
+                  <a:rPr lang="en-US" b="1" dirty="0"/>
+                  <a:t>update the value function for all previous states </a:t>
+                </a:r>
+                <a:r>
+                  <a:rPr lang="en-US" dirty="0"/>
+                  <a:t>depending on the current observed TD-error:</a:t>
                 </a:r>
               </a:p>
               <a:p>
@@ -4977,7 +5320,7 @@
                 <a:pPr lvl="1"/>
                 <a:r>
                   <a:rPr lang="en-US" dirty="0"/>
-                  <a:t>Update </a:t>
+                  <a:t>Online update of </a:t>
                 </a:r>
                 <a14:m>
                   <m:oMath xmlns:m="http://schemas.openxmlformats.org/officeDocument/2006/math">
@@ -5015,7 +5358,7 @@
             </p:txBody>
           </p:sp>
         </mc:Choice>
-        <mc:Fallback xmlns="">
+        <mc:Fallback>
           <p:sp>
             <p:nvSpPr>
               <p:cNvPr id="5" name="Content Placeholder 4">
@@ -5034,13 +5377,13 @@
             </p:nvSpPr>
             <p:spPr>
               <a:xfrm>
-                <a:off x="838200" y="4579570"/>
-                <a:ext cx="10515600" cy="1870525"/>
+                <a:off x="838200" y="4579571"/>
+                <a:ext cx="10515600" cy="1720562"/>
               </a:xfrm>
               <a:blipFill>
                 <a:blip r:embed="rId2"/>
                 <a:stretch>
-                  <a:fillRect l="-1043" t="-8143" r="-1507" b="-6189"/>
+                  <a:fillRect l="-754" t="-7092" r="-348" b="-1418"/>
                 </a:stretch>
               </a:blipFill>
             </p:spPr>
@@ -5059,44 +5402,403 @@
           </p:sp>
         </mc:Fallback>
       </mc:AlternateContent>
-      <p:pic>
-        <p:nvPicPr>
-          <p:cNvPr id="7" name="Picture 6">
+      <p:grpSp>
+        <p:nvGrpSpPr>
+          <p:cNvPr id="2" name="Group 1">
             <a:extLst>
               <a:ext uri="{FF2B5EF4-FFF2-40B4-BE49-F238E27FC236}">
-                <a16:creationId xmlns:a16="http://schemas.microsoft.com/office/drawing/2014/main" id="{AF2107B3-4130-2F4D-8348-C8D01145A672}"/>
+                <a16:creationId xmlns:a16="http://schemas.microsoft.com/office/drawing/2014/main" id="{24CA70D1-B1C8-66B6-2B70-B39889CCE8CA}"/>
               </a:ext>
             </a:extLst>
           </p:cNvPr>
-          <p:cNvPicPr>
-            <a:picLocks noChangeAspect="1"/>
-          </p:cNvPicPr>
+          <p:cNvGrpSpPr/>
           <p:nvPr/>
-        </p:nvPicPr>
-        <p:blipFill>
-          <a:blip r:embed="rId3"/>
-          <a:stretch>
-            <a:fillRect/>
-          </a:stretch>
-        </p:blipFill>
-        <p:spPr>
+        </p:nvGrpSpPr>
+        <p:grpSpPr>
           <a:xfrm>
-            <a:off x="2000745" y="1095253"/>
-            <a:ext cx="7075799" cy="3142324"/>
+            <a:off x="1988161" y="1124198"/>
+            <a:ext cx="7075799" cy="3327793"/>
+            <a:chOff x="2000745" y="1095253"/>
+            <a:chExt cx="7075799" cy="3327793"/>
           </a:xfrm>
-          <a:prstGeom prst="rect">
-            <a:avLst/>
-          </a:prstGeom>
-        </p:spPr>
-      </p:pic>
-      <mc:AlternateContent xmlns:mc="http://schemas.openxmlformats.org/markup-compatibility/2006" xmlns:a14="http://schemas.microsoft.com/office/drawing/2010/main">
-        <mc:Choice Requires="a14">
+        </p:grpSpPr>
+        <p:pic>
+          <p:nvPicPr>
+            <p:cNvPr id="7" name="Picture 6">
+              <a:extLst>
+                <a:ext uri="{FF2B5EF4-FFF2-40B4-BE49-F238E27FC236}">
+                  <a16:creationId xmlns:a16="http://schemas.microsoft.com/office/drawing/2014/main" id="{AF2107B3-4130-2F4D-8348-C8D01145A672}"/>
+                </a:ext>
+              </a:extLst>
+            </p:cNvPr>
+            <p:cNvPicPr>
+              <a:picLocks noChangeAspect="1"/>
+            </p:cNvPicPr>
+            <p:nvPr/>
+          </p:nvPicPr>
+          <p:blipFill>
+            <a:blip r:embed="rId3"/>
+            <a:stretch>
+              <a:fillRect/>
+            </a:stretch>
+          </p:blipFill>
+          <p:spPr>
+            <a:xfrm>
+              <a:off x="2000745" y="1095253"/>
+              <a:ext cx="7075799" cy="3142324"/>
+            </a:xfrm>
+            <a:prstGeom prst="rect">
+              <a:avLst/>
+            </a:prstGeom>
+          </p:spPr>
+        </p:pic>
+        <mc:AlternateContent xmlns:mc="http://schemas.openxmlformats.org/markup-compatibility/2006">
+          <mc:Choice xmlns:a14="http://schemas.microsoft.com/office/drawing/2010/main" Requires="a14">
+            <p:sp>
+              <p:nvSpPr>
+                <p:cNvPr id="11" name="TextBox 10">
+                  <a:extLst>
+                    <a:ext uri="{FF2B5EF4-FFF2-40B4-BE49-F238E27FC236}">
+                      <a16:creationId xmlns:a16="http://schemas.microsoft.com/office/drawing/2014/main" id="{99931218-62BE-9701-43DE-FF542624DDB6}"/>
+                    </a:ext>
+                  </a:extLst>
+                </p:cNvPr>
+                <p:cNvSpPr txBox="1"/>
+                <p:nvPr/>
+              </p:nvSpPr>
+              <p:spPr>
+                <a:xfrm>
+                  <a:off x="6518848" y="3619087"/>
+                  <a:ext cx="538393" cy="369332"/>
+                </a:xfrm>
+                <a:prstGeom prst="rect">
+                  <a:avLst/>
+                </a:prstGeom>
+                <a:noFill/>
+              </p:spPr>
+              <p:txBody>
+                <a:bodyPr wrap="square">
+                  <a:spAutoFit/>
+                </a:bodyPr>
+                <a:lstStyle/>
+                <a:p>
+                  <a:pPr/>
+                  <a14:m>
+                    <m:oMathPara xmlns:m="http://schemas.openxmlformats.org/officeDocument/2006/math">
+                      <m:oMathParaPr>
+                        <m:jc m:val="centerGroup"/>
+                      </m:oMathParaPr>
+                      <m:oMath xmlns:m="http://schemas.openxmlformats.org/officeDocument/2006/math">
+                        <m:sSub>
+                          <m:sSubPr>
+                            <m:ctrlPr>
+                              <a:rPr lang="en-US" i="1" smtClean="0">
+                                <a:latin typeface="Cambria Math" panose="02040503050406030204" pitchFamily="18" charset="0"/>
+                              </a:rPr>
+                            </m:ctrlPr>
+                          </m:sSubPr>
+                          <m:e>
+                            <m:r>
+                              <a:rPr lang="en-US" b="1" i="1" smtClean="0">
+                                <a:latin typeface="Cambria Math" panose="02040503050406030204" pitchFamily="18" charset="0"/>
+                              </a:rPr>
+                              <m:t>𝒘</m:t>
+                            </m:r>
+                          </m:e>
+                          <m:sub>
+                            <m:r>
+                              <a:rPr lang="en-US" b="0" i="1" smtClean="0">
+                                <a:latin typeface="Cambria Math" panose="02040503050406030204" pitchFamily="18" charset="0"/>
+                              </a:rPr>
+                              <m:t>𝑡</m:t>
+                            </m:r>
+                          </m:sub>
+                        </m:sSub>
+                      </m:oMath>
+                    </m:oMathPara>
+                  </a14:m>
+                  <a:endParaRPr lang="en-US" dirty="0"/>
+                </a:p>
+              </p:txBody>
+            </p:sp>
+          </mc:Choice>
+          <mc:Fallback>
+            <p:sp>
+              <p:nvSpPr>
+                <p:cNvPr id="11" name="TextBox 10">
+                  <a:extLst>
+                    <a:ext uri="{FF2B5EF4-FFF2-40B4-BE49-F238E27FC236}">
+                      <a16:creationId xmlns:a16="http://schemas.microsoft.com/office/drawing/2014/main" id="{99931218-62BE-9701-43DE-FF542624DDB6}"/>
+                    </a:ext>
+                  </a:extLst>
+                </p:cNvPr>
+                <p:cNvSpPr txBox="1">
+                  <a:spLocks noRot="1" noChangeAspect="1" noMove="1" noResize="1" noEditPoints="1" noAdjustHandles="1" noChangeArrowheads="1" noChangeShapeType="1" noTextEdit="1"/>
+                </p:cNvSpPr>
+                <p:nvPr/>
+              </p:nvSpPr>
+              <p:spPr>
+                <a:xfrm>
+                  <a:off x="6518848" y="3619087"/>
+                  <a:ext cx="538393" cy="369332"/>
+                </a:xfrm>
+                <a:prstGeom prst="rect">
+                  <a:avLst/>
+                </a:prstGeom>
+                <a:blipFill>
+                  <a:blip r:embed="rId4"/>
+                  <a:stretch>
+                    <a:fillRect/>
+                  </a:stretch>
+                </a:blipFill>
+              </p:spPr>
+              <p:txBody>
+                <a:bodyPr/>
+                <a:lstStyle/>
+                <a:p>
+                  <a:r>
+                    <a:rPr lang="en-US">
+                      <a:noFill/>
+                    </a:rPr>
+                    <a:t> </a:t>
+                  </a:r>
+                </a:p>
+              </p:txBody>
+            </p:sp>
+          </mc:Fallback>
+        </mc:AlternateContent>
+        <mc:AlternateContent xmlns:mc="http://schemas.openxmlformats.org/markup-compatibility/2006">
+          <mc:Choice xmlns:a14="http://schemas.microsoft.com/office/drawing/2010/main" Requires="a14">
+            <p:sp>
+              <p:nvSpPr>
+                <p:cNvPr id="12" name="TextBox 11">
+                  <a:extLst>
+                    <a:ext uri="{FF2B5EF4-FFF2-40B4-BE49-F238E27FC236}">
+                      <a16:creationId xmlns:a16="http://schemas.microsoft.com/office/drawing/2014/main" id="{9BEF2B6F-A91F-6A73-BE9B-2007F6B1995C}"/>
+                    </a:ext>
+                  </a:extLst>
+                </p:cNvPr>
+                <p:cNvSpPr txBox="1"/>
+                <p:nvPr/>
+              </p:nvSpPr>
+              <p:spPr>
+                <a:xfrm>
+                  <a:off x="8012868" y="4053714"/>
+                  <a:ext cx="616470" cy="369332"/>
+                </a:xfrm>
+                <a:prstGeom prst="rect">
+                  <a:avLst/>
+                </a:prstGeom>
+                <a:noFill/>
+              </p:spPr>
+              <p:txBody>
+                <a:bodyPr wrap="square">
+                  <a:spAutoFit/>
+                </a:bodyPr>
+                <a:lstStyle/>
+                <a:p>
+                  <a:pPr/>
+                  <a14:m>
+                    <m:oMathPara xmlns:m="http://schemas.openxmlformats.org/officeDocument/2006/math">
+                      <m:oMathParaPr>
+                        <m:jc m:val="centerGroup"/>
+                      </m:oMathParaPr>
+                      <m:oMath xmlns:m="http://schemas.openxmlformats.org/officeDocument/2006/math">
+                        <m:sSub>
+                          <m:sSubPr>
+                            <m:ctrlPr>
+                              <a:rPr lang="en-US" i="1" smtClean="0">
+                                <a:latin typeface="Cambria Math" panose="02040503050406030204" pitchFamily="18" charset="0"/>
+                              </a:rPr>
+                            </m:ctrlPr>
+                          </m:sSubPr>
+                          <m:e>
+                            <m:r>
+                              <a:rPr lang="en-US" b="1" i="1" smtClean="0">
+                                <a:latin typeface="Cambria Math" panose="02040503050406030204" pitchFamily="18" charset="0"/>
+                              </a:rPr>
+                              <m:t>𝒘</m:t>
+                            </m:r>
+                          </m:e>
+                          <m:sub>
+                            <m:r>
+                              <a:rPr lang="en-US" b="0" i="1" smtClean="0">
+                                <a:latin typeface="Cambria Math" panose="02040503050406030204" pitchFamily="18" charset="0"/>
+                              </a:rPr>
+                              <m:t>𝑡</m:t>
+                            </m:r>
+                            <m:r>
+                              <a:rPr lang="en-US" b="0" i="1" smtClean="0">
+                                <a:latin typeface="Cambria Math" panose="02040503050406030204" pitchFamily="18" charset="0"/>
+                              </a:rPr>
+                              <m:t>+1</m:t>
+                            </m:r>
+                          </m:sub>
+                        </m:sSub>
+                      </m:oMath>
+                    </m:oMathPara>
+                  </a14:m>
+                  <a:endParaRPr lang="en-US" dirty="0"/>
+                </a:p>
+              </p:txBody>
+            </p:sp>
+          </mc:Choice>
+          <mc:Fallback>
+            <p:sp>
+              <p:nvSpPr>
+                <p:cNvPr id="12" name="TextBox 11">
+                  <a:extLst>
+                    <a:ext uri="{FF2B5EF4-FFF2-40B4-BE49-F238E27FC236}">
+                      <a16:creationId xmlns:a16="http://schemas.microsoft.com/office/drawing/2014/main" id="{9BEF2B6F-A91F-6A73-BE9B-2007F6B1995C}"/>
+                    </a:ext>
+                  </a:extLst>
+                </p:cNvPr>
+                <p:cNvSpPr txBox="1">
+                  <a:spLocks noRot="1" noChangeAspect="1" noMove="1" noResize="1" noEditPoints="1" noAdjustHandles="1" noChangeArrowheads="1" noChangeShapeType="1" noTextEdit="1"/>
+                </p:cNvSpPr>
+                <p:nvPr/>
+              </p:nvSpPr>
+              <p:spPr>
+                <a:xfrm>
+                  <a:off x="8012868" y="4053714"/>
+                  <a:ext cx="616470" cy="369332"/>
+                </a:xfrm>
+                <a:prstGeom prst="rect">
+                  <a:avLst/>
+                </a:prstGeom>
+                <a:blipFill>
+                  <a:blip r:embed="rId5"/>
+                  <a:stretch>
+                    <a:fillRect/>
+                  </a:stretch>
+                </a:blipFill>
+              </p:spPr>
+              <p:txBody>
+                <a:bodyPr/>
+                <a:lstStyle/>
+                <a:p>
+                  <a:r>
+                    <a:rPr lang="en-US">
+                      <a:noFill/>
+                    </a:rPr>
+                    <a:t> </a:t>
+                  </a:r>
+                </a:p>
+              </p:txBody>
+            </p:sp>
+          </mc:Fallback>
+        </mc:AlternateContent>
+        <p:grpSp>
+          <p:nvGrpSpPr>
+            <p:cNvPr id="19" name="Group 18">
+              <a:extLst>
+                <a:ext uri="{FF2B5EF4-FFF2-40B4-BE49-F238E27FC236}">
+                  <a16:creationId xmlns:a16="http://schemas.microsoft.com/office/drawing/2014/main" id="{F2CEEC33-42F0-CF71-67E5-0E3B29769461}"/>
+                </a:ext>
+              </a:extLst>
+            </p:cNvPr>
+            <p:cNvGrpSpPr/>
+            <p:nvPr/>
+          </p:nvGrpSpPr>
+          <p:grpSpPr>
+            <a:xfrm>
+              <a:off x="6932951" y="3768495"/>
+              <a:ext cx="1079917" cy="469885"/>
+              <a:chOff x="6932951" y="3768495"/>
+              <a:chExt cx="1079917" cy="469885"/>
+            </a:xfrm>
+          </p:grpSpPr>
+          <p:cxnSp>
+            <p:nvCxnSpPr>
+              <p:cNvPr id="14" name="Straight Arrow Connector 13">
+                <a:extLst>
+                  <a:ext uri="{FF2B5EF4-FFF2-40B4-BE49-F238E27FC236}">
+                    <a16:creationId xmlns:a16="http://schemas.microsoft.com/office/drawing/2014/main" id="{B5453FED-9076-E5A4-2B94-9A032A9FD338}"/>
+                  </a:ext>
+                </a:extLst>
+              </p:cNvPr>
+              <p:cNvCxnSpPr>
+                <a:cxnSpLocks/>
+                <a:endCxn id="12" idx="1"/>
+              </p:cNvCxnSpPr>
+              <p:nvPr/>
+            </p:nvCxnSpPr>
+            <p:spPr>
+              <a:xfrm>
+                <a:off x="6932951" y="3895685"/>
+                <a:ext cx="1079917" cy="342695"/>
+              </a:xfrm>
+              <a:prstGeom prst="straightConnector1">
+                <a:avLst/>
+              </a:prstGeom>
+              <a:ln>
+                <a:tailEnd type="triangle"/>
+              </a:ln>
+            </p:spPr>
+            <p:style>
+              <a:lnRef idx="3">
+                <a:schemeClr val="accent2"/>
+              </a:lnRef>
+              <a:fillRef idx="0">
+                <a:schemeClr val="accent2"/>
+              </a:fillRef>
+              <a:effectRef idx="2">
+                <a:schemeClr val="accent2"/>
+              </a:effectRef>
+              <a:fontRef idx="minor">
+                <a:schemeClr val="tx1"/>
+              </a:fontRef>
+            </p:style>
+          </p:cxnSp>
           <p:sp>
             <p:nvSpPr>
-              <p:cNvPr id="11" name="TextBox 10">
+              <p:cNvPr id="18" name="TextBox 17">
                 <a:extLst>
                   <a:ext uri="{FF2B5EF4-FFF2-40B4-BE49-F238E27FC236}">
-                    <a16:creationId xmlns:a16="http://schemas.microsoft.com/office/drawing/2014/main" id="{99931218-62BE-9701-43DE-FF542624DDB6}"/>
+                    <a16:creationId xmlns:a16="http://schemas.microsoft.com/office/drawing/2014/main" id="{3FF7A9AF-DCD8-97D1-286D-51D9A1170DA3}"/>
+                  </a:ext>
+                </a:extLst>
+              </p:cNvPr>
+              <p:cNvSpPr txBox="1"/>
+              <p:nvPr/>
+            </p:nvSpPr>
+            <p:spPr>
+              <a:xfrm rot="1135729">
+                <a:off x="7090062" y="3768495"/>
+                <a:ext cx="889987" cy="369332"/>
+              </a:xfrm>
+              <a:prstGeom prst="rect">
+                <a:avLst/>
+              </a:prstGeom>
+              <a:noFill/>
+            </p:spPr>
+            <p:txBody>
+              <a:bodyPr wrap="none" rtlCol="0">
+                <a:spAutoFit/>
+              </a:bodyPr>
+              <a:lstStyle/>
+              <a:p>
+                <a:r>
+                  <a:rPr lang="en-US" dirty="0">
+                    <a:solidFill>
+                      <a:schemeClr val="accent2"/>
+                    </a:solidFill>
+                  </a:rPr>
+                  <a:t>update</a:t>
+                </a:r>
+              </a:p>
+            </p:txBody>
+          </p:sp>
+        </p:grpSp>
+      </p:grpSp>
+      <mc:AlternateContent xmlns:mc="http://schemas.openxmlformats.org/markup-compatibility/2006">
+        <mc:Choice xmlns:a14="http://schemas.microsoft.com/office/drawing/2010/main" Requires="a14">
+          <p:sp>
+            <p:nvSpPr>
+              <p:cNvPr id="3" name="TextBox 2">
+                <a:extLst>
+                  <a:ext uri="{FF2B5EF4-FFF2-40B4-BE49-F238E27FC236}">
+                    <a16:creationId xmlns:a16="http://schemas.microsoft.com/office/drawing/2014/main" id="{7F2DE156-8CD9-6258-1FAA-DB9C5CBF9ACF}"/>
                   </a:ext>
                 </a:extLst>
               </p:cNvPr>
@@ -5105,67 +5807,150 @@
             </p:nvSpPr>
             <p:spPr>
               <a:xfrm>
-                <a:off x="6518848" y="3619087"/>
-                <a:ext cx="538393" cy="369332"/>
+                <a:off x="8699383" y="1402630"/>
+                <a:ext cx="2722227" cy="1200329"/>
               </a:xfrm>
               <a:prstGeom prst="rect">
                 <a:avLst/>
               </a:prstGeom>
-              <a:noFill/>
             </p:spPr>
+            <p:style>
+              <a:lnRef idx="2">
+                <a:schemeClr val="dk1"/>
+              </a:lnRef>
+              <a:fillRef idx="1">
+                <a:schemeClr val="lt1"/>
+              </a:fillRef>
+              <a:effectRef idx="0">
+                <a:schemeClr val="dk1"/>
+              </a:effectRef>
+              <a:fontRef idx="minor">
+                <a:schemeClr val="dk1"/>
+              </a:fontRef>
+            </p:style>
             <p:txBody>
-              <a:bodyPr wrap="square">
+              <a:bodyPr wrap="square" rtlCol="0">
                 <a:spAutoFit/>
               </a:bodyPr>
               <a:lstStyle/>
               <a:p>
-                <a:pPr/>
                 <a14:m>
-                  <m:oMathPara xmlns:m="http://schemas.openxmlformats.org/officeDocument/2006/math">
-                    <m:oMathParaPr>
-                      <m:jc m:val="centerGroup"/>
-                    </m:oMathParaPr>
-                    <m:oMath xmlns:m="http://schemas.openxmlformats.org/officeDocument/2006/math">
-                      <m:sSub>
-                        <m:sSubPr>
-                          <m:ctrlPr>
-                            <a:rPr lang="en-US" i="1" smtClean="0">
-                              <a:latin typeface="Cambria Math" panose="02040503050406030204" pitchFamily="18" charset="0"/>
-                            </a:rPr>
-                          </m:ctrlPr>
-                        </m:sSubPr>
-                        <m:e>
-                          <m:r>
-                            <a:rPr lang="en-US" b="1" i="1" smtClean="0">
-                              <a:latin typeface="Cambria Math" panose="02040503050406030204" pitchFamily="18" charset="0"/>
-                            </a:rPr>
-                            <m:t>𝒘</m:t>
-                          </m:r>
-                        </m:e>
-                        <m:sub>
-                          <m:r>
-                            <a:rPr lang="en-US" b="0" i="1" smtClean="0">
-                              <a:latin typeface="Cambria Math" panose="02040503050406030204" pitchFamily="18" charset="0"/>
-                            </a:rPr>
-                            <m:t>𝑡</m:t>
-                          </m:r>
-                        </m:sub>
-                      </m:sSub>
-                    </m:oMath>
-                  </m:oMathPara>
+                  <m:oMath xmlns:m="http://schemas.openxmlformats.org/officeDocument/2006/math">
+                    <m:sSub>
+                      <m:sSubPr>
+                        <m:ctrlPr>
+                          <a:rPr lang="en-US" b="0" i="1" smtClean="0">
+                            <a:latin typeface="Cambria Math" panose="02040503050406030204" pitchFamily="18" charset="0"/>
+                          </a:rPr>
+                        </m:ctrlPr>
+                      </m:sSubPr>
+                      <m:e>
+                        <m:r>
+                          <a:rPr lang="en-US" b="0" i="1" smtClean="0">
+                            <a:latin typeface="Cambria Math" panose="02040503050406030204" pitchFamily="18" charset="0"/>
+                          </a:rPr>
+                          <m:t>𝛿</m:t>
+                        </m:r>
+                      </m:e>
+                      <m:sub>
+                        <m:r>
+                          <a:rPr lang="en-US" b="0" i="1" smtClean="0">
+                            <a:latin typeface="Cambria Math" panose="02040503050406030204" pitchFamily="18" charset="0"/>
+                          </a:rPr>
+                          <m:t>𝑡</m:t>
+                        </m:r>
+                      </m:sub>
+                    </m:sSub>
+                  </m:oMath>
                 </a14:m>
-                <a:endParaRPr lang="en-US" dirty="0"/>
+                <a:r>
+                  <a:rPr lang="en-US" dirty="0"/>
+                  <a:t> is the TD-error</a:t>
+                </a:r>
+              </a:p>
+              <a:p>
+                <a:endParaRPr lang="en-US" b="0" i="1" dirty="0">
+                  <a:latin typeface="Cambria Math" panose="02040503050406030204" pitchFamily="18" charset="0"/>
+                </a:endParaRPr>
+              </a:p>
+              <a:p>
+                <a14:m>
+                  <m:oMath xmlns:m="http://schemas.openxmlformats.org/officeDocument/2006/math">
+                    <m:sSub>
+                      <m:sSubPr>
+                        <m:ctrlPr>
+                          <a:rPr lang="en-US" b="0" i="1" smtClean="0">
+                            <a:latin typeface="Cambria Math" panose="02040503050406030204" pitchFamily="18" charset="0"/>
+                          </a:rPr>
+                        </m:ctrlPr>
+                      </m:sSubPr>
+                      <m:e>
+                        <m:r>
+                          <a:rPr lang="en-US" b="0" i="1" smtClean="0">
+                            <a:latin typeface="Cambria Math" panose="02040503050406030204" pitchFamily="18" charset="0"/>
+                          </a:rPr>
+                          <m:t>𝑧</m:t>
+                        </m:r>
+                      </m:e>
+                      <m:sub>
+                        <m:r>
+                          <a:rPr lang="en-US" b="0" i="1" smtClean="0">
+                            <a:latin typeface="Cambria Math" panose="02040503050406030204" pitchFamily="18" charset="0"/>
+                          </a:rPr>
+                          <m:t>𝑡</m:t>
+                        </m:r>
+                      </m:sub>
+                    </m:sSub>
+                  </m:oMath>
+                </a14:m>
+                <a:r>
+                  <a:rPr lang="en-US" dirty="0"/>
+                  <a:t>remembers how much to blame state for </a:t>
+                </a:r>
+                <a14:m>
+                  <m:oMath xmlns:m="http://schemas.openxmlformats.org/officeDocument/2006/math">
+                    <m:sSub>
+                      <m:sSubPr>
+                        <m:ctrlPr>
+                          <a:rPr lang="en-US" i="1">
+                            <a:latin typeface="Cambria Math" panose="02040503050406030204" pitchFamily="18" charset="0"/>
+                          </a:rPr>
+                        </m:ctrlPr>
+                      </m:sSubPr>
+                      <m:e>
+                        <m:r>
+                          <a:rPr lang="en-US" i="1">
+                            <a:latin typeface="Cambria Math" panose="02040503050406030204" pitchFamily="18" charset="0"/>
+                          </a:rPr>
+                          <m:t>𝛿</m:t>
+                        </m:r>
+                      </m:e>
+                      <m:sub>
+                        <m:r>
+                          <a:rPr lang="en-US" i="1">
+                            <a:latin typeface="Cambria Math" panose="02040503050406030204" pitchFamily="18" charset="0"/>
+                          </a:rPr>
+                          <m:t>𝑡</m:t>
+                        </m:r>
+                      </m:sub>
+                    </m:sSub>
+                  </m:oMath>
+                </a14:m>
+                <a:r>
+                  <a:rPr lang="en-US" dirty="0"/>
+                  <a:t>.</a:t>
+                </a:r>
               </a:p>
             </p:txBody>
           </p:sp>
         </mc:Choice>
-        <mc:Fallback xmlns="">
+        <mc:Fallback>
           <p:sp>
             <p:nvSpPr>
-              <p:cNvPr id="11" name="TextBox 10">
+              <p:cNvPr id="3" name="TextBox 2">
                 <a:extLst>
                   <a:ext uri="{FF2B5EF4-FFF2-40B4-BE49-F238E27FC236}">
-                    <a16:creationId xmlns:a16="http://schemas.microsoft.com/office/drawing/2014/main" id="{99931218-62BE-9701-43DE-FF542624DDB6}"/>
+                    <a16:creationId xmlns:a16="http://schemas.microsoft.com/office/drawing/2014/main" id="{7F2DE156-8CD9-6258-1FAA-DB9C5CBF9ACF}"/>
                   </a:ext>
                 </a:extLst>
               </p:cNvPr>
@@ -5176,16 +5961,16 @@
             </p:nvSpPr>
             <p:spPr>
               <a:xfrm>
-                <a:off x="6518848" y="3619087"/>
-                <a:ext cx="538393" cy="369332"/>
+                <a:off x="8699383" y="1402630"/>
+                <a:ext cx="2722227" cy="1200329"/>
               </a:xfrm>
               <a:prstGeom prst="rect">
                 <a:avLst/>
               </a:prstGeom>
               <a:blipFill>
-                <a:blip r:embed="rId4"/>
+                <a:blip r:embed="rId6"/>
                 <a:stretch>
-                  <a:fillRect/>
+                  <a:fillRect l="-1556" t="-1500" b="-6500"/>
                 </a:stretch>
               </a:blipFill>
             </p:spPr>
@@ -5204,229 +5989,6 @@
           </p:sp>
         </mc:Fallback>
       </mc:AlternateContent>
-      <mc:AlternateContent xmlns:mc="http://schemas.openxmlformats.org/markup-compatibility/2006" xmlns:a14="http://schemas.microsoft.com/office/drawing/2010/main">
-        <mc:Choice Requires="a14">
-          <p:sp>
-            <p:nvSpPr>
-              <p:cNvPr id="12" name="TextBox 11">
-                <a:extLst>
-                  <a:ext uri="{FF2B5EF4-FFF2-40B4-BE49-F238E27FC236}">
-                    <a16:creationId xmlns:a16="http://schemas.microsoft.com/office/drawing/2014/main" id="{9BEF2B6F-A91F-6A73-BE9B-2007F6B1995C}"/>
-                  </a:ext>
-                </a:extLst>
-              </p:cNvPr>
-              <p:cNvSpPr txBox="1"/>
-              <p:nvPr/>
-            </p:nvSpPr>
-            <p:spPr>
-              <a:xfrm>
-                <a:off x="8012868" y="4053714"/>
-                <a:ext cx="616470" cy="369332"/>
-              </a:xfrm>
-              <a:prstGeom prst="rect">
-                <a:avLst/>
-              </a:prstGeom>
-              <a:noFill/>
-            </p:spPr>
-            <p:txBody>
-              <a:bodyPr wrap="square">
-                <a:spAutoFit/>
-              </a:bodyPr>
-              <a:lstStyle/>
-              <a:p>
-                <a:pPr/>
-                <a14:m>
-                  <m:oMathPara xmlns:m="http://schemas.openxmlformats.org/officeDocument/2006/math">
-                    <m:oMathParaPr>
-                      <m:jc m:val="centerGroup"/>
-                    </m:oMathParaPr>
-                    <m:oMath xmlns:m="http://schemas.openxmlformats.org/officeDocument/2006/math">
-                      <m:sSub>
-                        <m:sSubPr>
-                          <m:ctrlPr>
-                            <a:rPr lang="en-US" i="1" smtClean="0">
-                              <a:latin typeface="Cambria Math" panose="02040503050406030204" pitchFamily="18" charset="0"/>
-                            </a:rPr>
-                          </m:ctrlPr>
-                        </m:sSubPr>
-                        <m:e>
-                          <m:r>
-                            <a:rPr lang="en-US" b="1" i="1" smtClean="0">
-                              <a:latin typeface="Cambria Math" panose="02040503050406030204" pitchFamily="18" charset="0"/>
-                            </a:rPr>
-                            <m:t>𝒘</m:t>
-                          </m:r>
-                        </m:e>
-                        <m:sub>
-                          <m:r>
-                            <a:rPr lang="en-US" b="0" i="1" smtClean="0">
-                              <a:latin typeface="Cambria Math" panose="02040503050406030204" pitchFamily="18" charset="0"/>
-                            </a:rPr>
-                            <m:t>𝑡</m:t>
-                          </m:r>
-                          <m:r>
-                            <a:rPr lang="en-US" b="0" i="1" smtClean="0">
-                              <a:latin typeface="Cambria Math" panose="02040503050406030204" pitchFamily="18" charset="0"/>
-                            </a:rPr>
-                            <m:t>+1</m:t>
-                          </m:r>
-                        </m:sub>
-                      </m:sSub>
-                    </m:oMath>
-                  </m:oMathPara>
-                </a14:m>
-                <a:endParaRPr lang="en-US" dirty="0"/>
-              </a:p>
-            </p:txBody>
-          </p:sp>
-        </mc:Choice>
-        <mc:Fallback xmlns="">
-          <p:sp>
-            <p:nvSpPr>
-              <p:cNvPr id="12" name="TextBox 11">
-                <a:extLst>
-                  <a:ext uri="{FF2B5EF4-FFF2-40B4-BE49-F238E27FC236}">
-                    <a16:creationId xmlns:a16="http://schemas.microsoft.com/office/drawing/2014/main" id="{9BEF2B6F-A91F-6A73-BE9B-2007F6B1995C}"/>
-                  </a:ext>
-                </a:extLst>
-              </p:cNvPr>
-              <p:cNvSpPr txBox="1">
-                <a:spLocks noRot="1" noChangeAspect="1" noMove="1" noResize="1" noEditPoints="1" noAdjustHandles="1" noChangeArrowheads="1" noChangeShapeType="1" noTextEdit="1"/>
-              </p:cNvSpPr>
-              <p:nvPr/>
-            </p:nvSpPr>
-            <p:spPr>
-              <a:xfrm>
-                <a:off x="8012868" y="4053714"/>
-                <a:ext cx="616470" cy="369332"/>
-              </a:xfrm>
-              <a:prstGeom prst="rect">
-                <a:avLst/>
-              </a:prstGeom>
-              <a:blipFill>
-                <a:blip r:embed="rId5"/>
-                <a:stretch>
-                  <a:fillRect/>
-                </a:stretch>
-              </a:blipFill>
-            </p:spPr>
-            <p:txBody>
-              <a:bodyPr/>
-              <a:lstStyle/>
-              <a:p>
-                <a:r>
-                  <a:rPr lang="en-US">
-                    <a:noFill/>
-                  </a:rPr>
-                  <a:t> </a:t>
-                </a:r>
-              </a:p>
-            </p:txBody>
-          </p:sp>
-        </mc:Fallback>
-      </mc:AlternateContent>
-      <p:grpSp>
-        <p:nvGrpSpPr>
-          <p:cNvPr id="19" name="Group 18">
-            <a:extLst>
-              <a:ext uri="{FF2B5EF4-FFF2-40B4-BE49-F238E27FC236}">
-                <a16:creationId xmlns:a16="http://schemas.microsoft.com/office/drawing/2014/main" id="{F2CEEC33-42F0-CF71-67E5-0E3B29769461}"/>
-              </a:ext>
-            </a:extLst>
-          </p:cNvPr>
-          <p:cNvGrpSpPr/>
-          <p:nvPr/>
-        </p:nvGrpSpPr>
-        <p:grpSpPr>
-          <a:xfrm>
-            <a:off x="6932951" y="3768495"/>
-            <a:ext cx="1079917" cy="469885"/>
-            <a:chOff x="6932951" y="3768495"/>
-            <a:chExt cx="1079917" cy="469885"/>
-          </a:xfrm>
-        </p:grpSpPr>
-        <p:cxnSp>
-          <p:nvCxnSpPr>
-            <p:cNvPr id="14" name="Straight Arrow Connector 13">
-              <a:extLst>
-                <a:ext uri="{FF2B5EF4-FFF2-40B4-BE49-F238E27FC236}">
-                  <a16:creationId xmlns:a16="http://schemas.microsoft.com/office/drawing/2014/main" id="{B5453FED-9076-E5A4-2B94-9A032A9FD338}"/>
-                </a:ext>
-              </a:extLst>
-            </p:cNvPr>
-            <p:cNvCxnSpPr>
-              <a:cxnSpLocks/>
-              <a:endCxn id="12" idx="1"/>
-            </p:cNvCxnSpPr>
-            <p:nvPr/>
-          </p:nvCxnSpPr>
-          <p:spPr>
-            <a:xfrm>
-              <a:off x="6932951" y="3895685"/>
-              <a:ext cx="1079917" cy="342695"/>
-            </a:xfrm>
-            <a:prstGeom prst="straightConnector1">
-              <a:avLst/>
-            </a:prstGeom>
-            <a:ln>
-              <a:tailEnd type="triangle"/>
-            </a:ln>
-          </p:spPr>
-          <p:style>
-            <a:lnRef idx="3">
-              <a:schemeClr val="accent2"/>
-            </a:lnRef>
-            <a:fillRef idx="0">
-              <a:schemeClr val="accent2"/>
-            </a:fillRef>
-            <a:effectRef idx="2">
-              <a:schemeClr val="accent2"/>
-            </a:effectRef>
-            <a:fontRef idx="minor">
-              <a:schemeClr val="tx1"/>
-            </a:fontRef>
-          </p:style>
-        </p:cxnSp>
-        <p:sp>
-          <p:nvSpPr>
-            <p:cNvPr id="18" name="TextBox 17">
-              <a:extLst>
-                <a:ext uri="{FF2B5EF4-FFF2-40B4-BE49-F238E27FC236}">
-                  <a16:creationId xmlns:a16="http://schemas.microsoft.com/office/drawing/2014/main" id="{3FF7A9AF-DCD8-97D1-286D-51D9A1170DA3}"/>
-                </a:ext>
-              </a:extLst>
-            </p:cNvPr>
-            <p:cNvSpPr txBox="1"/>
-            <p:nvPr/>
-          </p:nvSpPr>
-          <p:spPr>
-            <a:xfrm rot="1135729">
-              <a:off x="7090062" y="3768495"/>
-              <a:ext cx="889987" cy="369332"/>
-            </a:xfrm>
-            <a:prstGeom prst="rect">
-              <a:avLst/>
-            </a:prstGeom>
-            <a:noFill/>
-          </p:spPr>
-          <p:txBody>
-            <a:bodyPr wrap="none" rtlCol="0">
-              <a:spAutoFit/>
-            </a:bodyPr>
-            <a:lstStyle/>
-            <a:p>
-              <a:r>
-                <a:rPr lang="en-US" dirty="0">
-                  <a:solidFill>
-                    <a:schemeClr val="accent2"/>
-                  </a:solidFill>
-                </a:rPr>
-                <a:t>update</a:t>
-              </a:r>
-            </a:p>
-          </p:txBody>
-        </p:sp>
-      </p:grpSp>
     </p:spTree>
     <p:extLst>
       <p:ext uri="{BB962C8B-B14F-4D97-AF65-F5344CB8AC3E}">
@@ -5485,8 +6047,8 @@
           </a:p>
         </p:txBody>
       </p:sp>
-      <mc:AlternateContent xmlns:mc="http://schemas.openxmlformats.org/markup-compatibility/2006" xmlns:a14="http://schemas.microsoft.com/office/drawing/2010/main">
-        <mc:Choice Requires="a14">
+      <mc:AlternateContent xmlns:mc="http://schemas.openxmlformats.org/markup-compatibility/2006">
+        <mc:Choice xmlns:a14="http://schemas.microsoft.com/office/drawing/2010/main" Requires="a14">
           <p:sp>
             <p:nvSpPr>
               <p:cNvPr id="3" name="Content Placeholder 2">
@@ -5511,7 +6073,7 @@
             </p:spPr>
             <p:txBody>
               <a:bodyPr>
-                <a:normAutofit fontScale="62500" lnSpcReduction="20000"/>
+                <a:normAutofit fontScale="55000" lnSpcReduction="20000"/>
               </a:bodyPr>
               <a:lstStyle/>
               <a:p>
@@ -5600,7 +6162,15 @@
                 </a:br>
                 <a:r>
                   <a:rPr lang="en-US" dirty="0"/>
-                  <a:t>represent what we have learned about the value function so far = long-term memory.</a:t>
+                  <a:t>represent what we have learned about the value function so far = </a:t>
+                </a:r>
+                <a:r>
+                  <a:rPr lang="en-US" b="1" dirty="0"/>
+                  <a:t>long-term memory</a:t>
+                </a:r>
+                <a:r>
+                  <a:rPr lang="en-US" dirty="0"/>
+                  <a:t>.</a:t>
                 </a:r>
               </a:p>
               <a:p>
@@ -5701,6 +6271,9 @@
                   <a:rPr lang="en-US" dirty="0"/>
                   <a:t>: </a:t>
                 </a:r>
+                <a:br>
+                  <a:rPr lang="en-US" dirty="0"/>
+                </a:br>
                 <a14:m>
                   <m:oMath xmlns:m="http://schemas.openxmlformats.org/officeDocument/2006/math">
                     <m:sSub>
@@ -5881,6 +6454,155 @@
                     </m:d>
                   </m:oMath>
                 </a14:m>
+                <a:br>
+                  <a:rPr lang="en-US" dirty="0">
+                    <a:ea typeface="Cambria Math" panose="02040503050406030204" pitchFamily="18" charset="0"/>
+                  </a:rPr>
+                </a:br>
+                <a14:m>
+                  <m:oMath xmlns:m="http://schemas.openxmlformats.org/officeDocument/2006/math">
+                    <m:sSub>
+                      <m:sSubPr>
+                        <m:ctrlPr>
+                          <a:rPr lang="en-US" b="0" i="1" smtClean="0">
+                            <a:latin typeface="Cambria Math" panose="02040503050406030204" pitchFamily="18" charset="0"/>
+                            <a:ea typeface="Cambria Math" panose="02040503050406030204" pitchFamily="18" charset="0"/>
+                          </a:rPr>
+                        </m:ctrlPr>
+                      </m:sSubPr>
+                      <m:e>
+                        <m:r>
+                          <a:rPr lang="en-US" b="1" i="1" smtClean="0">
+                            <a:latin typeface="Cambria Math" panose="02040503050406030204" pitchFamily="18" charset="0"/>
+                            <a:ea typeface="Cambria Math" panose="02040503050406030204" pitchFamily="18" charset="0"/>
+                          </a:rPr>
+                          <m:t>𝒘</m:t>
+                        </m:r>
+                      </m:e>
+                      <m:sub>
+                        <m:r>
+                          <a:rPr lang="en-US" b="0" i="1" smtClean="0">
+                            <a:latin typeface="Cambria Math" panose="02040503050406030204" pitchFamily="18" charset="0"/>
+                            <a:ea typeface="Cambria Math" panose="02040503050406030204" pitchFamily="18" charset="0"/>
+                          </a:rPr>
+                          <m:t>𝑡</m:t>
+                        </m:r>
+                        <m:r>
+                          <a:rPr lang="en-US" b="0" i="1" smtClean="0">
+                            <a:latin typeface="Cambria Math" panose="02040503050406030204" pitchFamily="18" charset="0"/>
+                            <a:ea typeface="Cambria Math" panose="02040503050406030204" pitchFamily="18" charset="0"/>
+                          </a:rPr>
+                          <m:t>+1</m:t>
+                        </m:r>
+                      </m:sub>
+                    </m:sSub>
+                    <m:r>
+                      <a:rPr lang="en-US" b="0" i="1" smtClean="0">
+                        <a:latin typeface="Cambria Math" panose="02040503050406030204" pitchFamily="18" charset="0"/>
+                        <a:ea typeface="Cambria Math" panose="02040503050406030204" pitchFamily="18" charset="0"/>
+                      </a:rPr>
+                      <m:t>=</m:t>
+                    </m:r>
+                    <m:sSub>
+                      <m:sSubPr>
+                        <m:ctrlPr>
+                          <a:rPr lang="en-US" b="0" i="1" smtClean="0">
+                            <a:latin typeface="Cambria Math" panose="02040503050406030204" pitchFamily="18" charset="0"/>
+                            <a:ea typeface="Cambria Math" panose="02040503050406030204" pitchFamily="18" charset="0"/>
+                          </a:rPr>
+                        </m:ctrlPr>
+                      </m:sSubPr>
+                      <m:e>
+                        <m:r>
+                          <a:rPr lang="en-US" b="1" i="1" smtClean="0">
+                            <a:latin typeface="Cambria Math" panose="02040503050406030204" pitchFamily="18" charset="0"/>
+                            <a:ea typeface="Cambria Math" panose="02040503050406030204" pitchFamily="18" charset="0"/>
+                          </a:rPr>
+                          <m:t>𝒘</m:t>
+                        </m:r>
+                      </m:e>
+                      <m:sub>
+                        <m:r>
+                          <a:rPr lang="en-US" b="0" i="1" smtClean="0">
+                            <a:latin typeface="Cambria Math" panose="02040503050406030204" pitchFamily="18" charset="0"/>
+                            <a:ea typeface="Cambria Math" panose="02040503050406030204" pitchFamily="18" charset="0"/>
+                          </a:rPr>
+                          <m:t>𝑡</m:t>
+                        </m:r>
+                      </m:sub>
+                    </m:sSub>
+                    <m:r>
+                      <a:rPr lang="en-US" b="0" i="1" smtClean="0">
+                        <a:latin typeface="Cambria Math" panose="02040503050406030204" pitchFamily="18" charset="0"/>
+                        <a:ea typeface="Cambria Math" panose="02040503050406030204" pitchFamily="18" charset="0"/>
+                      </a:rPr>
+                      <m:t>+</m:t>
+                    </m:r>
+                    <m:r>
+                      <a:rPr lang="en-US" b="0" i="1" smtClean="0">
+                        <a:latin typeface="Cambria Math" panose="02040503050406030204" pitchFamily="18" charset="0"/>
+                        <a:ea typeface="Cambria Math" panose="02040503050406030204" pitchFamily="18" charset="0"/>
+                      </a:rPr>
+                      <m:t>𝛼</m:t>
+                    </m:r>
+                    <m:sSub>
+                      <m:sSubPr>
+                        <m:ctrlPr>
+                          <a:rPr lang="en-US" b="0" i="1" smtClean="0">
+                            <a:latin typeface="Cambria Math" panose="02040503050406030204" pitchFamily="18" charset="0"/>
+                            <a:ea typeface="Cambria Math" panose="02040503050406030204" pitchFamily="18" charset="0"/>
+                          </a:rPr>
+                        </m:ctrlPr>
+                      </m:sSubPr>
+                      <m:e>
+                        <m:r>
+                          <a:rPr lang="en-US" b="0" i="1" smtClean="0">
+                            <a:latin typeface="Cambria Math" panose="02040503050406030204" pitchFamily="18" charset="0"/>
+                            <a:ea typeface="Cambria Math" panose="02040503050406030204" pitchFamily="18" charset="0"/>
+                          </a:rPr>
+                          <m:t>𝛿</m:t>
+                        </m:r>
+                      </m:e>
+                      <m:sub>
+                        <m:r>
+                          <a:rPr lang="en-US" b="0" i="1" smtClean="0">
+                            <a:latin typeface="Cambria Math" panose="02040503050406030204" pitchFamily="18" charset="0"/>
+                            <a:ea typeface="Cambria Math" panose="02040503050406030204" pitchFamily="18" charset="0"/>
+                          </a:rPr>
+                          <m:t>𝑡</m:t>
+                        </m:r>
+                      </m:sub>
+                    </m:sSub>
+                    <m:sSub>
+                      <m:sSubPr>
+                        <m:ctrlPr>
+                          <a:rPr lang="en-US" b="0" i="1" smtClean="0">
+                            <a:latin typeface="Cambria Math" panose="02040503050406030204" pitchFamily="18" charset="0"/>
+                            <a:ea typeface="Cambria Math" panose="02040503050406030204" pitchFamily="18" charset="0"/>
+                          </a:rPr>
+                        </m:ctrlPr>
+                      </m:sSubPr>
+                      <m:e>
+                        <m:r>
+                          <a:rPr lang="en-US" b="1" i="1" smtClean="0">
+                            <a:latin typeface="Cambria Math" panose="02040503050406030204" pitchFamily="18" charset="0"/>
+                            <a:ea typeface="Cambria Math" panose="02040503050406030204" pitchFamily="18" charset="0"/>
+                          </a:rPr>
+                          <m:t>𝒛</m:t>
+                        </m:r>
+                      </m:e>
+                      <m:sub>
+                        <m:r>
+                          <a:rPr lang="en-US" b="0" i="1" smtClean="0">
+                            <a:latin typeface="Cambria Math" panose="02040503050406030204" pitchFamily="18" charset="0"/>
+                            <a:ea typeface="Cambria Math" panose="02040503050406030204" pitchFamily="18" charset="0"/>
+                          </a:rPr>
+                          <m:t>𝑡</m:t>
+                        </m:r>
+                      </m:sub>
+                    </m:sSub>
+                  </m:oMath>
+                </a14:m>
                 <a:endParaRPr lang="en-US" dirty="0">
                   <a:ea typeface="Cambria Math" panose="02040503050406030204" pitchFamily="18" charset="0"/>
                 </a:endParaRPr>
@@ -5924,7 +6646,7 @@
                 </a14:m>
                 <a:r>
                   <a:rPr lang="en-US" dirty="0"/>
-                  <a:t> keeps track of which component in </a:t>
+                  <a:t> keeps track of how much each component in </a:t>
                 </a:r>
                 <a14:m>
                   <m:oMath xmlns:m="http://schemas.openxmlformats.org/officeDocument/2006/math">
@@ -5957,7 +6679,15 @@
                 </a14:m>
                 <a:r>
                   <a:rPr lang="en-US" dirty="0"/>
-                  <a:t> contributed to the recent state valuation.</a:t>
+                  <a:t> contributed to the recent state valuation (sum of gradients). This is a </a:t>
+                </a:r>
+                <a:r>
+                  <a:rPr lang="en-US" b="1" dirty="0"/>
+                  <a:t>short-term memory</a:t>
+                </a:r>
+                <a:r>
+                  <a:rPr lang="en-US" dirty="0"/>
+                  <a:t>.</a:t>
                 </a:r>
               </a:p>
               <a:p>
@@ -5996,7 +6726,15 @@
                 </a14:m>
                 <a:r>
                   <a:rPr lang="en-US" dirty="0"/>
-                  <a:t> shows the eligibility of each component of </a:t>
+                  <a:t> shows the </a:t>
+                </a:r>
+                <a:r>
+                  <a:rPr lang="en-US" b="1" dirty="0"/>
+                  <a:t>eligibility</a:t>
+                </a:r>
+                <a:r>
+                  <a:rPr lang="en-US" dirty="0"/>
+                  <a:t> of each component of </a:t>
                 </a:r>
                 <a14:m>
                   <m:oMath xmlns:m="http://schemas.openxmlformats.org/officeDocument/2006/math">
@@ -6033,11 +6771,8 @@
                 </a:r>
                 <a:r>
                   <a:rPr lang="en-US" dirty="0"/>
-                  <a:t>to undergo learning changes when a reinforcement event happens. </a:t>
-                </a:r>
-              </a:p>
-              <a:p>
-                <a:endParaRPr lang="en-US" dirty="0"/>
+                  <a:t>to undergo learning changes when a reinforcement event happens. It is a weighted sum of past gradients.</a:t>
+                </a:r>
               </a:p>
               <a:p>
                 <a:endParaRPr lang="en-US" dirty="0"/>
@@ -6045,7 +6780,7 @@
             </p:txBody>
           </p:sp>
         </mc:Choice>
-        <mc:Fallback xmlns="">
+        <mc:Fallback>
           <p:sp>
             <p:nvSpPr>
               <p:cNvPr id="3" name="Content Placeholder 2">
@@ -6070,7 +6805,7 @@
               <a:blipFill>
                 <a:blip r:embed="rId2"/>
                 <a:stretch>
-                  <a:fillRect l="-657" t="-1859" r="-876"/>
+                  <a:fillRect l="-219" t="-1239" r="-438"/>
                 </a:stretch>
               </a:blipFill>
             </p:spPr>
@@ -6089,38 +6824,375 @@
           </p:sp>
         </mc:Fallback>
       </mc:AlternateContent>
-      <p:pic>
-        <p:nvPicPr>
-          <p:cNvPr id="4" name="Picture 3">
+      <p:grpSp>
+        <p:nvGrpSpPr>
+          <p:cNvPr id="18" name="Group 17">
             <a:extLst>
               <a:ext uri="{FF2B5EF4-FFF2-40B4-BE49-F238E27FC236}">
-                <a16:creationId xmlns:a16="http://schemas.microsoft.com/office/drawing/2014/main" id="{0113900C-F2B0-BAB2-F576-3E82F4E85FD8}"/>
+                <a16:creationId xmlns:a16="http://schemas.microsoft.com/office/drawing/2014/main" id="{86273108-0757-82D9-3CC1-E6ED941AE347}"/>
               </a:ext>
             </a:extLst>
           </p:cNvPr>
-          <p:cNvPicPr>
-            <a:picLocks noChangeAspect="1"/>
-          </p:cNvPicPr>
+          <p:cNvGrpSpPr/>
           <p:nvPr/>
-        </p:nvPicPr>
-        <p:blipFill>
-          <a:blip r:embed="rId2"/>
-          <a:stretch>
-            <a:fillRect/>
-          </a:stretch>
-        </p:blipFill>
-        <p:spPr>
+        </p:nvGrpSpPr>
+        <p:grpSpPr>
           <a:xfrm>
-            <a:off x="6227165" y="1397331"/>
-            <a:ext cx="5321508" cy="2363253"/>
+            <a:off x="6400800" y="1434518"/>
+            <a:ext cx="5364787" cy="2490088"/>
+            <a:chOff x="6400800" y="1434518"/>
+            <a:chExt cx="5364787" cy="2490088"/>
           </a:xfrm>
-          <a:prstGeom prst="rect">
-            <a:avLst/>
-          </a:prstGeom>
-        </p:spPr>
-      </p:pic>
-      <mc:AlternateContent xmlns:mc="http://schemas.openxmlformats.org/markup-compatibility/2006" xmlns:a14="http://schemas.microsoft.com/office/drawing/2010/main">
-        <mc:Choice Requires="a14">
+        </p:grpSpPr>
+        <p:pic>
+          <p:nvPicPr>
+            <p:cNvPr id="7" name="Picture 6">
+              <a:extLst>
+                <a:ext uri="{FF2B5EF4-FFF2-40B4-BE49-F238E27FC236}">
+                  <a16:creationId xmlns:a16="http://schemas.microsoft.com/office/drawing/2014/main" id="{C2D0E44C-6361-FF1D-4C5B-1D96D2497C06}"/>
+                </a:ext>
+              </a:extLst>
+            </p:cNvPr>
+            <p:cNvPicPr>
+              <a:picLocks noChangeAspect="1"/>
+            </p:cNvPicPr>
+            <p:nvPr/>
+          </p:nvPicPr>
+          <p:blipFill>
+            <a:blip r:embed="rId3"/>
+            <a:stretch>
+              <a:fillRect/>
+            </a:stretch>
+          </p:blipFill>
+          <p:spPr>
+            <a:xfrm>
+              <a:off x="6400800" y="1434518"/>
+              <a:ext cx="5364787" cy="2382473"/>
+            </a:xfrm>
+            <a:prstGeom prst="rect">
+              <a:avLst/>
+            </a:prstGeom>
+          </p:spPr>
+        </p:pic>
+        <mc:AlternateContent xmlns:mc="http://schemas.openxmlformats.org/markup-compatibility/2006">
+          <mc:Choice xmlns:a14="http://schemas.microsoft.com/office/drawing/2010/main" Requires="a14">
+            <p:sp>
+              <p:nvSpPr>
+                <p:cNvPr id="13" name="TextBox 12">
+                  <a:extLst>
+                    <a:ext uri="{FF2B5EF4-FFF2-40B4-BE49-F238E27FC236}">
+                      <a16:creationId xmlns:a16="http://schemas.microsoft.com/office/drawing/2014/main" id="{17E1B7AD-D5E2-146D-698D-E658F9A14FE8}"/>
+                    </a:ext>
+                  </a:extLst>
+                </p:cNvPr>
+                <p:cNvSpPr txBox="1"/>
+                <p:nvPr/>
+              </p:nvSpPr>
+              <p:spPr>
+                <a:xfrm>
+                  <a:off x="9725586" y="3385530"/>
+                  <a:ext cx="538393" cy="276999"/>
+                </a:xfrm>
+                <a:prstGeom prst="rect">
+                  <a:avLst/>
+                </a:prstGeom>
+                <a:noFill/>
+              </p:spPr>
+              <p:txBody>
+                <a:bodyPr wrap="square">
+                  <a:spAutoFit/>
+                </a:bodyPr>
+                <a:lstStyle/>
+                <a:p>
+                  <a:pPr/>
+                  <a14:m>
+                    <m:oMathPara xmlns:m="http://schemas.openxmlformats.org/officeDocument/2006/math">
+                      <m:oMathParaPr>
+                        <m:jc m:val="centerGroup"/>
+                      </m:oMathParaPr>
+                      <m:oMath xmlns:m="http://schemas.openxmlformats.org/officeDocument/2006/math">
+                        <m:sSub>
+                          <m:sSubPr>
+                            <m:ctrlPr>
+                              <a:rPr lang="en-US" sz="1200" i="1" smtClean="0">
+                                <a:latin typeface="Cambria Math" panose="02040503050406030204" pitchFamily="18" charset="0"/>
+                              </a:rPr>
+                            </m:ctrlPr>
+                          </m:sSubPr>
+                          <m:e>
+                            <m:r>
+                              <a:rPr lang="en-US" sz="1200" b="1" i="1" smtClean="0">
+                                <a:latin typeface="Cambria Math" panose="02040503050406030204" pitchFamily="18" charset="0"/>
+                              </a:rPr>
+                              <m:t>𝒘</m:t>
+                            </m:r>
+                          </m:e>
+                          <m:sub>
+                            <m:r>
+                              <a:rPr lang="en-US" sz="1200" b="0" i="1" smtClean="0">
+                                <a:latin typeface="Cambria Math" panose="02040503050406030204" pitchFamily="18" charset="0"/>
+                              </a:rPr>
+                              <m:t>𝑡</m:t>
+                            </m:r>
+                          </m:sub>
+                        </m:sSub>
+                      </m:oMath>
+                    </m:oMathPara>
+                  </a14:m>
+                  <a:endParaRPr lang="en-US" sz="1200" dirty="0"/>
+                </a:p>
+              </p:txBody>
+            </p:sp>
+          </mc:Choice>
+          <mc:Fallback>
+            <p:sp>
+              <p:nvSpPr>
+                <p:cNvPr id="13" name="TextBox 12">
+                  <a:extLst>
+                    <a:ext uri="{FF2B5EF4-FFF2-40B4-BE49-F238E27FC236}">
+                      <a16:creationId xmlns:a16="http://schemas.microsoft.com/office/drawing/2014/main" id="{17E1B7AD-D5E2-146D-698D-E658F9A14FE8}"/>
+                    </a:ext>
+                  </a:extLst>
+                </p:cNvPr>
+                <p:cNvSpPr txBox="1">
+                  <a:spLocks noRot="1" noChangeAspect="1" noMove="1" noResize="1" noEditPoints="1" noAdjustHandles="1" noChangeArrowheads="1" noChangeShapeType="1" noTextEdit="1"/>
+                </p:cNvSpPr>
+                <p:nvPr/>
+              </p:nvSpPr>
+              <p:spPr>
+                <a:xfrm>
+                  <a:off x="9725586" y="3385530"/>
+                  <a:ext cx="538393" cy="276999"/>
+                </a:xfrm>
+                <a:prstGeom prst="rect">
+                  <a:avLst/>
+                </a:prstGeom>
+                <a:blipFill>
+                  <a:blip r:embed="rId4"/>
+                  <a:stretch>
+                    <a:fillRect/>
+                  </a:stretch>
+                </a:blipFill>
+              </p:spPr>
+              <p:txBody>
+                <a:bodyPr/>
+                <a:lstStyle/>
+                <a:p>
+                  <a:r>
+                    <a:rPr lang="en-US">
+                      <a:noFill/>
+                    </a:rPr>
+                    <a:t> </a:t>
+                  </a:r>
+                </a:p>
+              </p:txBody>
+            </p:sp>
+          </mc:Fallback>
+        </mc:AlternateContent>
+        <mc:AlternateContent xmlns:mc="http://schemas.openxmlformats.org/markup-compatibility/2006">
+          <mc:Choice xmlns:a14="http://schemas.microsoft.com/office/drawing/2010/main" Requires="a14">
+            <p:sp>
+              <p:nvSpPr>
+                <p:cNvPr id="14" name="TextBox 13">
+                  <a:extLst>
+                    <a:ext uri="{FF2B5EF4-FFF2-40B4-BE49-F238E27FC236}">
+                      <a16:creationId xmlns:a16="http://schemas.microsoft.com/office/drawing/2014/main" id="{6E4BDAC7-11A9-01B8-0CE4-EB6BD229A090}"/>
+                    </a:ext>
+                  </a:extLst>
+                </p:cNvPr>
+                <p:cNvSpPr txBox="1"/>
+                <p:nvPr/>
+              </p:nvSpPr>
+              <p:spPr>
+                <a:xfrm>
+                  <a:off x="10877249" y="3647607"/>
+                  <a:ext cx="616470" cy="276999"/>
+                </a:xfrm>
+                <a:prstGeom prst="rect">
+                  <a:avLst/>
+                </a:prstGeom>
+                <a:noFill/>
+              </p:spPr>
+              <p:txBody>
+                <a:bodyPr wrap="square">
+                  <a:spAutoFit/>
+                </a:bodyPr>
+                <a:lstStyle/>
+                <a:p>
+                  <a:pPr/>
+                  <a14:m>
+                    <m:oMathPara xmlns:m="http://schemas.openxmlformats.org/officeDocument/2006/math">
+                      <m:oMathParaPr>
+                        <m:jc m:val="centerGroup"/>
+                      </m:oMathParaPr>
+                      <m:oMath xmlns:m="http://schemas.openxmlformats.org/officeDocument/2006/math">
+                        <m:sSub>
+                          <m:sSubPr>
+                            <m:ctrlPr>
+                              <a:rPr lang="en-US" sz="1200" i="1" smtClean="0">
+                                <a:latin typeface="Cambria Math" panose="02040503050406030204" pitchFamily="18" charset="0"/>
+                              </a:rPr>
+                            </m:ctrlPr>
+                          </m:sSubPr>
+                          <m:e>
+                            <m:r>
+                              <a:rPr lang="en-US" sz="1200" b="1" i="1" smtClean="0">
+                                <a:latin typeface="Cambria Math" panose="02040503050406030204" pitchFamily="18" charset="0"/>
+                              </a:rPr>
+                              <m:t>𝒘</m:t>
+                            </m:r>
+                          </m:e>
+                          <m:sub>
+                            <m:r>
+                              <a:rPr lang="en-US" sz="1200" b="0" i="1" smtClean="0">
+                                <a:latin typeface="Cambria Math" panose="02040503050406030204" pitchFamily="18" charset="0"/>
+                              </a:rPr>
+                              <m:t>𝑡</m:t>
+                            </m:r>
+                            <m:r>
+                              <a:rPr lang="en-US" sz="1200" b="0" i="1" smtClean="0">
+                                <a:latin typeface="Cambria Math" panose="02040503050406030204" pitchFamily="18" charset="0"/>
+                              </a:rPr>
+                              <m:t>+1</m:t>
+                            </m:r>
+                          </m:sub>
+                        </m:sSub>
+                      </m:oMath>
+                    </m:oMathPara>
+                  </a14:m>
+                  <a:endParaRPr lang="en-US" sz="1200" dirty="0"/>
+                </a:p>
+              </p:txBody>
+            </p:sp>
+          </mc:Choice>
+          <mc:Fallback>
+            <p:sp>
+              <p:nvSpPr>
+                <p:cNvPr id="14" name="TextBox 13">
+                  <a:extLst>
+                    <a:ext uri="{FF2B5EF4-FFF2-40B4-BE49-F238E27FC236}">
+                      <a16:creationId xmlns:a16="http://schemas.microsoft.com/office/drawing/2014/main" id="{6E4BDAC7-11A9-01B8-0CE4-EB6BD229A090}"/>
+                    </a:ext>
+                  </a:extLst>
+                </p:cNvPr>
+                <p:cNvSpPr txBox="1">
+                  <a:spLocks noRot="1" noChangeAspect="1" noMove="1" noResize="1" noEditPoints="1" noAdjustHandles="1" noChangeArrowheads="1" noChangeShapeType="1" noTextEdit="1"/>
+                </p:cNvSpPr>
+                <p:nvPr/>
+              </p:nvSpPr>
+              <p:spPr>
+                <a:xfrm>
+                  <a:off x="10877249" y="3647607"/>
+                  <a:ext cx="616470" cy="276999"/>
+                </a:xfrm>
+                <a:prstGeom prst="rect">
+                  <a:avLst/>
+                </a:prstGeom>
+                <a:blipFill>
+                  <a:blip r:embed="rId5"/>
+                  <a:stretch>
+                    <a:fillRect/>
+                  </a:stretch>
+                </a:blipFill>
+              </p:spPr>
+              <p:txBody>
+                <a:bodyPr/>
+                <a:lstStyle/>
+                <a:p>
+                  <a:r>
+                    <a:rPr lang="en-US">
+                      <a:noFill/>
+                    </a:rPr>
+                    <a:t> </a:t>
+                  </a:r>
+                </a:p>
+              </p:txBody>
+            </p:sp>
+          </mc:Fallback>
+        </mc:AlternateContent>
+        <p:cxnSp>
+          <p:nvCxnSpPr>
+            <p:cNvPr id="15" name="Straight Arrow Connector 14">
+              <a:extLst>
+                <a:ext uri="{FF2B5EF4-FFF2-40B4-BE49-F238E27FC236}">
+                  <a16:creationId xmlns:a16="http://schemas.microsoft.com/office/drawing/2014/main" id="{F20C3EF6-45C9-CEA4-CAF4-7DC4E8295964}"/>
+                </a:ext>
+              </a:extLst>
+            </p:cNvPr>
+            <p:cNvCxnSpPr>
+              <a:cxnSpLocks/>
+            </p:cNvCxnSpPr>
+            <p:nvPr/>
+          </p:nvCxnSpPr>
+          <p:spPr>
+            <a:xfrm>
+              <a:off x="10189101" y="3599950"/>
+              <a:ext cx="709850" cy="158029"/>
+            </a:xfrm>
+            <a:prstGeom prst="straightConnector1">
+              <a:avLst/>
+            </a:prstGeom>
+            <a:ln>
+              <a:tailEnd type="triangle"/>
+            </a:ln>
+          </p:spPr>
+          <p:style>
+            <a:lnRef idx="3">
+              <a:schemeClr val="accent2"/>
+            </a:lnRef>
+            <a:fillRef idx="0">
+              <a:schemeClr val="accent2"/>
+            </a:fillRef>
+            <a:effectRef idx="2">
+              <a:schemeClr val="accent2"/>
+            </a:effectRef>
+            <a:fontRef idx="minor">
+              <a:schemeClr val="tx1"/>
+            </a:fontRef>
+          </p:style>
+        </p:cxnSp>
+        <p:sp>
+          <p:nvSpPr>
+            <p:cNvPr id="16" name="TextBox 15">
+              <a:extLst>
+                <a:ext uri="{FF2B5EF4-FFF2-40B4-BE49-F238E27FC236}">
+                  <a16:creationId xmlns:a16="http://schemas.microsoft.com/office/drawing/2014/main" id="{071B9E28-149A-64C8-F045-86A88F3B55A6}"/>
+                </a:ext>
+              </a:extLst>
+            </p:cNvPr>
+            <p:cNvSpPr txBox="1"/>
+            <p:nvPr/>
+          </p:nvSpPr>
+          <p:spPr>
+            <a:xfrm rot="677913">
+              <a:off x="10216309" y="3419458"/>
+              <a:ext cx="655436" cy="276999"/>
+            </a:xfrm>
+            <a:prstGeom prst="rect">
+              <a:avLst/>
+            </a:prstGeom>
+            <a:noFill/>
+          </p:spPr>
+          <p:txBody>
+            <a:bodyPr wrap="square" rtlCol="0">
+              <a:spAutoFit/>
+            </a:bodyPr>
+            <a:lstStyle/>
+            <a:p>
+              <a:r>
+                <a:rPr lang="en-US" sz="1200" dirty="0">
+                  <a:solidFill>
+                    <a:schemeClr val="accent2"/>
+                  </a:solidFill>
+                </a:rPr>
+                <a:t>update</a:t>
+              </a:r>
+            </a:p>
+          </p:txBody>
+        </p:sp>
+      </p:grpSp>
+      <mc:AlternateContent xmlns:mc="http://schemas.openxmlformats.org/markup-compatibility/2006">
+        <mc:Choice xmlns:a14="http://schemas.microsoft.com/office/drawing/2010/main" Requires="a14">
           <p:sp>
             <p:nvSpPr>
               <p:cNvPr id="5" name="Arrow: Right 4">
@@ -6164,13 +7236,13 @@
               <a:p>
                 <a:pPr algn="ctr"/>
                 <a:r>
-                  <a:rPr lang="en-US" dirty="0"/>
+                  <a:rPr lang="en-US" sz="1600" dirty="0"/>
                   <a:t>The effect of </a:t>
                 </a:r>
                 <a14:m>
                   <m:oMath xmlns:m="http://schemas.openxmlformats.org/officeDocument/2006/math">
                     <m:r>
-                      <a:rPr lang="en-US" b="1" i="1" smtClean="0">
+                      <a:rPr lang="en-US" sz="1600" b="1" i="1" smtClean="0">
                         <a:latin typeface="Cambria Math" panose="02040503050406030204" pitchFamily="18" charset="0"/>
                       </a:rPr>
                       <m:t>𝒛</m:t>
@@ -6178,13 +7250,13 @@
                   </m:oMath>
                 </a14:m>
                 <a:r>
-                  <a:rPr lang="en-US" dirty="0"/>
+                  <a:rPr lang="en-US" sz="1600" dirty="0"/>
                   <a:t> fades with the discount factor </a:t>
                 </a:r>
                 <a14:m>
                   <m:oMath xmlns:m="http://schemas.openxmlformats.org/officeDocument/2006/math">
                     <m:r>
-                      <a:rPr lang="en-US" b="0" i="1" smtClean="0">
+                      <a:rPr lang="en-US" sz="1600" b="0" i="1" smtClean="0">
                         <a:latin typeface="Cambria Math" panose="02040503050406030204" pitchFamily="18" charset="0"/>
                       </a:rPr>
                       <m:t>𝛾</m:t>
@@ -6192,35 +7264,32 @@
                   </m:oMath>
                 </a14:m>
                 <a:r>
-                  <a:rPr lang="en-US" b="1" dirty="0"/>
-                  <a:t> </a:t>
-                </a:r>
-                <a:r>
-                  <a:rPr lang="en-US" dirty="0"/>
-                  <a:t>and </a:t>
+                  <a:rPr lang="en-US" sz="1600" b="1" dirty="0"/>
+                  <a:t> and </a:t>
+                </a:r>
+                <a:r>
+                  <a:rPr lang="en-US" sz="1600" dirty="0"/>
+                  <a:t>the trace-decay factor </a:t>
                 </a:r>
                 <a14:m>
                   <m:oMath xmlns:m="http://schemas.openxmlformats.org/officeDocument/2006/math">
                     <m:r>
-                      <a:rPr lang="en-US" b="0" i="1" smtClean="0">
+                      <a:rPr lang="en-US" sz="1600" i="1">
                         <a:latin typeface="Cambria Math" panose="02040503050406030204" pitchFamily="18" charset="0"/>
                       </a:rPr>
                       <m:t>𝜆</m:t>
-                    </m:r>
-                    <m:r>
-                      <a:rPr lang="en-US" b="0" i="1" smtClean="0">
-                        <a:latin typeface="Cambria Math" panose="02040503050406030204" pitchFamily="18" charset="0"/>
-                      </a:rPr>
-                      <m:t>. </m:t>
                     </m:r>
                   </m:oMath>
                 </a14:m>
-                <a:endParaRPr lang="en-US" b="1" dirty="0"/>
+                <a:r>
+                  <a:rPr lang="en-US" sz="1600" b="1" dirty="0"/>
+                  <a:t>.</a:t>
+                </a:r>
               </a:p>
             </p:txBody>
           </p:sp>
         </mc:Choice>
-        <mc:Fallback xmlns="">
+        <mc:Fallback>
           <p:sp>
             <p:nvSpPr>
               <p:cNvPr id="5" name="Arrow: Right 4">
@@ -6244,7 +7313,7 @@
                 <a:avLst/>
               </a:prstGeom>
               <a:blipFill>
-                <a:blip r:embed="rId4"/>
+                <a:blip r:embed="rId6"/>
                 <a:stretch>
                   <a:fillRect/>
                 </a:stretch>
@@ -6275,6 +7344,294 @@
   <p:clrMapOvr>
     <a:masterClrMapping/>
   </p:clrMapOvr>
+  <p:timing>
+    <p:tnLst>
+      <p:par>
+        <p:cTn id="1" dur="indefinite" restart="never" nodeType="tmRoot">
+          <p:childTnLst>
+            <p:seq concurrent="1" nextAc="seek">
+              <p:cTn id="2" dur="indefinite" nodeType="mainSeq">
+                <p:childTnLst>
+                  <p:par>
+                    <p:cTn id="3" fill="hold">
+                      <p:stCondLst>
+                        <p:cond delay="indefinite"/>
+                      </p:stCondLst>
+                      <p:childTnLst>
+                        <p:par>
+                          <p:cTn id="4" fill="hold">
+                            <p:stCondLst>
+                              <p:cond delay="0"/>
+                            </p:stCondLst>
+                            <p:childTnLst>
+                              <p:par>
+                                <p:cTn id="5" presetID="1" presetClass="entr" presetSubtype="0" fill="hold" grpId="0" nodeType="clickEffect">
+                                  <p:stCondLst>
+                                    <p:cond delay="0"/>
+                                  </p:stCondLst>
+                                  <p:childTnLst>
+                                    <p:set>
+                                      <p:cBhvr>
+                                        <p:cTn id="6" dur="1" fill="hold">
+                                          <p:stCondLst>
+                                            <p:cond delay="0"/>
+                                          </p:stCondLst>
+                                        </p:cTn>
+                                        <p:tgtEl>
+                                          <p:spTgt spid="3">
+                                            <p:txEl>
+                                              <p:pRg st="0" end="0"/>
+                                            </p:txEl>
+                                          </p:spTgt>
+                                        </p:tgtEl>
+                                        <p:attrNameLst>
+                                          <p:attrName>style.visibility</p:attrName>
+                                        </p:attrNameLst>
+                                      </p:cBhvr>
+                                      <p:to>
+                                        <p:strVal val="visible"/>
+                                      </p:to>
+                                    </p:set>
+                                  </p:childTnLst>
+                                </p:cTn>
+                              </p:par>
+                            </p:childTnLst>
+                          </p:cTn>
+                        </p:par>
+                      </p:childTnLst>
+                    </p:cTn>
+                  </p:par>
+                  <p:par>
+                    <p:cTn id="7" fill="hold">
+                      <p:stCondLst>
+                        <p:cond delay="indefinite"/>
+                      </p:stCondLst>
+                      <p:childTnLst>
+                        <p:par>
+                          <p:cTn id="8" fill="hold">
+                            <p:stCondLst>
+                              <p:cond delay="0"/>
+                            </p:stCondLst>
+                            <p:childTnLst>
+                              <p:par>
+                                <p:cTn id="9" presetID="1" presetClass="entr" presetSubtype="0" fill="hold" grpId="0" nodeType="clickEffect">
+                                  <p:stCondLst>
+                                    <p:cond delay="0"/>
+                                  </p:stCondLst>
+                                  <p:childTnLst>
+                                    <p:set>
+                                      <p:cBhvr>
+                                        <p:cTn id="10" dur="1" fill="hold">
+                                          <p:stCondLst>
+                                            <p:cond delay="0"/>
+                                          </p:stCondLst>
+                                        </p:cTn>
+                                        <p:tgtEl>
+                                          <p:spTgt spid="3">
+                                            <p:txEl>
+                                              <p:pRg st="2" end="2"/>
+                                            </p:txEl>
+                                          </p:spTgt>
+                                        </p:tgtEl>
+                                        <p:attrNameLst>
+                                          <p:attrName>style.visibility</p:attrName>
+                                        </p:attrNameLst>
+                                      </p:cBhvr>
+                                      <p:to>
+                                        <p:strVal val="visible"/>
+                                      </p:to>
+                                    </p:set>
+                                  </p:childTnLst>
+                                </p:cTn>
+                              </p:par>
+                            </p:childTnLst>
+                          </p:cTn>
+                        </p:par>
+                      </p:childTnLst>
+                    </p:cTn>
+                  </p:par>
+                  <p:par>
+                    <p:cTn id="11" fill="hold">
+                      <p:stCondLst>
+                        <p:cond delay="indefinite"/>
+                      </p:stCondLst>
+                      <p:childTnLst>
+                        <p:par>
+                          <p:cTn id="12" fill="hold">
+                            <p:stCondLst>
+                              <p:cond delay="0"/>
+                            </p:stCondLst>
+                            <p:childTnLst>
+                              <p:par>
+                                <p:cTn id="13" presetID="1" presetClass="entr" presetSubtype="0" fill="hold" grpId="0" nodeType="clickEffect">
+                                  <p:stCondLst>
+                                    <p:cond delay="0"/>
+                                  </p:stCondLst>
+                                  <p:childTnLst>
+                                    <p:set>
+                                      <p:cBhvr>
+                                        <p:cTn id="14" dur="1" fill="hold">
+                                          <p:stCondLst>
+                                            <p:cond delay="0"/>
+                                          </p:stCondLst>
+                                        </p:cTn>
+                                        <p:tgtEl>
+                                          <p:spTgt spid="3">
+                                            <p:txEl>
+                                              <p:pRg st="3" end="3"/>
+                                            </p:txEl>
+                                          </p:spTgt>
+                                        </p:tgtEl>
+                                        <p:attrNameLst>
+                                          <p:attrName>style.visibility</p:attrName>
+                                        </p:attrNameLst>
+                                      </p:cBhvr>
+                                      <p:to>
+                                        <p:strVal val="visible"/>
+                                      </p:to>
+                                    </p:set>
+                                  </p:childTnLst>
+                                </p:cTn>
+                              </p:par>
+                              <p:par>
+                                <p:cTn id="15" presetID="1" presetClass="entr" presetSubtype="0" fill="hold" grpId="0" nodeType="withEffect">
+                                  <p:stCondLst>
+                                    <p:cond delay="0"/>
+                                  </p:stCondLst>
+                                  <p:childTnLst>
+                                    <p:set>
+                                      <p:cBhvr>
+                                        <p:cTn id="16" dur="1" fill="hold">
+                                          <p:stCondLst>
+                                            <p:cond delay="0"/>
+                                          </p:stCondLst>
+                                        </p:cTn>
+                                        <p:tgtEl>
+                                          <p:spTgt spid="5"/>
+                                        </p:tgtEl>
+                                        <p:attrNameLst>
+                                          <p:attrName>style.visibility</p:attrName>
+                                        </p:attrNameLst>
+                                      </p:cBhvr>
+                                      <p:to>
+                                        <p:strVal val="visible"/>
+                                      </p:to>
+                                    </p:set>
+                                  </p:childTnLst>
+                                </p:cTn>
+                              </p:par>
+                            </p:childTnLst>
+                          </p:cTn>
+                        </p:par>
+                      </p:childTnLst>
+                    </p:cTn>
+                  </p:par>
+                  <p:par>
+                    <p:cTn id="17" fill="hold">
+                      <p:stCondLst>
+                        <p:cond delay="indefinite"/>
+                      </p:stCondLst>
+                      <p:childTnLst>
+                        <p:par>
+                          <p:cTn id="18" fill="hold">
+                            <p:stCondLst>
+                              <p:cond delay="0"/>
+                            </p:stCondLst>
+                            <p:childTnLst>
+                              <p:par>
+                                <p:cTn id="19" presetID="1" presetClass="entr" presetSubtype="0" fill="hold" grpId="0" nodeType="clickEffect">
+                                  <p:stCondLst>
+                                    <p:cond delay="0"/>
+                                  </p:stCondLst>
+                                  <p:childTnLst>
+                                    <p:set>
+                                      <p:cBhvr>
+                                        <p:cTn id="20" dur="1" fill="hold">
+                                          <p:stCondLst>
+                                            <p:cond delay="0"/>
+                                          </p:stCondLst>
+                                        </p:cTn>
+                                        <p:tgtEl>
+                                          <p:spTgt spid="3">
+                                            <p:txEl>
+                                              <p:pRg st="5" end="5"/>
+                                            </p:txEl>
+                                          </p:spTgt>
+                                        </p:tgtEl>
+                                        <p:attrNameLst>
+                                          <p:attrName>style.visibility</p:attrName>
+                                        </p:attrNameLst>
+                                      </p:cBhvr>
+                                      <p:to>
+                                        <p:strVal val="visible"/>
+                                      </p:to>
+                                    </p:set>
+                                  </p:childTnLst>
+                                </p:cTn>
+                              </p:par>
+                              <p:par>
+                                <p:cTn id="21" presetID="1" presetClass="entr" presetSubtype="0" fill="hold" grpId="0" nodeType="withEffect">
+                                  <p:stCondLst>
+                                    <p:cond delay="0"/>
+                                  </p:stCondLst>
+                                  <p:childTnLst>
+                                    <p:set>
+                                      <p:cBhvr>
+                                        <p:cTn id="22" dur="1" fill="hold">
+                                          <p:stCondLst>
+                                            <p:cond delay="0"/>
+                                          </p:stCondLst>
+                                        </p:cTn>
+                                        <p:tgtEl>
+                                          <p:spTgt spid="3">
+                                            <p:txEl>
+                                              <p:pRg st="6" end="6"/>
+                                            </p:txEl>
+                                          </p:spTgt>
+                                        </p:tgtEl>
+                                        <p:attrNameLst>
+                                          <p:attrName>style.visibility</p:attrName>
+                                        </p:attrNameLst>
+                                      </p:cBhvr>
+                                      <p:to>
+                                        <p:strVal val="visible"/>
+                                      </p:to>
+                                    </p:set>
+                                  </p:childTnLst>
+                                </p:cTn>
+                              </p:par>
+                            </p:childTnLst>
+                          </p:cTn>
+                        </p:par>
+                      </p:childTnLst>
+                    </p:cTn>
+                  </p:par>
+                </p:childTnLst>
+              </p:cTn>
+              <p:prevCondLst>
+                <p:cond evt="onPrev" delay="0">
+                  <p:tgtEl>
+                    <p:sldTgt/>
+                  </p:tgtEl>
+                </p:cond>
+              </p:prevCondLst>
+              <p:nextCondLst>
+                <p:cond evt="onNext" delay="0">
+                  <p:tgtEl>
+                    <p:sldTgt/>
+                  </p:tgtEl>
+                </p:cond>
+              </p:nextCondLst>
+            </p:seq>
+          </p:childTnLst>
+        </p:cTn>
+      </p:par>
+    </p:tnLst>
+    <p:bldLst>
+      <p:bldP spid="3" grpId="0" uiExpand="1" build="p"/>
+      <p:bldP spid="5" grpId="0" animBg="1"/>
+    </p:bldLst>
+  </p:timing>
 </p:sld>
 </file>
 
@@ -6422,6 +7779,60 @@
           </a:prstGeom>
         </p:spPr>
       </p:pic>
+      <p:sp>
+        <p:nvSpPr>
+          <p:cNvPr id="3" name="Rectangle 2">
+            <a:extLst>
+              <a:ext uri="{FF2B5EF4-FFF2-40B4-BE49-F238E27FC236}">
+                <a16:creationId xmlns:a16="http://schemas.microsoft.com/office/drawing/2014/main" id="{1F8D7FF5-595D-B2A3-1001-46E92156EC05}"/>
+              </a:ext>
+            </a:extLst>
+          </p:cNvPr>
+          <p:cNvSpPr/>
+          <p:nvPr/>
+        </p:nvSpPr>
+        <p:spPr>
+          <a:xfrm>
+            <a:off x="2611902" y="4642338"/>
+            <a:ext cx="3094892" cy="848751"/>
+          </a:xfrm>
+          <a:prstGeom prst="rect">
+            <a:avLst/>
+          </a:prstGeom>
+          <a:noFill/>
+          <a:ln w="9525" cap="flat" cmpd="sng" algn="ctr">
+            <a:solidFill>
+              <a:schemeClr val="accent2"/>
+            </a:solidFill>
+            <a:prstDash val="solid"/>
+            <a:round/>
+            <a:headEnd type="none" w="med" len="med"/>
+            <a:tailEnd type="none" w="med" len="med"/>
+          </a:ln>
+        </p:spPr>
+        <p:style>
+          <a:lnRef idx="0">
+            <a:scrgbClr r="0" g="0" b="0"/>
+          </a:lnRef>
+          <a:fillRef idx="0">
+            <a:scrgbClr r="0" g="0" b="0"/>
+          </a:fillRef>
+          <a:effectRef idx="0">
+            <a:scrgbClr r="0" g="0" b="0"/>
+          </a:effectRef>
+          <a:fontRef idx="minor">
+            <a:schemeClr val="accent2"/>
+          </a:fontRef>
+        </p:style>
+        <p:txBody>
+          <a:bodyPr rtlCol="0" anchor="ctr"/>
+          <a:lstStyle/>
+          <a:p>
+            <a:pPr algn="ctr"/>
+            <a:endParaRPr lang="en-US"/>
+          </a:p>
+        </p:txBody>
+      </p:sp>
     </p:spTree>
     <p:extLst>
       <p:ext uri="{BB962C8B-B14F-4D97-AF65-F5344CB8AC3E}">
@@ -6609,8 +8020,8 @@
           </a:prstGeom>
         </p:spPr>
       </p:pic>
-      <mc:AlternateContent xmlns:mc="http://schemas.openxmlformats.org/markup-compatibility/2006" xmlns:a14="http://schemas.microsoft.com/office/drawing/2010/main">
-        <mc:Choice Requires="a14">
+      <mc:AlternateContent xmlns:mc="http://schemas.openxmlformats.org/markup-compatibility/2006">
+        <mc:Choice xmlns:a14="http://schemas.microsoft.com/office/drawing/2010/main" Requires="a14">
           <p:sp>
             <p:nvSpPr>
               <p:cNvPr id="9" name="Speech Bubble: Rectangle with Corners Rounded 8">
@@ -6625,13 +8036,13 @@
             </p:nvSpPr>
             <p:spPr>
               <a:xfrm>
-                <a:off x="8696083" y="207693"/>
-                <a:ext cx="3107422" cy="804367"/>
+                <a:off x="8520332" y="207693"/>
+                <a:ext cx="3283173" cy="804367"/>
               </a:xfrm>
               <a:prstGeom prst="wedgeRoundRectCallout">
                 <a:avLst>
-                  <a:gd name="adj1" fmla="val -72450"/>
-                  <a:gd name="adj2" fmla="val 65223"/>
+                  <a:gd name="adj1" fmla="val -66023"/>
+                  <a:gd name="adj2" fmla="val 75134"/>
                   <a:gd name="adj3" fmla="val 16667"/>
                 </a:avLst>
               </a:prstGeom>
@@ -6737,6 +8148,21 @@
                 </a:r>
                 <a14:m>
                   <m:oMath xmlns:m="http://schemas.openxmlformats.org/officeDocument/2006/math">
+                    <m:r>
+                      <m:rPr>
+                        <m:sty m:val="p"/>
+                      </m:rPr>
+                      <a:rPr lang="en-US" b="0" i="0" smtClean="0">
+                        <a:latin typeface="Cambria Math" panose="02040503050406030204" pitchFamily="18" charset="0"/>
+                      </a:rPr>
+                      <m:t>V</m:t>
+                    </m:r>
+                    <m:r>
+                      <a:rPr lang="en-US" b="0" i="0" smtClean="0">
+                        <a:latin typeface="Cambria Math" panose="02040503050406030204" pitchFamily="18" charset="0"/>
+                      </a:rPr>
+                      <m:t>=</m:t>
+                    </m:r>
                     <m:sSup>
                       <m:sSupPr>
                         <m:ctrlPr>
@@ -6775,7 +8201,7 @@
             </p:txBody>
           </p:sp>
         </mc:Choice>
-        <mc:Fallback xmlns="">
+        <mc:Fallback>
           <p:sp>
             <p:nvSpPr>
               <p:cNvPr id="9" name="Speech Bubble: Rectangle with Corners Rounded 8">
@@ -6792,20 +8218,20 @@
             </p:nvSpPr>
             <p:spPr>
               <a:xfrm>
-                <a:off x="8696083" y="207693"/>
-                <a:ext cx="3107422" cy="804367"/>
+                <a:off x="8520332" y="207693"/>
+                <a:ext cx="3283173" cy="804367"/>
               </a:xfrm>
               <a:prstGeom prst="wedgeRoundRectCallout">
                 <a:avLst>
-                  <a:gd name="adj1" fmla="val -72450"/>
-                  <a:gd name="adj2" fmla="val 65223"/>
+                  <a:gd name="adj1" fmla="val -66023"/>
+                  <a:gd name="adj2" fmla="val 75134"/>
                   <a:gd name="adj3" fmla="val 16667"/>
                 </a:avLst>
               </a:prstGeom>
               <a:blipFill>
                 <a:blip r:embed="rId5"/>
                 <a:stretch>
-                  <a:fillRect t="-7500"/>
+                  <a:fillRect t="-7059"/>
                 </a:stretch>
               </a:blipFill>
             </p:spPr>
@@ -6978,6 +8404,125 @@
           </a:p>
         </p:txBody>
       </p:sp>
+      <mc:AlternateContent xmlns:mc="http://schemas.openxmlformats.org/markup-compatibility/2006">
+        <mc:Choice xmlns:a14="http://schemas.microsoft.com/office/drawing/2010/main" Requires="a14">
+          <p:sp>
+            <p:nvSpPr>
+              <p:cNvPr id="3" name="Speech Bubble: Rectangle with Corners Rounded 2">
+                <a:extLst>
+                  <a:ext uri="{FF2B5EF4-FFF2-40B4-BE49-F238E27FC236}">
+                    <a16:creationId xmlns:a16="http://schemas.microsoft.com/office/drawing/2014/main" id="{1350B539-C5B1-4BA6-3A80-B96852AEAA02}"/>
+                  </a:ext>
+                </a:extLst>
+              </p:cNvPr>
+              <p:cNvSpPr/>
+              <p:nvPr/>
+            </p:nvSpPr>
+            <p:spPr>
+              <a:xfrm>
+                <a:off x="9406597" y="4838075"/>
+                <a:ext cx="2713278" cy="1267303"/>
+              </a:xfrm>
+              <a:prstGeom prst="wedgeRoundRectCallout">
+                <a:avLst>
+                  <a:gd name="adj1" fmla="val -79431"/>
+                  <a:gd name="adj2" fmla="val 10395"/>
+                  <a:gd name="adj3" fmla="val 16667"/>
+                </a:avLst>
+              </a:prstGeom>
+            </p:spPr>
+            <p:style>
+              <a:lnRef idx="2">
+                <a:schemeClr val="accent2">
+                  <a:shade val="15000"/>
+                </a:schemeClr>
+              </a:lnRef>
+              <a:fillRef idx="1">
+                <a:schemeClr val="accent2"/>
+              </a:fillRef>
+              <a:effectRef idx="0">
+                <a:schemeClr val="accent2"/>
+              </a:effectRef>
+              <a:fontRef idx="minor">
+                <a:schemeClr val="lt1"/>
+              </a:fontRef>
+            </p:style>
+            <p:txBody>
+              <a:bodyPr rtlCol="0" anchor="ctr"/>
+              <a:lstStyle/>
+              <a:p>
+                <a:pPr algn="ctr"/>
+                <a:r>
+                  <a:rPr lang="en-US" dirty="0"/>
+                  <a:t>The additional </a:t>
+                </a:r>
+                <a14:m>
+                  <m:oMath xmlns:m="http://schemas.openxmlformats.org/officeDocument/2006/math">
+                    <m:r>
+                      <a:rPr lang="en-US" b="0" i="1" smtClean="0">
+                        <a:latin typeface="Cambria Math" panose="02040503050406030204" pitchFamily="18" charset="0"/>
+                      </a:rPr>
+                      <m:t>𝑉</m:t>
+                    </m:r>
+                  </m:oMath>
+                </a14:m>
+                <a:r>
+                  <a:rPr lang="en-US" dirty="0"/>
+                  <a:t>s make sure that the update exactly matches the forward view.</a:t>
+                </a:r>
+              </a:p>
+            </p:txBody>
+          </p:sp>
+        </mc:Choice>
+        <mc:Fallback>
+          <p:sp>
+            <p:nvSpPr>
+              <p:cNvPr id="3" name="Speech Bubble: Rectangle with Corners Rounded 2">
+                <a:extLst>
+                  <a:ext uri="{FF2B5EF4-FFF2-40B4-BE49-F238E27FC236}">
+                    <a16:creationId xmlns:a16="http://schemas.microsoft.com/office/drawing/2014/main" id="{1350B539-C5B1-4BA6-3A80-B96852AEAA02}"/>
+                  </a:ext>
+                </a:extLst>
+              </p:cNvPr>
+              <p:cNvSpPr>
+                <a:spLocks noRot="1" noChangeAspect="1" noMove="1" noResize="1" noEditPoints="1" noAdjustHandles="1" noChangeArrowheads="1" noChangeShapeType="1" noTextEdit="1"/>
+              </p:cNvSpPr>
+              <p:nvPr/>
+            </p:nvSpPr>
+            <p:spPr>
+              <a:xfrm>
+                <a:off x="9406597" y="4838075"/>
+                <a:ext cx="2713278" cy="1267303"/>
+              </a:xfrm>
+              <a:prstGeom prst="wedgeRoundRectCallout">
+                <a:avLst>
+                  <a:gd name="adj1" fmla="val -79431"/>
+                  <a:gd name="adj2" fmla="val 10395"/>
+                  <a:gd name="adj3" fmla="val 16667"/>
+                </a:avLst>
+              </a:prstGeom>
+              <a:blipFill>
+                <a:blip r:embed="rId6"/>
+                <a:stretch>
+                  <a:fillRect b="-3791"/>
+                </a:stretch>
+              </a:blipFill>
+            </p:spPr>
+            <p:txBody>
+              <a:bodyPr/>
+              <a:lstStyle/>
+              <a:p>
+                <a:r>
+                  <a:rPr lang="en-US">
+                    <a:noFill/>
+                  </a:rPr>
+                  <a:t> </a:t>
+                </a:r>
+              </a:p>
+            </p:txBody>
+          </p:sp>
+        </mc:Fallback>
+      </mc:AlternateContent>
     </p:spTree>
     <p:extLst>
       <p:ext uri="{BB962C8B-B14F-4D97-AF65-F5344CB8AC3E}">
@@ -8139,8 +9684,8 @@
           </a:p>
         </p:txBody>
       </p:sp>
-      <mc:AlternateContent xmlns:mc="http://schemas.openxmlformats.org/markup-compatibility/2006" xmlns:a14="http://schemas.microsoft.com/office/drawing/2010/main">
-        <mc:Choice Requires="a14">
+      <mc:AlternateContent xmlns:mc="http://schemas.openxmlformats.org/markup-compatibility/2006">
+        <mc:Choice xmlns:a14="http://schemas.microsoft.com/office/drawing/2010/main" Requires="a14">
           <p:sp>
             <p:nvSpPr>
               <p:cNvPr id="3" name="Content Placeholder 2">
@@ -8160,13 +9705,13 @@
             <p:spPr/>
             <p:txBody>
               <a:bodyPr>
-                <a:normAutofit fontScale="92500" lnSpcReduction="20000"/>
+                <a:normAutofit fontScale="62500" lnSpcReduction="20000"/>
               </a:bodyPr>
               <a:lstStyle/>
               <a:p>
                 <a:r>
                   <a:rPr lang="en-US" b="1" dirty="0"/>
-                  <a:t>Off-policy</a:t>
+                  <a:t>Off-policy learning</a:t>
                 </a:r>
                 <a:r>
                   <a:rPr lang="en-US" dirty="0"/>
@@ -8177,7 +9722,15 @@
                 </a:br>
                 <a:r>
                   <a:rPr lang="en-US" dirty="0"/>
-                  <a:t>Note: Semi-gradient methods do not guarantee stability and may need extensions to improve stability.</a:t>
+                  <a:t>Note: Semi-gradient methods do not guarantee </a:t>
+                </a:r>
+                <a:r>
+                  <a:rPr lang="en-US" b="1" dirty="0"/>
+                  <a:t>stability</a:t>
+                </a:r>
+                <a:r>
+                  <a:rPr lang="en-US" dirty="0"/>
+                  <a:t> and may need extensions to improve stability.</a:t>
                 </a:r>
               </a:p>
               <a:p>
@@ -8185,8 +9738,33 @@
               </a:p>
               <a:p>
                 <a:r>
+                  <a:rPr lang="en-US" b="1" dirty="0"/>
+                  <a:t>Non-linear approximation</a:t>
+                </a:r>
+                <a:r>
                   <a:rPr lang="en-US" dirty="0"/>
-                  <a:t>Most values of </a:t>
+                  <a:t>: For linear approximation backward and forward view matches perfectly. Non-linear approximations create discrepancies. Specialized, modified, or delayed methods are required for </a:t>
+                </a:r>
+                <a:r>
+                  <a:rPr lang="en-US" b="1" dirty="0"/>
+                  <a:t>stability</a:t>
+                </a:r>
+                <a:r>
+                  <a:rPr lang="en-US" dirty="0"/>
+                  <a:t>.</a:t>
+                </a:r>
+              </a:p>
+              <a:p>
+                <a:endParaRPr lang="en-US" dirty="0"/>
+              </a:p>
+              <a:p>
+                <a:r>
+                  <a:rPr lang="en-US" b="1" dirty="0"/>
+                  <a:t>Sparse traces</a:t>
+                </a:r>
+                <a:r>
+                  <a:rPr lang="en-US" dirty="0"/>
+                  <a:t>: Most values of </a:t>
                 </a:r>
                 <a14:m>
                   <m:oMath xmlns:m="http://schemas.openxmlformats.org/officeDocument/2006/math">
@@ -8263,14 +9841,14 @@
                 <a:pPr lvl="1"/>
                 <a:r>
                   <a:rPr lang="en-US" dirty="0"/>
-                  <a:t>How sparse rewards are</a:t>
+                  <a:t>Reward sparsity</a:t>
                 </a:r>
               </a:p>
               <a:p>
                 <a:pPr lvl="1"/>
                 <a:r>
                   <a:rPr lang="en-US" dirty="0"/>
-                  <a:t>The learning rate </a:t>
+                  <a:t>Learning rate </a:t>
                 </a:r>
                 <a14:m>
                   <m:oMath xmlns:m="http://schemas.openxmlformats.org/officeDocument/2006/math">
@@ -8282,41 +9860,39 @@
                     </m:r>
                   </m:oMath>
                 </a14:m>
-                <a:endParaRPr lang="en-US" dirty="0"/>
-              </a:p>
-              <a:p>
-                <a:r>
-                  <a:rPr lang="en-US" dirty="0"/>
-                  <a:t>Practitioners often start with lambda equals </a:t>
-                </a:r>
-                <a14:m>
-                  <m:oMath xmlns:m="http://schemas.openxmlformats.org/officeDocument/2006/math">
-                    <m:r>
-                      <a:rPr lang="en-US" i="1" dirty="0" smtClean="0">
-                        <a:latin typeface="Cambria Math" panose="02040503050406030204" pitchFamily="18" charset="0"/>
-                      </a:rPr>
-                      <m:t>0.9</m:t>
-                    </m:r>
-                  </m:oMath>
-                </a14:m>
-                <a:r>
-                  <a:rPr lang="en-US" dirty="0"/>
-                  <a:t> and then lower it if behavior is unstable.</a:t>
-                </a:r>
-              </a:p>
-              <a:p>
                 <a:endParaRPr lang="en-US" dirty="0"/>
               </a:p>
               <a:p>
                 <a:endParaRPr lang="en-US" dirty="0"/>
               </a:p>
               <a:p>
-                <a:endParaRPr lang="en-US" dirty="0"/>
+                <a:r>
+                  <a:rPr lang="en-US" b="1" dirty="0"/>
+                  <a:t>Practitioners</a:t>
+                </a:r>
+                <a:r>
+                  <a:rPr lang="en-US" dirty="0"/>
+                  <a:t> often start with lambda equals </a:t>
+                </a:r>
+                <a14:m>
+                  <m:oMath xmlns:m="http://schemas.openxmlformats.org/officeDocument/2006/math">
+                    <m:r>
+                      <a:rPr lang="en-US" i="1" dirty="0" smtClean="0">
+                        <a:latin typeface="Cambria Math" panose="02040503050406030204" pitchFamily="18" charset="0"/>
+                      </a:rPr>
+                      <m:t>0.9</m:t>
+                    </m:r>
+                  </m:oMath>
+                </a14:m>
+                <a:r>
+                  <a:rPr lang="en-US" dirty="0"/>
+                  <a:t> and then lower it if behavior is unstable.</a:t>
+                </a:r>
               </a:p>
             </p:txBody>
           </p:sp>
         </mc:Choice>
-        <mc:Fallback xmlns="">
+        <mc:Fallback>
           <p:sp>
             <p:nvSpPr>
               <p:cNvPr id="3" name="Content Placeholder 2">
@@ -8337,7 +9913,7 @@
               <a:blipFill>
                 <a:blip r:embed="rId2"/>
                 <a:stretch>
-                  <a:fillRect l="-928" t="-3189"/>
+                  <a:fillRect l="-406" t="-1913"/>
                 </a:stretch>
               </a:blipFill>
             </p:spPr>
@@ -8366,6 +9942,377 @@
   <p:clrMapOvr>
     <a:masterClrMapping/>
   </p:clrMapOvr>
+  <p:timing>
+    <p:tnLst>
+      <p:par>
+        <p:cTn id="1" dur="indefinite" restart="never" nodeType="tmRoot">
+          <p:childTnLst>
+            <p:seq concurrent="1" nextAc="seek">
+              <p:cTn id="2" dur="indefinite" nodeType="mainSeq">
+                <p:childTnLst>
+                  <p:par>
+                    <p:cTn id="3" fill="hold">
+                      <p:stCondLst>
+                        <p:cond delay="indefinite"/>
+                      </p:stCondLst>
+                      <p:childTnLst>
+                        <p:par>
+                          <p:cTn id="4" fill="hold">
+                            <p:stCondLst>
+                              <p:cond delay="0"/>
+                            </p:stCondLst>
+                            <p:childTnLst>
+                              <p:par>
+                                <p:cTn id="5" presetID="1" presetClass="entr" presetSubtype="0" fill="hold" grpId="0" nodeType="clickEffect">
+                                  <p:stCondLst>
+                                    <p:cond delay="0"/>
+                                  </p:stCondLst>
+                                  <p:childTnLst>
+                                    <p:set>
+                                      <p:cBhvr>
+                                        <p:cTn id="6" dur="1" fill="hold">
+                                          <p:stCondLst>
+                                            <p:cond delay="0"/>
+                                          </p:stCondLst>
+                                        </p:cTn>
+                                        <p:tgtEl>
+                                          <p:spTgt spid="3">
+                                            <p:txEl>
+                                              <p:pRg st="0" end="0"/>
+                                            </p:txEl>
+                                          </p:spTgt>
+                                        </p:tgtEl>
+                                        <p:attrNameLst>
+                                          <p:attrName>style.visibility</p:attrName>
+                                        </p:attrNameLst>
+                                      </p:cBhvr>
+                                      <p:to>
+                                        <p:strVal val="visible"/>
+                                      </p:to>
+                                    </p:set>
+                                  </p:childTnLst>
+                                </p:cTn>
+                              </p:par>
+                            </p:childTnLst>
+                          </p:cTn>
+                        </p:par>
+                      </p:childTnLst>
+                    </p:cTn>
+                  </p:par>
+                  <p:par>
+                    <p:cTn id="7" fill="hold">
+                      <p:stCondLst>
+                        <p:cond delay="indefinite"/>
+                      </p:stCondLst>
+                      <p:childTnLst>
+                        <p:par>
+                          <p:cTn id="8" fill="hold">
+                            <p:stCondLst>
+                              <p:cond delay="0"/>
+                            </p:stCondLst>
+                            <p:childTnLst>
+                              <p:par>
+                                <p:cTn id="9" presetID="1" presetClass="entr" presetSubtype="0" fill="hold" grpId="0" nodeType="clickEffect">
+                                  <p:stCondLst>
+                                    <p:cond delay="0"/>
+                                  </p:stCondLst>
+                                  <p:childTnLst>
+                                    <p:set>
+                                      <p:cBhvr>
+                                        <p:cTn id="10" dur="1" fill="hold">
+                                          <p:stCondLst>
+                                            <p:cond delay="0"/>
+                                          </p:stCondLst>
+                                        </p:cTn>
+                                        <p:tgtEl>
+                                          <p:spTgt spid="3">
+                                            <p:txEl>
+                                              <p:pRg st="2" end="2"/>
+                                            </p:txEl>
+                                          </p:spTgt>
+                                        </p:tgtEl>
+                                        <p:attrNameLst>
+                                          <p:attrName>style.visibility</p:attrName>
+                                        </p:attrNameLst>
+                                      </p:cBhvr>
+                                      <p:to>
+                                        <p:strVal val="visible"/>
+                                      </p:to>
+                                    </p:set>
+                                  </p:childTnLst>
+                                </p:cTn>
+                              </p:par>
+                            </p:childTnLst>
+                          </p:cTn>
+                        </p:par>
+                      </p:childTnLst>
+                    </p:cTn>
+                  </p:par>
+                  <p:par>
+                    <p:cTn id="11" fill="hold">
+                      <p:stCondLst>
+                        <p:cond delay="indefinite"/>
+                      </p:stCondLst>
+                      <p:childTnLst>
+                        <p:par>
+                          <p:cTn id="12" fill="hold">
+                            <p:stCondLst>
+                              <p:cond delay="0"/>
+                            </p:stCondLst>
+                            <p:childTnLst>
+                              <p:par>
+                                <p:cTn id="13" presetID="1" presetClass="entr" presetSubtype="0" fill="hold" grpId="0" nodeType="clickEffect">
+                                  <p:stCondLst>
+                                    <p:cond delay="0"/>
+                                  </p:stCondLst>
+                                  <p:childTnLst>
+                                    <p:set>
+                                      <p:cBhvr>
+                                        <p:cTn id="14" dur="1" fill="hold">
+                                          <p:stCondLst>
+                                            <p:cond delay="0"/>
+                                          </p:stCondLst>
+                                        </p:cTn>
+                                        <p:tgtEl>
+                                          <p:spTgt spid="3">
+                                            <p:txEl>
+                                              <p:pRg st="4" end="4"/>
+                                            </p:txEl>
+                                          </p:spTgt>
+                                        </p:tgtEl>
+                                        <p:attrNameLst>
+                                          <p:attrName>style.visibility</p:attrName>
+                                        </p:attrNameLst>
+                                      </p:cBhvr>
+                                      <p:to>
+                                        <p:strVal val="visible"/>
+                                      </p:to>
+                                    </p:set>
+                                  </p:childTnLst>
+                                </p:cTn>
+                              </p:par>
+                            </p:childTnLst>
+                          </p:cTn>
+                        </p:par>
+                      </p:childTnLst>
+                    </p:cTn>
+                  </p:par>
+                  <p:par>
+                    <p:cTn id="15" fill="hold">
+                      <p:stCondLst>
+                        <p:cond delay="indefinite"/>
+                      </p:stCondLst>
+                      <p:childTnLst>
+                        <p:par>
+                          <p:cTn id="16" fill="hold">
+                            <p:stCondLst>
+                              <p:cond delay="0"/>
+                            </p:stCondLst>
+                            <p:childTnLst>
+                              <p:par>
+                                <p:cTn id="17" presetID="1" presetClass="entr" presetSubtype="0" fill="hold" grpId="0" nodeType="clickEffect">
+                                  <p:stCondLst>
+                                    <p:cond delay="0"/>
+                                  </p:stCondLst>
+                                  <p:childTnLst>
+                                    <p:set>
+                                      <p:cBhvr>
+                                        <p:cTn id="18" dur="1" fill="hold">
+                                          <p:stCondLst>
+                                            <p:cond delay="0"/>
+                                          </p:stCondLst>
+                                        </p:cTn>
+                                        <p:tgtEl>
+                                          <p:spTgt spid="3">
+                                            <p:txEl>
+                                              <p:pRg st="6" end="6"/>
+                                            </p:txEl>
+                                          </p:spTgt>
+                                        </p:tgtEl>
+                                        <p:attrNameLst>
+                                          <p:attrName>style.visibility</p:attrName>
+                                        </p:attrNameLst>
+                                      </p:cBhvr>
+                                      <p:to>
+                                        <p:strVal val="visible"/>
+                                      </p:to>
+                                    </p:set>
+                                  </p:childTnLst>
+                                </p:cTn>
+                              </p:par>
+                              <p:par>
+                                <p:cTn id="19" presetID="1" presetClass="entr" presetSubtype="0" fill="hold" grpId="0" nodeType="withEffect">
+                                  <p:stCondLst>
+                                    <p:cond delay="0"/>
+                                  </p:stCondLst>
+                                  <p:childTnLst>
+                                    <p:set>
+                                      <p:cBhvr>
+                                        <p:cTn id="20" dur="1" fill="hold">
+                                          <p:stCondLst>
+                                            <p:cond delay="0"/>
+                                          </p:stCondLst>
+                                        </p:cTn>
+                                        <p:tgtEl>
+                                          <p:spTgt spid="3">
+                                            <p:txEl>
+                                              <p:pRg st="7" end="7"/>
+                                            </p:txEl>
+                                          </p:spTgt>
+                                        </p:tgtEl>
+                                        <p:attrNameLst>
+                                          <p:attrName>style.visibility</p:attrName>
+                                        </p:attrNameLst>
+                                      </p:cBhvr>
+                                      <p:to>
+                                        <p:strVal val="visible"/>
+                                      </p:to>
+                                    </p:set>
+                                  </p:childTnLst>
+                                </p:cTn>
+                              </p:par>
+                              <p:par>
+                                <p:cTn id="21" presetID="1" presetClass="entr" presetSubtype="0" fill="hold" grpId="0" nodeType="withEffect">
+                                  <p:stCondLst>
+                                    <p:cond delay="0"/>
+                                  </p:stCondLst>
+                                  <p:childTnLst>
+                                    <p:set>
+                                      <p:cBhvr>
+                                        <p:cTn id="22" dur="1" fill="hold">
+                                          <p:stCondLst>
+                                            <p:cond delay="0"/>
+                                          </p:stCondLst>
+                                        </p:cTn>
+                                        <p:tgtEl>
+                                          <p:spTgt spid="3">
+                                            <p:txEl>
+                                              <p:pRg st="8" end="8"/>
+                                            </p:txEl>
+                                          </p:spTgt>
+                                        </p:tgtEl>
+                                        <p:attrNameLst>
+                                          <p:attrName>style.visibility</p:attrName>
+                                        </p:attrNameLst>
+                                      </p:cBhvr>
+                                      <p:to>
+                                        <p:strVal val="visible"/>
+                                      </p:to>
+                                    </p:set>
+                                  </p:childTnLst>
+                                </p:cTn>
+                              </p:par>
+                              <p:par>
+                                <p:cTn id="23" presetID="1" presetClass="entr" presetSubtype="0" fill="hold" grpId="0" nodeType="withEffect">
+                                  <p:stCondLst>
+                                    <p:cond delay="0"/>
+                                  </p:stCondLst>
+                                  <p:childTnLst>
+                                    <p:set>
+                                      <p:cBhvr>
+                                        <p:cTn id="24" dur="1" fill="hold">
+                                          <p:stCondLst>
+                                            <p:cond delay="0"/>
+                                          </p:stCondLst>
+                                        </p:cTn>
+                                        <p:tgtEl>
+                                          <p:spTgt spid="3">
+                                            <p:txEl>
+                                              <p:pRg st="9" end="9"/>
+                                            </p:txEl>
+                                          </p:spTgt>
+                                        </p:tgtEl>
+                                        <p:attrNameLst>
+                                          <p:attrName>style.visibility</p:attrName>
+                                        </p:attrNameLst>
+                                      </p:cBhvr>
+                                      <p:to>
+                                        <p:strVal val="visible"/>
+                                      </p:to>
+                                    </p:set>
+                                  </p:childTnLst>
+                                </p:cTn>
+                              </p:par>
+                            </p:childTnLst>
+                          </p:cTn>
+                        </p:par>
+                      </p:childTnLst>
+                    </p:cTn>
+                  </p:par>
+                  <p:par>
+                    <p:cTn id="25" fill="hold">
+                      <p:stCondLst>
+                        <p:cond delay="indefinite"/>
+                      </p:stCondLst>
+                      <p:childTnLst>
+                        <p:par>
+                          <p:cTn id="26" fill="hold">
+                            <p:stCondLst>
+                              <p:cond delay="0"/>
+                            </p:stCondLst>
+                            <p:childTnLst>
+                              <p:par>
+                                <p:cTn id="27" presetID="1" presetClass="entr" presetSubtype="0" fill="hold" grpId="0" nodeType="clickEffect">
+                                  <p:stCondLst>
+                                    <p:cond delay="0"/>
+                                  </p:stCondLst>
+                                  <p:childTnLst>
+                                    <p:set>
+                                      <p:cBhvr>
+                                        <p:cTn id="28" dur="1" fill="hold">
+                                          <p:stCondLst>
+                                            <p:cond delay="0"/>
+                                          </p:stCondLst>
+                                        </p:cTn>
+                                        <p:tgtEl>
+                                          <p:spTgt spid="3">
+                                            <p:txEl>
+                                              <p:pRg st="11" end="11"/>
+                                            </p:txEl>
+                                          </p:spTgt>
+                                        </p:tgtEl>
+                                        <p:attrNameLst>
+                                          <p:attrName>style.visibility</p:attrName>
+                                        </p:attrNameLst>
+                                      </p:cBhvr>
+                                      <p:to>
+                                        <p:strVal val="visible"/>
+                                      </p:to>
+                                    </p:set>
+                                  </p:childTnLst>
+                                </p:cTn>
+                              </p:par>
+                            </p:childTnLst>
+                          </p:cTn>
+                        </p:par>
+                      </p:childTnLst>
+                    </p:cTn>
+                  </p:par>
+                </p:childTnLst>
+              </p:cTn>
+              <p:prevCondLst>
+                <p:cond evt="onPrev" delay="0">
+                  <p:tgtEl>
+                    <p:sldTgt/>
+                  </p:tgtEl>
+                </p:cond>
+              </p:prevCondLst>
+              <p:nextCondLst>
+                <p:cond evt="onNext" delay="0">
+                  <p:tgtEl>
+                    <p:sldTgt/>
+                  </p:tgtEl>
+                </p:cond>
+              </p:nextCondLst>
+            </p:seq>
+          </p:childTnLst>
+        </p:cTn>
+      </p:par>
+    </p:tnLst>
+    <p:bldLst>
+      <p:bldP spid="3" grpId="0" build="p"/>
+    </p:bldLst>
+  </p:timing>
 </p:sld>
 </file>
 
@@ -8690,8 +10637,8 @@
           </a:extLst>
         </p:spPr>
       </p:pic>
-      <mc:AlternateContent xmlns:mc="http://schemas.openxmlformats.org/markup-compatibility/2006" xmlns:a14="http://schemas.microsoft.com/office/drawing/2010/main">
-        <mc:Choice Requires="a14">
+      <mc:AlternateContent xmlns:mc="http://schemas.openxmlformats.org/markup-compatibility/2006">
+        <mc:Choice xmlns:a14="http://schemas.microsoft.com/office/drawing/2010/main" Requires="a14">
           <p:sp>
             <p:nvSpPr>
               <p:cNvPr id="3" name="Content Placeholder 2">
@@ -8716,7 +10663,7 @@
             </p:spPr>
             <p:txBody>
               <a:bodyPr>
-                <a:normAutofit/>
+                <a:normAutofit lnSpcReduction="10000"/>
               </a:bodyPr>
               <a:lstStyle/>
               <a:p>
@@ -8802,90 +10749,100 @@
                 </a:r>
               </a:p>
               <a:p>
-                <a:pPr lvl="1"/>
-                <a:endParaRPr lang="en-US" sz="1700" dirty="0"/>
+                <a:r>
+                  <a:rPr lang="en-US" sz="1700" dirty="0"/>
+                  <a:t>Eligibility traces </a:t>
+                </a:r>
+                <a:r>
+                  <a:rPr lang="en-US" sz="1700" b="1" dirty="0"/>
+                  <a:t>can also be used to extend </a:t>
+                </a:r>
+                <a14:m>
+                  <m:oMath xmlns:m="http://schemas.openxmlformats.org/officeDocument/2006/math">
+                    <m:r>
+                      <a:rPr lang="en-US" sz="1700" b="1" i="1">
+                        <a:latin typeface="Cambria Math" panose="02040503050406030204" pitchFamily="18" charset="0"/>
+                      </a:rPr>
+                      <m:t>𝑸</m:t>
+                    </m:r>
+                  </m:oMath>
+                </a14:m>
+                <a:r>
+                  <a:rPr lang="en-US" sz="1700" b="1" dirty="0"/>
+                  <a:t>-learning</a:t>
+                </a:r>
+                <a:r>
+                  <a:rPr lang="en-US" sz="1700" dirty="0"/>
+                  <a:t>. This leads to algorithms like Watkins’s </a:t>
+                </a:r>
+                <a14:m>
+                  <m:oMath xmlns:m="http://schemas.openxmlformats.org/officeDocument/2006/math">
+                    <m:r>
+                      <a:rPr lang="en-US" sz="1700" i="1">
+                        <a:latin typeface="Cambria Math" panose="02040503050406030204" pitchFamily="18" charset="0"/>
+                      </a:rPr>
+                      <m:t>𝑄</m:t>
+                    </m:r>
+                    <m:r>
+                      <a:rPr lang="en-US" sz="1700" i="1">
+                        <a:latin typeface="Cambria Math" panose="02040503050406030204" pitchFamily="18" charset="0"/>
+                      </a:rPr>
+                      <m:t>(</m:t>
+                    </m:r>
+                    <m:r>
+                      <a:rPr lang="en-US" sz="1700" b="0" i="1">
+                        <a:latin typeface="Cambria Math" panose="02040503050406030204" pitchFamily="18" charset="0"/>
+                      </a:rPr>
+                      <m:t>𝜆</m:t>
+                    </m:r>
+                    <m:r>
+                      <a:rPr lang="en-US" sz="1700" i="1">
+                        <a:latin typeface="Cambria Math" panose="02040503050406030204" pitchFamily="18" charset="0"/>
+                      </a:rPr>
+                      <m:t>)</m:t>
+                    </m:r>
+                  </m:oMath>
+                </a14:m>
+                <a:r>
+                  <a:rPr lang="en-US" sz="1700" dirty="0"/>
+                  <a:t> and Tree-Backup</a:t>
+                </a:r>
+                <a14:m>
+                  <m:oMath xmlns:m="http://schemas.openxmlformats.org/officeDocument/2006/math">
+                    <m:r>
+                      <a:rPr lang="en-US" sz="1700" i="1">
+                        <a:latin typeface="Cambria Math" panose="02040503050406030204" pitchFamily="18" charset="0"/>
+                      </a:rPr>
+                      <m:t>(</m:t>
+                    </m:r>
+                    <m:r>
+                      <a:rPr lang="en-US" sz="1700" b="0" i="1">
+                        <a:latin typeface="Cambria Math" panose="02040503050406030204" pitchFamily="18" charset="0"/>
+                      </a:rPr>
+                      <m:t>𝜆</m:t>
+                    </m:r>
+                    <m:r>
+                      <a:rPr lang="en-US" sz="1700" i="1">
+                        <a:latin typeface="Cambria Math" panose="02040503050406030204" pitchFamily="18" charset="0"/>
+                      </a:rPr>
+                      <m:t>)</m:t>
+                    </m:r>
+                  </m:oMath>
+                </a14:m>
+                <a:r>
+                  <a:rPr lang="en-US" sz="1700" dirty="0"/>
+                  <a:t>.</a:t>
+                </a:r>
               </a:p>
               <a:p>
                 <a:r>
                   <a:rPr lang="en-US" sz="1700" dirty="0"/>
-                  <a:t>Eligibility traces </a:t>
+                  <a:t>Non-linear approximation may lead to </a:t>
                 </a:r>
                 <a:r>
                   <a:rPr lang="en-US" sz="1700" b="1" dirty="0"/>
-                  <a:t>can also be used to extend </a:t>
-                </a:r>
-                <a14:m>
-                  <m:oMath xmlns:m="http://schemas.openxmlformats.org/officeDocument/2006/math">
-                    <m:r>
-                      <a:rPr lang="en-US" sz="1700" b="1" i="1">
-                        <a:latin typeface="Cambria Math" panose="02040503050406030204" pitchFamily="18" charset="0"/>
-                      </a:rPr>
-                      <m:t>𝑸</m:t>
-                    </m:r>
-                  </m:oMath>
-                </a14:m>
-                <a:r>
-                  <a:rPr lang="en-US" sz="1700" b="1" dirty="0"/>
-                  <a:t>-learning</a:t>
-                </a:r>
-                <a:r>
-                  <a:rPr lang="en-US" sz="1700" dirty="0"/>
-                  <a:t>. This leads to algorithms like Watkins’s </a:t>
-                </a:r>
-                <a14:m>
-                  <m:oMath xmlns:m="http://schemas.openxmlformats.org/officeDocument/2006/math">
-                    <m:r>
-                      <a:rPr lang="en-US" sz="1700" i="1">
-                        <a:latin typeface="Cambria Math" panose="02040503050406030204" pitchFamily="18" charset="0"/>
-                      </a:rPr>
-                      <m:t>𝑄</m:t>
-                    </m:r>
-                    <m:r>
-                      <a:rPr lang="en-US" sz="1700" i="1">
-                        <a:latin typeface="Cambria Math" panose="02040503050406030204" pitchFamily="18" charset="0"/>
-                      </a:rPr>
-                      <m:t>(</m:t>
-                    </m:r>
-                    <m:r>
-                      <a:rPr lang="en-US" sz="1700" b="0" i="1">
-                        <a:latin typeface="Cambria Math" panose="02040503050406030204" pitchFamily="18" charset="0"/>
-                      </a:rPr>
-                      <m:t>𝜆</m:t>
-                    </m:r>
-                    <m:r>
-                      <a:rPr lang="en-US" sz="1700" i="1">
-                        <a:latin typeface="Cambria Math" panose="02040503050406030204" pitchFamily="18" charset="0"/>
-                      </a:rPr>
-                      <m:t>)</m:t>
-                    </m:r>
-                  </m:oMath>
-                </a14:m>
-                <a:r>
-                  <a:rPr lang="en-US" sz="1700" dirty="0"/>
-                  <a:t> and Tree-Backup</a:t>
-                </a:r>
-                <a14:m>
-                  <m:oMath xmlns:m="http://schemas.openxmlformats.org/officeDocument/2006/math">
-                    <m:r>
-                      <a:rPr lang="en-US" sz="1700" i="1">
-                        <a:latin typeface="Cambria Math" panose="02040503050406030204" pitchFamily="18" charset="0"/>
-                      </a:rPr>
-                      <m:t>(</m:t>
-                    </m:r>
-                    <m:r>
-                      <a:rPr lang="en-US" sz="1700" b="0" i="1">
-                        <a:latin typeface="Cambria Math" panose="02040503050406030204" pitchFamily="18" charset="0"/>
-                      </a:rPr>
-                      <m:t>𝜆</m:t>
-                    </m:r>
-                    <m:r>
-                      <a:rPr lang="en-US" sz="1700" i="1">
-                        <a:latin typeface="Cambria Math" panose="02040503050406030204" pitchFamily="18" charset="0"/>
-                      </a:rPr>
-                      <m:t>)</m:t>
-                    </m:r>
-                  </m:oMath>
-                </a14:m>
+                  <a:t>stability issues</a:t>
+                </a:r>
                 <a:r>
                   <a:rPr lang="en-US" sz="1700" dirty="0"/>
                   <a:t>.</a:t>
@@ -8894,7 +10851,7 @@
             </p:txBody>
           </p:sp>
         </mc:Choice>
-        <mc:Fallback xmlns="">
+        <mc:Fallback>
           <p:sp>
             <p:nvSpPr>
               <p:cNvPr id="3" name="Content Placeholder 2">
@@ -8919,7 +10876,7 @@
               <a:blipFill>
                 <a:blip r:embed="rId3"/>
                 <a:stretch>
-                  <a:fillRect l="-576" t="-1136" b="-649"/>
+                  <a:fillRect l="-576" t="-1623"/>
                 </a:stretch>
               </a:blipFill>
             </p:spPr>
@@ -12790,8 +14747,8 @@
           </p:sp>
         </mc:Fallback>
       </mc:AlternateContent>
-      <mc:AlternateContent xmlns:mc="http://schemas.openxmlformats.org/markup-compatibility/2006" xmlns:a14="http://schemas.microsoft.com/office/drawing/2010/main">
-        <mc:Choice Requires="a14">
+      <mc:AlternateContent xmlns:mc="http://schemas.openxmlformats.org/markup-compatibility/2006">
+        <mc:Choice xmlns:a14="http://schemas.microsoft.com/office/drawing/2010/main" Requires="a14">
           <p:sp>
             <p:nvSpPr>
               <p:cNvPr id="14" name="Speech Bubble: Rectangle with Corners Rounded 13">
@@ -12839,7 +14796,7 @@
               <a:p>
                 <a:r>
                   <a:rPr lang="en-US" sz="1400" dirty="0"/>
-                  <a:t>Update with reward </a:t>
+                  <a:t>Update target is the reward </a:t>
                 </a:r>
                 <a14:m>
                   <m:oMath xmlns:m="http://schemas.openxmlformats.org/officeDocument/2006/math">
@@ -12941,7 +14898,7 @@
             </p:txBody>
           </p:sp>
         </mc:Choice>
-        <mc:Fallback xmlns="">
+        <mc:Fallback>
           <p:sp>
             <p:nvSpPr>
               <p:cNvPr id="14" name="Speech Bubble: Rectangle with Corners Rounded 13">
@@ -14615,8 +16572,8 @@
           </p:sp>
         </mc:Fallback>
       </mc:AlternateContent>
-      <mc:AlternateContent xmlns:mc="http://schemas.openxmlformats.org/markup-compatibility/2006" xmlns:a14="http://schemas.microsoft.com/office/drawing/2010/main">
-        <mc:Choice Requires="a14">
+      <mc:AlternateContent xmlns:mc="http://schemas.openxmlformats.org/markup-compatibility/2006">
+        <mc:Choice xmlns:a14="http://schemas.microsoft.com/office/drawing/2010/main" Requires="a14">
           <p:sp>
             <p:nvSpPr>
               <p:cNvPr id="27" name="Speech Bubble: Rectangle with Corners Rounded 26">
@@ -14632,12 +16589,12 @@
             <p:spPr>
               <a:xfrm>
                 <a:off x="2680283" y="6126976"/>
-                <a:ext cx="4009937" cy="319673"/>
+                <a:ext cx="5062756" cy="319673"/>
               </a:xfrm>
               <a:prstGeom prst="wedgeRoundRectCallout">
                 <a:avLst>
-                  <a:gd name="adj1" fmla="val -31269"/>
-                  <a:gd name="adj2" fmla="val -115663"/>
+                  <a:gd name="adj1" fmla="val -34086"/>
+                  <a:gd name="adj2" fmla="val -110415"/>
                   <a:gd name="adj3" fmla="val 16667"/>
                 </a:avLst>
               </a:prstGeom>
@@ -14662,9 +16619,10 @@
               <a:bodyPr rtlCol="0" anchor="ctr"/>
               <a:lstStyle/>
               <a:p>
+                <a:pPr algn="ctr"/>
                 <a:r>
                   <a:rPr lang="en-US" sz="1400" dirty="0"/>
-                  <a:t>The update needs </a:t>
+                  <a:t>The update target </a:t>
                 </a:r>
                 <a14:m>
                   <m:oMath xmlns:m="http://schemas.openxmlformats.org/officeDocument/2006/math">
@@ -14727,7 +16685,7 @@
                 </a14:m>
                 <a:r>
                   <a:rPr lang="en-US" sz="1400" dirty="0"/>
-                  <a:t> and is </a:t>
+                  <a:t> is only available with a </a:t>
                 </a:r>
                 <a14:m>
                   <m:oMath xmlns:m="http://schemas.openxmlformats.org/officeDocument/2006/math">
@@ -14741,13 +16699,13 @@
                 </a14:m>
                 <a:r>
                   <a:rPr lang="en-US" sz="1400" dirty="0"/>
-                  <a:t> steps delayed!</a:t>
+                  <a:t>-steps delay!</a:t>
                 </a:r>
               </a:p>
             </p:txBody>
           </p:sp>
         </mc:Choice>
-        <mc:Fallback xmlns="">
+        <mc:Fallback>
           <p:sp>
             <p:nvSpPr>
               <p:cNvPr id="27" name="Speech Bubble: Rectangle with Corners Rounded 26">
@@ -14765,19 +16723,19 @@
             <p:spPr>
               <a:xfrm>
                 <a:off x="2680283" y="6126976"/>
-                <a:ext cx="4009937" cy="319673"/>
+                <a:ext cx="5062756" cy="319673"/>
               </a:xfrm>
               <a:prstGeom prst="wedgeRoundRectCallout">
                 <a:avLst>
-                  <a:gd name="adj1" fmla="val -31269"/>
-                  <a:gd name="adj2" fmla="val -115663"/>
+                  <a:gd name="adj1" fmla="val -34086"/>
+                  <a:gd name="adj2" fmla="val -110415"/>
                   <a:gd name="adj3" fmla="val 16667"/>
                 </a:avLst>
               </a:prstGeom>
               <a:blipFill>
                 <a:blip r:embed="rId11"/>
                 <a:stretch>
-                  <a:fillRect b="-7609"/>
+                  <a:fillRect b="-7865"/>
                 </a:stretch>
               </a:blipFill>
             </p:spPr>
@@ -14796,54 +16754,6 @@
           </p:sp>
         </mc:Fallback>
       </mc:AlternateContent>
-      <p:sp>
-        <p:nvSpPr>
-          <p:cNvPr id="3" name="TextBox 2">
-            <a:extLst>
-              <a:ext uri="{FF2B5EF4-FFF2-40B4-BE49-F238E27FC236}">
-                <a16:creationId xmlns:a16="http://schemas.microsoft.com/office/drawing/2014/main" id="{B30B7AFA-5070-0761-161B-A2191BB26B52}"/>
-              </a:ext>
-            </a:extLst>
-          </p:cNvPr>
-          <p:cNvSpPr txBox="1"/>
-          <p:nvPr/>
-        </p:nvSpPr>
-        <p:spPr>
-          <a:xfrm>
-            <a:off x="6772386" y="5462862"/>
-            <a:ext cx="2185332" cy="1200329"/>
-          </a:xfrm>
-          <a:prstGeom prst="rect">
-            <a:avLst/>
-          </a:prstGeom>
-        </p:spPr>
-        <p:style>
-          <a:lnRef idx="3">
-            <a:schemeClr val="lt1"/>
-          </a:lnRef>
-          <a:fillRef idx="1">
-            <a:schemeClr val="accent5"/>
-          </a:fillRef>
-          <a:effectRef idx="1">
-            <a:schemeClr val="accent5"/>
-          </a:effectRef>
-          <a:fontRef idx="minor">
-            <a:schemeClr val="lt1"/>
-          </a:fontRef>
-        </p:style>
-        <p:txBody>
-          <a:bodyPr wrap="square" rtlCol="0">
-            <a:spAutoFit/>
-          </a:bodyPr>
-          <a:lstStyle/>
-          <a:p>
-            <a:r>
-              <a:rPr lang="en-US" dirty="0"/>
-              <a:t>Question: The implementation drops the subscript for V!</a:t>
-            </a:r>
-          </a:p>
-        </p:txBody>
-      </p:sp>
     </p:spTree>
     <p:extLst>
       <p:ext uri="{BB962C8B-B14F-4D97-AF65-F5344CB8AC3E}">
@@ -14874,8 +16784,8 @@
           <a:chExt cx="0" cy="0"/>
         </a:xfrm>
       </p:grpSpPr>
-      <mc:AlternateContent xmlns:mc="http://schemas.openxmlformats.org/markup-compatibility/2006" xmlns:a14="http://schemas.microsoft.com/office/drawing/2010/main">
-        <mc:Choice Requires="a14">
+      <mc:AlternateContent xmlns:mc="http://schemas.openxmlformats.org/markup-compatibility/2006">
+        <mc:Choice xmlns:a14="http://schemas.microsoft.com/office/drawing/2010/main" Requires="a14">
           <p:sp>
             <p:nvSpPr>
               <p:cNvPr id="2" name="Title 1">
@@ -14894,17 +16804,19 @@
             </p:nvSpPr>
             <p:spPr/>
             <p:txBody>
-              <a:bodyPr/>
+              <a:bodyPr>
+                <a:normAutofit/>
+              </a:bodyPr>
               <a:lstStyle/>
               <a:p>
                 <a:r>
-                  <a:rPr lang="en-US" dirty="0"/>
+                  <a:rPr lang="en-US" sz="3600" dirty="0"/>
                   <a:t>Valid </a:t>
                 </a:r>
                 <a14:m>
                   <m:oMath xmlns:m="http://schemas.openxmlformats.org/officeDocument/2006/math">
                     <m:r>
-                      <a:rPr lang="en-US" i="1" dirty="0" smtClean="0">
+                      <a:rPr lang="en-US" sz="3600" i="1" dirty="0" smtClean="0">
                         <a:latin typeface="Cambria Math" panose="02040503050406030204" pitchFamily="18" charset="0"/>
                       </a:rPr>
                       <m:t>𝑛</m:t>
@@ -14912,14 +16824,14 @@
                   </m:oMath>
                 </a14:m>
                 <a:r>
-                  <a:rPr lang="en-US" dirty="0"/>
-                  <a:t>-step Update Targets</a:t>
+                  <a:rPr lang="en-US" sz="3600" dirty="0"/>
+                  <a:t>-step Update Targets and Compound Updates</a:t>
                 </a:r>
               </a:p>
             </p:txBody>
           </p:sp>
         </mc:Choice>
-        <mc:Fallback xmlns="">
+        <mc:Fallback>
           <p:sp>
             <p:nvSpPr>
               <p:cNvPr id="2" name="Title 1">
@@ -14940,7 +16852,7 @@
               <a:blipFill>
                 <a:blip r:embed="rId2"/>
                 <a:stretch>
-                  <a:fillRect l="-2377" t="-20161" b="-35484"/>
+                  <a:fillRect l="-1797" t="-7258" b="-20161"/>
                 </a:stretch>
               </a:blipFill>
             </p:spPr>
@@ -14959,8 +16871,8 @@
           </p:sp>
         </mc:Fallback>
       </mc:AlternateContent>
-      <mc:AlternateContent xmlns:mc="http://schemas.openxmlformats.org/markup-compatibility/2006" xmlns:a14="http://schemas.microsoft.com/office/drawing/2010/main">
-        <mc:Choice Requires="a14">
+      <mc:AlternateContent xmlns:mc="http://schemas.openxmlformats.org/markup-compatibility/2006">
+        <mc:Choice xmlns:a14="http://schemas.microsoft.com/office/drawing/2010/main" Requires="a14">
           <p:sp>
             <p:nvSpPr>
               <p:cNvPr id="3" name="Content Placeholder 2">
@@ -15475,7 +17387,15 @@
                 </a14:m>
                 <a:r>
                   <a:rPr lang="en-US" dirty="0"/>
-                  <a:t> is a valid update target for tabular learning and approx. SGD since it has the error reduction property.</a:t>
+                  <a:t> is a valid update target for tabular learning and approx. SGD since it has the </a:t>
+                </a:r>
+                <a:r>
+                  <a:rPr lang="en-US" b="1" dirty="0"/>
+                  <a:t>error reduction property</a:t>
+                </a:r>
+                <a:r>
+                  <a:rPr lang="en-US" dirty="0"/>
+                  <a:t>.</a:t>
                 </a:r>
               </a:p>
               <a:p>
@@ -15488,7 +17408,7 @@
                 </a:r>
                 <a:r>
                   <a:rPr lang="en-US" dirty="0"/>
-                  <a:t>any average of different </a:t>
+                  <a:t>Any average of different </a:t>
                 </a:r>
                 <a14:m>
                   <m:oMath xmlns:m="http://schemas.openxmlformats.org/officeDocument/2006/math">
@@ -15690,7 +17610,15 @@
                 </a14:m>
                 <a:r>
                   <a:rPr lang="en-US" dirty="0"/>
-                  <a:t>-step returns is called a compound update.</a:t>
+                  <a:t>-step returns is called a </a:t>
+                </a:r>
+                <a:r>
+                  <a:rPr lang="en-US" b="1" dirty="0"/>
+                  <a:t>compound update</a:t>
+                </a:r>
+                <a:r>
+                  <a:rPr lang="en-US" dirty="0"/>
+                  <a:t>.</a:t>
                 </a:r>
               </a:p>
               <a:p>
@@ -15702,7 +17630,7 @@
             </p:txBody>
           </p:sp>
         </mc:Choice>
-        <mc:Fallback xmlns="">
+        <mc:Fallback>
           <p:sp>
             <p:nvSpPr>
               <p:cNvPr id="3" name="Content Placeholder 2">
@@ -16044,6 +17972,85 @@
   <p:clrMapOvr>
     <a:masterClrMapping/>
   </p:clrMapOvr>
+  <p:timing>
+    <p:tnLst>
+      <p:par>
+        <p:cTn id="1" dur="indefinite" restart="never" nodeType="tmRoot">
+          <p:childTnLst>
+            <p:seq concurrent="1" nextAc="seek">
+              <p:cTn id="2" dur="indefinite" nodeType="mainSeq">
+                <p:childTnLst>
+                  <p:par>
+                    <p:cTn id="3" fill="hold">
+                      <p:stCondLst>
+                        <p:cond delay="indefinite"/>
+                      </p:stCondLst>
+                      <p:childTnLst>
+                        <p:par>
+                          <p:cTn id="4" fill="hold">
+                            <p:stCondLst>
+                              <p:cond delay="0"/>
+                            </p:stCondLst>
+                            <p:childTnLst>
+                              <p:par>
+                                <p:cTn id="5" presetID="1" presetClass="entr" presetSubtype="0" fill="hold" nodeType="clickEffect">
+                                  <p:stCondLst>
+                                    <p:cond delay="0"/>
+                                  </p:stCondLst>
+                                  <p:childTnLst>
+                                    <p:set>
+                                      <p:cBhvr>
+                                        <p:cTn id="6" dur="1" fill="hold">
+                                          <p:stCondLst>
+                                            <p:cond delay="0"/>
+                                          </p:stCondLst>
+                                        </p:cTn>
+                                        <p:tgtEl>
+                                          <p:spTgt spid="3">
+                                            <p:txEl>
+                                              <p:pRg st="5" end="5"/>
+                                            </p:txEl>
+                                          </p:spTgt>
+                                        </p:tgtEl>
+                                        <p:attrNameLst>
+                                          <p:attrName>style.visibility</p:attrName>
+                                        </p:attrNameLst>
+                                      </p:cBhvr>
+                                      <p:to>
+                                        <p:strVal val="visible"/>
+                                      </p:to>
+                                    </p:set>
+                                  </p:childTnLst>
+                                </p:cTn>
+                              </p:par>
+                            </p:childTnLst>
+                          </p:cTn>
+                        </p:par>
+                      </p:childTnLst>
+                    </p:cTn>
+                  </p:par>
+                </p:childTnLst>
+              </p:cTn>
+              <p:prevCondLst>
+                <p:cond evt="onPrev" delay="0">
+                  <p:tgtEl>
+                    <p:sldTgt/>
+                  </p:tgtEl>
+                </p:cond>
+              </p:prevCondLst>
+              <p:nextCondLst>
+                <p:cond evt="onNext" delay="0">
+                  <p:tgtEl>
+                    <p:sldTgt/>
+                  </p:tgtEl>
+                </p:cond>
+              </p:nextCondLst>
+            </p:seq>
+          </p:childTnLst>
+        </p:cTn>
+      </p:par>
+    </p:tnLst>
+  </p:timing>
 </p:sld>
 </file>
 
@@ -16181,8 +18188,8 @@
           </p:sp>
         </mc:Fallback>
       </mc:AlternateContent>
-      <mc:AlternateContent xmlns:mc="http://schemas.openxmlformats.org/markup-compatibility/2006" xmlns:a14="http://schemas.microsoft.com/office/drawing/2010/main">
-        <mc:Choice Requires="a14">
+      <mc:AlternateContent xmlns:mc="http://schemas.openxmlformats.org/markup-compatibility/2006">
+        <mc:Choice xmlns:a14="http://schemas.microsoft.com/office/drawing/2010/main" Requires="a14">
           <p:sp>
             <p:nvSpPr>
               <p:cNvPr id="3" name="Content Placeholder 2">
@@ -16487,7 +18494,7 @@
                 </a14:m>
                 <a:r>
                   <a:rPr lang="en-US" dirty="0"/>
-                  <a:t> uses only first component and is a one-step TD update.</a:t>
+                  <a:t> uses only first component. One-step TD update.</a:t>
                 </a:r>
               </a:p>
               <a:p>
@@ -16518,7 +18525,7 @@
                 </a14:m>
                 <a:r>
                   <a:rPr lang="en-US" dirty="0"/>
-                  <a:t> uses only the last component and is a MC update.</a:t>
+                  <a:t> uses only the last component. MC update.</a:t>
                 </a:r>
               </a:p>
               <a:p>
@@ -16528,7 +18535,7 @@
             </p:txBody>
           </p:sp>
         </mc:Choice>
-        <mc:Fallback xmlns="">
+        <mc:Fallback>
           <p:sp>
             <p:nvSpPr>
               <p:cNvPr id="3" name="Content Placeholder 2">
@@ -16553,7 +18560,7 @@
               <a:blipFill>
                 <a:blip r:embed="rId3"/>
                 <a:stretch>
-                  <a:fillRect l="-1777" t="-2168" r="-2863" b="-1403"/>
+                  <a:fillRect l="-1777" t="-2168" r="-2863"/>
                 </a:stretch>
               </a:blipFill>
             </p:spPr>
@@ -18476,8 +20483,8 @@
           </p:sp>
         </mc:Fallback>
       </mc:AlternateContent>
-      <mc:AlternateContent xmlns:mc="http://schemas.openxmlformats.org/markup-compatibility/2006" xmlns:a14="http://schemas.microsoft.com/office/drawing/2010/main">
-        <mc:Choice Requires="a14">
+      <mc:AlternateContent xmlns:mc="http://schemas.openxmlformats.org/markup-compatibility/2006">
+        <mc:Choice xmlns:a14="http://schemas.microsoft.com/office/drawing/2010/main" Requires="a14">
           <p:sp>
             <p:nvSpPr>
               <p:cNvPr id="3" name="Content Placeholder 2">
@@ -18496,13 +20503,13 @@
             </p:nvSpPr>
             <p:spPr>
               <a:xfrm>
-                <a:off x="838200" y="1397331"/>
-                <a:ext cx="10515600" cy="1495771"/>
+                <a:off x="838200" y="1397332"/>
+                <a:ext cx="10515600" cy="1319520"/>
               </a:xfrm>
             </p:spPr>
             <p:txBody>
               <a:bodyPr>
-                <a:normAutofit fontScale="77500" lnSpcReduction="20000"/>
+                <a:normAutofit fontScale="62500" lnSpcReduction="20000"/>
               </a:bodyPr>
               <a:lstStyle/>
               <a:p>
@@ -18522,13 +20529,25 @@
                 </a14:m>
                 <a:r>
                   <a:rPr lang="en-US" dirty="0"/>
-                  <a:t>-return as the update target for SGD (semi-gradient descent) with approximation.</a:t>
+                  <a:t>-return as the update target for </a:t>
+                </a:r>
+                <a:r>
+                  <a:rPr lang="en-US" b="1" dirty="0"/>
+                  <a:t>semi-gradient descent with approximation</a:t>
+                </a:r>
+                <a:r>
+                  <a:rPr lang="en-US" dirty="0"/>
+                  <a:t>.</a:t>
                 </a:r>
               </a:p>
               <a:p>
                 <a:r>
+                  <a:rPr lang="en-US" b="1" dirty="0"/>
+                  <a:t>Update</a:t>
+                </a:r>
+                <a:r>
                   <a:rPr lang="en-US" dirty="0"/>
-                  <a:t>Update: Use </a:t>
+                  <a:t>: Use </a:t>
                 </a:r>
                 <a14:m>
                   <m:oMath xmlns:m="http://schemas.openxmlformats.org/officeDocument/2006/math">
@@ -18988,7 +21007,7 @@
             </p:txBody>
           </p:sp>
         </mc:Choice>
-        <mc:Fallback xmlns="">
+        <mc:Fallback>
           <p:sp>
             <p:nvSpPr>
               <p:cNvPr id="3" name="Content Placeholder 2">
@@ -19007,13 +21026,13 @@
             </p:nvSpPr>
             <p:spPr>
               <a:xfrm>
-                <a:off x="838200" y="1397331"/>
-                <a:ext cx="10515600" cy="1495771"/>
+                <a:off x="838200" y="1397332"/>
+                <a:ext cx="10515600" cy="1319520"/>
               </a:xfrm>
               <a:blipFill>
                 <a:blip r:embed="rId3"/>
                 <a:stretch>
-                  <a:fillRect l="-696" t="-8130"/>
+                  <a:fillRect l="-406" t="-6912"/>
                 </a:stretch>
               </a:blipFill>
             </p:spPr>
@@ -19046,10 +21065,10 @@
         </p:nvGrpSpPr>
         <p:grpSpPr>
           <a:xfrm>
-            <a:off x="1023079" y="3080477"/>
-            <a:ext cx="9876018" cy="3107124"/>
-            <a:chOff x="1199214" y="3385750"/>
-            <a:chExt cx="9876018" cy="3107124"/>
+            <a:off x="1152460" y="2765735"/>
+            <a:ext cx="9669185" cy="3962956"/>
+            <a:chOff x="1406047" y="2529918"/>
+            <a:chExt cx="9669185" cy="3962956"/>
           </a:xfrm>
         </p:grpSpPr>
         <p:pic>
@@ -19082,8 +21101,8 @@
             </a:prstGeom>
           </p:spPr>
         </p:pic>
-        <mc:AlternateContent xmlns:mc="http://schemas.openxmlformats.org/markup-compatibility/2006" xmlns:a14="http://schemas.microsoft.com/office/drawing/2010/main">
-          <mc:Choice Requires="a14">
+        <mc:AlternateContent xmlns:mc="http://schemas.openxmlformats.org/markup-compatibility/2006">
+          <mc:Choice xmlns:a14="http://schemas.microsoft.com/office/drawing/2010/main" Requires="a14">
             <p:sp>
               <p:nvSpPr>
                 <p:cNvPr id="6" name="TextBox 5">
@@ -19098,7 +21117,7 @@
               </p:nvSpPr>
               <p:spPr>
                 <a:xfrm>
-                  <a:off x="1199214" y="3666850"/>
+                  <a:off x="1406047" y="2529918"/>
                   <a:ext cx="2158583" cy="2031325"/>
                 </a:xfrm>
                 <a:prstGeom prst="rect">
@@ -19158,7 +21177,7 @@
               </p:txBody>
             </p:sp>
           </mc:Choice>
-          <mc:Fallback xmlns="">
+          <mc:Fallback>
             <p:sp>
               <p:nvSpPr>
                 <p:cNvPr id="6" name="TextBox 5">
@@ -19175,7 +21194,7 @@
               </p:nvSpPr>
               <p:spPr>
                 <a:xfrm>
-                  <a:off x="1199214" y="3666850"/>
+                  <a:off x="1406047" y="2529918"/>
                   <a:ext cx="2158583" cy="2031325"/>
                 </a:xfrm>
                 <a:prstGeom prst="rect">
@@ -19184,7 +21203,7 @@
                 <a:blipFill>
                   <a:blip r:embed="rId5"/>
                   <a:stretch>
-                    <a:fillRect l="-2542" t="-1198" b="-3892"/>
+                    <a:fillRect l="-2260" t="-1502" b="-4204"/>
                   </a:stretch>
                 </a:blipFill>
               </p:spPr>
@@ -19203,6 +21222,2200 @@
             </p:sp>
           </mc:Fallback>
         </mc:AlternateContent>
+      </p:grpSp>
+      <p:grpSp>
+        <p:nvGrpSpPr>
+          <p:cNvPr id="95" name="Group 94">
+            <a:extLst>
+              <a:ext uri="{FF2B5EF4-FFF2-40B4-BE49-F238E27FC236}">
+                <a16:creationId xmlns:a16="http://schemas.microsoft.com/office/drawing/2014/main" id="{12A65E2A-F699-E5C1-C264-E0BC7D75A8D7}"/>
+              </a:ext>
+            </a:extLst>
+          </p:cNvPr>
+          <p:cNvGrpSpPr/>
+          <p:nvPr/>
+        </p:nvGrpSpPr>
+        <p:grpSpPr>
+          <a:xfrm>
+            <a:off x="3403550" y="2923409"/>
+            <a:ext cx="7659148" cy="661675"/>
+            <a:chOff x="2214694" y="6167346"/>
+            <a:chExt cx="7659148" cy="661675"/>
+          </a:xfrm>
+        </p:grpSpPr>
+        <p:grpSp>
+          <p:nvGrpSpPr>
+            <p:cNvPr id="93" name="Group 92">
+              <a:extLst>
+                <a:ext uri="{FF2B5EF4-FFF2-40B4-BE49-F238E27FC236}">
+                  <a16:creationId xmlns:a16="http://schemas.microsoft.com/office/drawing/2014/main" id="{97D967B2-B348-0E40-0BB3-84B7D0B3F934}"/>
+                </a:ext>
+              </a:extLst>
+            </p:cNvPr>
+            <p:cNvGrpSpPr/>
+            <p:nvPr/>
+          </p:nvGrpSpPr>
+          <p:grpSpPr>
+            <a:xfrm>
+              <a:off x="2461790" y="6167346"/>
+              <a:ext cx="7165118" cy="661675"/>
+              <a:chOff x="2461790" y="6167346"/>
+              <a:chExt cx="7165118" cy="661675"/>
+            </a:xfrm>
+          </p:grpSpPr>
+          <p:sp>
+            <p:nvSpPr>
+              <p:cNvPr id="9" name="Rectangle 8">
+                <a:extLst>
+                  <a:ext uri="{FF2B5EF4-FFF2-40B4-BE49-F238E27FC236}">
+                    <a16:creationId xmlns:a16="http://schemas.microsoft.com/office/drawing/2014/main" id="{32619BE9-C484-A416-98A4-8AE733AC04D1}"/>
+                  </a:ext>
+                </a:extLst>
+              </p:cNvPr>
+              <p:cNvSpPr/>
+              <p:nvPr/>
+            </p:nvSpPr>
+            <p:spPr>
+              <a:xfrm>
+                <a:off x="2461790" y="6372200"/>
+                <a:ext cx="117424" cy="119056"/>
+              </a:xfrm>
+              <a:prstGeom prst="rect">
+                <a:avLst/>
+              </a:prstGeom>
+            </p:spPr>
+            <p:style>
+              <a:lnRef idx="2">
+                <a:schemeClr val="accent1">
+                  <a:shade val="15000"/>
+                </a:schemeClr>
+              </a:lnRef>
+              <a:fillRef idx="1">
+                <a:schemeClr val="accent1"/>
+              </a:fillRef>
+              <a:effectRef idx="0">
+                <a:schemeClr val="accent1"/>
+              </a:effectRef>
+              <a:fontRef idx="minor">
+                <a:schemeClr val="lt1"/>
+              </a:fontRef>
+            </p:style>
+            <p:txBody>
+              <a:bodyPr rtlCol="0" anchor="ctr"/>
+              <a:lstStyle/>
+              <a:p>
+                <a:pPr algn="ctr"/>
+                <a:endParaRPr lang="en-US"/>
+              </a:p>
+            </p:txBody>
+          </p:sp>
+          <p:sp>
+            <p:nvSpPr>
+              <p:cNvPr id="10" name="Rectangle 9">
+                <a:extLst>
+                  <a:ext uri="{FF2B5EF4-FFF2-40B4-BE49-F238E27FC236}">
+                    <a16:creationId xmlns:a16="http://schemas.microsoft.com/office/drawing/2014/main" id="{6CB1DB2A-CAD7-37A1-3BAA-EC2AEDB53E27}"/>
+                  </a:ext>
+                </a:extLst>
+              </p:cNvPr>
+              <p:cNvSpPr/>
+              <p:nvPr/>
+            </p:nvSpPr>
+            <p:spPr>
+              <a:xfrm>
+                <a:off x="9440989" y="6372200"/>
+                <a:ext cx="117424" cy="119056"/>
+              </a:xfrm>
+              <a:prstGeom prst="rect">
+                <a:avLst/>
+              </a:prstGeom>
+            </p:spPr>
+            <p:style>
+              <a:lnRef idx="2">
+                <a:schemeClr val="accent1">
+                  <a:shade val="15000"/>
+                </a:schemeClr>
+              </a:lnRef>
+              <a:fillRef idx="1">
+                <a:schemeClr val="accent1"/>
+              </a:fillRef>
+              <a:effectRef idx="0">
+                <a:schemeClr val="accent1"/>
+              </a:effectRef>
+              <a:fontRef idx="minor">
+                <a:schemeClr val="lt1"/>
+              </a:fontRef>
+            </p:style>
+            <p:txBody>
+              <a:bodyPr rtlCol="0" anchor="ctr"/>
+              <a:lstStyle/>
+              <a:p>
+                <a:pPr algn="ctr"/>
+                <a:endParaRPr lang="en-US"/>
+              </a:p>
+            </p:txBody>
+          </p:sp>
+          <p:sp>
+            <p:nvSpPr>
+              <p:cNvPr id="11" name="Oval 10">
+                <a:extLst>
+                  <a:ext uri="{FF2B5EF4-FFF2-40B4-BE49-F238E27FC236}">
+                    <a16:creationId xmlns:a16="http://schemas.microsoft.com/office/drawing/2014/main" id="{AF1689B6-1017-4B3A-8792-CA3EEBC41DC8}"/>
+                  </a:ext>
+                </a:extLst>
+              </p:cNvPr>
+              <p:cNvSpPr/>
+              <p:nvPr/>
+            </p:nvSpPr>
+            <p:spPr>
+              <a:xfrm>
+                <a:off x="2801105" y="6363887"/>
+                <a:ext cx="127577" cy="135683"/>
+              </a:xfrm>
+              <a:prstGeom prst="ellipse">
+                <a:avLst/>
+              </a:prstGeom>
+              <a:noFill/>
+              <a:ln w="9525" cap="flat" cmpd="sng" algn="ctr">
+                <a:solidFill>
+                  <a:schemeClr val="dk1"/>
+                </a:solidFill>
+                <a:prstDash val="solid"/>
+                <a:round/>
+                <a:headEnd type="none" w="med" len="med"/>
+                <a:tailEnd type="none" w="med" len="med"/>
+              </a:ln>
+            </p:spPr>
+            <p:style>
+              <a:lnRef idx="0">
+                <a:scrgbClr r="0" g="0" b="0"/>
+              </a:lnRef>
+              <a:fillRef idx="0">
+                <a:scrgbClr r="0" g="0" b="0"/>
+              </a:fillRef>
+              <a:effectRef idx="0">
+                <a:scrgbClr r="0" g="0" b="0"/>
+              </a:effectRef>
+              <a:fontRef idx="minor">
+                <a:schemeClr val="dk1"/>
+              </a:fontRef>
+            </p:style>
+            <p:txBody>
+              <a:bodyPr rtlCol="0" anchor="ctr"/>
+              <a:lstStyle/>
+              <a:p>
+                <a:pPr algn="ctr"/>
+                <a:endParaRPr lang="en-US"/>
+              </a:p>
+            </p:txBody>
+          </p:sp>
+          <p:sp>
+            <p:nvSpPr>
+              <p:cNvPr id="12" name="Oval 11">
+                <a:extLst>
+                  <a:ext uri="{FF2B5EF4-FFF2-40B4-BE49-F238E27FC236}">
+                    <a16:creationId xmlns:a16="http://schemas.microsoft.com/office/drawing/2014/main" id="{7630ABE6-10AF-4F05-9562-8CF14AF760F7}"/>
+                  </a:ext>
+                </a:extLst>
+              </p:cNvPr>
+              <p:cNvSpPr/>
+              <p:nvPr/>
+            </p:nvSpPr>
+            <p:spPr>
+              <a:xfrm>
+                <a:off x="6295785" y="6363887"/>
+                <a:ext cx="127577" cy="135683"/>
+              </a:xfrm>
+              <a:prstGeom prst="ellipse">
+                <a:avLst/>
+              </a:prstGeom>
+              <a:ln>
+                <a:headEnd type="none" w="med" len="med"/>
+                <a:tailEnd type="none" w="med" len="med"/>
+              </a:ln>
+            </p:spPr>
+            <p:style>
+              <a:lnRef idx="2">
+                <a:schemeClr val="accent1">
+                  <a:shade val="15000"/>
+                </a:schemeClr>
+              </a:lnRef>
+              <a:fillRef idx="1">
+                <a:schemeClr val="accent1"/>
+              </a:fillRef>
+              <a:effectRef idx="0">
+                <a:schemeClr val="accent1"/>
+              </a:effectRef>
+              <a:fontRef idx="minor">
+                <a:schemeClr val="lt1"/>
+              </a:fontRef>
+            </p:style>
+            <p:txBody>
+              <a:bodyPr rtlCol="0" anchor="ctr"/>
+              <a:lstStyle/>
+              <a:p>
+                <a:pPr algn="ctr"/>
+                <a:endParaRPr lang="en-US"/>
+              </a:p>
+            </p:txBody>
+          </p:sp>
+          <p:sp>
+            <p:nvSpPr>
+              <p:cNvPr id="13" name="Oval 12">
+                <a:extLst>
+                  <a:ext uri="{FF2B5EF4-FFF2-40B4-BE49-F238E27FC236}">
+                    <a16:creationId xmlns:a16="http://schemas.microsoft.com/office/drawing/2014/main" id="{E34CBCC4-8E16-081B-E4B3-06EC788C2930}"/>
+                  </a:ext>
+                </a:extLst>
+              </p:cNvPr>
+              <p:cNvSpPr/>
+              <p:nvPr/>
+            </p:nvSpPr>
+            <p:spPr>
+              <a:xfrm>
+                <a:off x="8043125" y="6363887"/>
+                <a:ext cx="127577" cy="135683"/>
+              </a:xfrm>
+              <a:prstGeom prst="ellipse">
+                <a:avLst/>
+              </a:prstGeom>
+              <a:noFill/>
+              <a:ln w="9525" cap="flat" cmpd="sng" algn="ctr">
+                <a:solidFill>
+                  <a:schemeClr val="dk1"/>
+                </a:solidFill>
+                <a:prstDash val="solid"/>
+                <a:round/>
+                <a:headEnd type="none" w="med" len="med"/>
+                <a:tailEnd type="none" w="med" len="med"/>
+              </a:ln>
+            </p:spPr>
+            <p:style>
+              <a:lnRef idx="0">
+                <a:scrgbClr r="0" g="0" b="0"/>
+              </a:lnRef>
+              <a:fillRef idx="0">
+                <a:scrgbClr r="0" g="0" b="0"/>
+              </a:fillRef>
+              <a:effectRef idx="0">
+                <a:scrgbClr r="0" g="0" b="0"/>
+              </a:effectRef>
+              <a:fontRef idx="minor">
+                <a:schemeClr val="dk1"/>
+              </a:fontRef>
+            </p:style>
+            <p:txBody>
+              <a:bodyPr rtlCol="0" anchor="ctr"/>
+              <a:lstStyle/>
+              <a:p>
+                <a:pPr algn="ctr"/>
+                <a:endParaRPr lang="en-US"/>
+              </a:p>
+            </p:txBody>
+          </p:sp>
+          <p:sp>
+            <p:nvSpPr>
+              <p:cNvPr id="14" name="Oval 13">
+                <a:extLst>
+                  <a:ext uri="{FF2B5EF4-FFF2-40B4-BE49-F238E27FC236}">
+                    <a16:creationId xmlns:a16="http://schemas.microsoft.com/office/drawing/2014/main" id="{289AA893-5A37-4C2B-270B-FFF9ECEC7666}"/>
+                  </a:ext>
+                </a:extLst>
+              </p:cNvPr>
+              <p:cNvSpPr/>
+              <p:nvPr/>
+            </p:nvSpPr>
+            <p:spPr>
+              <a:xfrm>
+                <a:off x="8742061" y="6363887"/>
+                <a:ext cx="127577" cy="135683"/>
+              </a:xfrm>
+              <a:prstGeom prst="ellipse">
+                <a:avLst/>
+              </a:prstGeom>
+              <a:noFill/>
+              <a:ln w="9525" cap="flat" cmpd="sng" algn="ctr">
+                <a:solidFill>
+                  <a:schemeClr val="dk1"/>
+                </a:solidFill>
+                <a:prstDash val="solid"/>
+                <a:round/>
+                <a:headEnd type="none" w="med" len="med"/>
+                <a:tailEnd type="none" w="med" len="med"/>
+              </a:ln>
+            </p:spPr>
+            <p:style>
+              <a:lnRef idx="0">
+                <a:scrgbClr r="0" g="0" b="0"/>
+              </a:lnRef>
+              <a:fillRef idx="0">
+                <a:scrgbClr r="0" g="0" b="0"/>
+              </a:fillRef>
+              <a:effectRef idx="0">
+                <a:scrgbClr r="0" g="0" b="0"/>
+              </a:effectRef>
+              <a:fontRef idx="minor">
+                <a:schemeClr val="dk1"/>
+              </a:fontRef>
+            </p:style>
+            <p:txBody>
+              <a:bodyPr rtlCol="0" anchor="ctr"/>
+              <a:lstStyle/>
+              <a:p>
+                <a:pPr algn="ctr"/>
+                <a:endParaRPr lang="en-US"/>
+              </a:p>
+            </p:txBody>
+          </p:sp>
+          <p:sp>
+            <p:nvSpPr>
+              <p:cNvPr id="15" name="Oval 14">
+                <a:extLst>
+                  <a:ext uri="{FF2B5EF4-FFF2-40B4-BE49-F238E27FC236}">
+                    <a16:creationId xmlns:a16="http://schemas.microsoft.com/office/drawing/2014/main" id="{D3C910E0-52B9-557F-9E40-121901F79C22}"/>
+                  </a:ext>
+                </a:extLst>
+              </p:cNvPr>
+              <p:cNvSpPr/>
+              <p:nvPr/>
+            </p:nvSpPr>
+            <p:spPr>
+              <a:xfrm>
+                <a:off x="9091529" y="6363887"/>
+                <a:ext cx="127577" cy="135683"/>
+              </a:xfrm>
+              <a:prstGeom prst="ellipse">
+                <a:avLst/>
+              </a:prstGeom>
+              <a:noFill/>
+              <a:ln w="9525" cap="flat" cmpd="sng" algn="ctr">
+                <a:solidFill>
+                  <a:schemeClr val="dk1"/>
+                </a:solidFill>
+                <a:prstDash val="solid"/>
+                <a:round/>
+                <a:headEnd type="none" w="med" len="med"/>
+                <a:tailEnd type="none" w="med" len="med"/>
+              </a:ln>
+            </p:spPr>
+            <p:style>
+              <a:lnRef idx="0">
+                <a:scrgbClr r="0" g="0" b="0"/>
+              </a:lnRef>
+              <a:fillRef idx="0">
+                <a:scrgbClr r="0" g="0" b="0"/>
+              </a:fillRef>
+              <a:effectRef idx="0">
+                <a:scrgbClr r="0" g="0" b="0"/>
+              </a:effectRef>
+              <a:fontRef idx="minor">
+                <a:schemeClr val="dk1"/>
+              </a:fontRef>
+            </p:style>
+            <p:txBody>
+              <a:bodyPr rtlCol="0" anchor="ctr"/>
+              <a:lstStyle/>
+              <a:p>
+                <a:pPr algn="ctr"/>
+                <a:endParaRPr lang="en-US"/>
+              </a:p>
+            </p:txBody>
+          </p:sp>
+          <p:sp>
+            <p:nvSpPr>
+              <p:cNvPr id="16" name="Oval 15">
+                <a:extLst>
+                  <a:ext uri="{FF2B5EF4-FFF2-40B4-BE49-F238E27FC236}">
+                    <a16:creationId xmlns:a16="http://schemas.microsoft.com/office/drawing/2014/main" id="{51BEBD32-299F-2311-0411-C2DC5F42B7AA}"/>
+                  </a:ext>
+                </a:extLst>
+              </p:cNvPr>
+              <p:cNvSpPr/>
+              <p:nvPr/>
+            </p:nvSpPr>
+            <p:spPr>
+              <a:xfrm>
+                <a:off x="3849509" y="6363887"/>
+                <a:ext cx="127577" cy="135683"/>
+              </a:xfrm>
+              <a:prstGeom prst="ellipse">
+                <a:avLst/>
+              </a:prstGeom>
+              <a:noFill/>
+              <a:ln w="9525" cap="flat" cmpd="sng" algn="ctr">
+                <a:solidFill>
+                  <a:schemeClr val="dk1"/>
+                </a:solidFill>
+                <a:prstDash val="solid"/>
+                <a:round/>
+                <a:headEnd type="none" w="med" len="med"/>
+                <a:tailEnd type="none" w="med" len="med"/>
+              </a:ln>
+            </p:spPr>
+            <p:style>
+              <a:lnRef idx="0">
+                <a:scrgbClr r="0" g="0" b="0"/>
+              </a:lnRef>
+              <a:fillRef idx="0">
+                <a:scrgbClr r="0" g="0" b="0"/>
+              </a:fillRef>
+              <a:effectRef idx="0">
+                <a:scrgbClr r="0" g="0" b="0"/>
+              </a:effectRef>
+              <a:fontRef idx="minor">
+                <a:schemeClr val="dk1"/>
+              </a:fontRef>
+            </p:style>
+            <p:txBody>
+              <a:bodyPr rtlCol="0" anchor="ctr"/>
+              <a:lstStyle/>
+              <a:p>
+                <a:pPr algn="ctr"/>
+                <a:endParaRPr lang="en-US"/>
+              </a:p>
+            </p:txBody>
+          </p:sp>
+          <p:sp>
+            <p:nvSpPr>
+              <p:cNvPr id="17" name="Oval 16">
+                <a:extLst>
+                  <a:ext uri="{FF2B5EF4-FFF2-40B4-BE49-F238E27FC236}">
+                    <a16:creationId xmlns:a16="http://schemas.microsoft.com/office/drawing/2014/main" id="{E09C797B-9A54-933C-8553-FAE16E6AFCF7}"/>
+                  </a:ext>
+                </a:extLst>
+              </p:cNvPr>
+              <p:cNvSpPr/>
+              <p:nvPr/>
+            </p:nvSpPr>
+            <p:spPr>
+              <a:xfrm>
+                <a:off x="4897913" y="6363887"/>
+                <a:ext cx="127577" cy="135683"/>
+              </a:xfrm>
+              <a:prstGeom prst="ellipse">
+                <a:avLst/>
+              </a:prstGeom>
+              <a:noFill/>
+              <a:ln w="9525" cap="flat" cmpd="sng" algn="ctr">
+                <a:solidFill>
+                  <a:schemeClr val="dk1"/>
+                </a:solidFill>
+                <a:prstDash val="solid"/>
+                <a:round/>
+                <a:headEnd type="none" w="med" len="med"/>
+                <a:tailEnd type="none" w="med" len="med"/>
+              </a:ln>
+            </p:spPr>
+            <p:style>
+              <a:lnRef idx="0">
+                <a:scrgbClr r="0" g="0" b="0"/>
+              </a:lnRef>
+              <a:fillRef idx="0">
+                <a:scrgbClr r="0" g="0" b="0"/>
+              </a:fillRef>
+              <a:effectRef idx="0">
+                <a:scrgbClr r="0" g="0" b="0"/>
+              </a:effectRef>
+              <a:fontRef idx="minor">
+                <a:schemeClr val="dk1"/>
+              </a:fontRef>
+            </p:style>
+            <p:txBody>
+              <a:bodyPr rtlCol="0" anchor="ctr"/>
+              <a:lstStyle/>
+              <a:p>
+                <a:pPr algn="ctr"/>
+                <a:endParaRPr lang="en-US"/>
+              </a:p>
+            </p:txBody>
+          </p:sp>
+          <p:sp>
+            <p:nvSpPr>
+              <p:cNvPr id="18" name="Oval 17">
+                <a:extLst>
+                  <a:ext uri="{FF2B5EF4-FFF2-40B4-BE49-F238E27FC236}">
+                    <a16:creationId xmlns:a16="http://schemas.microsoft.com/office/drawing/2014/main" id="{59BB7535-0223-79FE-D220-16A1A6AFB38E}"/>
+                  </a:ext>
+                </a:extLst>
+              </p:cNvPr>
+              <p:cNvSpPr/>
+              <p:nvPr/>
+            </p:nvSpPr>
+            <p:spPr>
+              <a:xfrm>
+                <a:off x="5946317" y="6363887"/>
+                <a:ext cx="127577" cy="135683"/>
+              </a:xfrm>
+              <a:prstGeom prst="ellipse">
+                <a:avLst/>
+              </a:prstGeom>
+              <a:noFill/>
+              <a:ln w="9525" cap="flat" cmpd="sng" algn="ctr">
+                <a:solidFill>
+                  <a:schemeClr val="dk1"/>
+                </a:solidFill>
+                <a:prstDash val="solid"/>
+                <a:round/>
+                <a:headEnd type="none" w="med" len="med"/>
+                <a:tailEnd type="none" w="med" len="med"/>
+              </a:ln>
+            </p:spPr>
+            <p:style>
+              <a:lnRef idx="0">
+                <a:scrgbClr r="0" g="0" b="0"/>
+              </a:lnRef>
+              <a:fillRef idx="0">
+                <a:scrgbClr r="0" g="0" b="0"/>
+              </a:fillRef>
+              <a:effectRef idx="0">
+                <a:scrgbClr r="0" g="0" b="0"/>
+              </a:effectRef>
+              <a:fontRef idx="minor">
+                <a:schemeClr val="dk1"/>
+              </a:fontRef>
+            </p:style>
+            <p:txBody>
+              <a:bodyPr rtlCol="0" anchor="ctr"/>
+              <a:lstStyle/>
+              <a:p>
+                <a:pPr algn="ctr"/>
+                <a:endParaRPr lang="en-US"/>
+              </a:p>
+            </p:txBody>
+          </p:sp>
+          <p:sp>
+            <p:nvSpPr>
+              <p:cNvPr id="19" name="Oval 18">
+                <a:extLst>
+                  <a:ext uri="{FF2B5EF4-FFF2-40B4-BE49-F238E27FC236}">
+                    <a16:creationId xmlns:a16="http://schemas.microsoft.com/office/drawing/2014/main" id="{D9079AEA-6821-8B89-1FD2-B0E52F0EA999}"/>
+                  </a:ext>
+                </a:extLst>
+              </p:cNvPr>
+              <p:cNvSpPr/>
+              <p:nvPr/>
+            </p:nvSpPr>
+            <p:spPr>
+              <a:xfrm>
+                <a:off x="6645253" y="6363887"/>
+                <a:ext cx="127577" cy="135683"/>
+              </a:xfrm>
+              <a:prstGeom prst="ellipse">
+                <a:avLst/>
+              </a:prstGeom>
+              <a:noFill/>
+              <a:ln w="9525" cap="flat" cmpd="sng" algn="ctr">
+                <a:solidFill>
+                  <a:schemeClr val="dk1"/>
+                </a:solidFill>
+                <a:prstDash val="solid"/>
+                <a:round/>
+                <a:headEnd type="none" w="med" len="med"/>
+                <a:tailEnd type="none" w="med" len="med"/>
+              </a:ln>
+            </p:spPr>
+            <p:style>
+              <a:lnRef idx="0">
+                <a:scrgbClr r="0" g="0" b="0"/>
+              </a:lnRef>
+              <a:fillRef idx="0">
+                <a:scrgbClr r="0" g="0" b="0"/>
+              </a:fillRef>
+              <a:effectRef idx="0">
+                <a:scrgbClr r="0" g="0" b="0"/>
+              </a:effectRef>
+              <a:fontRef idx="minor">
+                <a:schemeClr val="dk1"/>
+              </a:fontRef>
+            </p:style>
+            <p:txBody>
+              <a:bodyPr rtlCol="0" anchor="ctr"/>
+              <a:lstStyle/>
+              <a:p>
+                <a:pPr algn="ctr"/>
+                <a:endParaRPr lang="en-US"/>
+              </a:p>
+            </p:txBody>
+          </p:sp>
+          <p:sp>
+            <p:nvSpPr>
+              <p:cNvPr id="20" name="Oval 19">
+                <a:extLst>
+                  <a:ext uri="{FF2B5EF4-FFF2-40B4-BE49-F238E27FC236}">
+                    <a16:creationId xmlns:a16="http://schemas.microsoft.com/office/drawing/2014/main" id="{7FD6F763-B9D3-4E4F-755F-844788DE5356}"/>
+                  </a:ext>
+                </a:extLst>
+              </p:cNvPr>
+              <p:cNvSpPr/>
+              <p:nvPr/>
+            </p:nvSpPr>
+            <p:spPr>
+              <a:xfrm>
+                <a:off x="6994721" y="6363887"/>
+                <a:ext cx="127577" cy="135683"/>
+              </a:xfrm>
+              <a:prstGeom prst="ellipse">
+                <a:avLst/>
+              </a:prstGeom>
+              <a:noFill/>
+              <a:ln w="9525" cap="flat" cmpd="sng" algn="ctr">
+                <a:solidFill>
+                  <a:schemeClr val="dk1"/>
+                </a:solidFill>
+                <a:prstDash val="solid"/>
+                <a:round/>
+                <a:headEnd type="none" w="med" len="med"/>
+                <a:tailEnd type="none" w="med" len="med"/>
+              </a:ln>
+            </p:spPr>
+            <p:style>
+              <a:lnRef idx="0">
+                <a:scrgbClr r="0" g="0" b="0"/>
+              </a:lnRef>
+              <a:fillRef idx="0">
+                <a:scrgbClr r="0" g="0" b="0"/>
+              </a:fillRef>
+              <a:effectRef idx="0">
+                <a:scrgbClr r="0" g="0" b="0"/>
+              </a:effectRef>
+              <a:fontRef idx="minor">
+                <a:schemeClr val="dk1"/>
+              </a:fontRef>
+            </p:style>
+            <p:txBody>
+              <a:bodyPr rtlCol="0" anchor="ctr"/>
+              <a:lstStyle/>
+              <a:p>
+                <a:pPr algn="ctr"/>
+                <a:endParaRPr lang="en-US"/>
+              </a:p>
+            </p:txBody>
+          </p:sp>
+          <p:sp>
+            <p:nvSpPr>
+              <p:cNvPr id="21" name="Oval 20">
+                <a:extLst>
+                  <a:ext uri="{FF2B5EF4-FFF2-40B4-BE49-F238E27FC236}">
+                    <a16:creationId xmlns:a16="http://schemas.microsoft.com/office/drawing/2014/main" id="{589546C9-D7ED-D52D-9595-374828E87B2E}"/>
+                  </a:ext>
+                </a:extLst>
+              </p:cNvPr>
+              <p:cNvSpPr/>
+              <p:nvPr/>
+            </p:nvSpPr>
+            <p:spPr>
+              <a:xfrm>
+                <a:off x="7344189" y="6363887"/>
+                <a:ext cx="127577" cy="135683"/>
+              </a:xfrm>
+              <a:prstGeom prst="ellipse">
+                <a:avLst/>
+              </a:prstGeom>
+              <a:noFill/>
+              <a:ln w="9525" cap="flat" cmpd="sng" algn="ctr">
+                <a:solidFill>
+                  <a:schemeClr val="dk1"/>
+                </a:solidFill>
+                <a:prstDash val="solid"/>
+                <a:round/>
+                <a:headEnd type="none" w="med" len="med"/>
+                <a:tailEnd type="none" w="med" len="med"/>
+              </a:ln>
+            </p:spPr>
+            <p:style>
+              <a:lnRef idx="0">
+                <a:scrgbClr r="0" g="0" b="0"/>
+              </a:lnRef>
+              <a:fillRef idx="0">
+                <a:scrgbClr r="0" g="0" b="0"/>
+              </a:fillRef>
+              <a:effectRef idx="0">
+                <a:scrgbClr r="0" g="0" b="0"/>
+              </a:effectRef>
+              <a:fontRef idx="minor">
+                <a:schemeClr val="dk1"/>
+              </a:fontRef>
+            </p:style>
+            <p:txBody>
+              <a:bodyPr rtlCol="0" anchor="ctr"/>
+              <a:lstStyle/>
+              <a:p>
+                <a:pPr algn="ctr"/>
+                <a:endParaRPr lang="en-US"/>
+              </a:p>
+            </p:txBody>
+          </p:sp>
+          <p:sp>
+            <p:nvSpPr>
+              <p:cNvPr id="22" name="Oval 21">
+                <a:extLst>
+                  <a:ext uri="{FF2B5EF4-FFF2-40B4-BE49-F238E27FC236}">
+                    <a16:creationId xmlns:a16="http://schemas.microsoft.com/office/drawing/2014/main" id="{12A0E120-120F-CCDE-C82B-2B47426D7FE5}"/>
+                  </a:ext>
+                </a:extLst>
+              </p:cNvPr>
+              <p:cNvSpPr/>
+              <p:nvPr/>
+            </p:nvSpPr>
+            <p:spPr>
+              <a:xfrm>
+                <a:off x="7693657" y="6363887"/>
+                <a:ext cx="127577" cy="135683"/>
+              </a:xfrm>
+              <a:prstGeom prst="ellipse">
+                <a:avLst/>
+              </a:prstGeom>
+              <a:noFill/>
+              <a:ln w="9525" cap="flat" cmpd="sng" algn="ctr">
+                <a:solidFill>
+                  <a:schemeClr val="dk1"/>
+                </a:solidFill>
+                <a:prstDash val="solid"/>
+                <a:round/>
+                <a:headEnd type="none" w="med" len="med"/>
+                <a:tailEnd type="none" w="med" len="med"/>
+              </a:ln>
+            </p:spPr>
+            <p:style>
+              <a:lnRef idx="0">
+                <a:scrgbClr r="0" g="0" b="0"/>
+              </a:lnRef>
+              <a:fillRef idx="0">
+                <a:scrgbClr r="0" g="0" b="0"/>
+              </a:fillRef>
+              <a:effectRef idx="0">
+                <a:scrgbClr r="0" g="0" b="0"/>
+              </a:effectRef>
+              <a:fontRef idx="minor">
+                <a:schemeClr val="dk1"/>
+              </a:fontRef>
+            </p:style>
+            <p:txBody>
+              <a:bodyPr rtlCol="0" anchor="ctr"/>
+              <a:lstStyle/>
+              <a:p>
+                <a:pPr algn="ctr"/>
+                <a:endParaRPr lang="en-US"/>
+              </a:p>
+            </p:txBody>
+          </p:sp>
+          <p:sp>
+            <p:nvSpPr>
+              <p:cNvPr id="23" name="Oval 22">
+                <a:extLst>
+                  <a:ext uri="{FF2B5EF4-FFF2-40B4-BE49-F238E27FC236}">
+                    <a16:creationId xmlns:a16="http://schemas.microsoft.com/office/drawing/2014/main" id="{889C76DA-D890-CBDA-2CD8-996545D98B33}"/>
+                  </a:ext>
+                </a:extLst>
+              </p:cNvPr>
+              <p:cNvSpPr/>
+              <p:nvPr/>
+            </p:nvSpPr>
+            <p:spPr>
+              <a:xfrm>
+                <a:off x="8392593" y="6363887"/>
+                <a:ext cx="127577" cy="135683"/>
+              </a:xfrm>
+              <a:prstGeom prst="ellipse">
+                <a:avLst/>
+              </a:prstGeom>
+              <a:noFill/>
+              <a:ln w="9525" cap="flat" cmpd="sng" algn="ctr">
+                <a:solidFill>
+                  <a:schemeClr val="dk1"/>
+                </a:solidFill>
+                <a:prstDash val="solid"/>
+                <a:round/>
+                <a:headEnd type="none" w="med" len="med"/>
+                <a:tailEnd type="none" w="med" len="med"/>
+              </a:ln>
+            </p:spPr>
+            <p:style>
+              <a:lnRef idx="0">
+                <a:scrgbClr r="0" g="0" b="0"/>
+              </a:lnRef>
+              <a:fillRef idx="0">
+                <a:scrgbClr r="0" g="0" b="0"/>
+              </a:fillRef>
+              <a:effectRef idx="0">
+                <a:scrgbClr r="0" g="0" b="0"/>
+              </a:effectRef>
+              <a:fontRef idx="minor">
+                <a:schemeClr val="dk1"/>
+              </a:fontRef>
+            </p:style>
+            <p:txBody>
+              <a:bodyPr rtlCol="0" anchor="ctr"/>
+              <a:lstStyle/>
+              <a:p>
+                <a:pPr algn="ctr"/>
+                <a:endParaRPr lang="en-US"/>
+              </a:p>
+            </p:txBody>
+          </p:sp>
+          <p:sp>
+            <p:nvSpPr>
+              <p:cNvPr id="24" name="Oval 23">
+                <a:extLst>
+                  <a:ext uri="{FF2B5EF4-FFF2-40B4-BE49-F238E27FC236}">
+                    <a16:creationId xmlns:a16="http://schemas.microsoft.com/office/drawing/2014/main" id="{805A342E-E93C-D36F-1D12-19597437B810}"/>
+                  </a:ext>
+                </a:extLst>
+              </p:cNvPr>
+              <p:cNvSpPr/>
+              <p:nvPr/>
+            </p:nvSpPr>
+            <p:spPr>
+              <a:xfrm>
+                <a:off x="3150573" y="6363887"/>
+                <a:ext cx="127577" cy="135683"/>
+              </a:xfrm>
+              <a:prstGeom prst="ellipse">
+                <a:avLst/>
+              </a:prstGeom>
+              <a:noFill/>
+              <a:ln w="9525" cap="flat" cmpd="sng" algn="ctr">
+                <a:solidFill>
+                  <a:schemeClr val="dk1"/>
+                </a:solidFill>
+                <a:prstDash val="solid"/>
+                <a:round/>
+                <a:headEnd type="none" w="med" len="med"/>
+                <a:tailEnd type="none" w="med" len="med"/>
+              </a:ln>
+            </p:spPr>
+            <p:style>
+              <a:lnRef idx="0">
+                <a:scrgbClr r="0" g="0" b="0"/>
+              </a:lnRef>
+              <a:fillRef idx="0">
+                <a:scrgbClr r="0" g="0" b="0"/>
+              </a:fillRef>
+              <a:effectRef idx="0">
+                <a:scrgbClr r="0" g="0" b="0"/>
+              </a:effectRef>
+              <a:fontRef idx="minor">
+                <a:schemeClr val="dk1"/>
+              </a:fontRef>
+            </p:style>
+            <p:txBody>
+              <a:bodyPr rtlCol="0" anchor="ctr"/>
+              <a:lstStyle/>
+              <a:p>
+                <a:pPr algn="ctr"/>
+                <a:endParaRPr lang="en-US"/>
+              </a:p>
+            </p:txBody>
+          </p:sp>
+          <p:sp>
+            <p:nvSpPr>
+              <p:cNvPr id="25" name="Oval 24">
+                <a:extLst>
+                  <a:ext uri="{FF2B5EF4-FFF2-40B4-BE49-F238E27FC236}">
+                    <a16:creationId xmlns:a16="http://schemas.microsoft.com/office/drawing/2014/main" id="{FEF2C0E5-30A4-64B5-81CC-A967EB22B1F6}"/>
+                  </a:ext>
+                </a:extLst>
+              </p:cNvPr>
+              <p:cNvSpPr/>
+              <p:nvPr/>
+            </p:nvSpPr>
+            <p:spPr>
+              <a:xfrm>
+                <a:off x="3500041" y="6363887"/>
+                <a:ext cx="127577" cy="135683"/>
+              </a:xfrm>
+              <a:prstGeom prst="ellipse">
+                <a:avLst/>
+              </a:prstGeom>
+              <a:noFill/>
+              <a:ln w="9525" cap="flat" cmpd="sng" algn="ctr">
+                <a:solidFill>
+                  <a:schemeClr val="dk1"/>
+                </a:solidFill>
+                <a:prstDash val="solid"/>
+                <a:round/>
+                <a:headEnd type="none" w="med" len="med"/>
+                <a:tailEnd type="none" w="med" len="med"/>
+              </a:ln>
+            </p:spPr>
+            <p:style>
+              <a:lnRef idx="0">
+                <a:scrgbClr r="0" g="0" b="0"/>
+              </a:lnRef>
+              <a:fillRef idx="0">
+                <a:scrgbClr r="0" g="0" b="0"/>
+              </a:fillRef>
+              <a:effectRef idx="0">
+                <a:scrgbClr r="0" g="0" b="0"/>
+              </a:effectRef>
+              <a:fontRef idx="minor">
+                <a:schemeClr val="dk1"/>
+              </a:fontRef>
+            </p:style>
+            <p:txBody>
+              <a:bodyPr rtlCol="0" anchor="ctr"/>
+              <a:lstStyle/>
+              <a:p>
+                <a:pPr algn="ctr"/>
+                <a:endParaRPr lang="en-US"/>
+              </a:p>
+            </p:txBody>
+          </p:sp>
+          <p:sp>
+            <p:nvSpPr>
+              <p:cNvPr id="26" name="Oval 25">
+                <a:extLst>
+                  <a:ext uri="{FF2B5EF4-FFF2-40B4-BE49-F238E27FC236}">
+                    <a16:creationId xmlns:a16="http://schemas.microsoft.com/office/drawing/2014/main" id="{3CA23BFD-8168-E566-5BE5-CCBF51E6CB93}"/>
+                  </a:ext>
+                </a:extLst>
+              </p:cNvPr>
+              <p:cNvSpPr/>
+              <p:nvPr/>
+            </p:nvSpPr>
+            <p:spPr>
+              <a:xfrm>
+                <a:off x="4198977" y="6363887"/>
+                <a:ext cx="127577" cy="135683"/>
+              </a:xfrm>
+              <a:prstGeom prst="ellipse">
+                <a:avLst/>
+              </a:prstGeom>
+              <a:noFill/>
+              <a:ln w="9525" cap="flat" cmpd="sng" algn="ctr">
+                <a:solidFill>
+                  <a:schemeClr val="dk1"/>
+                </a:solidFill>
+                <a:prstDash val="solid"/>
+                <a:round/>
+                <a:headEnd type="none" w="med" len="med"/>
+                <a:tailEnd type="none" w="med" len="med"/>
+              </a:ln>
+            </p:spPr>
+            <p:style>
+              <a:lnRef idx="0">
+                <a:scrgbClr r="0" g="0" b="0"/>
+              </a:lnRef>
+              <a:fillRef idx="0">
+                <a:scrgbClr r="0" g="0" b="0"/>
+              </a:fillRef>
+              <a:effectRef idx="0">
+                <a:scrgbClr r="0" g="0" b="0"/>
+              </a:effectRef>
+              <a:fontRef idx="minor">
+                <a:schemeClr val="dk1"/>
+              </a:fontRef>
+            </p:style>
+            <p:txBody>
+              <a:bodyPr rtlCol="0" anchor="ctr"/>
+              <a:lstStyle/>
+              <a:p>
+                <a:pPr algn="ctr"/>
+                <a:endParaRPr lang="en-US"/>
+              </a:p>
+            </p:txBody>
+          </p:sp>
+          <p:sp>
+            <p:nvSpPr>
+              <p:cNvPr id="27" name="Oval 26">
+                <a:extLst>
+                  <a:ext uri="{FF2B5EF4-FFF2-40B4-BE49-F238E27FC236}">
+                    <a16:creationId xmlns:a16="http://schemas.microsoft.com/office/drawing/2014/main" id="{358C67C3-C806-A948-3344-82D69E657CC5}"/>
+                  </a:ext>
+                </a:extLst>
+              </p:cNvPr>
+              <p:cNvSpPr/>
+              <p:nvPr/>
+            </p:nvSpPr>
+            <p:spPr>
+              <a:xfrm>
+                <a:off x="4548445" y="6363887"/>
+                <a:ext cx="127577" cy="135683"/>
+              </a:xfrm>
+              <a:prstGeom prst="ellipse">
+                <a:avLst/>
+              </a:prstGeom>
+              <a:noFill/>
+              <a:ln w="9525" cap="flat" cmpd="sng" algn="ctr">
+                <a:solidFill>
+                  <a:schemeClr val="dk1"/>
+                </a:solidFill>
+                <a:prstDash val="solid"/>
+                <a:round/>
+                <a:headEnd type="none" w="med" len="med"/>
+                <a:tailEnd type="none" w="med" len="med"/>
+              </a:ln>
+            </p:spPr>
+            <p:style>
+              <a:lnRef idx="0">
+                <a:scrgbClr r="0" g="0" b="0"/>
+              </a:lnRef>
+              <a:fillRef idx="0">
+                <a:scrgbClr r="0" g="0" b="0"/>
+              </a:fillRef>
+              <a:effectRef idx="0">
+                <a:scrgbClr r="0" g="0" b="0"/>
+              </a:effectRef>
+              <a:fontRef idx="minor">
+                <a:schemeClr val="dk1"/>
+              </a:fontRef>
+            </p:style>
+            <p:txBody>
+              <a:bodyPr rtlCol="0" anchor="ctr"/>
+              <a:lstStyle/>
+              <a:p>
+                <a:pPr algn="ctr"/>
+                <a:endParaRPr lang="en-US"/>
+              </a:p>
+            </p:txBody>
+          </p:sp>
+          <p:sp>
+            <p:nvSpPr>
+              <p:cNvPr id="28" name="Oval 27">
+                <a:extLst>
+                  <a:ext uri="{FF2B5EF4-FFF2-40B4-BE49-F238E27FC236}">
+                    <a16:creationId xmlns:a16="http://schemas.microsoft.com/office/drawing/2014/main" id="{EEB601CA-3FA5-F6F3-E5E0-E10135ABCF00}"/>
+                  </a:ext>
+                </a:extLst>
+              </p:cNvPr>
+              <p:cNvSpPr/>
+              <p:nvPr/>
+            </p:nvSpPr>
+            <p:spPr>
+              <a:xfrm>
+                <a:off x="5247381" y="6363887"/>
+                <a:ext cx="127577" cy="135683"/>
+              </a:xfrm>
+              <a:prstGeom prst="ellipse">
+                <a:avLst/>
+              </a:prstGeom>
+              <a:noFill/>
+              <a:ln w="9525" cap="flat" cmpd="sng" algn="ctr">
+                <a:solidFill>
+                  <a:schemeClr val="dk1"/>
+                </a:solidFill>
+                <a:prstDash val="solid"/>
+                <a:round/>
+                <a:headEnd type="none" w="med" len="med"/>
+                <a:tailEnd type="none" w="med" len="med"/>
+              </a:ln>
+            </p:spPr>
+            <p:style>
+              <a:lnRef idx="0">
+                <a:scrgbClr r="0" g="0" b="0"/>
+              </a:lnRef>
+              <a:fillRef idx="0">
+                <a:scrgbClr r="0" g="0" b="0"/>
+              </a:fillRef>
+              <a:effectRef idx="0">
+                <a:scrgbClr r="0" g="0" b="0"/>
+              </a:effectRef>
+              <a:fontRef idx="minor">
+                <a:schemeClr val="dk1"/>
+              </a:fontRef>
+            </p:style>
+            <p:txBody>
+              <a:bodyPr rtlCol="0" anchor="ctr"/>
+              <a:lstStyle/>
+              <a:p>
+                <a:pPr algn="ctr"/>
+                <a:endParaRPr lang="en-US"/>
+              </a:p>
+            </p:txBody>
+          </p:sp>
+          <p:sp>
+            <p:nvSpPr>
+              <p:cNvPr id="29" name="Oval 28">
+                <a:extLst>
+                  <a:ext uri="{FF2B5EF4-FFF2-40B4-BE49-F238E27FC236}">
+                    <a16:creationId xmlns:a16="http://schemas.microsoft.com/office/drawing/2014/main" id="{830AB825-0669-506A-FB89-A2380820FAA5}"/>
+                  </a:ext>
+                </a:extLst>
+              </p:cNvPr>
+              <p:cNvSpPr/>
+              <p:nvPr/>
+            </p:nvSpPr>
+            <p:spPr>
+              <a:xfrm>
+                <a:off x="5596849" y="6363887"/>
+                <a:ext cx="127577" cy="135683"/>
+              </a:xfrm>
+              <a:prstGeom prst="ellipse">
+                <a:avLst/>
+              </a:prstGeom>
+              <a:noFill/>
+              <a:ln w="9525" cap="flat" cmpd="sng" algn="ctr">
+                <a:solidFill>
+                  <a:schemeClr val="dk1"/>
+                </a:solidFill>
+                <a:prstDash val="solid"/>
+                <a:round/>
+                <a:headEnd type="none" w="med" len="med"/>
+                <a:tailEnd type="none" w="med" len="med"/>
+              </a:ln>
+            </p:spPr>
+            <p:style>
+              <a:lnRef idx="0">
+                <a:scrgbClr r="0" g="0" b="0"/>
+              </a:lnRef>
+              <a:fillRef idx="0">
+                <a:scrgbClr r="0" g="0" b="0"/>
+              </a:fillRef>
+              <a:effectRef idx="0">
+                <a:scrgbClr r="0" g="0" b="0"/>
+              </a:effectRef>
+              <a:fontRef idx="minor">
+                <a:schemeClr val="dk1"/>
+              </a:fontRef>
+            </p:style>
+            <p:txBody>
+              <a:bodyPr rtlCol="0" anchor="ctr"/>
+              <a:lstStyle/>
+              <a:p>
+                <a:pPr algn="ctr"/>
+                <a:endParaRPr lang="en-US"/>
+              </a:p>
+            </p:txBody>
+          </p:sp>
+          <p:sp>
+            <p:nvSpPr>
+              <p:cNvPr id="30" name="TextBox 29">
+                <a:extLst>
+                  <a:ext uri="{FF2B5EF4-FFF2-40B4-BE49-F238E27FC236}">
+                    <a16:creationId xmlns:a16="http://schemas.microsoft.com/office/drawing/2014/main" id="{BE8C6C8A-6679-5775-AB35-1ECF87C8B844}"/>
+                  </a:ext>
+                </a:extLst>
+              </p:cNvPr>
+              <p:cNvSpPr txBox="1"/>
+              <p:nvPr/>
+            </p:nvSpPr>
+            <p:spPr>
+              <a:xfrm>
+                <a:off x="6096000" y="6499570"/>
+                <a:ext cx="540404" cy="307777"/>
+              </a:xfrm>
+              <a:prstGeom prst="rect">
+                <a:avLst/>
+              </a:prstGeom>
+              <a:noFill/>
+            </p:spPr>
+            <p:txBody>
+              <a:bodyPr wrap="none" rtlCol="0">
+                <a:spAutoFit/>
+              </a:bodyPr>
+              <a:lstStyle/>
+              <a:p>
+                <a:r>
+                  <a:rPr lang="en-US" sz="1400" dirty="0"/>
+                  <a:t>start</a:t>
+                </a:r>
+              </a:p>
+            </p:txBody>
+          </p:sp>
+          <p:cxnSp>
+            <p:nvCxnSpPr>
+              <p:cNvPr id="32" name="Straight Arrow Connector 31">
+                <a:extLst>
+                  <a:ext uri="{FF2B5EF4-FFF2-40B4-BE49-F238E27FC236}">
+                    <a16:creationId xmlns:a16="http://schemas.microsoft.com/office/drawing/2014/main" id="{0C70CA7B-55C5-9430-3357-3B3F162D64EE}"/>
+                  </a:ext>
+                </a:extLst>
+              </p:cNvPr>
+              <p:cNvCxnSpPr>
+                <a:stCxn id="12" idx="6"/>
+                <a:endCxn id="19" idx="2"/>
+              </p:cNvCxnSpPr>
+              <p:nvPr/>
+            </p:nvCxnSpPr>
+            <p:spPr>
+              <a:xfrm>
+                <a:off x="6423362" y="6431729"/>
+                <a:ext cx="221891" cy="0"/>
+              </a:xfrm>
+              <a:prstGeom prst="straightConnector1">
+                <a:avLst/>
+              </a:prstGeom>
+              <a:ln>
+                <a:headEnd type="triangle"/>
+                <a:tailEnd type="triangle"/>
+              </a:ln>
+            </p:spPr>
+            <p:style>
+              <a:lnRef idx="2">
+                <a:schemeClr val="accent1"/>
+              </a:lnRef>
+              <a:fillRef idx="0">
+                <a:schemeClr val="accent1"/>
+              </a:fillRef>
+              <a:effectRef idx="1">
+                <a:schemeClr val="accent1"/>
+              </a:effectRef>
+              <a:fontRef idx="minor">
+                <a:schemeClr val="tx1"/>
+              </a:fontRef>
+            </p:style>
+          </p:cxnSp>
+          <p:cxnSp>
+            <p:nvCxnSpPr>
+              <p:cNvPr id="33" name="Straight Arrow Connector 32">
+                <a:extLst>
+                  <a:ext uri="{FF2B5EF4-FFF2-40B4-BE49-F238E27FC236}">
+                    <a16:creationId xmlns:a16="http://schemas.microsoft.com/office/drawing/2014/main" id="{A10E0A17-7211-8B1D-09E3-ED1D8FFA0A9B}"/>
+                  </a:ext>
+                </a:extLst>
+              </p:cNvPr>
+              <p:cNvCxnSpPr>
+                <a:cxnSpLocks/>
+                <a:stCxn id="19" idx="6"/>
+                <a:endCxn id="20" idx="2"/>
+              </p:cNvCxnSpPr>
+              <p:nvPr/>
+            </p:nvCxnSpPr>
+            <p:spPr>
+              <a:xfrm>
+                <a:off x="6772830" y="6431729"/>
+                <a:ext cx="221891" cy="0"/>
+              </a:xfrm>
+              <a:prstGeom prst="straightConnector1">
+                <a:avLst/>
+              </a:prstGeom>
+              <a:ln>
+                <a:headEnd type="triangle"/>
+                <a:tailEnd type="triangle"/>
+              </a:ln>
+            </p:spPr>
+            <p:style>
+              <a:lnRef idx="2">
+                <a:schemeClr val="accent1"/>
+              </a:lnRef>
+              <a:fillRef idx="0">
+                <a:schemeClr val="accent1"/>
+              </a:fillRef>
+              <a:effectRef idx="1">
+                <a:schemeClr val="accent1"/>
+              </a:effectRef>
+              <a:fontRef idx="minor">
+                <a:schemeClr val="tx1"/>
+              </a:fontRef>
+            </p:style>
+          </p:cxnSp>
+          <p:cxnSp>
+            <p:nvCxnSpPr>
+              <p:cNvPr id="36" name="Straight Arrow Connector 35">
+                <a:extLst>
+                  <a:ext uri="{FF2B5EF4-FFF2-40B4-BE49-F238E27FC236}">
+                    <a16:creationId xmlns:a16="http://schemas.microsoft.com/office/drawing/2014/main" id="{3D538BDB-09FC-E391-18F1-F952E72A0CE0}"/>
+                  </a:ext>
+                </a:extLst>
+              </p:cNvPr>
+              <p:cNvCxnSpPr>
+                <a:cxnSpLocks/>
+                <a:stCxn id="20" idx="6"/>
+                <a:endCxn id="21" idx="2"/>
+              </p:cNvCxnSpPr>
+              <p:nvPr/>
+            </p:nvCxnSpPr>
+            <p:spPr>
+              <a:xfrm>
+                <a:off x="7122298" y="6431729"/>
+                <a:ext cx="221891" cy="0"/>
+              </a:xfrm>
+              <a:prstGeom prst="straightConnector1">
+                <a:avLst/>
+              </a:prstGeom>
+              <a:ln>
+                <a:headEnd type="triangle"/>
+                <a:tailEnd type="triangle"/>
+              </a:ln>
+            </p:spPr>
+            <p:style>
+              <a:lnRef idx="2">
+                <a:schemeClr val="accent1"/>
+              </a:lnRef>
+              <a:fillRef idx="0">
+                <a:schemeClr val="accent1"/>
+              </a:fillRef>
+              <a:effectRef idx="1">
+                <a:schemeClr val="accent1"/>
+              </a:effectRef>
+              <a:fontRef idx="minor">
+                <a:schemeClr val="tx1"/>
+              </a:fontRef>
+            </p:style>
+          </p:cxnSp>
+          <p:cxnSp>
+            <p:nvCxnSpPr>
+              <p:cNvPr id="39" name="Straight Arrow Connector 38">
+                <a:extLst>
+                  <a:ext uri="{FF2B5EF4-FFF2-40B4-BE49-F238E27FC236}">
+                    <a16:creationId xmlns:a16="http://schemas.microsoft.com/office/drawing/2014/main" id="{014953F8-2D0E-1927-8FAE-5D59D36E12D4}"/>
+                  </a:ext>
+                </a:extLst>
+              </p:cNvPr>
+              <p:cNvCxnSpPr>
+                <a:cxnSpLocks/>
+                <a:stCxn id="21" idx="6"/>
+                <a:endCxn id="22" idx="2"/>
+              </p:cNvCxnSpPr>
+              <p:nvPr/>
+            </p:nvCxnSpPr>
+            <p:spPr>
+              <a:xfrm>
+                <a:off x="7471766" y="6431729"/>
+                <a:ext cx="221891" cy="0"/>
+              </a:xfrm>
+              <a:prstGeom prst="straightConnector1">
+                <a:avLst/>
+              </a:prstGeom>
+              <a:ln>
+                <a:headEnd type="triangle"/>
+                <a:tailEnd type="triangle"/>
+              </a:ln>
+            </p:spPr>
+            <p:style>
+              <a:lnRef idx="2">
+                <a:schemeClr val="accent1"/>
+              </a:lnRef>
+              <a:fillRef idx="0">
+                <a:schemeClr val="accent1"/>
+              </a:fillRef>
+              <a:effectRef idx="1">
+                <a:schemeClr val="accent1"/>
+              </a:effectRef>
+              <a:fontRef idx="minor">
+                <a:schemeClr val="tx1"/>
+              </a:fontRef>
+            </p:style>
+          </p:cxnSp>
+          <p:cxnSp>
+            <p:nvCxnSpPr>
+              <p:cNvPr id="42" name="Straight Arrow Connector 41">
+                <a:extLst>
+                  <a:ext uri="{FF2B5EF4-FFF2-40B4-BE49-F238E27FC236}">
+                    <a16:creationId xmlns:a16="http://schemas.microsoft.com/office/drawing/2014/main" id="{568AC4A9-3DBC-DE88-8FFA-9CC171FE6EB0}"/>
+                  </a:ext>
+                </a:extLst>
+              </p:cNvPr>
+              <p:cNvCxnSpPr>
+                <a:cxnSpLocks/>
+                <a:stCxn id="22" idx="6"/>
+                <a:endCxn id="13" idx="2"/>
+              </p:cNvCxnSpPr>
+              <p:nvPr/>
+            </p:nvCxnSpPr>
+            <p:spPr>
+              <a:xfrm>
+                <a:off x="7821234" y="6431729"/>
+                <a:ext cx="221891" cy="0"/>
+              </a:xfrm>
+              <a:prstGeom prst="straightConnector1">
+                <a:avLst/>
+              </a:prstGeom>
+              <a:ln>
+                <a:headEnd type="triangle"/>
+                <a:tailEnd type="triangle"/>
+              </a:ln>
+            </p:spPr>
+            <p:style>
+              <a:lnRef idx="2">
+                <a:schemeClr val="accent1"/>
+              </a:lnRef>
+              <a:fillRef idx="0">
+                <a:schemeClr val="accent1"/>
+              </a:fillRef>
+              <a:effectRef idx="1">
+                <a:schemeClr val="accent1"/>
+              </a:effectRef>
+              <a:fontRef idx="minor">
+                <a:schemeClr val="tx1"/>
+              </a:fontRef>
+            </p:style>
+          </p:cxnSp>
+          <p:cxnSp>
+            <p:nvCxnSpPr>
+              <p:cNvPr id="45" name="Straight Arrow Connector 44">
+                <a:extLst>
+                  <a:ext uri="{FF2B5EF4-FFF2-40B4-BE49-F238E27FC236}">
+                    <a16:creationId xmlns:a16="http://schemas.microsoft.com/office/drawing/2014/main" id="{F173D8E0-7638-0657-ECFD-973A570B6C40}"/>
+                  </a:ext>
+                </a:extLst>
+              </p:cNvPr>
+              <p:cNvCxnSpPr>
+                <a:cxnSpLocks/>
+                <a:stCxn id="13" idx="6"/>
+                <a:endCxn id="23" idx="2"/>
+              </p:cNvCxnSpPr>
+              <p:nvPr/>
+            </p:nvCxnSpPr>
+            <p:spPr>
+              <a:xfrm>
+                <a:off x="8170702" y="6431729"/>
+                <a:ext cx="221891" cy="0"/>
+              </a:xfrm>
+              <a:prstGeom prst="straightConnector1">
+                <a:avLst/>
+              </a:prstGeom>
+              <a:ln>
+                <a:headEnd type="triangle"/>
+                <a:tailEnd type="triangle"/>
+              </a:ln>
+            </p:spPr>
+            <p:style>
+              <a:lnRef idx="2">
+                <a:schemeClr val="accent1"/>
+              </a:lnRef>
+              <a:fillRef idx="0">
+                <a:schemeClr val="accent1"/>
+              </a:fillRef>
+              <a:effectRef idx="1">
+                <a:schemeClr val="accent1"/>
+              </a:effectRef>
+              <a:fontRef idx="minor">
+                <a:schemeClr val="tx1"/>
+              </a:fontRef>
+            </p:style>
+          </p:cxnSp>
+          <p:cxnSp>
+            <p:nvCxnSpPr>
+              <p:cNvPr id="48" name="Straight Arrow Connector 47">
+                <a:extLst>
+                  <a:ext uri="{FF2B5EF4-FFF2-40B4-BE49-F238E27FC236}">
+                    <a16:creationId xmlns:a16="http://schemas.microsoft.com/office/drawing/2014/main" id="{C49BA629-D5B2-BEDE-7BA3-85920105A7B4}"/>
+                  </a:ext>
+                </a:extLst>
+              </p:cNvPr>
+              <p:cNvCxnSpPr>
+                <a:cxnSpLocks/>
+                <a:stCxn id="23" idx="6"/>
+                <a:endCxn id="14" idx="2"/>
+              </p:cNvCxnSpPr>
+              <p:nvPr/>
+            </p:nvCxnSpPr>
+            <p:spPr>
+              <a:xfrm>
+                <a:off x="8520170" y="6431729"/>
+                <a:ext cx="221891" cy="0"/>
+              </a:xfrm>
+              <a:prstGeom prst="straightConnector1">
+                <a:avLst/>
+              </a:prstGeom>
+              <a:ln>
+                <a:headEnd type="triangle"/>
+                <a:tailEnd type="triangle"/>
+              </a:ln>
+            </p:spPr>
+            <p:style>
+              <a:lnRef idx="2">
+                <a:schemeClr val="accent1"/>
+              </a:lnRef>
+              <a:fillRef idx="0">
+                <a:schemeClr val="accent1"/>
+              </a:fillRef>
+              <a:effectRef idx="1">
+                <a:schemeClr val="accent1"/>
+              </a:effectRef>
+              <a:fontRef idx="minor">
+                <a:schemeClr val="tx1"/>
+              </a:fontRef>
+            </p:style>
+          </p:cxnSp>
+          <p:cxnSp>
+            <p:nvCxnSpPr>
+              <p:cNvPr id="51" name="Straight Arrow Connector 50">
+                <a:extLst>
+                  <a:ext uri="{FF2B5EF4-FFF2-40B4-BE49-F238E27FC236}">
+                    <a16:creationId xmlns:a16="http://schemas.microsoft.com/office/drawing/2014/main" id="{73249D8A-234C-D0EC-35F0-9851F00DB3FB}"/>
+                  </a:ext>
+                </a:extLst>
+              </p:cNvPr>
+              <p:cNvCxnSpPr>
+                <a:cxnSpLocks/>
+                <a:stCxn id="14" idx="6"/>
+                <a:endCxn id="15" idx="2"/>
+              </p:cNvCxnSpPr>
+              <p:nvPr/>
+            </p:nvCxnSpPr>
+            <p:spPr>
+              <a:xfrm>
+                <a:off x="8869638" y="6431729"/>
+                <a:ext cx="221891" cy="0"/>
+              </a:xfrm>
+              <a:prstGeom prst="straightConnector1">
+                <a:avLst/>
+              </a:prstGeom>
+              <a:ln>
+                <a:headEnd type="triangle"/>
+                <a:tailEnd type="triangle"/>
+              </a:ln>
+            </p:spPr>
+            <p:style>
+              <a:lnRef idx="2">
+                <a:schemeClr val="accent1"/>
+              </a:lnRef>
+              <a:fillRef idx="0">
+                <a:schemeClr val="accent1"/>
+              </a:fillRef>
+              <a:effectRef idx="1">
+                <a:schemeClr val="accent1"/>
+              </a:effectRef>
+              <a:fontRef idx="minor">
+                <a:schemeClr val="tx1"/>
+              </a:fontRef>
+            </p:style>
+          </p:cxnSp>
+          <p:cxnSp>
+            <p:nvCxnSpPr>
+              <p:cNvPr id="54" name="Straight Arrow Connector 53">
+                <a:extLst>
+                  <a:ext uri="{FF2B5EF4-FFF2-40B4-BE49-F238E27FC236}">
+                    <a16:creationId xmlns:a16="http://schemas.microsoft.com/office/drawing/2014/main" id="{3A6A30CB-9F74-302F-BDAA-838507EE6658}"/>
+                  </a:ext>
+                </a:extLst>
+              </p:cNvPr>
+              <p:cNvCxnSpPr>
+                <a:cxnSpLocks/>
+                <a:stCxn id="15" idx="6"/>
+                <a:endCxn id="10" idx="1"/>
+              </p:cNvCxnSpPr>
+              <p:nvPr/>
+            </p:nvCxnSpPr>
+            <p:spPr>
+              <a:xfrm flipV="1">
+                <a:off x="9219106" y="6431728"/>
+                <a:ext cx="221883" cy="1"/>
+              </a:xfrm>
+              <a:prstGeom prst="straightConnector1">
+                <a:avLst/>
+              </a:prstGeom>
+              <a:ln>
+                <a:headEnd type="none" w="med" len="med"/>
+                <a:tailEnd type="triangle" w="med" len="med"/>
+              </a:ln>
+            </p:spPr>
+            <p:style>
+              <a:lnRef idx="2">
+                <a:schemeClr val="accent1"/>
+              </a:lnRef>
+              <a:fillRef idx="0">
+                <a:schemeClr val="accent1"/>
+              </a:fillRef>
+              <a:effectRef idx="1">
+                <a:schemeClr val="accent1"/>
+              </a:effectRef>
+              <a:fontRef idx="minor">
+                <a:schemeClr val="tx1"/>
+              </a:fontRef>
+            </p:style>
+          </p:cxnSp>
+          <p:sp>
+            <p:nvSpPr>
+              <p:cNvPr id="57" name="TextBox 56">
+                <a:extLst>
+                  <a:ext uri="{FF2B5EF4-FFF2-40B4-BE49-F238E27FC236}">
+                    <a16:creationId xmlns:a16="http://schemas.microsoft.com/office/drawing/2014/main" id="{DDB88DF1-91ED-4C9F-7FC4-392EDFF8BC8C}"/>
+                  </a:ext>
+                </a:extLst>
+              </p:cNvPr>
+              <p:cNvSpPr txBox="1"/>
+              <p:nvPr/>
+            </p:nvSpPr>
+            <p:spPr>
+              <a:xfrm>
+                <a:off x="9146739" y="6167346"/>
+                <a:ext cx="280846" cy="307777"/>
+              </a:xfrm>
+              <a:prstGeom prst="rect">
+                <a:avLst/>
+              </a:prstGeom>
+              <a:noFill/>
+            </p:spPr>
+            <p:txBody>
+              <a:bodyPr wrap="none" rtlCol="0">
+                <a:spAutoFit/>
+              </a:bodyPr>
+              <a:lstStyle/>
+              <a:p>
+                <a:r>
+                  <a:rPr lang="en-US" sz="1400" dirty="0"/>
+                  <a:t>1</a:t>
+                </a:r>
+              </a:p>
+            </p:txBody>
+          </p:sp>
+          <p:cxnSp>
+            <p:nvCxnSpPr>
+              <p:cNvPr id="58" name="Straight Arrow Connector 57">
+                <a:extLst>
+                  <a:ext uri="{FF2B5EF4-FFF2-40B4-BE49-F238E27FC236}">
+                    <a16:creationId xmlns:a16="http://schemas.microsoft.com/office/drawing/2014/main" id="{3C708411-13CA-3938-9960-AF0276035451}"/>
+                  </a:ext>
+                </a:extLst>
+              </p:cNvPr>
+              <p:cNvCxnSpPr>
+                <a:cxnSpLocks/>
+                <a:stCxn id="11" idx="6"/>
+                <a:endCxn id="24" idx="2"/>
+              </p:cNvCxnSpPr>
+              <p:nvPr/>
+            </p:nvCxnSpPr>
+            <p:spPr>
+              <a:xfrm>
+                <a:off x="2928682" y="6431729"/>
+                <a:ext cx="221891" cy="0"/>
+              </a:xfrm>
+              <a:prstGeom prst="straightConnector1">
+                <a:avLst/>
+              </a:prstGeom>
+              <a:ln>
+                <a:headEnd type="triangle"/>
+                <a:tailEnd type="triangle"/>
+              </a:ln>
+            </p:spPr>
+            <p:style>
+              <a:lnRef idx="2">
+                <a:schemeClr val="accent1"/>
+              </a:lnRef>
+              <a:fillRef idx="0">
+                <a:schemeClr val="accent1"/>
+              </a:fillRef>
+              <a:effectRef idx="1">
+                <a:schemeClr val="accent1"/>
+              </a:effectRef>
+              <a:fontRef idx="minor">
+                <a:schemeClr val="tx1"/>
+              </a:fontRef>
+            </p:style>
+          </p:cxnSp>
+          <p:cxnSp>
+            <p:nvCxnSpPr>
+              <p:cNvPr id="59" name="Straight Arrow Connector 58">
+                <a:extLst>
+                  <a:ext uri="{FF2B5EF4-FFF2-40B4-BE49-F238E27FC236}">
+                    <a16:creationId xmlns:a16="http://schemas.microsoft.com/office/drawing/2014/main" id="{AC1A75C6-70EC-4B7A-A5B0-1BA5335000AF}"/>
+                  </a:ext>
+                </a:extLst>
+              </p:cNvPr>
+              <p:cNvCxnSpPr>
+                <a:cxnSpLocks/>
+                <a:stCxn id="24" idx="6"/>
+                <a:endCxn id="25" idx="2"/>
+              </p:cNvCxnSpPr>
+              <p:nvPr/>
+            </p:nvCxnSpPr>
+            <p:spPr>
+              <a:xfrm>
+                <a:off x="3278150" y="6431729"/>
+                <a:ext cx="221891" cy="0"/>
+              </a:xfrm>
+              <a:prstGeom prst="straightConnector1">
+                <a:avLst/>
+              </a:prstGeom>
+              <a:ln>
+                <a:headEnd type="triangle"/>
+                <a:tailEnd type="triangle"/>
+              </a:ln>
+            </p:spPr>
+            <p:style>
+              <a:lnRef idx="2">
+                <a:schemeClr val="accent1"/>
+              </a:lnRef>
+              <a:fillRef idx="0">
+                <a:schemeClr val="accent1"/>
+              </a:fillRef>
+              <a:effectRef idx="1">
+                <a:schemeClr val="accent1"/>
+              </a:effectRef>
+              <a:fontRef idx="minor">
+                <a:schemeClr val="tx1"/>
+              </a:fontRef>
+            </p:style>
+          </p:cxnSp>
+          <p:cxnSp>
+            <p:nvCxnSpPr>
+              <p:cNvPr id="60" name="Straight Arrow Connector 59">
+                <a:extLst>
+                  <a:ext uri="{FF2B5EF4-FFF2-40B4-BE49-F238E27FC236}">
+                    <a16:creationId xmlns:a16="http://schemas.microsoft.com/office/drawing/2014/main" id="{5B4BD555-83D5-3B59-C23E-13F48857A492}"/>
+                  </a:ext>
+                </a:extLst>
+              </p:cNvPr>
+              <p:cNvCxnSpPr>
+                <a:cxnSpLocks/>
+                <a:stCxn id="25" idx="6"/>
+                <a:endCxn id="16" idx="2"/>
+              </p:cNvCxnSpPr>
+              <p:nvPr/>
+            </p:nvCxnSpPr>
+            <p:spPr>
+              <a:xfrm>
+                <a:off x="3627618" y="6431729"/>
+                <a:ext cx="221891" cy="0"/>
+              </a:xfrm>
+              <a:prstGeom prst="straightConnector1">
+                <a:avLst/>
+              </a:prstGeom>
+              <a:ln>
+                <a:headEnd type="triangle"/>
+                <a:tailEnd type="triangle"/>
+              </a:ln>
+            </p:spPr>
+            <p:style>
+              <a:lnRef idx="2">
+                <a:schemeClr val="accent1"/>
+              </a:lnRef>
+              <a:fillRef idx="0">
+                <a:schemeClr val="accent1"/>
+              </a:fillRef>
+              <a:effectRef idx="1">
+                <a:schemeClr val="accent1"/>
+              </a:effectRef>
+              <a:fontRef idx="minor">
+                <a:schemeClr val="tx1"/>
+              </a:fontRef>
+            </p:style>
+          </p:cxnSp>
+          <p:cxnSp>
+            <p:nvCxnSpPr>
+              <p:cNvPr id="61" name="Straight Arrow Connector 60">
+                <a:extLst>
+                  <a:ext uri="{FF2B5EF4-FFF2-40B4-BE49-F238E27FC236}">
+                    <a16:creationId xmlns:a16="http://schemas.microsoft.com/office/drawing/2014/main" id="{A9271A34-B6BE-E33B-C643-F3B5597E0CA7}"/>
+                  </a:ext>
+                </a:extLst>
+              </p:cNvPr>
+              <p:cNvCxnSpPr>
+                <a:cxnSpLocks/>
+                <a:stCxn id="16" idx="6"/>
+                <a:endCxn id="26" idx="2"/>
+              </p:cNvCxnSpPr>
+              <p:nvPr/>
+            </p:nvCxnSpPr>
+            <p:spPr>
+              <a:xfrm>
+                <a:off x="3977086" y="6431729"/>
+                <a:ext cx="221891" cy="0"/>
+              </a:xfrm>
+              <a:prstGeom prst="straightConnector1">
+                <a:avLst/>
+              </a:prstGeom>
+              <a:ln>
+                <a:headEnd type="triangle"/>
+                <a:tailEnd type="triangle"/>
+              </a:ln>
+            </p:spPr>
+            <p:style>
+              <a:lnRef idx="2">
+                <a:schemeClr val="accent1"/>
+              </a:lnRef>
+              <a:fillRef idx="0">
+                <a:schemeClr val="accent1"/>
+              </a:fillRef>
+              <a:effectRef idx="1">
+                <a:schemeClr val="accent1"/>
+              </a:effectRef>
+              <a:fontRef idx="minor">
+                <a:schemeClr val="tx1"/>
+              </a:fontRef>
+            </p:style>
+          </p:cxnSp>
+          <p:cxnSp>
+            <p:nvCxnSpPr>
+              <p:cNvPr id="62" name="Straight Arrow Connector 61">
+                <a:extLst>
+                  <a:ext uri="{FF2B5EF4-FFF2-40B4-BE49-F238E27FC236}">
+                    <a16:creationId xmlns:a16="http://schemas.microsoft.com/office/drawing/2014/main" id="{0C11D0BD-BB06-F0C0-0AEE-41A1ABA464B2}"/>
+                  </a:ext>
+                </a:extLst>
+              </p:cNvPr>
+              <p:cNvCxnSpPr>
+                <a:cxnSpLocks/>
+                <a:stCxn id="26" idx="6"/>
+                <a:endCxn id="27" idx="2"/>
+              </p:cNvCxnSpPr>
+              <p:nvPr/>
+            </p:nvCxnSpPr>
+            <p:spPr>
+              <a:xfrm>
+                <a:off x="4326554" y="6431729"/>
+                <a:ext cx="221891" cy="0"/>
+              </a:xfrm>
+              <a:prstGeom prst="straightConnector1">
+                <a:avLst/>
+              </a:prstGeom>
+              <a:ln>
+                <a:headEnd type="triangle"/>
+                <a:tailEnd type="triangle"/>
+              </a:ln>
+            </p:spPr>
+            <p:style>
+              <a:lnRef idx="2">
+                <a:schemeClr val="accent1"/>
+              </a:lnRef>
+              <a:fillRef idx="0">
+                <a:schemeClr val="accent1"/>
+              </a:fillRef>
+              <a:effectRef idx="1">
+                <a:schemeClr val="accent1"/>
+              </a:effectRef>
+              <a:fontRef idx="minor">
+                <a:schemeClr val="tx1"/>
+              </a:fontRef>
+            </p:style>
+          </p:cxnSp>
+          <p:cxnSp>
+            <p:nvCxnSpPr>
+              <p:cNvPr id="74" name="Straight Arrow Connector 73">
+                <a:extLst>
+                  <a:ext uri="{FF2B5EF4-FFF2-40B4-BE49-F238E27FC236}">
+                    <a16:creationId xmlns:a16="http://schemas.microsoft.com/office/drawing/2014/main" id="{F93D429D-1C0A-6EEC-9B3D-430DF89DC51F}"/>
+                  </a:ext>
+                </a:extLst>
+              </p:cNvPr>
+              <p:cNvCxnSpPr>
+                <a:cxnSpLocks/>
+                <a:stCxn id="27" idx="6"/>
+                <a:endCxn id="17" idx="2"/>
+              </p:cNvCxnSpPr>
+              <p:nvPr/>
+            </p:nvCxnSpPr>
+            <p:spPr>
+              <a:xfrm>
+                <a:off x="4676022" y="6431729"/>
+                <a:ext cx="221891" cy="0"/>
+              </a:xfrm>
+              <a:prstGeom prst="straightConnector1">
+                <a:avLst/>
+              </a:prstGeom>
+              <a:ln>
+                <a:headEnd type="triangle"/>
+                <a:tailEnd type="triangle"/>
+              </a:ln>
+            </p:spPr>
+            <p:style>
+              <a:lnRef idx="2">
+                <a:schemeClr val="accent1"/>
+              </a:lnRef>
+              <a:fillRef idx="0">
+                <a:schemeClr val="accent1"/>
+              </a:fillRef>
+              <a:effectRef idx="1">
+                <a:schemeClr val="accent1"/>
+              </a:effectRef>
+              <a:fontRef idx="minor">
+                <a:schemeClr val="tx1"/>
+              </a:fontRef>
+            </p:style>
+          </p:cxnSp>
+          <p:cxnSp>
+            <p:nvCxnSpPr>
+              <p:cNvPr id="75" name="Straight Arrow Connector 74">
+                <a:extLst>
+                  <a:ext uri="{FF2B5EF4-FFF2-40B4-BE49-F238E27FC236}">
+                    <a16:creationId xmlns:a16="http://schemas.microsoft.com/office/drawing/2014/main" id="{DE24DF03-5C88-B36C-274D-BD029FE5CA35}"/>
+                  </a:ext>
+                </a:extLst>
+              </p:cNvPr>
+              <p:cNvCxnSpPr>
+                <a:cxnSpLocks/>
+                <a:stCxn id="17" idx="6"/>
+                <a:endCxn id="28" idx="2"/>
+              </p:cNvCxnSpPr>
+              <p:nvPr/>
+            </p:nvCxnSpPr>
+            <p:spPr>
+              <a:xfrm>
+                <a:off x="5025490" y="6431729"/>
+                <a:ext cx="221891" cy="0"/>
+              </a:xfrm>
+              <a:prstGeom prst="straightConnector1">
+                <a:avLst/>
+              </a:prstGeom>
+              <a:ln>
+                <a:headEnd type="triangle"/>
+                <a:tailEnd type="triangle"/>
+              </a:ln>
+            </p:spPr>
+            <p:style>
+              <a:lnRef idx="2">
+                <a:schemeClr val="accent1"/>
+              </a:lnRef>
+              <a:fillRef idx="0">
+                <a:schemeClr val="accent1"/>
+              </a:fillRef>
+              <a:effectRef idx="1">
+                <a:schemeClr val="accent1"/>
+              </a:effectRef>
+              <a:fontRef idx="minor">
+                <a:schemeClr val="tx1"/>
+              </a:fontRef>
+            </p:style>
+          </p:cxnSp>
+          <p:cxnSp>
+            <p:nvCxnSpPr>
+              <p:cNvPr id="76" name="Straight Arrow Connector 75">
+                <a:extLst>
+                  <a:ext uri="{FF2B5EF4-FFF2-40B4-BE49-F238E27FC236}">
+                    <a16:creationId xmlns:a16="http://schemas.microsoft.com/office/drawing/2014/main" id="{B5609BB2-1E49-DFEB-F8E9-C624995B02B7}"/>
+                  </a:ext>
+                </a:extLst>
+              </p:cNvPr>
+              <p:cNvCxnSpPr>
+                <a:cxnSpLocks/>
+                <a:stCxn id="28" idx="6"/>
+                <a:endCxn id="29" idx="2"/>
+              </p:cNvCxnSpPr>
+              <p:nvPr/>
+            </p:nvCxnSpPr>
+            <p:spPr>
+              <a:xfrm>
+                <a:off x="5374958" y="6431729"/>
+                <a:ext cx="221891" cy="0"/>
+              </a:xfrm>
+              <a:prstGeom prst="straightConnector1">
+                <a:avLst/>
+              </a:prstGeom>
+              <a:ln>
+                <a:headEnd type="triangle"/>
+                <a:tailEnd type="triangle"/>
+              </a:ln>
+            </p:spPr>
+            <p:style>
+              <a:lnRef idx="2">
+                <a:schemeClr val="accent1"/>
+              </a:lnRef>
+              <a:fillRef idx="0">
+                <a:schemeClr val="accent1"/>
+              </a:fillRef>
+              <a:effectRef idx="1">
+                <a:schemeClr val="accent1"/>
+              </a:effectRef>
+              <a:fontRef idx="minor">
+                <a:schemeClr val="tx1"/>
+              </a:fontRef>
+            </p:style>
+          </p:cxnSp>
+          <p:cxnSp>
+            <p:nvCxnSpPr>
+              <p:cNvPr id="83" name="Straight Arrow Connector 82">
+                <a:extLst>
+                  <a:ext uri="{FF2B5EF4-FFF2-40B4-BE49-F238E27FC236}">
+                    <a16:creationId xmlns:a16="http://schemas.microsoft.com/office/drawing/2014/main" id="{14AAD3C5-70CE-686C-85C2-34767DF131FC}"/>
+                  </a:ext>
+                </a:extLst>
+              </p:cNvPr>
+              <p:cNvCxnSpPr>
+                <a:cxnSpLocks/>
+                <a:stCxn id="29" idx="6"/>
+                <a:endCxn id="18" idx="2"/>
+              </p:cNvCxnSpPr>
+              <p:nvPr/>
+            </p:nvCxnSpPr>
+            <p:spPr>
+              <a:xfrm>
+                <a:off x="5724426" y="6431729"/>
+                <a:ext cx="221891" cy="0"/>
+              </a:xfrm>
+              <a:prstGeom prst="straightConnector1">
+                <a:avLst/>
+              </a:prstGeom>
+              <a:ln>
+                <a:headEnd type="triangle"/>
+                <a:tailEnd type="triangle"/>
+              </a:ln>
+            </p:spPr>
+            <p:style>
+              <a:lnRef idx="2">
+                <a:schemeClr val="accent1"/>
+              </a:lnRef>
+              <a:fillRef idx="0">
+                <a:schemeClr val="accent1"/>
+              </a:fillRef>
+              <a:effectRef idx="1">
+                <a:schemeClr val="accent1"/>
+              </a:effectRef>
+              <a:fontRef idx="minor">
+                <a:schemeClr val="tx1"/>
+              </a:fontRef>
+            </p:style>
+          </p:cxnSp>
+          <p:cxnSp>
+            <p:nvCxnSpPr>
+              <p:cNvPr id="86" name="Straight Arrow Connector 85">
+                <a:extLst>
+                  <a:ext uri="{FF2B5EF4-FFF2-40B4-BE49-F238E27FC236}">
+                    <a16:creationId xmlns:a16="http://schemas.microsoft.com/office/drawing/2014/main" id="{5B9F4920-AAF3-A1F4-42A5-8A01574E22EB}"/>
+                  </a:ext>
+                </a:extLst>
+              </p:cNvPr>
+              <p:cNvCxnSpPr>
+                <a:cxnSpLocks/>
+                <a:stCxn id="18" idx="6"/>
+                <a:endCxn id="12" idx="2"/>
+              </p:cNvCxnSpPr>
+              <p:nvPr/>
+            </p:nvCxnSpPr>
+            <p:spPr>
+              <a:xfrm>
+                <a:off x="6073894" y="6431729"/>
+                <a:ext cx="221891" cy="0"/>
+              </a:xfrm>
+              <a:prstGeom prst="straightConnector1">
+                <a:avLst/>
+              </a:prstGeom>
+              <a:ln>
+                <a:headEnd type="triangle"/>
+                <a:tailEnd type="triangle"/>
+              </a:ln>
+            </p:spPr>
+            <p:style>
+              <a:lnRef idx="2">
+                <a:schemeClr val="accent1"/>
+              </a:lnRef>
+              <a:fillRef idx="0">
+                <a:schemeClr val="accent1"/>
+              </a:fillRef>
+              <a:effectRef idx="1">
+                <a:schemeClr val="accent1"/>
+              </a:effectRef>
+              <a:fontRef idx="minor">
+                <a:schemeClr val="tx1"/>
+              </a:fontRef>
+            </p:style>
+          </p:cxnSp>
+          <p:cxnSp>
+            <p:nvCxnSpPr>
+              <p:cNvPr id="89" name="Straight Arrow Connector 88">
+                <a:extLst>
+                  <a:ext uri="{FF2B5EF4-FFF2-40B4-BE49-F238E27FC236}">
+                    <a16:creationId xmlns:a16="http://schemas.microsoft.com/office/drawing/2014/main" id="{FB4FE02B-54EB-011C-82F2-386C18847A92}"/>
+                  </a:ext>
+                </a:extLst>
+              </p:cNvPr>
+              <p:cNvCxnSpPr>
+                <a:cxnSpLocks/>
+                <a:stCxn id="9" idx="3"/>
+                <a:endCxn id="11" idx="2"/>
+              </p:cNvCxnSpPr>
+              <p:nvPr/>
+            </p:nvCxnSpPr>
+            <p:spPr>
+              <a:xfrm>
+                <a:off x="2579214" y="6431728"/>
+                <a:ext cx="221891" cy="1"/>
+              </a:xfrm>
+              <a:prstGeom prst="straightConnector1">
+                <a:avLst/>
+              </a:prstGeom>
+              <a:ln>
+                <a:headEnd type="triangle" w="med" len="med"/>
+                <a:tailEnd type="none" w="med" len="med"/>
+              </a:ln>
+            </p:spPr>
+            <p:style>
+              <a:lnRef idx="2">
+                <a:schemeClr val="accent1"/>
+              </a:lnRef>
+              <a:fillRef idx="0">
+                <a:schemeClr val="accent1"/>
+              </a:fillRef>
+              <a:effectRef idx="1">
+                <a:schemeClr val="accent1"/>
+              </a:effectRef>
+              <a:fontRef idx="minor">
+                <a:schemeClr val="tx1"/>
+              </a:fontRef>
+            </p:style>
+          </p:cxnSp>
+          <p:sp>
+            <p:nvSpPr>
+              <p:cNvPr id="92" name="TextBox 91">
+                <a:extLst>
+                  <a:ext uri="{FF2B5EF4-FFF2-40B4-BE49-F238E27FC236}">
+                    <a16:creationId xmlns:a16="http://schemas.microsoft.com/office/drawing/2014/main" id="{7326ECA9-2FA8-60C8-3A75-C4C6324598BA}"/>
+                  </a:ext>
+                </a:extLst>
+              </p:cNvPr>
+              <p:cNvSpPr txBox="1"/>
+              <p:nvPr/>
+            </p:nvSpPr>
+            <p:spPr>
+              <a:xfrm>
+                <a:off x="8248004" y="6567411"/>
+                <a:ext cx="1378904" cy="261610"/>
+              </a:xfrm>
+              <a:prstGeom prst="rect">
+                <a:avLst/>
+              </a:prstGeom>
+              <a:noFill/>
+            </p:spPr>
+            <p:txBody>
+              <a:bodyPr wrap="none" rtlCol="0">
+                <a:spAutoFit/>
+              </a:bodyPr>
+              <a:lstStyle/>
+              <a:p>
+                <a:r>
+                  <a:rPr lang="en-US" sz="1100" dirty="0"/>
+                  <a:t>All other reward is 0</a:t>
+                </a:r>
+              </a:p>
+            </p:txBody>
+          </p:sp>
+        </p:grpSp>
+        <p:sp>
+          <p:nvSpPr>
+            <p:cNvPr id="94" name="Rectangle 93">
+              <a:extLst>
+                <a:ext uri="{FF2B5EF4-FFF2-40B4-BE49-F238E27FC236}">
+                  <a16:creationId xmlns:a16="http://schemas.microsoft.com/office/drawing/2014/main" id="{24CD6081-8E7C-5373-C274-98350E0DB050}"/>
+                </a:ext>
+              </a:extLst>
+            </p:cNvPr>
+            <p:cNvSpPr/>
+            <p:nvPr/>
+          </p:nvSpPr>
+          <p:spPr>
+            <a:xfrm>
+              <a:off x="2214694" y="6171467"/>
+              <a:ext cx="7659148" cy="638139"/>
+            </a:xfrm>
+            <a:prstGeom prst="rect">
+              <a:avLst/>
+            </a:prstGeom>
+            <a:noFill/>
+            <a:ln w="9525" cap="flat" cmpd="sng" algn="ctr">
+              <a:solidFill>
+                <a:schemeClr val="dk1"/>
+              </a:solidFill>
+              <a:prstDash val="solid"/>
+              <a:round/>
+              <a:headEnd type="none" w="med" len="med"/>
+              <a:tailEnd type="none" w="med" len="med"/>
+            </a:ln>
+          </p:spPr>
+          <p:style>
+            <a:lnRef idx="0">
+              <a:scrgbClr r="0" g="0" b="0"/>
+            </a:lnRef>
+            <a:fillRef idx="0">
+              <a:scrgbClr r="0" g="0" b="0"/>
+            </a:fillRef>
+            <a:effectRef idx="0">
+              <a:scrgbClr r="0" g="0" b="0"/>
+            </a:effectRef>
+            <a:fontRef idx="minor">
+              <a:schemeClr val="dk1"/>
+            </a:fontRef>
+          </p:style>
+          <p:txBody>
+            <a:bodyPr rtlCol="0" anchor="ctr"/>
+            <a:lstStyle/>
+            <a:p>
+              <a:pPr algn="ctr"/>
+              <a:endParaRPr lang="en-US"/>
+            </a:p>
+          </p:txBody>
+        </p:sp>
       </p:grpSp>
     </p:spTree>
     <p:extLst>
